--- a/public/documents/countries/espagne.pptx
+++ b/public/documents/countries/espagne.pptx
@@ -117,7 +117,7 @@
 </p:presentation>
 </file>
 
-<file path=ppt/charts/chart1.xml><?xml version="1.0" encoding="utf-8"?>
+<file path=ppt/charts/chart22.xml><?xml version="1.0" encoding="utf-8"?>
 <c:chartSpace xmlns:c="http://schemas.openxmlformats.org/drawingml/2006/chart" xmlns:a="http://schemas.openxmlformats.org/drawingml/2006/main" xmlns:r="http://schemas.openxmlformats.org/officeDocument/2006/relationships">
   <c:date1904 val="0"/>
   <c:roundedCorners val="1"/>
@@ -362,7 +362,7 @@
 </c:chartSpace>
 </file>
 
-<file path=ppt/charts/chart2.xml><?xml version="1.0" encoding="utf-8"?>
+<file path=ppt/charts/chart23.xml><?xml version="1.0" encoding="utf-8"?>
 <c:chartSpace xmlns:c="http://schemas.openxmlformats.org/drawingml/2006/chart" xmlns:a="http://schemas.openxmlformats.org/drawingml/2006/main" xmlns:r="http://schemas.openxmlformats.org/officeDocument/2006/relationships">
   <c:date1904 val="0"/>
   <c:roundedCorners val="1"/>
@@ -670,7 +670,7 @@
 </c:chartSpace>
 </file>
 
-<file path=ppt/charts/chart3.xml><?xml version="1.0" encoding="utf-8"?>
+<file path=ppt/charts/chart24.xml><?xml version="1.0" encoding="utf-8"?>
 <c:chartSpace xmlns:c="http://schemas.openxmlformats.org/drawingml/2006/chart" xmlns:a="http://schemas.openxmlformats.org/drawingml/2006/main" xmlns:r="http://schemas.openxmlformats.org/officeDocument/2006/relationships">
   <c:date1904 val="0"/>
   <c:roundedCorners val="1"/>
@@ -3842,9 +3842,35 @@
           </a:p>
         </p:txBody>
       </p:sp>
-      <p:sp>
-        <p:nvSpPr>
-          <p:cNvPr id="6" name="Text 3"/>
+      <p:pic>
+        <p:nvPicPr>
+          <p:cNvPr id="6" name="Image 1" descr="C:\Users\Utilisateur\dev\green-solutions-web\scripts\dossiers\sceau-aim-clair.png">    </p:cNvPr>
+          <p:cNvPicPr>
+            <a:picLocks noChangeAspect="1"/>
+          </p:cNvPicPr>
+          <p:nvPr/>
+        </p:nvPicPr>
+        <p:blipFill>
+          <a:blip r:embed="rId2">
+            <a:alphaModFix amt="85000"/>
+          </a:blip>
+          <a:stretch>
+            <a:fillRect/>
+          </a:stretch>
+        </p:blipFill>
+        <p:spPr>
+          <a:xfrm>
+            <a:off x="10637215" y="5193792"/>
+            <a:ext cx="1051560" cy="1051560"/>
+          </a:xfrm>
+          <a:prstGeom prst="rect">
+            <a:avLst/>
+          </a:prstGeom>
+        </p:spPr>
+      </p:pic>
+      <p:sp>
+        <p:nvSpPr>
+          <p:cNvPr id="7" name="Text 3"/>
           <p:cNvSpPr txBox="1"/>
           <p:nvPr/>
         </p:nvSpPr>
@@ -3885,7 +3911,7 @@
       </p:sp>
       <p:sp>
         <p:nvSpPr>
-          <p:cNvPr id="7" name="Text 4"/>
+          <p:cNvPr id="8" name="Text 4"/>
           <p:cNvSpPr txBox="1"/>
           <p:nvPr/>
         </p:nvSpPr>

--- a/public/documents/countries/espagne.pptx
+++ b/public/documents/countries/espagne.pptx
@@ -16,9 +16,16 @@
     <p:sldId id="264" r:id="rId10"/>
     <p:sldId id="265" r:id="rId11"/>
     <p:sldId id="266" r:id="rId12"/>
+    <p:sldId id="267" r:id="rId13"/>
+    <p:sldId id="268" r:id="rId14"/>
+    <p:sldId id="269" r:id="rId15"/>
+    <p:sldId id="270" r:id="rId16"/>
+    <p:sldId id="271" r:id="rId17"/>
+    <p:sldId id="272" r:id="rId18"/>
+    <p:sldId id="273" r:id="rId19"/>
   </p:sldIdLst>
   <p:notesMasterIdLst>
-    <p:notesMasterId r:id="rId13"/>
+    <p:notesMasterId r:id="rId20"/>
   </p:notesMasterIdLst>
   <p:sldSz cx="12192000" cy="6858000"/>
   <p:notesSz cx="6858000" cy="12192000"/>
@@ -117,7 +124,7 @@
 </p:presentation>
 </file>
 
-<file path=ppt/charts/chart22.xml><?xml version="1.0" encoding="utf-8"?>
+<file path=ppt/charts/chart29.xml><?xml version="1.0" encoding="utf-8"?>
 <c:chartSpace xmlns:c="http://schemas.openxmlformats.org/drawingml/2006/chart" xmlns:a="http://schemas.openxmlformats.org/drawingml/2006/main" xmlns:r="http://schemas.openxmlformats.org/officeDocument/2006/relationships">
   <c:date1904 val="0"/>
   <c:roundedCorners val="1"/>
@@ -362,7 +369,7 @@
 </c:chartSpace>
 </file>
 
-<file path=ppt/charts/chart23.xml><?xml version="1.0" encoding="utf-8"?>
+<file path=ppt/charts/chart30.xml><?xml version="1.0" encoding="utf-8"?>
 <c:chartSpace xmlns:c="http://schemas.openxmlformats.org/drawingml/2006/chart" xmlns:a="http://schemas.openxmlformats.org/drawingml/2006/main" xmlns:r="http://schemas.openxmlformats.org/officeDocument/2006/relationships">
   <c:date1904 val="0"/>
   <c:roundedCorners val="1"/>
@@ -670,7 +677,372 @@
 </c:chartSpace>
 </file>
 
-<file path=ppt/charts/chart24.xml><?xml version="1.0" encoding="utf-8"?>
+<file path=ppt/charts/chart31.xml><?xml version="1.0" encoding="utf-8"?>
+<c:chartSpace xmlns:c="http://schemas.openxmlformats.org/drawingml/2006/chart" xmlns:a="http://schemas.openxmlformats.org/drawingml/2006/main" xmlns:r="http://schemas.openxmlformats.org/officeDocument/2006/relationships">
+  <c:date1904 val="0"/>
+  <c:roundedCorners val="1"/>
+  <c:chart>
+    <c:autoTitleDeleted val="1"/>
+    <c:plotArea>
+      <c:layout/>
+      <c:barChart>
+        <c:barDir val="col"/>
+        <c:grouping val="clustered"/>
+        <c:varyColors val="0"/>
+        <c:ser>
+          <c:idx val="0"/>
+          <c:order val="0"/>
+          <c:tx>
+            <c:strRef>
+              <c:f>Sheet1!$B$1</c:f>
+              <c:strCache>
+                <c:ptCount val="1"/>
+                <c:pt idx="0">
+                  <c:v>Mínimo (%)</c:v>
+                </c:pt>
+              </c:strCache>
+            </c:strRef>
+          </c:tx>
+          <c:spPr>
+            <a:solidFill>
+              <a:srgbClr val="6B2A44"/>
+            </a:solidFill>
+            <a:effectLst/>
+          </c:spPr>
+          <c:invertIfNegative val="0"/>
+          <c:dLbls>
+            <c:numFmt formatCode="[$-C0A]0&quot;%&quot;" sourceLinked="0"/>
+            <c:txPr>
+              <a:bodyPr/>
+              <a:lstStyle/>
+              <a:p>
+                <a:pPr>
+                  <a:defRPr b="0" i="0" strike="noStrike" sz="1100" u="none">
+                    <a:solidFill>
+                      <a:srgbClr val="3F162A"/>
+                    </a:solidFill>
+                    <a:latin typeface="Calibri"/>
+                  </a:defRPr>
+                </a:pPr>
+              </a:p>
+            </c:txPr>
+            <c:showLegendKey val="0"/>
+            <c:showVal val="1"/>
+            <c:showCatName val="0"/>
+            <c:showSerName val="0"/>
+            <c:showPercent val="0"/>
+            <c:showBubbleSize val="0"/>
+            <c:showLeaderLines val="0"/>
+          </c:dLbls>
+          <c:cat>
+            <c:multiLvlStrRef>
+              <c:f>Sheet1!$A$2:$A$6</c:f>
+              <c:multiLvlStrCache>
+                <c:ptCount val="5"/>
+                <c:lvl>
+                  <c:pt idx="0">
+                    <c:v>Tomates</c:v>
+                  </c:pt>
+                  <c:pt idx="1">
+                    <c:v>Pimientos</c:v>
+                  </c:pt>
+                  <c:pt idx="2">
+                    <c:v>Aceitunas</c:v>
+                  </c:pt>
+                  <c:pt idx="3">
+                    <c:v>Cítricos</c:v>
+                  </c:pt>
+                  <c:pt idx="4">
+                    <c:v>Lechugas</c:v>
+                  </c:pt>
+                </c:lvl>
+              </c:multiLvlStrCache>
+            </c:multiLvlStrRef>
+          </c:cat>
+          <c:val>
+            <c:numRef>
+              <c:f>Sheet1!$B$2:$B$6</c:f>
+              <c:numCache>
+                <c:formatCode>General</c:formatCode>
+                <c:ptCount val="5"/>
+                <c:pt idx="0">
+                  <c:v>30</c:v>
+                </c:pt>
+                <c:pt idx="1">
+                  <c:v>20</c:v>
+                </c:pt>
+                <c:pt idx="2">
+                  <c:v>20</c:v>
+                </c:pt>
+                <c:pt idx="3">
+                  <c:v>20</c:v>
+                </c:pt>
+                <c:pt idx="4">
+                  <c:v>20</c:v>
+                </c:pt>
+              </c:numCache>
+            </c:numRef>
+          </c:val>
+        </c:ser>
+        <c:ser>
+          <c:idx val="1"/>
+          <c:order val="1"/>
+          <c:tx>
+            <c:strRef>
+              <c:f>Sheet1!$C$1</c:f>
+              <c:strCache>
+                <c:ptCount val="1"/>
+                <c:pt idx="0">
+                  <c:v>Máximo (%)</c:v>
+                </c:pt>
+              </c:strCache>
+            </c:strRef>
+          </c:tx>
+          <c:spPr>
+            <a:solidFill>
+              <a:srgbClr val="C9A227"/>
+            </a:solidFill>
+            <a:effectLst/>
+          </c:spPr>
+          <c:invertIfNegative val="0"/>
+          <c:dLbls>
+            <c:numFmt formatCode="[$-C0A]0&quot;%&quot;" sourceLinked="0"/>
+            <c:txPr>
+              <a:bodyPr/>
+              <a:lstStyle/>
+              <a:p>
+                <a:pPr>
+                  <a:defRPr b="0" i="0" strike="noStrike" sz="1100" u="none">
+                    <a:solidFill>
+                      <a:srgbClr val="3F162A"/>
+                    </a:solidFill>
+                    <a:latin typeface="Calibri"/>
+                  </a:defRPr>
+                </a:pPr>
+              </a:p>
+            </c:txPr>
+            <c:showLegendKey val="0"/>
+            <c:showVal val="1"/>
+            <c:showCatName val="0"/>
+            <c:showSerName val="0"/>
+            <c:showPercent val="0"/>
+            <c:showBubbleSize val="0"/>
+            <c:showLeaderLines val="0"/>
+          </c:dLbls>
+          <c:cat>
+            <c:multiLvlStrRef>
+              <c:f>Sheet1!$A$2:$A$6</c:f>
+              <c:multiLvlStrCache>
+                <c:ptCount val="5"/>
+                <c:lvl>
+                  <c:pt idx="0">
+                    <c:v>Tomates</c:v>
+                  </c:pt>
+                  <c:pt idx="1">
+                    <c:v>Pimientos</c:v>
+                  </c:pt>
+                  <c:pt idx="2">
+                    <c:v>Aceitunas</c:v>
+                  </c:pt>
+                  <c:pt idx="3">
+                    <c:v>Cítricos</c:v>
+                  </c:pt>
+                  <c:pt idx="4">
+                    <c:v>Lechugas</c:v>
+                  </c:pt>
+                </c:lvl>
+              </c:multiLvlStrCache>
+            </c:multiLvlStrRef>
+          </c:cat>
+          <c:val>
+            <c:numRef>
+              <c:f>Sheet1!$C$2:$C$6</c:f>
+              <c:numCache>
+                <c:formatCode>General</c:formatCode>
+                <c:ptCount val="5"/>
+                <c:pt idx="0">
+                  <c:v>50</c:v>
+                </c:pt>
+                <c:pt idx="1">
+                  <c:v>40</c:v>
+                </c:pt>
+                <c:pt idx="2">
+                  <c:v>40</c:v>
+                </c:pt>
+                <c:pt idx="3">
+                  <c:v>40</c:v>
+                </c:pt>
+                <c:pt idx="4">
+                  <c:v>40</c:v>
+                </c:pt>
+              </c:numCache>
+            </c:numRef>
+          </c:val>
+        </c:ser>
+        <c:dLbls>
+          <c:numFmt formatCode="[$-C0A]0&quot;%&quot;" sourceLinked="0"/>
+          <c:txPr>
+            <a:bodyPr/>
+            <a:lstStyle/>
+            <a:p>
+              <a:pPr>
+                <a:defRPr b="0" i="0" strike="noStrike" sz="1100" u="none">
+                  <a:solidFill>
+                    <a:srgbClr val="3F162A"/>
+                  </a:solidFill>
+                  <a:latin typeface="Calibri"/>
+                </a:defRPr>
+              </a:pPr>
+            </a:p>
+          </c:txPr>
+          <c:showLegendKey val="0"/>
+          <c:showVal val="1"/>
+          <c:showCatName val="0"/>
+          <c:showSerName val="0"/>
+          <c:showPercent val="0"/>
+          <c:showBubbleSize val="0"/>
+          <c:showLeaderLines val="0"/>
+        </c:dLbls>
+        <c:gapWidth val="150"/>
+        <c:overlap val="0"/>
+        <c:axId val="2094734554"/>
+        <c:axId val="2094734552"/>
+        <c:axId val="2094734556"/>
+      </c:barChart>
+      <c:catAx>
+        <c:axId val="2094734554"/>
+        <c:scaling>
+          <c:orientation val="minMax"/>
+        </c:scaling>
+        <c:delete val="0"/>
+        <c:axPos val="b"/>
+        <c:numFmt formatCode="General" sourceLinked="1"/>
+        <c:majorTickMark val="out"/>
+        <c:minorTickMark val="none"/>
+        <c:tickLblPos val="low"/>
+        <c:spPr>
+          <a:ln w="12700" cap="flat">
+            <a:solidFill>
+              <a:srgbClr val="888888"/>
+            </a:solidFill>
+            <a:prstDash val="solid"/>
+            <a:round/>
+          </a:ln>
+        </c:spPr>
+        <c:txPr>
+          <a:bodyPr/>
+          <a:lstStyle/>
+          <a:p>
+            <a:pPr>
+              <a:defRPr sz="1100" b="0" i="0" u="none" strike="noStrike">
+                <a:solidFill>
+                  <a:srgbClr val="7C6B73"/>
+                </a:solidFill>
+                <a:latin typeface="Calibri"/>
+              </a:defRPr>
+            </a:pPr>
+            <a:endParaRPr lang="en-US"/>
+          </a:p>
+        </c:txPr>
+        <c:crossAx val="2094734552"/>
+        <c:crosses val="autoZero"/>
+        <c:auto val="1"/>
+        <c:lblAlgn val="ctr"/>
+        <c:noMultiLvlLbl val="1"/>
+      </c:catAx>
+      <c:valAx>
+        <c:axId val="2094734552"/>
+        <c:scaling>
+          <c:orientation val="minMax"/>
+          <c:min val="0"/>
+        </c:scaling>
+        <c:delete val="0"/>
+        <c:axPos val="l"/>
+        <c:majorGridlines>
+          <c:spPr>
+            <a:ln w="9525" cap="flat">
+              <a:solidFill>
+                <a:srgbClr val="E5D9DE"/>
+              </a:solidFill>
+              <a:prstDash val="solid"/>
+              <a:round/>
+            </a:ln>
+          </c:spPr>
+        </c:majorGridlines>
+        <c:numFmt formatCode="General" sourceLinked="0"/>
+        <c:majorTickMark val="out"/>
+        <c:minorTickMark val="none"/>
+        <c:tickLblPos val="nextTo"/>
+        <c:spPr>
+          <a:ln w="12700" cap="flat">
+            <a:solidFill>
+              <a:srgbClr val="888888"/>
+            </a:solidFill>
+            <a:prstDash val="solid"/>
+            <a:round/>
+          </a:ln>
+        </c:spPr>
+        <c:txPr>
+          <a:bodyPr/>
+          <a:lstStyle/>
+          <a:p>
+            <a:pPr>
+              <a:defRPr sz="1100" b="0" i="0" u="none" strike="noStrike">
+                <a:solidFill>
+                  <a:srgbClr val="7C6B73"/>
+                </a:solidFill>
+                <a:latin typeface="Calibri"/>
+              </a:defRPr>
+            </a:pPr>
+            <a:endParaRPr lang="en-US"/>
+          </a:p>
+        </c:txPr>
+        <c:crossAx val="2094734554"/>
+        <c:crosses val="autoZero"/>
+        <c:crossBetween val="between"/>
+      </c:valAx>
+      <c:spPr>
+        <a:noFill/>
+        <a:ln>
+          <a:noFill/>
+        </a:ln>
+        <a:effectLst/>
+      </c:spPr>
+    </c:plotArea>
+    <c:legend>
+      <c:legendPos val="b"/>
+      <c:overlay val="0"/>
+      <c:txPr>
+        <a:bodyPr/>
+        <a:lstStyle/>
+        <a:p>
+          <a:pPr>
+            <a:defRPr sz="1100">
+              <a:latin typeface="Calibri"/>
+              <a:cs typeface="Calibri"/>
+            </a:defRPr>
+          </a:pPr>
+          <a:endParaRPr lang="en-US"/>
+        </a:p>
+      </c:txPr>
+    </c:legend>
+    <c:plotVisOnly val="1"/>
+    <c:dispBlanksAs val="span"/>
+  </c:chart>
+  <c:spPr>
+    <a:noFill/>
+    <a:ln>
+      <a:noFill/>
+    </a:ln>
+    <a:effectLst/>
+  </c:spPr>
+  <c:externalData r:id="rId1">
+    <c:autoUpdate val="0"/>
+  </c:externalData>
+</c:chartSpace>
+</file>
+
+<file path=ppt/charts/chart32.xml><?xml version="1.0" encoding="utf-8"?>
 <c:chartSpace xmlns:c="http://schemas.openxmlformats.org/drawingml/2006/chart" xmlns:a="http://schemas.openxmlformats.org/drawingml/2006/main" xmlns:r="http://schemas.openxmlformats.org/officeDocument/2006/relationships">
   <c:date1904 val="0"/>
   <c:roundedCorners val="1"/>
@@ -1618,6 +1990,622 @@
             <a:fld id="{F7021451-1387-4CA6-816F-3879F97B5CBC}" type="slidenum">
               <a:rPr lang="en-US"/>
               <a:t>11</a:t>
+            </a:fld>
+            <a:endParaRPr lang="en-US"/>
+          </a:p>
+        </p:txBody>
+      </p:sp>
+    </p:spTree>
+    <p:extLst>
+      <p:ext uri="{BB962C8B-B14F-4D97-AF65-F5344CB8AC3E}">
+        <p14:creationId xmlns:p14="http://schemas.microsoft.com/office/powerpoint/2010/main" val="1024086991"/>
+      </p:ext>
+    </p:extLst>
+  </p:cSld>
+  <p:clrMapOvr>
+    <a:masterClrMapping/>
+  </p:clrMapOvr>
+</p:notes>
+</file>
+
+<file path=ppt/notesSlides/notesSlide12.xml><?xml version="1.0" encoding="utf-8"?>
+<p:notes xmlns:a="http://schemas.openxmlformats.org/drawingml/2006/main" xmlns:r="http://schemas.openxmlformats.org/officeDocument/2006/relationships" xmlns:p="http://schemas.openxmlformats.org/presentationml/2006/main">
+  <p:cSld>
+    <p:spTree>
+      <p:nvGrpSpPr>
+        <p:cNvPr id="1" name=""/>
+        <p:cNvGrpSpPr/>
+        <p:nvPr/>
+      </p:nvGrpSpPr>
+      <p:grpSpPr>
+        <a:xfrm>
+          <a:off x="0" y="0"/>
+          <a:ext cx="0" cy="0"/>
+          <a:chOff x="0" y="0"/>
+          <a:chExt cx="0" cy="0"/>
+        </a:xfrm>
+      </p:grpSpPr>
+      <p:sp>
+        <p:nvSpPr>
+          <p:cNvPr id="2" name="Slide Image Placeholder 1"/>
+          <p:cNvSpPr>
+            <a:spLocks noGrp="1" noRot="1" noChangeAspect="1"/>
+          </p:cNvSpPr>
+          <p:nvPr>
+            <p:ph type="sldImg"/>
+          </p:nvPr>
+        </p:nvSpPr>
+        <p:spPr/>
+      </p:sp>
+      <p:sp>
+        <p:nvSpPr>
+          <p:cNvPr id="3" name="Notes Placeholder 2"/>
+          <p:cNvSpPr>
+            <a:spLocks noGrp="1"/>
+          </p:cNvSpPr>
+          <p:nvPr>
+            <p:ph type="body" idx="1"/>
+          </p:nvPr>
+        </p:nvSpPr>
+        <p:spPr/>
+        <p:txBody>
+          <a:bodyPr/>
+          <a:lstStyle/>
+          <a:p>
+            <a:r>
+              <a:rPr lang="en-US" dirty="0"/>
+              <a:t/>
+            </a:r>
+            <a:endParaRPr lang="en-US" dirty="0"/>
+          </a:p>
+        </p:txBody>
+      </p:sp>
+      <p:sp>
+        <p:nvSpPr>
+          <p:cNvPr id="4" name="Slide Number Placeholder 3"/>
+          <p:cNvSpPr>
+            <a:spLocks noGrp="1"/>
+          </p:cNvSpPr>
+          <p:nvPr>
+            <p:ph type="sldNum" sz="quarter" idx="10"/>
+          </p:nvPr>
+        </p:nvSpPr>
+        <p:spPr/>
+        <p:txBody>
+          <a:bodyPr/>
+          <a:lstStyle/>
+          <a:p>
+            <a:fld id="{F7021451-1387-4CA6-816F-3879F97B5CBC}" type="slidenum">
+              <a:rPr lang="en-US"/>
+              <a:t>12</a:t>
+            </a:fld>
+            <a:endParaRPr lang="en-US"/>
+          </a:p>
+        </p:txBody>
+      </p:sp>
+    </p:spTree>
+    <p:extLst>
+      <p:ext uri="{BB962C8B-B14F-4D97-AF65-F5344CB8AC3E}">
+        <p14:creationId xmlns:p14="http://schemas.microsoft.com/office/powerpoint/2010/main" val="1024086991"/>
+      </p:ext>
+    </p:extLst>
+  </p:cSld>
+  <p:clrMapOvr>
+    <a:masterClrMapping/>
+  </p:clrMapOvr>
+</p:notes>
+</file>
+
+<file path=ppt/notesSlides/notesSlide13.xml><?xml version="1.0" encoding="utf-8"?>
+<p:notes xmlns:a="http://schemas.openxmlformats.org/drawingml/2006/main" xmlns:r="http://schemas.openxmlformats.org/officeDocument/2006/relationships" xmlns:p="http://schemas.openxmlformats.org/presentationml/2006/main">
+  <p:cSld>
+    <p:spTree>
+      <p:nvGrpSpPr>
+        <p:cNvPr id="1" name=""/>
+        <p:cNvGrpSpPr/>
+        <p:nvPr/>
+      </p:nvGrpSpPr>
+      <p:grpSpPr>
+        <a:xfrm>
+          <a:off x="0" y="0"/>
+          <a:ext cx="0" cy="0"/>
+          <a:chOff x="0" y="0"/>
+          <a:chExt cx="0" cy="0"/>
+        </a:xfrm>
+      </p:grpSpPr>
+      <p:sp>
+        <p:nvSpPr>
+          <p:cNvPr id="2" name="Slide Image Placeholder 1"/>
+          <p:cNvSpPr>
+            <a:spLocks noGrp="1" noRot="1" noChangeAspect="1"/>
+          </p:cNvSpPr>
+          <p:nvPr>
+            <p:ph type="sldImg"/>
+          </p:nvPr>
+        </p:nvSpPr>
+        <p:spPr/>
+      </p:sp>
+      <p:sp>
+        <p:nvSpPr>
+          <p:cNvPr id="3" name="Notes Placeholder 2"/>
+          <p:cNvSpPr>
+            <a:spLocks noGrp="1"/>
+          </p:cNvSpPr>
+          <p:nvPr>
+            <p:ph type="body" idx="1"/>
+          </p:nvPr>
+        </p:nvSpPr>
+        <p:spPr/>
+        <p:txBody>
+          <a:bodyPr/>
+          <a:lstStyle/>
+          <a:p>
+            <a:r>
+              <a:rPr lang="en-US" dirty="0"/>
+              <a:t/>
+            </a:r>
+            <a:endParaRPr lang="en-US" dirty="0"/>
+          </a:p>
+        </p:txBody>
+      </p:sp>
+      <p:sp>
+        <p:nvSpPr>
+          <p:cNvPr id="4" name="Slide Number Placeholder 3"/>
+          <p:cNvSpPr>
+            <a:spLocks noGrp="1"/>
+          </p:cNvSpPr>
+          <p:nvPr>
+            <p:ph type="sldNum" sz="quarter" idx="10"/>
+          </p:nvPr>
+        </p:nvSpPr>
+        <p:spPr/>
+        <p:txBody>
+          <a:bodyPr/>
+          <a:lstStyle/>
+          <a:p>
+            <a:fld id="{F7021451-1387-4CA6-816F-3879F97B5CBC}" type="slidenum">
+              <a:rPr lang="en-US"/>
+              <a:t>13</a:t>
+            </a:fld>
+            <a:endParaRPr lang="en-US"/>
+          </a:p>
+        </p:txBody>
+      </p:sp>
+    </p:spTree>
+    <p:extLst>
+      <p:ext uri="{BB962C8B-B14F-4D97-AF65-F5344CB8AC3E}">
+        <p14:creationId xmlns:p14="http://schemas.microsoft.com/office/powerpoint/2010/main" val="1024086991"/>
+      </p:ext>
+    </p:extLst>
+  </p:cSld>
+  <p:clrMapOvr>
+    <a:masterClrMapping/>
+  </p:clrMapOvr>
+</p:notes>
+</file>
+
+<file path=ppt/notesSlides/notesSlide14.xml><?xml version="1.0" encoding="utf-8"?>
+<p:notes xmlns:a="http://schemas.openxmlformats.org/drawingml/2006/main" xmlns:r="http://schemas.openxmlformats.org/officeDocument/2006/relationships" xmlns:p="http://schemas.openxmlformats.org/presentationml/2006/main">
+  <p:cSld>
+    <p:spTree>
+      <p:nvGrpSpPr>
+        <p:cNvPr id="1" name=""/>
+        <p:cNvGrpSpPr/>
+        <p:nvPr/>
+      </p:nvGrpSpPr>
+      <p:grpSpPr>
+        <a:xfrm>
+          <a:off x="0" y="0"/>
+          <a:ext cx="0" cy="0"/>
+          <a:chOff x="0" y="0"/>
+          <a:chExt cx="0" cy="0"/>
+        </a:xfrm>
+      </p:grpSpPr>
+      <p:sp>
+        <p:nvSpPr>
+          <p:cNvPr id="2" name="Slide Image Placeholder 1"/>
+          <p:cNvSpPr>
+            <a:spLocks noGrp="1" noRot="1" noChangeAspect="1"/>
+          </p:cNvSpPr>
+          <p:nvPr>
+            <p:ph type="sldImg"/>
+          </p:nvPr>
+        </p:nvSpPr>
+        <p:spPr/>
+      </p:sp>
+      <p:sp>
+        <p:nvSpPr>
+          <p:cNvPr id="3" name="Notes Placeholder 2"/>
+          <p:cNvSpPr>
+            <a:spLocks noGrp="1"/>
+          </p:cNvSpPr>
+          <p:nvPr>
+            <p:ph type="body" idx="1"/>
+          </p:nvPr>
+        </p:nvSpPr>
+        <p:spPr/>
+        <p:txBody>
+          <a:bodyPr/>
+          <a:lstStyle/>
+          <a:p>
+            <a:r>
+              <a:rPr lang="en-US" dirty="0"/>
+              <a:t/>
+            </a:r>
+            <a:endParaRPr lang="en-US" dirty="0"/>
+          </a:p>
+        </p:txBody>
+      </p:sp>
+      <p:sp>
+        <p:nvSpPr>
+          <p:cNvPr id="4" name="Slide Number Placeholder 3"/>
+          <p:cNvSpPr>
+            <a:spLocks noGrp="1"/>
+          </p:cNvSpPr>
+          <p:nvPr>
+            <p:ph type="sldNum" sz="quarter" idx="10"/>
+          </p:nvPr>
+        </p:nvSpPr>
+        <p:spPr/>
+        <p:txBody>
+          <a:bodyPr/>
+          <a:lstStyle/>
+          <a:p>
+            <a:fld id="{F7021451-1387-4CA6-816F-3879F97B5CBC}" type="slidenum">
+              <a:rPr lang="en-US"/>
+              <a:t>14</a:t>
+            </a:fld>
+            <a:endParaRPr lang="en-US"/>
+          </a:p>
+        </p:txBody>
+      </p:sp>
+    </p:spTree>
+    <p:extLst>
+      <p:ext uri="{BB962C8B-B14F-4D97-AF65-F5344CB8AC3E}">
+        <p14:creationId xmlns:p14="http://schemas.microsoft.com/office/powerpoint/2010/main" val="1024086991"/>
+      </p:ext>
+    </p:extLst>
+  </p:cSld>
+  <p:clrMapOvr>
+    <a:masterClrMapping/>
+  </p:clrMapOvr>
+</p:notes>
+</file>
+
+<file path=ppt/notesSlides/notesSlide15.xml><?xml version="1.0" encoding="utf-8"?>
+<p:notes xmlns:a="http://schemas.openxmlformats.org/drawingml/2006/main" xmlns:r="http://schemas.openxmlformats.org/officeDocument/2006/relationships" xmlns:p="http://schemas.openxmlformats.org/presentationml/2006/main">
+  <p:cSld>
+    <p:spTree>
+      <p:nvGrpSpPr>
+        <p:cNvPr id="1" name=""/>
+        <p:cNvGrpSpPr/>
+        <p:nvPr/>
+      </p:nvGrpSpPr>
+      <p:grpSpPr>
+        <a:xfrm>
+          <a:off x="0" y="0"/>
+          <a:ext cx="0" cy="0"/>
+          <a:chOff x="0" y="0"/>
+          <a:chExt cx="0" cy="0"/>
+        </a:xfrm>
+      </p:grpSpPr>
+      <p:sp>
+        <p:nvSpPr>
+          <p:cNvPr id="2" name="Slide Image Placeholder 1"/>
+          <p:cNvSpPr>
+            <a:spLocks noGrp="1" noRot="1" noChangeAspect="1"/>
+          </p:cNvSpPr>
+          <p:nvPr>
+            <p:ph type="sldImg"/>
+          </p:nvPr>
+        </p:nvSpPr>
+        <p:spPr/>
+      </p:sp>
+      <p:sp>
+        <p:nvSpPr>
+          <p:cNvPr id="3" name="Notes Placeholder 2"/>
+          <p:cNvSpPr>
+            <a:spLocks noGrp="1"/>
+          </p:cNvSpPr>
+          <p:nvPr>
+            <p:ph type="body" idx="1"/>
+          </p:nvPr>
+        </p:nvSpPr>
+        <p:spPr/>
+        <p:txBody>
+          <a:bodyPr/>
+          <a:lstStyle/>
+          <a:p>
+            <a:r>
+              <a:rPr lang="en-US" dirty="0"/>
+              <a:t/>
+            </a:r>
+            <a:endParaRPr lang="en-US" dirty="0"/>
+          </a:p>
+        </p:txBody>
+      </p:sp>
+      <p:sp>
+        <p:nvSpPr>
+          <p:cNvPr id="4" name="Slide Number Placeholder 3"/>
+          <p:cNvSpPr>
+            <a:spLocks noGrp="1"/>
+          </p:cNvSpPr>
+          <p:nvPr>
+            <p:ph type="sldNum" sz="quarter" idx="10"/>
+          </p:nvPr>
+        </p:nvSpPr>
+        <p:spPr/>
+        <p:txBody>
+          <a:bodyPr/>
+          <a:lstStyle/>
+          <a:p>
+            <a:fld id="{F7021451-1387-4CA6-816F-3879F97B5CBC}" type="slidenum">
+              <a:rPr lang="en-US"/>
+              <a:t>15</a:t>
+            </a:fld>
+            <a:endParaRPr lang="en-US"/>
+          </a:p>
+        </p:txBody>
+      </p:sp>
+    </p:spTree>
+    <p:extLst>
+      <p:ext uri="{BB962C8B-B14F-4D97-AF65-F5344CB8AC3E}">
+        <p14:creationId xmlns:p14="http://schemas.microsoft.com/office/powerpoint/2010/main" val="1024086991"/>
+      </p:ext>
+    </p:extLst>
+  </p:cSld>
+  <p:clrMapOvr>
+    <a:masterClrMapping/>
+  </p:clrMapOvr>
+</p:notes>
+</file>
+
+<file path=ppt/notesSlides/notesSlide16.xml><?xml version="1.0" encoding="utf-8"?>
+<p:notes xmlns:a="http://schemas.openxmlformats.org/drawingml/2006/main" xmlns:r="http://schemas.openxmlformats.org/officeDocument/2006/relationships" xmlns:p="http://schemas.openxmlformats.org/presentationml/2006/main">
+  <p:cSld>
+    <p:spTree>
+      <p:nvGrpSpPr>
+        <p:cNvPr id="1" name=""/>
+        <p:cNvGrpSpPr/>
+        <p:nvPr/>
+      </p:nvGrpSpPr>
+      <p:grpSpPr>
+        <a:xfrm>
+          <a:off x="0" y="0"/>
+          <a:ext cx="0" cy="0"/>
+          <a:chOff x="0" y="0"/>
+          <a:chExt cx="0" cy="0"/>
+        </a:xfrm>
+      </p:grpSpPr>
+      <p:sp>
+        <p:nvSpPr>
+          <p:cNvPr id="2" name="Slide Image Placeholder 1"/>
+          <p:cNvSpPr>
+            <a:spLocks noGrp="1" noRot="1" noChangeAspect="1"/>
+          </p:cNvSpPr>
+          <p:nvPr>
+            <p:ph type="sldImg"/>
+          </p:nvPr>
+        </p:nvSpPr>
+        <p:spPr/>
+      </p:sp>
+      <p:sp>
+        <p:nvSpPr>
+          <p:cNvPr id="3" name="Notes Placeholder 2"/>
+          <p:cNvSpPr>
+            <a:spLocks noGrp="1"/>
+          </p:cNvSpPr>
+          <p:nvPr>
+            <p:ph type="body" idx="1"/>
+          </p:nvPr>
+        </p:nvSpPr>
+        <p:spPr/>
+        <p:txBody>
+          <a:bodyPr/>
+          <a:lstStyle/>
+          <a:p>
+            <a:r>
+              <a:rPr lang="en-US" dirty="0"/>
+              <a:t/>
+            </a:r>
+            <a:endParaRPr lang="en-US" dirty="0"/>
+          </a:p>
+        </p:txBody>
+      </p:sp>
+      <p:sp>
+        <p:nvSpPr>
+          <p:cNvPr id="4" name="Slide Number Placeholder 3"/>
+          <p:cNvSpPr>
+            <a:spLocks noGrp="1"/>
+          </p:cNvSpPr>
+          <p:nvPr>
+            <p:ph type="sldNum" sz="quarter" idx="10"/>
+          </p:nvPr>
+        </p:nvSpPr>
+        <p:spPr/>
+        <p:txBody>
+          <a:bodyPr/>
+          <a:lstStyle/>
+          <a:p>
+            <a:fld id="{F7021451-1387-4CA6-816F-3879F97B5CBC}" type="slidenum">
+              <a:rPr lang="en-US"/>
+              <a:t>16</a:t>
+            </a:fld>
+            <a:endParaRPr lang="en-US"/>
+          </a:p>
+        </p:txBody>
+      </p:sp>
+    </p:spTree>
+    <p:extLst>
+      <p:ext uri="{BB962C8B-B14F-4D97-AF65-F5344CB8AC3E}">
+        <p14:creationId xmlns:p14="http://schemas.microsoft.com/office/powerpoint/2010/main" val="1024086991"/>
+      </p:ext>
+    </p:extLst>
+  </p:cSld>
+  <p:clrMapOvr>
+    <a:masterClrMapping/>
+  </p:clrMapOvr>
+</p:notes>
+</file>
+
+<file path=ppt/notesSlides/notesSlide17.xml><?xml version="1.0" encoding="utf-8"?>
+<p:notes xmlns:a="http://schemas.openxmlformats.org/drawingml/2006/main" xmlns:r="http://schemas.openxmlformats.org/officeDocument/2006/relationships" xmlns:p="http://schemas.openxmlformats.org/presentationml/2006/main">
+  <p:cSld>
+    <p:spTree>
+      <p:nvGrpSpPr>
+        <p:cNvPr id="1" name=""/>
+        <p:cNvGrpSpPr/>
+        <p:nvPr/>
+      </p:nvGrpSpPr>
+      <p:grpSpPr>
+        <a:xfrm>
+          <a:off x="0" y="0"/>
+          <a:ext cx="0" cy="0"/>
+          <a:chOff x="0" y="0"/>
+          <a:chExt cx="0" cy="0"/>
+        </a:xfrm>
+      </p:grpSpPr>
+      <p:sp>
+        <p:nvSpPr>
+          <p:cNvPr id="2" name="Slide Image Placeholder 1"/>
+          <p:cNvSpPr>
+            <a:spLocks noGrp="1" noRot="1" noChangeAspect="1"/>
+          </p:cNvSpPr>
+          <p:nvPr>
+            <p:ph type="sldImg"/>
+          </p:nvPr>
+        </p:nvSpPr>
+        <p:spPr/>
+      </p:sp>
+      <p:sp>
+        <p:nvSpPr>
+          <p:cNvPr id="3" name="Notes Placeholder 2"/>
+          <p:cNvSpPr>
+            <a:spLocks noGrp="1"/>
+          </p:cNvSpPr>
+          <p:nvPr>
+            <p:ph type="body" idx="1"/>
+          </p:nvPr>
+        </p:nvSpPr>
+        <p:spPr/>
+        <p:txBody>
+          <a:bodyPr/>
+          <a:lstStyle/>
+          <a:p>
+            <a:r>
+              <a:rPr lang="en-US" dirty="0"/>
+              <a:t/>
+            </a:r>
+            <a:endParaRPr lang="en-US" dirty="0"/>
+          </a:p>
+        </p:txBody>
+      </p:sp>
+      <p:sp>
+        <p:nvSpPr>
+          <p:cNvPr id="4" name="Slide Number Placeholder 3"/>
+          <p:cNvSpPr>
+            <a:spLocks noGrp="1"/>
+          </p:cNvSpPr>
+          <p:nvPr>
+            <p:ph type="sldNum" sz="quarter" idx="10"/>
+          </p:nvPr>
+        </p:nvSpPr>
+        <p:spPr/>
+        <p:txBody>
+          <a:bodyPr/>
+          <a:lstStyle/>
+          <a:p>
+            <a:fld id="{F7021451-1387-4CA6-816F-3879F97B5CBC}" type="slidenum">
+              <a:rPr lang="en-US"/>
+              <a:t>17</a:t>
+            </a:fld>
+            <a:endParaRPr lang="en-US"/>
+          </a:p>
+        </p:txBody>
+      </p:sp>
+    </p:spTree>
+    <p:extLst>
+      <p:ext uri="{BB962C8B-B14F-4D97-AF65-F5344CB8AC3E}">
+        <p14:creationId xmlns:p14="http://schemas.microsoft.com/office/powerpoint/2010/main" val="1024086991"/>
+      </p:ext>
+    </p:extLst>
+  </p:cSld>
+  <p:clrMapOvr>
+    <a:masterClrMapping/>
+  </p:clrMapOvr>
+</p:notes>
+</file>
+
+<file path=ppt/notesSlides/notesSlide18.xml><?xml version="1.0" encoding="utf-8"?>
+<p:notes xmlns:a="http://schemas.openxmlformats.org/drawingml/2006/main" xmlns:r="http://schemas.openxmlformats.org/officeDocument/2006/relationships" xmlns:p="http://schemas.openxmlformats.org/presentationml/2006/main">
+  <p:cSld>
+    <p:spTree>
+      <p:nvGrpSpPr>
+        <p:cNvPr id="1" name=""/>
+        <p:cNvGrpSpPr/>
+        <p:nvPr/>
+      </p:nvGrpSpPr>
+      <p:grpSpPr>
+        <a:xfrm>
+          <a:off x="0" y="0"/>
+          <a:ext cx="0" cy="0"/>
+          <a:chOff x="0" y="0"/>
+          <a:chExt cx="0" cy="0"/>
+        </a:xfrm>
+      </p:grpSpPr>
+      <p:sp>
+        <p:nvSpPr>
+          <p:cNvPr id="2" name="Slide Image Placeholder 1"/>
+          <p:cNvSpPr>
+            <a:spLocks noGrp="1" noRot="1" noChangeAspect="1"/>
+          </p:cNvSpPr>
+          <p:nvPr>
+            <p:ph type="sldImg"/>
+          </p:nvPr>
+        </p:nvSpPr>
+        <p:spPr/>
+      </p:sp>
+      <p:sp>
+        <p:nvSpPr>
+          <p:cNvPr id="3" name="Notes Placeholder 2"/>
+          <p:cNvSpPr>
+            <a:spLocks noGrp="1"/>
+          </p:cNvSpPr>
+          <p:nvPr>
+            <p:ph type="body" idx="1"/>
+          </p:nvPr>
+        </p:nvSpPr>
+        <p:spPr/>
+        <p:txBody>
+          <a:bodyPr/>
+          <a:lstStyle/>
+          <a:p>
+            <a:r>
+              <a:rPr lang="en-US" dirty="0"/>
+              <a:t/>
+            </a:r>
+            <a:endParaRPr lang="en-US" dirty="0"/>
+          </a:p>
+        </p:txBody>
+      </p:sp>
+      <p:sp>
+        <p:nvSpPr>
+          <p:cNvPr id="4" name="Slide Number Placeholder 3"/>
+          <p:cNvSpPr>
+            <a:spLocks noGrp="1"/>
+          </p:cNvSpPr>
+          <p:nvPr>
+            <p:ph type="sldNum" sz="quarter" idx="10"/>
+          </p:nvPr>
+        </p:nvSpPr>
+        <p:spPr/>
+        <p:txBody>
+          <a:bodyPr/>
+          <a:lstStyle/>
+          <a:p>
+            <a:fld id="{F7021451-1387-4CA6-816F-3879F97B5CBC}" type="slidenum">
+              <a:rPr lang="en-US"/>
+              <a:t>18</a:t>
             </a:fld>
             <a:endParaRPr lang="en-US"/>
           </a:p>
@@ -3130,7 +4118,7 @@
                 <a:ea typeface="Calibri" pitchFamily="34" charset="-122"/>
                 <a:cs typeface="Calibri" pitchFamily="34" charset="-120"/>
               </a:rPr>
-              <a:t>LO QUE HAY QUE ANTICIPAR</a:t>
+              <a:t>NUESTRA RESPUESTA</a:t>
             </a:r>
             <a:endParaRPr lang="en-US" sz="1150" dirty="0"/>
           </a:p>
@@ -3169,7 +4157,7 @@
                 <a:ea typeface="Cambria" pitchFamily="34" charset="-122"/>
                 <a:cs typeface="Cambria" pitchFamily="34" charset="-120"/>
               </a:rPr>
-              <a:t>Riesgos identificados y respuestas</a:t>
+              <a:t>Dos tecnologías para dos restricciones distintas</a:t>
             </a:r>
             <a:endParaRPr lang="en-US" sz="3000" dirty="0"/>
           </a:p>
@@ -3208,7 +4196,7 @@
                 <a:ea typeface="Cambria" pitchFamily="34" charset="-122"/>
                 <a:cs typeface="Cambria" pitchFamily="34" charset="-120"/>
               </a:rPr>
-              <a:t>Riesgos</a:t>
+              <a:t>EVERGREEN® — retener el agua</a:t>
             </a:r>
             <a:endParaRPr lang="en-US" sz="1600" dirty="0"/>
           </a:p>
@@ -3254,7 +4242,7 @@
                 <a:ea typeface="Calibri" pitchFamily="34" charset="-122"/>
                 <a:cs typeface="Calibri" pitchFamily="34" charset="-120"/>
               </a:rPr>
-              <a:t>Variabilidad entre campañas: un año lluvioso enmascara el interés del producto.</a:t>
+              <a:t>Hidrorretenedor a base de potasio, incorporado en la zona radicular a la plantación o en la reposición de plantas.</a:t>
             </a:r>
             <a:endParaRPr lang="en-US" sz="1350" dirty="0"/>
           </a:p>
@@ -3278,7 +4266,7 @@
                 <a:ea typeface="Calibri" pitchFamily="34" charset="-122"/>
                 <a:cs typeface="Calibri" pitchFamily="34" charset="-120"/>
               </a:rPr>
-              <a:t>Parque de riego ya muy tecnificado: el comprador pregunta qué aporta el producto por encima del goteo que ya tiene instalado.</a:t>
+              <a:t>Capta el agua de lluvia o de riego y la devuelve a la planta de forma gradual, suprimiendo el estrés hídrico en las etapas críticas.</a:t>
             </a:r>
             <a:endParaRPr lang="en-US" sz="1350" dirty="0"/>
           </a:p>
@@ -3302,7 +4290,7 @@
                 <a:ea typeface="Calibri" pitchFamily="34" charset="-122"/>
                 <a:cs typeface="Calibri" pitchFamily="34" charset="-120"/>
               </a:rPr>
-              <a:t>Marco europeo sobre microplásticos añadidos intencionadamente: cualquier polímero agrícola queda bajo escrutinio.</a:t>
+              <a:t>Capacidad de absorción del orden de 300 veces su peso; efecto útil de 3 a 4 años en el suelo.</a:t>
             </a:r>
             <a:endParaRPr lang="en-US" sz="1350" dirty="0"/>
           </a:p>
@@ -3326,7 +4314,7 @@
                 <a:ea typeface="Calibri" pitchFamily="34" charset="-122"/>
                 <a:cs typeface="Calibri" pitchFamily="34" charset="-120"/>
               </a:rPr>
-              <a:t>Competencia de polímeros baratos a base de sodio, que dejaron mal recuerdo en suelos ya salinizados.</a:t>
+              <a:t>Se degrada entre 20 y 25 % al año, sin acumulación ni riesgo de sobredosis.</a:t>
             </a:r>
             <a:endParaRPr lang="en-US" sz="1350" dirty="0"/>
           </a:p>
@@ -3365,7 +4353,7 @@
                 <a:ea typeface="Cambria" pitchFamily="34" charset="-122"/>
                 <a:cs typeface="Cambria" pitchFamily="34" charset="-120"/>
               </a:rPr>
-              <a:t>Respuestas</a:t>
+              <a:t>ECOFERT® — nutrir sin agotar el suelo</a:t>
             </a:r>
             <a:endParaRPr lang="en-US" sz="1600" dirty="0"/>
           </a:p>
@@ -3411,7 +4399,7 @@
                 <a:ea typeface="Calibri" pitchFamily="34" charset="-122"/>
                 <a:cs typeface="Calibri" pitchFamily="34" charset="-120"/>
               </a:rPr>
-              <a:t>Conducir el ensayo sobre un ciclo completo con parcela testigo, para objetivar la ganancia incluso en año favorable.</a:t>
+              <a:t>Fertilizante en microdosis de aminoácidos, nitrógeno, fósforo y potasio, obtenido de recursos renovables.</a:t>
             </a:r>
             <a:endParaRPr lang="en-US" sz="1350" dirty="0"/>
           </a:p>
@@ -3435,7 +4423,7 @@
                 <a:ea typeface="Calibri" pitchFamily="34" charset="-122"/>
                 <a:cs typeface="Calibri" pitchFamily="34" charset="-120"/>
               </a:rPr>
-              <a:t>Medir el ahorro sobre el goteo mismo: la hidrorretención actúa en el suelo, no en el método de aplicación.</a:t>
+              <a:t>No quelante: no empobrece el complejo arcillo-húmico y no incrementa la salinidad ni el contenido de nitratos.</a:t>
             </a:r>
             <a:endParaRPr lang="en-US" sz="1350" dirty="0"/>
           </a:p>
@@ -3459,7 +4447,7 @@
                 <a:ea typeface="Calibri" pitchFamily="34" charset="-122"/>
                 <a:cs typeface="Calibri" pitchFamily="34" charset="-120"/>
               </a:rPr>
-              <a:t>Aportar la documentación de degradación —entre 20 y 25 % al año, sin acumulación— y el screening REACH / SVHC.</a:t>
+              <a:t>Certificado por SOHISCERT, entidad andaluza, y conforme a la normativa europea de producción ecológica.</a:t>
             </a:r>
             <a:endParaRPr lang="en-US" sz="1350" dirty="0"/>
           </a:p>
@@ -3483,7 +4471,7 @@
                 <a:ea typeface="Calibri" pitchFamily="34" charset="-122"/>
                 <a:cs typeface="Calibri" pitchFamily="34" charset="-120"/>
               </a:rPr>
-              <a:t>Documentar la formulación: potasio y no sodio, compatible con cultivos alimentarios y con suelos salinos.</a:t>
+              <a:t>De 1 a 4 frascos de 140 ml por hectárea, compatible con los equipos de fertirriego ya instalados.</a:t>
             </a:r>
             <a:endParaRPr lang="en-US" sz="1350" dirty="0"/>
           </a:p>
@@ -3552,7 +4540,7 @@
                 <a:ea typeface="Calibri" pitchFamily="34" charset="-122"/>
                 <a:cs typeface="Calibri" pitchFamily="34" charset="-120"/>
               </a:rPr>
-              <a:t>Análisis de acrilamida (laboratorio Polymex, ISO 9001, contenido inferior a 3,0 µg/g), screening REACH / SVHC (SGS) y certificado SOHISCERT vigente hasta el 4 de septiembre de 2027, disponibles a solicitud. SOHISCERT tiene su sede en Sevilla: el organismo que nos certifica es el mismo que audita a buena parte de sus vecinos.</a:t>
+              <a:t>Los dos productos se venden por separado, pero fueron concebidos para reforzarse: el hidrorretenedor prolonga la disponibilidad del agua y el fertilizante valoriza esa agua disponible sin degradar el suelo. En zona vulnerable a nitratos, el carácter no quelante y la microdosis del segundo importan tanto como el ahorro de agua del primero.</a:t>
             </a:r>
             <a:endParaRPr lang="en-US" sz="1100" dirty="0"/>
           </a:p>
@@ -3651,6 +4639,4717 @@
 <file path=ppt/slides/slide11.xml><?xml version="1.0" encoding="utf-8"?>
 <p:sld xmlns:a="http://schemas.openxmlformats.org/drawingml/2006/main" xmlns:r="http://schemas.openxmlformats.org/officeDocument/2006/relationships" xmlns:p="http://schemas.openxmlformats.org/presentationml/2006/main">
   <p:cSld name="Slide 11">
+    <p:bg>
+      <p:bgPr>
+        <a:solidFill>
+          <a:srgbClr val="FCFAFA"/>
+        </a:solidFill>
+      </p:bgPr>
+    </p:bg>
+    <p:spTree>
+      <p:nvGrpSpPr>
+        <p:cNvPr id="1" name=""/>
+        <p:cNvGrpSpPr/>
+        <p:nvPr/>
+      </p:nvGrpSpPr>
+      <p:grpSpPr>
+        <a:xfrm>
+          <a:off x="0" y="0"/>
+          <a:ext cx="0" cy="0"/>
+          <a:chOff x="0" y="0"/>
+          <a:chExt cx="0" cy="0"/>
+        </a:xfrm>
+      </p:grpSpPr>
+      <p:sp>
+        <p:nvSpPr>
+          <p:cNvPr id="2" name="Text 0"/>
+          <p:cNvSpPr txBox="1"/>
+          <p:nvPr/>
+        </p:nvSpPr>
+        <p:spPr>
+          <a:xfrm>
+            <a:off x="594360" y="411480"/>
+            <a:ext cx="10515600" cy="274320"/>
+          </a:xfrm>
+          <a:prstGeom prst="rect">
+            <a:avLst/>
+          </a:prstGeom>
+          <a:noFill/>
+          <a:ln/>
+        </p:spPr>
+        <p:txBody>
+          <a:bodyPr wrap="square" lIns="0" tIns="0" rIns="0" bIns="0" rtlCol="0" anchor="ctr"/>
+          <a:lstStyle/>
+          <a:p>
+            <a:pPr algn="l" indent="0" marL="0">
+              <a:buNone/>
+            </a:pPr>
+            <a:r>
+              <a:rPr lang="en-US" sz="1150" b="1" spc="200" kern="0" dirty="0">
+                <a:solidFill>
+                  <a:srgbClr val="C9A227"/>
+                </a:solidFill>
+                <a:latin typeface="Calibri" pitchFamily="34" charset="0"/>
+                <a:ea typeface="Calibri" pitchFamily="34" charset="-122"/>
+                <a:cs typeface="Calibri" pitchFamily="34" charset="-120"/>
+              </a:rPr>
+              <a:t>El resto de la gama</a:t>
+            </a:r>
+            <a:endParaRPr lang="en-US" sz="1150" dirty="0"/>
+          </a:p>
+        </p:txBody>
+      </p:sp>
+      <p:sp>
+        <p:nvSpPr>
+          <p:cNvPr id="3" name="Text 1"/>
+          <p:cNvSpPr txBox="1"/>
+          <p:nvPr/>
+        </p:nvSpPr>
+        <p:spPr>
+          <a:xfrm>
+            <a:off x="594360" y="731520"/>
+            <a:ext cx="10881360" cy="731520"/>
+          </a:xfrm>
+          <a:prstGeom prst="rect">
+            <a:avLst/>
+          </a:prstGeom>
+          <a:noFill/>
+          <a:ln/>
+        </p:spPr>
+        <p:txBody>
+          <a:bodyPr wrap="square" lIns="0" tIns="0" rIns="0" bIns="0" rtlCol="0" anchor="ctr"/>
+          <a:lstStyle/>
+          <a:p>
+            <a:pPr algn="l" indent="0" marL="0">
+              <a:buNone/>
+            </a:pPr>
+            <a:r>
+              <a:rPr lang="en-US" sz="3000" b="1" dirty="0">
+                <a:solidFill>
+                  <a:srgbClr val="3F162A"/>
+                </a:solidFill>
+                <a:latin typeface="Cambria" pitchFamily="34" charset="0"/>
+                <a:ea typeface="Cambria" pitchFamily="34" charset="-122"/>
+                <a:cs typeface="Cambria" pitchFamily="34" charset="-120"/>
+              </a:rPr>
+              <a:t>Proteger los cultivos, sujetar los suelos</a:t>
+            </a:r>
+            <a:endParaRPr lang="en-US" sz="3000" dirty="0"/>
+          </a:p>
+        </p:txBody>
+      </p:sp>
+      <p:sp>
+        <p:nvSpPr>
+          <p:cNvPr id="4" name="Text 2"/>
+          <p:cNvSpPr txBox="1"/>
+          <p:nvPr/>
+        </p:nvSpPr>
+        <p:spPr>
+          <a:xfrm>
+            <a:off x="594360" y="1783080"/>
+            <a:ext cx="5227168" cy="411480"/>
+          </a:xfrm>
+          <a:prstGeom prst="rect">
+            <a:avLst/>
+          </a:prstGeom>
+          <a:noFill/>
+          <a:ln/>
+        </p:spPr>
+        <p:txBody>
+          <a:bodyPr wrap="square" lIns="0" tIns="0" rIns="0" bIns="0" rtlCol="0" anchor="ctr"/>
+          <a:lstStyle/>
+          <a:p>
+            <a:pPr algn="l" indent="0" marL="0">
+              <a:buNone/>
+            </a:pPr>
+            <a:r>
+              <a:rPr lang="en-US" sz="1600" b="1" dirty="0">
+                <a:solidFill>
+                  <a:srgbClr val="6B2A44"/>
+                </a:solidFill>
+                <a:latin typeface="Cambria" pitchFamily="34" charset="0"/>
+                <a:ea typeface="Cambria" pitchFamily="34" charset="-122"/>
+                <a:cs typeface="Cambria" pitchFamily="34" charset="-120"/>
+              </a:rPr>
+              <a:t>NAPEMA® — proteger sin residuos</a:t>
+            </a:r>
+            <a:endParaRPr lang="en-US" sz="1600" dirty="0"/>
+          </a:p>
+        </p:txBody>
+      </p:sp>
+      <p:sp>
+        <p:nvSpPr>
+          <p:cNvPr id="5" name="Text 3"/>
+          <p:cNvSpPr txBox="1"/>
+          <p:nvPr/>
+        </p:nvSpPr>
+        <p:spPr>
+          <a:xfrm>
+            <a:off x="594360" y="2286000"/>
+            <a:ext cx="5227168" cy="2468880"/>
+          </a:xfrm>
+          <a:prstGeom prst="rect">
+            <a:avLst/>
+          </a:prstGeom>
+          <a:noFill/>
+          <a:ln/>
+        </p:spPr>
+        <p:txBody>
+          <a:bodyPr wrap="square" lIns="0" tIns="0" rIns="0" bIns="0" rtlCol="0" anchor="t"/>
+          <a:lstStyle/>
+          <a:p>
+            <a:pPr algn="l" marL="342900" indent="-342900">
+              <a:lnSpc>
+                <a:spcPct val="122000"/>
+              </a:lnSpc>
+              <a:spcAft>
+                <a:spcPts val="1000"/>
+              </a:spcAft>
+              <a:buSzPct val="100000"/>
+              <a:buChar char="•"/>
+            </a:pPr>
+            <a:r>
+              <a:rPr lang="en-US" sz="1350" dirty="0">
+                <a:solidFill>
+                  <a:srgbClr val="3F3138"/>
+                </a:solidFill>
+                <a:latin typeface="Calibri" pitchFamily="34" charset="0"/>
+                <a:ea typeface="Calibri" pitchFamily="34" charset="-122"/>
+                <a:cs typeface="Calibri" pitchFamily="34" charset="-120"/>
+              </a:rPr>
+              <a:t>Controla enfermedades, parásitos, hongos y plagas, sin moléculas de síntesis.</a:t>
+            </a:r>
+            <a:endParaRPr lang="en-US" sz="1350" dirty="0"/>
+          </a:p>
+          <a:p>
+            <a:pPr algn="l" marL="342900" indent="-342900">
+              <a:lnSpc>
+                <a:spcPct val="122000"/>
+              </a:lnSpc>
+              <a:spcAft>
+                <a:spcPts val="1000"/>
+              </a:spcAft>
+              <a:buSzPct val="100000"/>
+              <a:buChar char="•"/>
+            </a:pPr>
+            <a:r>
+              <a:rPr lang="en-US" sz="1350" dirty="0">
+                <a:solidFill>
+                  <a:srgbClr val="3F3138"/>
+                </a:solidFill>
+                <a:latin typeface="Calibri" pitchFamily="34" charset="0"/>
+                <a:ea typeface="Calibri" pitchFamily="34" charset="-122"/>
+                <a:cs typeface="Calibri" pitchFamily="34" charset="-120"/>
+              </a:rPr>
+              <a:t>Pulverización foliar y radicular, con efecto preventivo y curativo.</a:t>
+            </a:r>
+            <a:endParaRPr lang="en-US" sz="1350" dirty="0"/>
+          </a:p>
+          <a:p>
+            <a:pPr algn="l" marL="342900" indent="-342900">
+              <a:lnSpc>
+                <a:spcPct val="122000"/>
+              </a:lnSpc>
+              <a:spcAft>
+                <a:spcPts val="1000"/>
+              </a:spcAft>
+              <a:buSzPct val="100000"/>
+              <a:buChar char="•"/>
+            </a:pPr>
+            <a:r>
+              <a:rPr lang="en-US" sz="1350" dirty="0">
+                <a:solidFill>
+                  <a:srgbClr val="3F3138"/>
+                </a:solidFill>
+                <a:latin typeface="Calibri" pitchFamily="34" charset="0"/>
+                <a:ea typeface="Calibri" pitchFamily="34" charset="-122"/>
+                <a:cs typeface="Calibri" pitchFamily="34" charset="-120"/>
+              </a:rPr>
+              <a:t>Ningún residuo en el suelo, la planta ni el aire: polinizadores y auxiliares a salvo.</a:t>
+            </a:r>
+            <a:endParaRPr lang="en-US" sz="1350" dirty="0"/>
+          </a:p>
+          <a:p>
+            <a:pPr algn="l" marL="342900" indent="-342900">
+              <a:lnSpc>
+                <a:spcPct val="122000"/>
+              </a:lnSpc>
+              <a:spcAft>
+                <a:spcPts val="1000"/>
+              </a:spcAft>
+              <a:buSzPct val="100000"/>
+              <a:buChar char="•"/>
+            </a:pPr>
+            <a:r>
+              <a:rPr lang="en-US" sz="1350" dirty="0">
+                <a:solidFill>
+                  <a:srgbClr val="3F3138"/>
+                </a:solidFill>
+                <a:latin typeface="Calibri" pitchFamily="34" charset="0"/>
+                <a:ea typeface="Calibri" pitchFamily="34" charset="-122"/>
+                <a:cs typeface="Calibri" pitchFamily="34" charset="-120"/>
+              </a:rPr>
+              <a:t>Formulado a medida para un problema concreto: cochinilla, HLB de los cítricos, nematodos.</a:t>
+            </a:r>
+            <a:endParaRPr lang="en-US" sz="1350" dirty="0"/>
+          </a:p>
+        </p:txBody>
+      </p:sp>
+      <p:sp>
+        <p:nvSpPr>
+          <p:cNvPr id="6" name="Text 4"/>
+          <p:cNvSpPr txBox="1"/>
+          <p:nvPr/>
+        </p:nvSpPr>
+        <p:spPr>
+          <a:xfrm>
+            <a:off x="6370168" y="1783080"/>
+            <a:ext cx="5227168" cy="411480"/>
+          </a:xfrm>
+          <a:prstGeom prst="rect">
+            <a:avLst/>
+          </a:prstGeom>
+          <a:noFill/>
+          <a:ln/>
+        </p:spPr>
+        <p:txBody>
+          <a:bodyPr wrap="square" lIns="0" tIns="0" rIns="0" bIns="0" rtlCol="0" anchor="ctr"/>
+          <a:lstStyle/>
+          <a:p>
+            <a:pPr algn="l" indent="0" marL="0">
+              <a:buNone/>
+            </a:pPr>
+            <a:r>
+              <a:rPr lang="en-US" sz="1600" b="1" dirty="0">
+                <a:solidFill>
+                  <a:srgbClr val="6B2A44"/>
+                </a:solidFill>
+                <a:latin typeface="Cambria" pitchFamily="34" charset="0"/>
+                <a:ea typeface="Cambria" pitchFamily="34" charset="-122"/>
+                <a:cs typeface="Cambria" pitchFamily="34" charset="-120"/>
+              </a:rPr>
+              <a:t>Paulownia ALTIFOLIA® — árbol de clima cálido</a:t>
+            </a:r>
+            <a:endParaRPr lang="en-US" sz="1600" dirty="0"/>
+          </a:p>
+        </p:txBody>
+      </p:sp>
+      <p:sp>
+        <p:nvSpPr>
+          <p:cNvPr id="7" name="Text 5"/>
+          <p:cNvSpPr txBox="1"/>
+          <p:nvPr/>
+        </p:nvSpPr>
+        <p:spPr>
+          <a:xfrm>
+            <a:off x="6370168" y="2286000"/>
+            <a:ext cx="5227168" cy="2468880"/>
+          </a:xfrm>
+          <a:prstGeom prst="rect">
+            <a:avLst/>
+          </a:prstGeom>
+          <a:noFill/>
+          <a:ln/>
+        </p:spPr>
+        <p:txBody>
+          <a:bodyPr wrap="square" lIns="0" tIns="0" rIns="0" bIns="0" rtlCol="0" anchor="t"/>
+          <a:lstStyle/>
+          <a:p>
+            <a:pPr algn="l" marL="342900" indent="-342900">
+              <a:lnSpc>
+                <a:spcPct val="122000"/>
+              </a:lnSpc>
+              <a:spcAft>
+                <a:spcPts val="1000"/>
+              </a:spcAft>
+              <a:buSzPct val="100000"/>
+              <a:buChar char="•"/>
+            </a:pPr>
+            <a:r>
+              <a:rPr lang="en-US" sz="1350" dirty="0">
+                <a:solidFill>
+                  <a:srgbClr val="3F3138"/>
+                </a:solidFill>
+                <a:latin typeface="Calibri" pitchFamily="34" charset="0"/>
+                <a:ea typeface="Calibri" pitchFamily="34" charset="-122"/>
+                <a:cs typeface="Calibri" pitchFamily="34" charset="-120"/>
+              </a:rPr>
+              <a:t>De 13 a 15 m en seis a ocho años, con un tronco de gran diámetro.</a:t>
+            </a:r>
+            <a:endParaRPr lang="en-US" sz="1350" dirty="0"/>
+          </a:p>
+          <a:p>
+            <a:pPr algn="l" marL="342900" indent="-342900">
+              <a:lnSpc>
+                <a:spcPct val="122000"/>
+              </a:lnSpc>
+              <a:spcAft>
+                <a:spcPts val="1000"/>
+              </a:spcAft>
+              <a:buSzPct val="100000"/>
+              <a:buChar char="•"/>
+            </a:pPr>
+            <a:r>
+              <a:rPr lang="en-US" sz="1350" dirty="0">
+                <a:solidFill>
+                  <a:srgbClr val="3F3138"/>
+                </a:solidFill>
+                <a:latin typeface="Calibri" pitchFamily="34" charset="0"/>
+                <a:ea typeface="Calibri" pitchFamily="34" charset="-122"/>
+                <a:cs typeface="Calibri" pitchFamily="34" charset="-120"/>
+              </a:rPr>
+              <a:t>Con 100 g de EVERGREEN® por planta, el riego necesario disminuye un 50 %.</a:t>
+            </a:r>
+            <a:endParaRPr lang="en-US" sz="1350" dirty="0"/>
+          </a:p>
+          <a:p>
+            <a:pPr algn="l" marL="342900" indent="-342900">
+              <a:lnSpc>
+                <a:spcPct val="122000"/>
+              </a:lnSpc>
+              <a:spcAft>
+                <a:spcPts val="1000"/>
+              </a:spcAft>
+              <a:buSzPct val="100000"/>
+              <a:buChar char="•"/>
+            </a:pPr>
+            <a:r>
+              <a:rPr lang="en-US" sz="1350" dirty="0">
+                <a:solidFill>
+                  <a:srgbClr val="3F3138"/>
+                </a:solidFill>
+                <a:latin typeface="Calibri" pitchFamily="34" charset="0"/>
+                <a:ea typeface="Calibri" pitchFamily="34" charset="-122"/>
+                <a:cs typeface="Calibri" pitchFamily="34" charset="-120"/>
+              </a:rPr>
+              <a:t>Resiste de −25 °C a +45 °C; su madera solo se inflama a partir de 426 °C.</a:t>
+            </a:r>
+            <a:endParaRPr lang="en-US" sz="1350" dirty="0"/>
+          </a:p>
+          <a:p>
+            <a:pPr algn="l" marL="342900" indent="-342900">
+              <a:lnSpc>
+                <a:spcPct val="122000"/>
+              </a:lnSpc>
+              <a:spcAft>
+                <a:spcPts val="1000"/>
+              </a:spcAft>
+              <a:buSzPct val="100000"/>
+              <a:buChar char="•"/>
+            </a:pPr>
+            <a:r>
+              <a:rPr lang="en-US" sz="1350" dirty="0">
+                <a:solidFill>
+                  <a:srgbClr val="3F3138"/>
+                </a:solidFill>
+                <a:latin typeface="Calibri" pitchFamily="34" charset="0"/>
+                <a:ea typeface="Calibri" pitchFamily="34" charset="-122"/>
+                <a:cs typeface="Calibri" pitchFamily="34" charset="-120"/>
+              </a:rPr>
+              <a:t>Cortavientos, protección del suelo contra la erosión, de 400 a 700 kg de miel por hectárea.</a:t>
+            </a:r>
+            <a:endParaRPr lang="en-US" sz="1350" dirty="0"/>
+          </a:p>
+        </p:txBody>
+      </p:sp>
+      <p:sp>
+        <p:nvSpPr>
+          <p:cNvPr id="8" name="Shape 6"/>
+          <p:cNvSpPr/>
+          <p:nvPr/>
+        </p:nvSpPr>
+        <p:spPr>
+          <a:xfrm>
+            <a:off x="594360" y="4846320"/>
+            <a:ext cx="11002975" cy="960120"/>
+          </a:xfrm>
+          <a:prstGeom prst="roundRect">
+            <a:avLst>
+              <a:gd name="adj" fmla="val 7619"/>
+            </a:avLst>
+          </a:prstGeom>
+          <a:solidFill>
+            <a:srgbClr val="F5EFF1"/>
+          </a:solidFill>
+          <a:ln w="9525">
+            <a:solidFill>
+              <a:srgbClr val="E5D9DE"/>
+            </a:solidFill>
+            <a:prstDash val="solid"/>
+          </a:ln>
+        </p:spPr>
+      </p:sp>
+      <p:sp>
+        <p:nvSpPr>
+          <p:cNvPr id="9" name="Text 7"/>
+          <p:cNvSpPr txBox="1"/>
+          <p:nvPr/>
+        </p:nvSpPr>
+        <p:spPr>
+          <a:xfrm>
+            <a:off x="822960" y="4983480"/>
+            <a:ext cx="10545775" cy="713232"/>
+          </a:xfrm>
+          <a:prstGeom prst="rect">
+            <a:avLst/>
+          </a:prstGeom>
+          <a:noFill/>
+          <a:ln/>
+        </p:spPr>
+        <p:txBody>
+          <a:bodyPr wrap="square" lIns="0" tIns="0" rIns="0" bIns="0" rtlCol="0" anchor="t"/>
+          <a:lstStyle/>
+          <a:p>
+            <a:pPr algn="l" indent="0" marL="0">
+              <a:lnSpc>
+                <a:spcPct val="118000"/>
+              </a:lnSpc>
+              <a:buNone/>
+            </a:pPr>
+            <a:r>
+              <a:rPr lang="en-US" sz="1100" dirty="0">
+                <a:solidFill>
+                  <a:srgbClr val="7C6B73"/>
+                </a:solidFill>
+                <a:latin typeface="Calibri" pitchFamily="34" charset="0"/>
+                <a:ea typeface="Calibri" pitchFamily="34" charset="-122"/>
+                <a:cs typeface="Calibri" pitchFamily="34" charset="-120"/>
+              </a:rPr>
+              <a:t>Plantas entregadas en maceta (25 a 30 cm), certificadas libres de enfermedades y repuestas en garantía en caso de pérdida. Primera corta al final del sexto año, con la madera valorada en torno a 400-450 € el m³.</a:t>
+            </a:r>
+            <a:endParaRPr lang="en-US" sz="1100" dirty="0"/>
+          </a:p>
+        </p:txBody>
+      </p:sp>
+      <p:sp>
+        <p:nvSpPr>
+          <p:cNvPr id="10" name="Text 8"/>
+          <p:cNvSpPr txBox="1"/>
+          <p:nvPr/>
+        </p:nvSpPr>
+        <p:spPr>
+          <a:xfrm>
+            <a:off x="502920" y="6382512"/>
+            <a:ext cx="8229600" cy="274320"/>
+          </a:xfrm>
+          <a:prstGeom prst="rect">
+            <a:avLst/>
+          </a:prstGeom>
+          <a:noFill/>
+          <a:ln/>
+        </p:spPr>
+        <p:txBody>
+          <a:bodyPr wrap="square" lIns="0" tIns="0" rIns="0" bIns="0" rtlCol="0" anchor="ctr"/>
+          <a:lstStyle/>
+          <a:p>
+            <a:pPr algn="l" indent="0" marL="0">
+              <a:buNone/>
+            </a:pPr>
+            <a:r>
+              <a:rPr lang="en-US" sz="950" dirty="0">
+                <a:solidFill>
+                  <a:srgbClr val="7C6B73">
+                    <a:alpha val="80000"/>
+                  </a:srgbClr>
+                </a:solidFill>
+                <a:latin typeface="Calibri" pitchFamily="34" charset="0"/>
+                <a:ea typeface="Calibri" pitchFamily="34" charset="-122"/>
+                <a:cs typeface="Calibri" pitchFamily="34" charset="-120"/>
+              </a:rPr>
+              <a:t>Green Solutions · Estudio de mercado España</a:t>
+            </a:r>
+            <a:endParaRPr lang="en-US" sz="950" dirty="0"/>
+          </a:p>
+        </p:txBody>
+      </p:sp>
+      <p:sp>
+        <p:nvSpPr>
+          <p:cNvPr id="11" name="Text 9"/>
+          <p:cNvSpPr txBox="1"/>
+          <p:nvPr/>
+        </p:nvSpPr>
+        <p:spPr>
+          <a:xfrm>
+            <a:off x="11140135" y="6382512"/>
+            <a:ext cx="548640" cy="274320"/>
+          </a:xfrm>
+          <a:prstGeom prst="rect">
+            <a:avLst/>
+          </a:prstGeom>
+          <a:noFill/>
+          <a:ln/>
+        </p:spPr>
+        <p:txBody>
+          <a:bodyPr wrap="square" lIns="0" tIns="0" rIns="0" bIns="0" rtlCol="0" anchor="ctr"/>
+          <a:lstStyle/>
+          <a:p>
+            <a:pPr algn="r" indent="0" marL="0">
+              <a:buNone/>
+            </a:pPr>
+            <a:r>
+              <a:rPr lang="en-US" sz="950" dirty="0">
+                <a:solidFill>
+                  <a:srgbClr val="7C6B73">
+                    <a:alpha val="80000"/>
+                  </a:srgbClr>
+                </a:solidFill>
+                <a:latin typeface="Calibri" pitchFamily="34" charset="0"/>
+                <a:ea typeface="Calibri" pitchFamily="34" charset="-122"/>
+                <a:cs typeface="Calibri" pitchFamily="34" charset="-120"/>
+              </a:rPr>
+              <a:t>10</a:t>
+            </a:r>
+            <a:endParaRPr lang="en-US" sz="950" dirty="0"/>
+          </a:p>
+        </p:txBody>
+      </p:sp>
+    </p:spTree>
+  </p:cSld>
+  <p:clrMapOvr>
+    <a:masterClrMapping/>
+  </p:clrMapOvr>
+</p:sld>
+</file>
+
+<file path=ppt/slides/slide12.xml><?xml version="1.0" encoding="utf-8"?>
+<p:sld xmlns:a="http://schemas.openxmlformats.org/drawingml/2006/main" xmlns:r="http://schemas.openxmlformats.org/officeDocument/2006/relationships" xmlns:p="http://schemas.openxmlformats.org/presentationml/2006/main">
+  <p:cSld name="Slide 12">
+    <p:bg>
+      <p:bgPr>
+        <a:solidFill>
+          <a:srgbClr val="FCFAFA"/>
+        </a:solidFill>
+      </p:bgPr>
+    </p:bg>
+    <p:spTree>
+      <p:nvGrpSpPr>
+        <p:cNvPr id="1" name=""/>
+        <p:cNvGrpSpPr/>
+        <p:nvPr/>
+      </p:nvGrpSpPr>
+      <p:grpSpPr>
+        <a:xfrm>
+          <a:off x="0" y="0"/>
+          <a:ext cx="0" cy="0"/>
+          <a:chOff x="0" y="0"/>
+          <a:chExt cx="0" cy="0"/>
+        </a:xfrm>
+      </p:grpSpPr>
+      <p:sp>
+        <p:nvSpPr>
+          <p:cNvPr id="2" name="Text 0"/>
+          <p:cNvSpPr txBox="1"/>
+          <p:nvPr/>
+        </p:nvSpPr>
+        <p:spPr>
+          <a:xfrm>
+            <a:off x="594360" y="411480"/>
+            <a:ext cx="10515600" cy="274320"/>
+          </a:xfrm>
+          <a:prstGeom prst="rect">
+            <a:avLst/>
+          </a:prstGeom>
+          <a:noFill/>
+          <a:ln/>
+        </p:spPr>
+        <p:txBody>
+          <a:bodyPr wrap="square" lIns="0" tIns="0" rIns="0" bIns="0" rtlCol="0" anchor="ctr"/>
+          <a:lstStyle/>
+          <a:p>
+            <a:pPr algn="l" indent="0" marL="0">
+              <a:buNone/>
+            </a:pPr>
+            <a:r>
+              <a:rPr lang="en-US" sz="1150" b="1" spc="200" kern="0" dirty="0">
+                <a:solidFill>
+                  <a:srgbClr val="C9A227"/>
+                </a:solidFill>
+                <a:latin typeface="Calibri" pitchFamily="34" charset="0"/>
+                <a:ea typeface="Calibri" pitchFamily="34" charset="-122"/>
+                <a:cs typeface="Calibri" pitchFamily="34" charset="-120"/>
+              </a:rPr>
+              <a:t>ÓRDENES DE MAGNITUD</a:t>
+            </a:r>
+            <a:endParaRPr lang="en-US" sz="1150" dirty="0"/>
+          </a:p>
+        </p:txBody>
+      </p:sp>
+      <p:sp>
+        <p:nvSpPr>
+          <p:cNvPr id="3" name="Text 1"/>
+          <p:cNvSpPr txBox="1"/>
+          <p:nvPr/>
+        </p:nvSpPr>
+        <p:spPr>
+          <a:xfrm>
+            <a:off x="594360" y="731520"/>
+            <a:ext cx="10881360" cy="731520"/>
+          </a:xfrm>
+          <a:prstGeom prst="rect">
+            <a:avLst/>
+          </a:prstGeom>
+          <a:noFill/>
+          <a:ln/>
+        </p:spPr>
+        <p:txBody>
+          <a:bodyPr wrap="square" lIns="0" tIns="0" rIns="0" bIns="0" rtlCol="0" anchor="ctr"/>
+          <a:lstStyle/>
+          <a:p>
+            <a:pPr algn="l" indent="0" marL="0">
+              <a:buNone/>
+            </a:pPr>
+            <a:r>
+              <a:rPr lang="en-US" sz="3000" b="1" dirty="0">
+                <a:solidFill>
+                  <a:srgbClr val="3F162A"/>
+                </a:solidFill>
+                <a:latin typeface="Cambria" pitchFamily="34" charset="0"/>
+                <a:ea typeface="Cambria" pitchFamily="34" charset="-122"/>
+                <a:cs typeface="Cambria" pitchFamily="34" charset="-120"/>
+              </a:rPr>
+              <a:t>Ahorro de agua esperado según el método de riego</a:t>
+            </a:r>
+            <a:endParaRPr lang="en-US" sz="3000" dirty="0"/>
+          </a:p>
+        </p:txBody>
+      </p:sp>
+      <p:graphicFrame>
+        <p:nvGraphicFramePr>
+          <p:cNvPr id="4" name="Chart 0" descr=""/>
+          <p:cNvGraphicFramePr/>
+          <p:nvPr/>
+        </p:nvGraphicFramePr>
+        <p:xfrm>
+          <a:off x="594360" y="1783080"/>
+          <a:ext cx="7360920" cy="3977640"/>
+        </p:xfrm>
+        <a:graphic xmlns:a="http://schemas.openxmlformats.org/drawingml/2006/main">
+          <a:graphicData uri="http://schemas.openxmlformats.org/drawingml/2006/chart">
+            <c:chart xmlns:c="http://schemas.openxmlformats.org/drawingml/2006/chart" r:id="rId1"/>
+          </a:graphicData>
+        </a:graphic>
+      </p:graphicFrame>
+      <p:sp>
+        <p:nvSpPr>
+          <p:cNvPr id="5" name="Shape 2"/>
+          <p:cNvSpPr/>
+          <p:nvPr/>
+        </p:nvSpPr>
+        <p:spPr>
+          <a:xfrm>
+            <a:off x="8275320" y="1783080"/>
+            <a:ext cx="3291840" cy="3977640"/>
+          </a:xfrm>
+          <a:prstGeom prst="roundRect">
+            <a:avLst>
+              <a:gd name="adj" fmla="val 2778"/>
+            </a:avLst>
+          </a:prstGeom>
+          <a:solidFill>
+            <a:srgbClr val="F5EFF1"/>
+          </a:solidFill>
+          <a:ln w="9525">
+            <a:solidFill>
+              <a:srgbClr val="E5D9DE"/>
+            </a:solidFill>
+            <a:prstDash val="solid"/>
+          </a:ln>
+        </p:spPr>
+      </p:sp>
+      <p:sp>
+        <p:nvSpPr>
+          <p:cNvPr id="6" name="Text 3"/>
+          <p:cNvSpPr txBox="1"/>
+          <p:nvPr/>
+        </p:nvSpPr>
+        <p:spPr>
+          <a:xfrm>
+            <a:off x="8503920" y="2011680"/>
+            <a:ext cx="2834640" cy="457200"/>
+          </a:xfrm>
+          <a:prstGeom prst="rect">
+            <a:avLst/>
+          </a:prstGeom>
+          <a:noFill/>
+          <a:ln/>
+        </p:spPr>
+        <p:txBody>
+          <a:bodyPr wrap="square" lIns="0" tIns="0" rIns="0" bIns="0" rtlCol="0" anchor="ctr"/>
+          <a:lstStyle/>
+          <a:p>
+            <a:pPr algn="l" indent="0" marL="0">
+              <a:buNone/>
+            </a:pPr>
+            <a:r>
+              <a:rPr lang="en-US" sz="1300" b="1" dirty="0">
+                <a:solidFill>
+                  <a:srgbClr val="6B2A44"/>
+                </a:solidFill>
+                <a:latin typeface="Cambria" pitchFamily="34" charset="0"/>
+                <a:ea typeface="Cambria" pitchFamily="34" charset="-122"/>
+                <a:cs typeface="Cambria" pitchFamily="34" charset="-120"/>
+              </a:rPr>
+              <a:t>Leer con prudencia</a:t>
+            </a:r>
+            <a:endParaRPr lang="en-US" sz="1300" dirty="0"/>
+          </a:p>
+        </p:txBody>
+      </p:sp>
+      <p:sp>
+        <p:nvSpPr>
+          <p:cNvPr id="7" name="Text 4"/>
+          <p:cNvSpPr txBox="1"/>
+          <p:nvPr/>
+        </p:nvSpPr>
+        <p:spPr>
+          <a:xfrm>
+            <a:off x="8503920" y="2560320"/>
+            <a:ext cx="2834640" cy="3017520"/>
+          </a:xfrm>
+          <a:prstGeom prst="rect">
+            <a:avLst/>
+          </a:prstGeom>
+          <a:noFill/>
+          <a:ln/>
+        </p:spPr>
+        <p:txBody>
+          <a:bodyPr wrap="square" lIns="0" tIns="0" rIns="0" bIns="0" rtlCol="0" anchor="t"/>
+          <a:lstStyle/>
+          <a:p>
+            <a:pPr algn="l" indent="0" marL="0">
+              <a:lnSpc>
+                <a:spcPct val="125000"/>
+              </a:lnSpc>
+              <a:buNone/>
+            </a:pPr>
+            <a:r>
+              <a:rPr lang="en-US" sz="1200" dirty="0">
+                <a:solidFill>
+                  <a:srgbClr val="3F3138"/>
+                </a:solidFill>
+                <a:latin typeface="Calibri" pitchFamily="34" charset="0"/>
+                <a:ea typeface="Calibri" pitchFamily="34" charset="-122"/>
+                <a:cs typeface="Calibri" pitchFamily="34" charset="-120"/>
+              </a:rPr>
+              <a:t>Estos rangos son indicativos y se apoyan en las ganancias documentadas de nuestros hidrorretenedores.</a:t>
+            </a:r>
+            <a:endParaRPr lang="en-US" sz="1200" dirty="0"/>
+          </a:p>
+          <a:p>
+            <a:pPr algn="l" indent="0" marL="0">
+              <a:lnSpc>
+                <a:spcPct val="125000"/>
+              </a:lnSpc>
+              <a:buNone/>
+            </a:pPr>
+            <a:endParaRPr lang="en-US" sz="1200" dirty="0"/>
+          </a:p>
+          <a:p>
+            <a:pPr algn="l" indent="0" marL="0">
+              <a:lnSpc>
+                <a:spcPct val="125000"/>
+              </a:lnSpc>
+              <a:buNone/>
+            </a:pPr>
+            <a:r>
+              <a:rPr lang="en-US" sz="1200" dirty="0">
+                <a:solidFill>
+                  <a:srgbClr val="3F3138"/>
+                </a:solidFill>
+                <a:latin typeface="Calibri" pitchFamily="34" charset="0"/>
+                <a:ea typeface="Calibri" pitchFamily="34" charset="-122"/>
+                <a:cs typeface="Calibri" pitchFamily="34" charset="-120"/>
+              </a:rPr>
+              <a:t>El resultado real depende del suelo, del clima y del cultivo. Estas cifras dan un orden de magnitud: en ningún caso constituyen un valor garantizado, contractual ni absoluto.</a:t>
+            </a:r>
+            <a:endParaRPr lang="en-US" sz="1200" dirty="0"/>
+          </a:p>
+        </p:txBody>
+      </p:sp>
+      <p:sp>
+        <p:nvSpPr>
+          <p:cNvPr id="8" name="Text 5"/>
+          <p:cNvSpPr txBox="1"/>
+          <p:nvPr/>
+        </p:nvSpPr>
+        <p:spPr>
+          <a:xfrm>
+            <a:off x="502920" y="6382512"/>
+            <a:ext cx="8229600" cy="274320"/>
+          </a:xfrm>
+          <a:prstGeom prst="rect">
+            <a:avLst/>
+          </a:prstGeom>
+          <a:noFill/>
+          <a:ln/>
+        </p:spPr>
+        <p:txBody>
+          <a:bodyPr wrap="square" lIns="0" tIns="0" rIns="0" bIns="0" rtlCol="0" anchor="ctr"/>
+          <a:lstStyle/>
+          <a:p>
+            <a:pPr algn="l" indent="0" marL="0">
+              <a:buNone/>
+            </a:pPr>
+            <a:r>
+              <a:rPr lang="en-US" sz="950" dirty="0">
+                <a:solidFill>
+                  <a:srgbClr val="7C6B73">
+                    <a:alpha val="80000"/>
+                  </a:srgbClr>
+                </a:solidFill>
+                <a:latin typeface="Calibri" pitchFamily="34" charset="0"/>
+                <a:ea typeface="Calibri" pitchFamily="34" charset="-122"/>
+                <a:cs typeface="Calibri" pitchFamily="34" charset="-120"/>
+              </a:rPr>
+              <a:t>Green Solutions · Estudio de mercado España</a:t>
+            </a:r>
+            <a:endParaRPr lang="en-US" sz="950" dirty="0"/>
+          </a:p>
+        </p:txBody>
+      </p:sp>
+      <p:sp>
+        <p:nvSpPr>
+          <p:cNvPr id="9" name="Text 6"/>
+          <p:cNvSpPr txBox="1"/>
+          <p:nvPr/>
+        </p:nvSpPr>
+        <p:spPr>
+          <a:xfrm>
+            <a:off x="11140135" y="6382512"/>
+            <a:ext cx="548640" cy="274320"/>
+          </a:xfrm>
+          <a:prstGeom prst="rect">
+            <a:avLst/>
+          </a:prstGeom>
+          <a:noFill/>
+          <a:ln/>
+        </p:spPr>
+        <p:txBody>
+          <a:bodyPr wrap="square" lIns="0" tIns="0" rIns="0" bIns="0" rtlCol="0" anchor="ctr"/>
+          <a:lstStyle/>
+          <a:p>
+            <a:pPr algn="r" indent="0" marL="0">
+              <a:buNone/>
+            </a:pPr>
+            <a:r>
+              <a:rPr lang="en-US" sz="950" dirty="0">
+                <a:solidFill>
+                  <a:srgbClr val="7C6B73">
+                    <a:alpha val="80000"/>
+                  </a:srgbClr>
+                </a:solidFill>
+                <a:latin typeface="Calibri" pitchFamily="34" charset="0"/>
+                <a:ea typeface="Calibri" pitchFamily="34" charset="-122"/>
+                <a:cs typeface="Calibri" pitchFamily="34" charset="-120"/>
+              </a:rPr>
+              <a:t>11</a:t>
+            </a:r>
+            <a:endParaRPr lang="en-US" sz="950" dirty="0"/>
+          </a:p>
+        </p:txBody>
+      </p:sp>
+    </p:spTree>
+  </p:cSld>
+  <p:clrMapOvr>
+    <a:masterClrMapping/>
+  </p:clrMapOvr>
+</p:sld>
+</file>
+
+<file path=ppt/slides/slide13.xml><?xml version="1.0" encoding="utf-8"?>
+<p:sld xmlns:a="http://schemas.openxmlformats.org/drawingml/2006/main" xmlns:r="http://schemas.openxmlformats.org/officeDocument/2006/relationships" xmlns:p="http://schemas.openxmlformats.org/presentationml/2006/main">
+  <p:cSld name="Slide 13">
+    <p:bg>
+      <p:bgPr>
+        <a:solidFill>
+          <a:srgbClr val="FCFAFA"/>
+        </a:solidFill>
+      </p:bgPr>
+    </p:bg>
+    <p:spTree>
+      <p:nvGrpSpPr>
+        <p:cNvPr id="1" name=""/>
+        <p:cNvGrpSpPr/>
+        <p:nvPr/>
+      </p:nvGrpSpPr>
+      <p:grpSpPr>
+        <a:xfrm>
+          <a:off x="0" y="0"/>
+          <a:ext cx="0" cy="0"/>
+          <a:chOff x="0" y="0"/>
+          <a:chExt cx="0" cy="0"/>
+        </a:xfrm>
+      </p:grpSpPr>
+      <p:sp>
+        <p:nvSpPr>
+          <p:cNvPr id="2" name="Text 0"/>
+          <p:cNvSpPr txBox="1"/>
+          <p:nvPr/>
+        </p:nvSpPr>
+        <p:spPr>
+          <a:xfrm>
+            <a:off x="594360" y="411480"/>
+            <a:ext cx="10515600" cy="274320"/>
+          </a:xfrm>
+          <a:prstGeom prst="rect">
+            <a:avLst/>
+          </a:prstGeom>
+          <a:noFill/>
+          <a:ln/>
+        </p:spPr>
+        <p:txBody>
+          <a:bodyPr wrap="square" lIns="0" tIns="0" rIns="0" bIns="0" rtlCol="0" anchor="ctr"/>
+          <a:lstStyle/>
+          <a:p>
+            <a:pPr algn="l" indent="0" marL="0">
+              <a:buNone/>
+            </a:pPr>
+            <a:r>
+              <a:rPr lang="en-US" sz="1150" b="1" spc="200" kern="0" dirty="0">
+                <a:solidFill>
+                  <a:srgbClr val="C9A227"/>
+                </a:solidFill>
+                <a:latin typeface="Calibri" pitchFamily="34" charset="0"/>
+                <a:ea typeface="Calibri" pitchFamily="34" charset="-122"/>
+                <a:cs typeface="Calibri" pitchFamily="34" charset="-120"/>
+              </a:rPr>
+              <a:t>TRES ZONAS PRIORITARIAS</a:t>
+            </a:r>
+            <a:endParaRPr lang="en-US" sz="1150" dirty="0"/>
+          </a:p>
+        </p:txBody>
+      </p:sp>
+      <p:sp>
+        <p:nvSpPr>
+          <p:cNvPr id="3" name="Text 1"/>
+          <p:cNvSpPr txBox="1"/>
+          <p:nvPr/>
+        </p:nvSpPr>
+        <p:spPr>
+          <a:xfrm>
+            <a:off x="594360" y="731520"/>
+            <a:ext cx="10881360" cy="731520"/>
+          </a:xfrm>
+          <a:prstGeom prst="rect">
+            <a:avLst/>
+          </a:prstGeom>
+          <a:noFill/>
+          <a:ln/>
+        </p:spPr>
+        <p:txBody>
+          <a:bodyPr wrap="square" lIns="0" tIns="0" rIns="0" bIns="0" rtlCol="0" anchor="ctr"/>
+          <a:lstStyle/>
+          <a:p>
+            <a:pPr algn="l" indent="0" marL="0">
+              <a:buNone/>
+            </a:pPr>
+            <a:r>
+              <a:rPr lang="en-US" sz="3000" b="1" dirty="0">
+                <a:solidFill>
+                  <a:srgbClr val="3F162A"/>
+                </a:solidFill>
+                <a:latin typeface="Cambria" pitchFamily="34" charset="0"/>
+                <a:ea typeface="Cambria" pitchFamily="34" charset="-122"/>
+                <a:cs typeface="Cambria" pitchFamily="34" charset="-120"/>
+              </a:rPr>
+              <a:t>Dónde iniciar los primeros ensayos</a:t>
+            </a:r>
+            <a:endParaRPr lang="en-US" sz="3000" dirty="0"/>
+          </a:p>
+        </p:txBody>
+      </p:sp>
+      <p:sp>
+        <p:nvSpPr>
+          <p:cNvPr id="4" name="Shape 2"/>
+          <p:cNvSpPr/>
+          <p:nvPr/>
+        </p:nvSpPr>
+        <p:spPr>
+          <a:xfrm>
+            <a:off x="594360" y="1783080"/>
+            <a:ext cx="3472586" cy="4069080"/>
+          </a:xfrm>
+          <a:prstGeom prst="roundRect">
+            <a:avLst>
+              <a:gd name="adj" fmla="val 2633"/>
+            </a:avLst>
+          </a:prstGeom>
+          <a:solidFill>
+            <a:srgbClr val="F5EFF1"/>
+          </a:solidFill>
+          <a:ln w="9525">
+            <a:solidFill>
+              <a:srgbClr val="E5D9DE"/>
+            </a:solidFill>
+            <a:prstDash val="solid"/>
+          </a:ln>
+        </p:spPr>
+      </p:sp>
+      <p:pic>
+        <p:nvPicPr>
+          <p:cNvPr id="5" name="Image 0" descr="preencoded.png">    </p:cNvPr>
+          <p:cNvPicPr>
+            <a:picLocks noChangeAspect="1"/>
+          </p:cNvPicPr>
+          <p:nvPr/>
+        </p:nvPicPr>
+        <p:blipFill>
+          <a:blip r:embed="rId1"/>
+          <a:stretch>
+            <a:fillRect/>
+          </a:stretch>
+        </p:blipFill>
+        <p:spPr>
+          <a:xfrm>
+            <a:off x="594360" y="1783080"/>
+            <a:ext cx="3472586" cy="1691640"/>
+          </a:xfrm>
+          <a:prstGeom prst="rect">
+            <a:avLst/>
+          </a:prstGeom>
+        </p:spPr>
+      </p:pic>
+      <p:sp>
+        <p:nvSpPr>
+          <p:cNvPr id="6" name="Text 3"/>
+          <p:cNvSpPr txBox="1"/>
+          <p:nvPr/>
+        </p:nvSpPr>
+        <p:spPr>
+          <a:xfrm>
+            <a:off x="795528" y="3639312"/>
+            <a:ext cx="3070250" cy="384048"/>
+          </a:xfrm>
+          <a:prstGeom prst="rect">
+            <a:avLst/>
+          </a:prstGeom>
+          <a:noFill/>
+          <a:ln/>
+        </p:spPr>
+        <p:txBody>
+          <a:bodyPr wrap="square" lIns="0" tIns="0" rIns="0" bIns="0" rtlCol="0" anchor="ctr"/>
+          <a:lstStyle/>
+          <a:p>
+            <a:pPr algn="l" indent="0" marL="0">
+              <a:buNone/>
+            </a:pPr>
+            <a:r>
+              <a:rPr lang="en-US" sz="1500" b="1" dirty="0">
+                <a:solidFill>
+                  <a:srgbClr val="6B2A44"/>
+                </a:solidFill>
+                <a:latin typeface="Cambria" pitchFamily="34" charset="0"/>
+                <a:ea typeface="Cambria" pitchFamily="34" charset="-122"/>
+                <a:cs typeface="Cambria" pitchFamily="34" charset="-120"/>
+              </a:rPr>
+              <a:t>Jaén y Córdoba</a:t>
+            </a:r>
+            <a:endParaRPr lang="en-US" sz="1500" dirty="0"/>
+          </a:p>
+        </p:txBody>
+      </p:sp>
+      <p:sp>
+        <p:nvSpPr>
+          <p:cNvPr id="7" name="Text 4"/>
+          <p:cNvSpPr txBox="1"/>
+          <p:nvPr/>
+        </p:nvSpPr>
+        <p:spPr>
+          <a:xfrm>
+            <a:off x="795528" y="4041648"/>
+            <a:ext cx="3070250" cy="329184"/>
+          </a:xfrm>
+          <a:prstGeom prst="rect">
+            <a:avLst/>
+          </a:prstGeom>
+          <a:noFill/>
+          <a:ln/>
+        </p:spPr>
+        <p:txBody>
+          <a:bodyPr wrap="square" lIns="0" tIns="0" rIns="0" bIns="0" rtlCol="0" anchor="ctr"/>
+          <a:lstStyle/>
+          <a:p>
+            <a:pPr algn="l" indent="0" marL="0">
+              <a:buNone/>
+            </a:pPr>
+            <a:r>
+              <a:rPr lang="en-US" sz="1250" b="1" dirty="0">
+                <a:solidFill>
+                  <a:srgbClr val="8F6D0F"/>
+                </a:solidFill>
+                <a:latin typeface="Calibri" pitchFamily="34" charset="0"/>
+                <a:ea typeface="Calibri" pitchFamily="34" charset="-122"/>
+                <a:cs typeface="Calibri" pitchFamily="34" charset="-120"/>
+              </a:rPr>
+              <a:t>≈ 1,6 M ha de olivar en Andalucía</a:t>
+            </a:r>
+            <a:endParaRPr lang="en-US" sz="1250" dirty="0"/>
+          </a:p>
+        </p:txBody>
+      </p:sp>
+      <p:sp>
+        <p:nvSpPr>
+          <p:cNvPr id="8" name="Text 5"/>
+          <p:cNvSpPr txBox="1"/>
+          <p:nvPr/>
+        </p:nvSpPr>
+        <p:spPr>
+          <a:xfrm>
+            <a:off x="795528" y="4407408"/>
+            <a:ext cx="3070250" cy="1280160"/>
+          </a:xfrm>
+          <a:prstGeom prst="rect">
+            <a:avLst/>
+          </a:prstGeom>
+          <a:noFill/>
+          <a:ln/>
+        </p:spPr>
+        <p:txBody>
+          <a:bodyPr wrap="square" lIns="0" tIns="0" rIns="0" bIns="0" rtlCol="0" anchor="t"/>
+          <a:lstStyle/>
+          <a:p>
+            <a:pPr algn="l" marL="342900" indent="-342900">
+              <a:lnSpc>
+                <a:spcPct val="116000"/>
+              </a:lnSpc>
+              <a:spcAft>
+                <a:spcPts val="700"/>
+              </a:spcAft>
+              <a:buSzPct val="100000"/>
+              <a:buChar char="•"/>
+            </a:pPr>
+            <a:r>
+              <a:rPr lang="en-US" sz="1150" dirty="0">
+                <a:solidFill>
+                  <a:srgbClr val="3F3138"/>
+                </a:solidFill>
+                <a:latin typeface="Calibri" pitchFamily="34" charset="0"/>
+                <a:ea typeface="Calibri" pitchFamily="34" charset="-122"/>
+                <a:cs typeface="Calibri" pitchFamily="34" charset="-120"/>
+              </a:rPr>
+              <a:t>Mayor concentración de olivar del mundo, con buena parte aún en secano: el hidrorretenedor actúa donde no hay riego.</a:t>
+            </a:r>
+            <a:endParaRPr lang="en-US" sz="1150" dirty="0"/>
+          </a:p>
+          <a:p>
+            <a:pPr algn="l" marL="342900" indent="-342900">
+              <a:lnSpc>
+                <a:spcPct val="116000"/>
+              </a:lnSpc>
+              <a:spcAft>
+                <a:spcPts val="700"/>
+              </a:spcAft>
+              <a:buSzPct val="100000"/>
+              <a:buChar char="•"/>
+            </a:pPr>
+            <a:r>
+              <a:rPr lang="en-US" sz="1150" dirty="0">
+                <a:solidFill>
+                  <a:srgbClr val="3F3138"/>
+                </a:solidFill>
+                <a:latin typeface="Calibri" pitchFamily="34" charset="0"/>
+                <a:ea typeface="Calibri" pitchFamily="34" charset="-122"/>
+                <a:cs typeface="Calibri" pitchFamily="34" charset="-120"/>
+              </a:rPr>
+              <a:t>Las campañas 2022/23 y 2023/24 mostraron lo que cuesta una floración sin agua.</a:t>
+            </a:r>
+            <a:endParaRPr lang="en-US" sz="1150" dirty="0"/>
+          </a:p>
+          <a:p>
+            <a:pPr algn="l" marL="342900" indent="-342900">
+              <a:lnSpc>
+                <a:spcPct val="116000"/>
+              </a:lnSpc>
+              <a:spcAft>
+                <a:spcPts val="700"/>
+              </a:spcAft>
+              <a:buSzPct val="100000"/>
+              <a:buChar char="•"/>
+            </a:pPr>
+            <a:r>
+              <a:rPr lang="en-US" sz="1150" dirty="0">
+                <a:solidFill>
+                  <a:srgbClr val="3F3138"/>
+                </a:solidFill>
+                <a:latin typeface="Calibri" pitchFamily="34" charset="0"/>
+                <a:ea typeface="Calibri" pitchFamily="34" charset="-122"/>
+                <a:cs typeface="Calibri" pitchFamily="34" charset="-120"/>
+              </a:rPr>
+              <a:t>Tejido cooperativo denso: el ensayo se decide en grupo, no finca por finca.</a:t>
+            </a:r>
+            <a:endParaRPr lang="en-US" sz="1150" dirty="0"/>
+          </a:p>
+        </p:txBody>
+      </p:sp>
+      <p:sp>
+        <p:nvSpPr>
+          <p:cNvPr id="9" name="Shape 6"/>
+          <p:cNvSpPr/>
+          <p:nvPr/>
+        </p:nvSpPr>
+        <p:spPr>
+          <a:xfrm>
+            <a:off x="4359554" y="1783080"/>
+            <a:ext cx="3472586" cy="4069080"/>
+          </a:xfrm>
+          <a:prstGeom prst="roundRect">
+            <a:avLst>
+              <a:gd name="adj" fmla="val 2633"/>
+            </a:avLst>
+          </a:prstGeom>
+          <a:solidFill>
+            <a:srgbClr val="F5EFF1"/>
+          </a:solidFill>
+          <a:ln w="9525">
+            <a:solidFill>
+              <a:srgbClr val="E5D9DE"/>
+            </a:solidFill>
+            <a:prstDash val="solid"/>
+          </a:ln>
+        </p:spPr>
+      </p:sp>
+      <p:pic>
+        <p:nvPicPr>
+          <p:cNvPr id="10" name="Image 1" descr="preencoded.png">    </p:cNvPr>
+          <p:cNvPicPr>
+            <a:picLocks noChangeAspect="1"/>
+          </p:cNvPicPr>
+          <p:nvPr/>
+        </p:nvPicPr>
+        <p:blipFill>
+          <a:blip r:embed="rId2"/>
+          <a:stretch>
+            <a:fillRect/>
+          </a:stretch>
+        </p:blipFill>
+        <p:spPr>
+          <a:xfrm>
+            <a:off x="4359554" y="1783080"/>
+            <a:ext cx="3472586" cy="1691640"/>
+          </a:xfrm>
+          <a:prstGeom prst="rect">
+            <a:avLst/>
+          </a:prstGeom>
+        </p:spPr>
+      </p:pic>
+      <p:sp>
+        <p:nvSpPr>
+          <p:cNvPr id="11" name="Text 7"/>
+          <p:cNvSpPr txBox="1"/>
+          <p:nvPr/>
+        </p:nvSpPr>
+        <p:spPr>
+          <a:xfrm>
+            <a:off x="4560722" y="3639312"/>
+            <a:ext cx="3070250" cy="384048"/>
+          </a:xfrm>
+          <a:prstGeom prst="rect">
+            <a:avLst/>
+          </a:prstGeom>
+          <a:noFill/>
+          <a:ln/>
+        </p:spPr>
+        <p:txBody>
+          <a:bodyPr wrap="square" lIns="0" tIns="0" rIns="0" bIns="0" rtlCol="0" anchor="ctr"/>
+          <a:lstStyle/>
+          <a:p>
+            <a:pPr algn="l" indent="0" marL="0">
+              <a:buNone/>
+            </a:pPr>
+            <a:r>
+              <a:rPr lang="en-US" sz="1500" b="1" dirty="0">
+                <a:solidFill>
+                  <a:srgbClr val="6B2A44"/>
+                </a:solidFill>
+                <a:latin typeface="Cambria" pitchFamily="34" charset="0"/>
+                <a:ea typeface="Cambria" pitchFamily="34" charset="-122"/>
+                <a:cs typeface="Cambria" pitchFamily="34" charset="-120"/>
+              </a:rPr>
+              <a:t>Murcia — Campo de Cartagena</a:t>
+            </a:r>
+            <a:endParaRPr lang="en-US" sz="1500" dirty="0"/>
+          </a:p>
+        </p:txBody>
+      </p:sp>
+      <p:sp>
+        <p:nvSpPr>
+          <p:cNvPr id="12" name="Text 8"/>
+          <p:cNvSpPr txBox="1"/>
+          <p:nvPr/>
+        </p:nvSpPr>
+        <p:spPr>
+          <a:xfrm>
+            <a:off x="4560722" y="4041648"/>
+            <a:ext cx="3070250" cy="329184"/>
+          </a:xfrm>
+          <a:prstGeom prst="rect">
+            <a:avLst/>
+          </a:prstGeom>
+          <a:noFill/>
+          <a:ln/>
+        </p:spPr>
+        <p:txBody>
+          <a:bodyPr wrap="square" lIns="0" tIns="0" rIns="0" bIns="0" rtlCol="0" anchor="ctr"/>
+          <a:lstStyle/>
+          <a:p>
+            <a:pPr algn="l" indent="0" marL="0">
+              <a:buNone/>
+            </a:pPr>
+            <a:r>
+              <a:rPr lang="en-US" sz="1250" b="1" dirty="0">
+                <a:solidFill>
+                  <a:srgbClr val="8F6D0F"/>
+                </a:solidFill>
+                <a:latin typeface="Calibri" pitchFamily="34" charset="0"/>
+                <a:ea typeface="Calibri" pitchFamily="34" charset="-122"/>
+                <a:cs typeface="Calibri" pitchFamily="34" charset="-120"/>
+              </a:rPr>
+              <a:t>Hortícola de exportación</a:t>
+            </a:r>
+            <a:endParaRPr lang="en-US" sz="1250" dirty="0"/>
+          </a:p>
+        </p:txBody>
+      </p:sp>
+      <p:sp>
+        <p:nvSpPr>
+          <p:cNvPr id="13" name="Text 9"/>
+          <p:cNvSpPr txBox="1"/>
+          <p:nvPr/>
+        </p:nvSpPr>
+        <p:spPr>
+          <a:xfrm>
+            <a:off x="4560722" y="4407408"/>
+            <a:ext cx="3070250" cy="1280160"/>
+          </a:xfrm>
+          <a:prstGeom prst="rect">
+            <a:avLst/>
+          </a:prstGeom>
+          <a:noFill/>
+          <a:ln/>
+        </p:spPr>
+        <p:txBody>
+          <a:bodyPr wrap="square" lIns="0" tIns="0" rIns="0" bIns="0" rtlCol="0" anchor="t"/>
+          <a:lstStyle/>
+          <a:p>
+            <a:pPr algn="l" marL="342900" indent="-342900">
+              <a:lnSpc>
+                <a:spcPct val="116000"/>
+              </a:lnSpc>
+              <a:spcAft>
+                <a:spcPts val="700"/>
+              </a:spcAft>
+              <a:buSzPct val="100000"/>
+              <a:buChar char="•"/>
+            </a:pPr>
+            <a:r>
+              <a:rPr lang="en-US" sz="1150" dirty="0">
+                <a:solidFill>
+                  <a:srgbClr val="3F3138"/>
+                </a:solidFill>
+                <a:latin typeface="Calibri" pitchFamily="34" charset="0"/>
+                <a:ea typeface="Calibri" pitchFamily="34" charset="-122"/>
+                <a:cs typeface="Calibri" pitchFamily="34" charset="-120"/>
+              </a:rPr>
+              <a:t>La huerta de exportación por excelencia, con dotaciones dependientes del trasvase Tajo-Segura y sometidas a recortes reiterados.</a:t>
+            </a:r>
+            <a:endParaRPr lang="en-US" sz="1150" dirty="0"/>
+          </a:p>
+          <a:p>
+            <a:pPr algn="l" marL="342900" indent="-342900">
+              <a:lnSpc>
+                <a:spcPct val="116000"/>
+              </a:lnSpc>
+              <a:spcAft>
+                <a:spcPts val="700"/>
+              </a:spcAft>
+              <a:buSzPct val="100000"/>
+              <a:buChar char="•"/>
+            </a:pPr>
+            <a:r>
+              <a:rPr lang="en-US" sz="1150" dirty="0">
+                <a:solidFill>
+                  <a:srgbClr val="3F3138"/>
+                </a:solidFill>
+                <a:latin typeface="Calibri" pitchFamily="34" charset="0"/>
+                <a:ea typeface="Calibri" pitchFamily="34" charset="-122"/>
+                <a:cs typeface="Calibri" pitchFamily="34" charset="-120"/>
+              </a:rPr>
+              <a:t>El Mar Menor ha impuesto el marco regulatorio más estricto del país en materia de nitratos: reducir aportes sin perder rendimiento es la exigencia central.</a:t>
+            </a:r>
+            <a:endParaRPr lang="en-US" sz="1150" dirty="0"/>
+          </a:p>
+          <a:p>
+            <a:pPr algn="l" marL="342900" indent="-342900">
+              <a:lnSpc>
+                <a:spcPct val="116000"/>
+              </a:lnSpc>
+              <a:spcAft>
+                <a:spcPts val="700"/>
+              </a:spcAft>
+              <a:buSzPct val="100000"/>
+              <a:buChar char="•"/>
+            </a:pPr>
+            <a:r>
+              <a:rPr lang="en-US" sz="1150" dirty="0">
+                <a:solidFill>
+                  <a:srgbClr val="3F3138"/>
+                </a:solidFill>
+                <a:latin typeface="Calibri" pitchFamily="34" charset="0"/>
+                <a:ea typeface="Calibri" pitchFamily="34" charset="-122"/>
+                <a:cs typeface="Calibri" pitchFamily="34" charset="-120"/>
+              </a:rPr>
+              <a:t>Riego localizado generalizado: el margen de ahorro ya no está en el método, sino en lo que el suelo es capaz de retener.</a:t>
+            </a:r>
+            <a:endParaRPr lang="en-US" sz="1150" dirty="0"/>
+          </a:p>
+        </p:txBody>
+      </p:sp>
+      <p:sp>
+        <p:nvSpPr>
+          <p:cNvPr id="14" name="Shape 10"/>
+          <p:cNvSpPr/>
+          <p:nvPr/>
+        </p:nvSpPr>
+        <p:spPr>
+          <a:xfrm>
+            <a:off x="8124749" y="1783080"/>
+            <a:ext cx="3472586" cy="4069080"/>
+          </a:xfrm>
+          <a:prstGeom prst="roundRect">
+            <a:avLst>
+              <a:gd name="adj" fmla="val 2633"/>
+            </a:avLst>
+          </a:prstGeom>
+          <a:solidFill>
+            <a:srgbClr val="F5EFF1"/>
+          </a:solidFill>
+          <a:ln w="9525">
+            <a:solidFill>
+              <a:srgbClr val="E5D9DE"/>
+            </a:solidFill>
+            <a:prstDash val="solid"/>
+          </a:ln>
+        </p:spPr>
+      </p:sp>
+      <p:pic>
+        <p:nvPicPr>
+          <p:cNvPr id="15" name="Image 2" descr="preencoded.png">    </p:cNvPr>
+          <p:cNvPicPr>
+            <a:picLocks noChangeAspect="1"/>
+          </p:cNvPicPr>
+          <p:nvPr/>
+        </p:nvPicPr>
+        <p:blipFill>
+          <a:blip r:embed="rId3"/>
+          <a:stretch>
+            <a:fillRect/>
+          </a:stretch>
+        </p:blipFill>
+        <p:spPr>
+          <a:xfrm>
+            <a:off x="8124749" y="1783080"/>
+            <a:ext cx="3472586" cy="1691640"/>
+          </a:xfrm>
+          <a:prstGeom prst="rect">
+            <a:avLst/>
+          </a:prstGeom>
+        </p:spPr>
+      </p:pic>
+      <p:sp>
+        <p:nvSpPr>
+          <p:cNvPr id="16" name="Text 11"/>
+          <p:cNvSpPr txBox="1"/>
+          <p:nvPr/>
+        </p:nvSpPr>
+        <p:spPr>
+          <a:xfrm>
+            <a:off x="8325917" y="3639312"/>
+            <a:ext cx="3070250" cy="384048"/>
+          </a:xfrm>
+          <a:prstGeom prst="rect">
+            <a:avLst/>
+          </a:prstGeom>
+          <a:noFill/>
+          <a:ln/>
+        </p:spPr>
+        <p:txBody>
+          <a:bodyPr wrap="square" lIns="0" tIns="0" rIns="0" bIns="0" rtlCol="0" anchor="ctr"/>
+          <a:lstStyle/>
+          <a:p>
+            <a:pPr algn="l" indent="0" marL="0">
+              <a:buNone/>
+            </a:pPr>
+            <a:r>
+              <a:rPr lang="en-US" sz="1500" b="1" dirty="0">
+                <a:solidFill>
+                  <a:srgbClr val="6B2A44"/>
+                </a:solidFill>
+                <a:latin typeface="Cambria" pitchFamily="34" charset="0"/>
+                <a:ea typeface="Cambria" pitchFamily="34" charset="-122"/>
+                <a:cs typeface="Cambria" pitchFamily="34" charset="-120"/>
+              </a:rPr>
+              <a:t>Almería — Campo de Dalías</a:t>
+            </a:r>
+            <a:endParaRPr lang="en-US" sz="1500" dirty="0"/>
+          </a:p>
+        </p:txBody>
+      </p:sp>
+      <p:sp>
+        <p:nvSpPr>
+          <p:cNvPr id="17" name="Text 12"/>
+          <p:cNvSpPr txBox="1"/>
+          <p:nvPr/>
+        </p:nvSpPr>
+        <p:spPr>
+          <a:xfrm>
+            <a:off x="8325917" y="4041648"/>
+            <a:ext cx="3070250" cy="329184"/>
+          </a:xfrm>
+          <a:prstGeom prst="rect">
+            <a:avLst/>
+          </a:prstGeom>
+          <a:noFill/>
+          <a:ln/>
+        </p:spPr>
+        <p:txBody>
+          <a:bodyPr wrap="square" lIns="0" tIns="0" rIns="0" bIns="0" rtlCol="0" anchor="ctr"/>
+          <a:lstStyle/>
+          <a:p>
+            <a:pPr algn="l" indent="0" marL="0">
+              <a:buNone/>
+            </a:pPr>
+            <a:r>
+              <a:rPr lang="en-US" sz="1250" b="1" dirty="0">
+                <a:solidFill>
+                  <a:srgbClr val="8F6D0F"/>
+                </a:solidFill>
+                <a:latin typeface="Calibri" pitchFamily="34" charset="0"/>
+                <a:ea typeface="Calibri" pitchFamily="34" charset="-122"/>
+                <a:cs typeface="Calibri" pitchFamily="34" charset="-120"/>
+              </a:rPr>
+              <a:t>≈ 33 000 ha de invernadero</a:t>
+            </a:r>
+            <a:endParaRPr lang="en-US" sz="1250" dirty="0"/>
+          </a:p>
+        </p:txBody>
+      </p:sp>
+      <p:sp>
+        <p:nvSpPr>
+          <p:cNvPr id="18" name="Text 13"/>
+          <p:cNvSpPr txBox="1"/>
+          <p:nvPr/>
+        </p:nvSpPr>
+        <p:spPr>
+          <a:xfrm>
+            <a:off x="8325917" y="4407408"/>
+            <a:ext cx="3070250" cy="1280160"/>
+          </a:xfrm>
+          <a:prstGeom prst="rect">
+            <a:avLst/>
+          </a:prstGeom>
+          <a:noFill/>
+          <a:ln/>
+        </p:spPr>
+        <p:txBody>
+          <a:bodyPr wrap="square" lIns="0" tIns="0" rIns="0" bIns="0" rtlCol="0" anchor="t"/>
+          <a:lstStyle/>
+          <a:p>
+            <a:pPr algn="l" marL="342900" indent="-342900">
+              <a:lnSpc>
+                <a:spcPct val="116000"/>
+              </a:lnSpc>
+              <a:spcAft>
+                <a:spcPts val="700"/>
+              </a:spcAft>
+              <a:buSzPct val="100000"/>
+              <a:buChar char="•"/>
+            </a:pPr>
+            <a:r>
+              <a:rPr lang="en-US" sz="1150" dirty="0">
+                <a:solidFill>
+                  <a:srgbClr val="3F3138"/>
+                </a:solidFill>
+                <a:latin typeface="Calibri" pitchFamily="34" charset="0"/>
+                <a:ea typeface="Calibri" pitchFamily="34" charset="-122"/>
+                <a:cs typeface="Calibri" pitchFamily="34" charset="-120"/>
+              </a:rPr>
+              <a:t>La mayor superficie de cultivo bajo plástico del mundo, sobre acuíferos sobreexplotados y con intrusión salina en la franja costera.</a:t>
+            </a:r>
+            <a:endParaRPr lang="en-US" sz="1150" dirty="0"/>
+          </a:p>
+          <a:p>
+            <a:pPr algn="l" marL="342900" indent="-342900">
+              <a:lnSpc>
+                <a:spcPct val="116000"/>
+              </a:lnSpc>
+              <a:spcAft>
+                <a:spcPts val="700"/>
+              </a:spcAft>
+              <a:buSzPct val="100000"/>
+              <a:buChar char="•"/>
+            </a:pPr>
+            <a:r>
+              <a:rPr lang="en-US" sz="1150" dirty="0">
+                <a:solidFill>
+                  <a:srgbClr val="3F3138"/>
+                </a:solidFill>
+                <a:latin typeface="Calibri" pitchFamily="34" charset="0"/>
+                <a:ea typeface="Calibri" pitchFamily="34" charset="-122"/>
+                <a:cs typeface="Calibri" pitchFamily="34" charset="-120"/>
+              </a:rPr>
+              <a:t>Ciclos cortos y rotaciones rápidas: el ensayo da resultado en una campaña, no en cuatro años.</a:t>
+            </a:r>
+            <a:endParaRPr lang="en-US" sz="1150" dirty="0"/>
+          </a:p>
+          <a:p>
+            <a:pPr algn="l" marL="342900" indent="-342900">
+              <a:lnSpc>
+                <a:spcPct val="116000"/>
+              </a:lnSpc>
+              <a:spcAft>
+                <a:spcPts val="700"/>
+              </a:spcAft>
+              <a:buSzPct val="100000"/>
+              <a:buChar char="•"/>
+            </a:pPr>
+            <a:r>
+              <a:rPr lang="en-US" sz="1150" dirty="0">
+                <a:solidFill>
+                  <a:srgbClr val="3F3138"/>
+                </a:solidFill>
+                <a:latin typeface="Calibri" pitchFamily="34" charset="0"/>
+                <a:ea typeface="Calibri" pitchFamily="34" charset="-122"/>
+                <a:cs typeface="Calibri" pitchFamily="34" charset="-120"/>
+              </a:rPr>
+              <a:t>Compradores del norte de Europa que auditan la huella hídrica de sus proveedores y piden trazabilidad documental.</a:t>
+            </a:r>
+            <a:endParaRPr lang="en-US" sz="1150" dirty="0"/>
+          </a:p>
+        </p:txBody>
+      </p:sp>
+      <p:sp>
+        <p:nvSpPr>
+          <p:cNvPr id="19" name="Text 14"/>
+          <p:cNvSpPr txBox="1"/>
+          <p:nvPr/>
+        </p:nvSpPr>
+        <p:spPr>
+          <a:xfrm>
+            <a:off x="502920" y="6382512"/>
+            <a:ext cx="8229600" cy="274320"/>
+          </a:xfrm>
+          <a:prstGeom prst="rect">
+            <a:avLst/>
+          </a:prstGeom>
+          <a:noFill/>
+          <a:ln/>
+        </p:spPr>
+        <p:txBody>
+          <a:bodyPr wrap="square" lIns="0" tIns="0" rIns="0" bIns="0" rtlCol="0" anchor="ctr"/>
+          <a:lstStyle/>
+          <a:p>
+            <a:pPr algn="l" indent="0" marL="0">
+              <a:buNone/>
+            </a:pPr>
+            <a:r>
+              <a:rPr lang="en-US" sz="950" dirty="0">
+                <a:solidFill>
+                  <a:srgbClr val="7C6B73">
+                    <a:alpha val="80000"/>
+                  </a:srgbClr>
+                </a:solidFill>
+                <a:latin typeface="Calibri" pitchFamily="34" charset="0"/>
+                <a:ea typeface="Calibri" pitchFamily="34" charset="-122"/>
+                <a:cs typeface="Calibri" pitchFamily="34" charset="-120"/>
+              </a:rPr>
+              <a:t>Green Solutions · Estudio de mercado España</a:t>
+            </a:r>
+            <a:endParaRPr lang="en-US" sz="950" dirty="0"/>
+          </a:p>
+        </p:txBody>
+      </p:sp>
+      <p:sp>
+        <p:nvSpPr>
+          <p:cNvPr id="20" name="Text 15"/>
+          <p:cNvSpPr txBox="1"/>
+          <p:nvPr/>
+        </p:nvSpPr>
+        <p:spPr>
+          <a:xfrm>
+            <a:off x="11140135" y="6382512"/>
+            <a:ext cx="548640" cy="274320"/>
+          </a:xfrm>
+          <a:prstGeom prst="rect">
+            <a:avLst/>
+          </a:prstGeom>
+          <a:noFill/>
+          <a:ln/>
+        </p:spPr>
+        <p:txBody>
+          <a:bodyPr wrap="square" lIns="0" tIns="0" rIns="0" bIns="0" rtlCol="0" anchor="ctr"/>
+          <a:lstStyle/>
+          <a:p>
+            <a:pPr algn="r" indent="0" marL="0">
+              <a:buNone/>
+            </a:pPr>
+            <a:r>
+              <a:rPr lang="en-US" sz="950" dirty="0">
+                <a:solidFill>
+                  <a:srgbClr val="7C6B73">
+                    <a:alpha val="80000"/>
+                  </a:srgbClr>
+                </a:solidFill>
+                <a:latin typeface="Calibri" pitchFamily="34" charset="0"/>
+                <a:ea typeface="Calibri" pitchFamily="34" charset="-122"/>
+                <a:cs typeface="Calibri" pitchFamily="34" charset="-120"/>
+              </a:rPr>
+              <a:t>12</a:t>
+            </a:r>
+            <a:endParaRPr lang="en-US" sz="950" dirty="0"/>
+          </a:p>
+        </p:txBody>
+      </p:sp>
+    </p:spTree>
+  </p:cSld>
+  <p:clrMapOvr>
+    <a:masterClrMapping/>
+  </p:clrMapOvr>
+</p:sld>
+</file>
+
+<file path=ppt/slides/slide14.xml><?xml version="1.0" encoding="utf-8"?>
+<p:sld xmlns:a="http://schemas.openxmlformats.org/drawingml/2006/main" xmlns:r="http://schemas.openxmlformats.org/officeDocument/2006/relationships" xmlns:p="http://schemas.openxmlformats.org/presentationml/2006/main">
+  <p:cSld name="Slide 14">
+    <p:bg>
+      <p:bgPr>
+        <a:solidFill>
+          <a:srgbClr val="FCFAFA"/>
+        </a:solidFill>
+      </p:bgPr>
+    </p:bg>
+    <p:spTree>
+      <p:nvGrpSpPr>
+        <p:cNvPr id="1" name=""/>
+        <p:cNvGrpSpPr/>
+        <p:nvPr/>
+      </p:nvGrpSpPr>
+      <p:grpSpPr>
+        <a:xfrm>
+          <a:off x="0" y="0"/>
+          <a:ext cx="0" cy="0"/>
+          <a:chOff x="0" y="0"/>
+          <a:chExt cx="0" cy="0"/>
+        </a:xfrm>
+      </p:grpSpPr>
+      <p:sp>
+        <p:nvSpPr>
+          <p:cNvPr id="2" name="Text 0"/>
+          <p:cNvSpPr txBox="1"/>
+          <p:nvPr/>
+        </p:nvSpPr>
+        <p:spPr>
+          <a:xfrm>
+            <a:off x="594360" y="411480"/>
+            <a:ext cx="10515600" cy="274320"/>
+          </a:xfrm>
+          <a:prstGeom prst="rect">
+            <a:avLst/>
+          </a:prstGeom>
+          <a:noFill/>
+          <a:ln/>
+        </p:spPr>
+        <p:txBody>
+          <a:bodyPr wrap="square" lIns="0" tIns="0" rIns="0" bIns="0" rtlCol="0" anchor="ctr"/>
+          <a:lstStyle/>
+          <a:p>
+            <a:pPr algn="l" indent="0" marL="0">
+              <a:buNone/>
+            </a:pPr>
+            <a:r>
+              <a:rPr lang="en-US" sz="1150" b="1" spc="200" kern="0" dirty="0">
+                <a:solidFill>
+                  <a:srgbClr val="C9A227"/>
+                </a:solidFill>
+                <a:latin typeface="Calibri" pitchFamily="34" charset="0"/>
+                <a:ea typeface="Calibri" pitchFamily="34" charset="-122"/>
+                <a:cs typeface="Calibri" pitchFamily="34" charset="-120"/>
+              </a:rPr>
+              <a:t>CÓMO TRABAJAMOS</a:t>
+            </a:r>
+            <a:endParaRPr lang="en-US" sz="1150" dirty="0"/>
+          </a:p>
+        </p:txBody>
+      </p:sp>
+      <p:sp>
+        <p:nvSpPr>
+          <p:cNvPr id="3" name="Text 1"/>
+          <p:cNvSpPr txBox="1"/>
+          <p:nvPr/>
+        </p:nvSpPr>
+        <p:spPr>
+          <a:xfrm>
+            <a:off x="594360" y="731520"/>
+            <a:ext cx="10881360" cy="731520"/>
+          </a:xfrm>
+          <a:prstGeom prst="rect">
+            <a:avLst/>
+          </a:prstGeom>
+          <a:noFill/>
+          <a:ln/>
+        </p:spPr>
+        <p:txBody>
+          <a:bodyPr wrap="square" lIns="0" tIns="0" rIns="0" bIns="0" rtlCol="0" anchor="ctr"/>
+          <a:lstStyle/>
+          <a:p>
+            <a:pPr algn="l" indent="0" marL="0">
+              <a:buNone/>
+            </a:pPr>
+            <a:r>
+              <a:rPr lang="en-US" sz="3000" b="1" dirty="0">
+                <a:solidFill>
+                  <a:srgbClr val="3F162A"/>
+                </a:solidFill>
+                <a:latin typeface="Cambria" pitchFamily="34" charset="0"/>
+                <a:ea typeface="Cambria" pitchFamily="34" charset="-122"/>
+                <a:cs typeface="Cambria" pitchFamily="34" charset="-120"/>
+              </a:rPr>
+              <a:t>Un despliegue por etapas, medido en cada paso</a:t>
+            </a:r>
+            <a:endParaRPr lang="en-US" sz="3000" dirty="0"/>
+          </a:p>
+        </p:txBody>
+      </p:sp>
+      <p:sp>
+        <p:nvSpPr>
+          <p:cNvPr id="4" name="Shape 2"/>
+          <p:cNvSpPr/>
+          <p:nvPr/>
+        </p:nvSpPr>
+        <p:spPr>
+          <a:xfrm>
+            <a:off x="594360" y="1874520"/>
+            <a:ext cx="2545004" cy="2834640"/>
+          </a:xfrm>
+          <a:prstGeom prst="roundRect">
+            <a:avLst>
+              <a:gd name="adj" fmla="val 3593"/>
+            </a:avLst>
+          </a:prstGeom>
+          <a:solidFill>
+            <a:srgbClr val="F5EFF1"/>
+          </a:solidFill>
+          <a:ln w="9525">
+            <a:solidFill>
+              <a:srgbClr val="E5D9DE"/>
+            </a:solidFill>
+            <a:prstDash val="solid"/>
+          </a:ln>
+        </p:spPr>
+      </p:sp>
+      <p:sp>
+        <p:nvSpPr>
+          <p:cNvPr id="5" name="Shape 3"/>
+          <p:cNvSpPr/>
+          <p:nvPr/>
+        </p:nvSpPr>
+        <p:spPr>
+          <a:xfrm>
+            <a:off x="822960" y="2103120"/>
+            <a:ext cx="566928" cy="566928"/>
+          </a:xfrm>
+          <a:prstGeom prst="ellipse">
+            <a:avLst/>
+          </a:prstGeom>
+          <a:solidFill>
+            <a:srgbClr val="6B2A44"/>
+          </a:solidFill>
+          <a:ln/>
+        </p:spPr>
+      </p:sp>
+      <p:sp>
+        <p:nvSpPr>
+          <p:cNvPr id="6" name="Text 4"/>
+          <p:cNvSpPr txBox="1"/>
+          <p:nvPr/>
+        </p:nvSpPr>
+        <p:spPr>
+          <a:xfrm>
+            <a:off x="822960" y="2103120"/>
+            <a:ext cx="566928" cy="566928"/>
+          </a:xfrm>
+          <a:prstGeom prst="rect">
+            <a:avLst/>
+          </a:prstGeom>
+          <a:noFill/>
+          <a:ln/>
+        </p:spPr>
+        <p:txBody>
+          <a:bodyPr wrap="square" lIns="0" tIns="0" rIns="0" bIns="0" rtlCol="0" anchor="ctr"/>
+          <a:lstStyle/>
+          <a:p>
+            <a:pPr algn="ctr" indent="0" marL="0">
+              <a:buNone/>
+            </a:pPr>
+            <a:r>
+              <a:rPr lang="en-US" sz="1600" b="1" dirty="0">
+                <a:solidFill>
+                  <a:srgbClr val="FFFFFF"/>
+                </a:solidFill>
+                <a:latin typeface="Cambria" pitchFamily="34" charset="0"/>
+                <a:ea typeface="Cambria" pitchFamily="34" charset="-122"/>
+                <a:cs typeface="Cambria" pitchFamily="34" charset="-120"/>
+              </a:rPr>
+              <a:t>1</a:t>
+            </a:r>
+            <a:endParaRPr lang="en-US" sz="1600" dirty="0"/>
+          </a:p>
+        </p:txBody>
+      </p:sp>
+      <p:sp>
+        <p:nvSpPr>
+          <p:cNvPr id="7" name="Text 5"/>
+          <p:cNvSpPr txBox="1"/>
+          <p:nvPr/>
+        </p:nvSpPr>
+        <p:spPr>
+          <a:xfrm>
+            <a:off x="822960" y="2788920"/>
+            <a:ext cx="2087804" cy="457200"/>
+          </a:xfrm>
+          <a:prstGeom prst="rect">
+            <a:avLst/>
+          </a:prstGeom>
+          <a:noFill/>
+          <a:ln/>
+        </p:spPr>
+        <p:txBody>
+          <a:bodyPr wrap="square" lIns="0" tIns="0" rIns="0" bIns="0" rtlCol="0" anchor="ctr"/>
+          <a:lstStyle/>
+          <a:p>
+            <a:pPr algn="l" indent="0" marL="0">
+              <a:buNone/>
+            </a:pPr>
+            <a:r>
+              <a:rPr lang="en-US" sz="1400" b="1" dirty="0">
+                <a:solidFill>
+                  <a:srgbClr val="6B2A44"/>
+                </a:solidFill>
+                <a:latin typeface="Cambria" pitchFamily="34" charset="0"/>
+                <a:ea typeface="Cambria" pitchFamily="34" charset="-122"/>
+                <a:cs typeface="Cambria" pitchFamily="34" charset="-120"/>
+              </a:rPr>
+              <a:t>Diagnóstico</a:t>
+            </a:r>
+            <a:endParaRPr lang="en-US" sz="1400" dirty="0"/>
+          </a:p>
+        </p:txBody>
+      </p:sp>
+      <p:sp>
+        <p:nvSpPr>
+          <p:cNvPr id="8" name="Text 6"/>
+          <p:cNvSpPr txBox="1"/>
+          <p:nvPr/>
+        </p:nvSpPr>
+        <p:spPr>
+          <a:xfrm>
+            <a:off x="822960" y="3291840"/>
+            <a:ext cx="2087804" cy="1234440"/>
+          </a:xfrm>
+          <a:prstGeom prst="rect">
+            <a:avLst/>
+          </a:prstGeom>
+          <a:noFill/>
+          <a:ln/>
+        </p:spPr>
+        <p:txBody>
+          <a:bodyPr wrap="square" lIns="0" tIns="0" rIns="0" bIns="0" rtlCol="0" anchor="t"/>
+          <a:lstStyle/>
+          <a:p>
+            <a:pPr algn="l" indent="0" marL="0">
+              <a:lnSpc>
+                <a:spcPct val="120000"/>
+              </a:lnSpc>
+              <a:buNone/>
+            </a:pPr>
+            <a:r>
+              <a:rPr lang="en-US" sz="1200" dirty="0">
+                <a:solidFill>
+                  <a:srgbClr val="3F3138"/>
+                </a:solidFill>
+                <a:latin typeface="Calibri" pitchFamily="34" charset="0"/>
+                <a:ea typeface="Calibri" pitchFamily="34" charset="-122"/>
+                <a:cs typeface="Calibri" pitchFamily="34" charset="-120"/>
+              </a:rPr>
+              <a:t>Análisis del suelo, del método de riego y del cultivo. Sin compromiso en esta etapa.</a:t>
+            </a:r>
+            <a:endParaRPr lang="en-US" sz="1200" dirty="0"/>
+          </a:p>
+        </p:txBody>
+      </p:sp>
+      <p:sp>
+        <p:nvSpPr>
+          <p:cNvPr id="9" name="Shape 7"/>
+          <p:cNvSpPr/>
+          <p:nvPr/>
+        </p:nvSpPr>
+        <p:spPr>
+          <a:xfrm>
+            <a:off x="3413684" y="1874520"/>
+            <a:ext cx="2545004" cy="2834640"/>
+          </a:xfrm>
+          <a:prstGeom prst="roundRect">
+            <a:avLst>
+              <a:gd name="adj" fmla="val 3593"/>
+            </a:avLst>
+          </a:prstGeom>
+          <a:solidFill>
+            <a:srgbClr val="F5EFF1"/>
+          </a:solidFill>
+          <a:ln w="9525">
+            <a:solidFill>
+              <a:srgbClr val="E5D9DE"/>
+            </a:solidFill>
+            <a:prstDash val="solid"/>
+          </a:ln>
+        </p:spPr>
+      </p:sp>
+      <p:sp>
+        <p:nvSpPr>
+          <p:cNvPr id="10" name="Shape 8"/>
+          <p:cNvSpPr/>
+          <p:nvPr/>
+        </p:nvSpPr>
+        <p:spPr>
+          <a:xfrm>
+            <a:off x="3642284" y="2103120"/>
+            <a:ext cx="566928" cy="566928"/>
+          </a:xfrm>
+          <a:prstGeom prst="ellipse">
+            <a:avLst/>
+          </a:prstGeom>
+          <a:solidFill>
+            <a:srgbClr val="6B2A44"/>
+          </a:solidFill>
+          <a:ln/>
+        </p:spPr>
+      </p:sp>
+      <p:sp>
+        <p:nvSpPr>
+          <p:cNvPr id="11" name="Text 9"/>
+          <p:cNvSpPr txBox="1"/>
+          <p:nvPr/>
+        </p:nvSpPr>
+        <p:spPr>
+          <a:xfrm>
+            <a:off x="3642284" y="2103120"/>
+            <a:ext cx="566928" cy="566928"/>
+          </a:xfrm>
+          <a:prstGeom prst="rect">
+            <a:avLst/>
+          </a:prstGeom>
+          <a:noFill/>
+          <a:ln/>
+        </p:spPr>
+        <p:txBody>
+          <a:bodyPr wrap="square" lIns="0" tIns="0" rIns="0" bIns="0" rtlCol="0" anchor="ctr"/>
+          <a:lstStyle/>
+          <a:p>
+            <a:pPr algn="ctr" indent="0" marL="0">
+              <a:buNone/>
+            </a:pPr>
+            <a:r>
+              <a:rPr lang="en-US" sz="1600" b="1" dirty="0">
+                <a:solidFill>
+                  <a:srgbClr val="FFFFFF"/>
+                </a:solidFill>
+                <a:latin typeface="Cambria" pitchFamily="34" charset="0"/>
+                <a:ea typeface="Cambria" pitchFamily="34" charset="-122"/>
+                <a:cs typeface="Cambria" pitchFamily="34" charset="-120"/>
+              </a:rPr>
+              <a:t>2</a:t>
+            </a:r>
+            <a:endParaRPr lang="en-US" sz="1600" dirty="0"/>
+          </a:p>
+        </p:txBody>
+      </p:sp>
+      <p:sp>
+        <p:nvSpPr>
+          <p:cNvPr id="12" name="Text 10"/>
+          <p:cNvSpPr txBox="1"/>
+          <p:nvPr/>
+        </p:nvSpPr>
+        <p:spPr>
+          <a:xfrm>
+            <a:off x="3642284" y="2788920"/>
+            <a:ext cx="2087804" cy="457200"/>
+          </a:xfrm>
+          <a:prstGeom prst="rect">
+            <a:avLst/>
+          </a:prstGeom>
+          <a:noFill/>
+          <a:ln/>
+        </p:spPr>
+        <p:txBody>
+          <a:bodyPr wrap="square" lIns="0" tIns="0" rIns="0" bIns="0" rtlCol="0" anchor="ctr"/>
+          <a:lstStyle/>
+          <a:p>
+            <a:pPr algn="l" indent="0" marL="0">
+              <a:buNone/>
+            </a:pPr>
+            <a:r>
+              <a:rPr lang="en-US" sz="1400" b="1" dirty="0">
+                <a:solidFill>
+                  <a:srgbClr val="6B2A44"/>
+                </a:solidFill>
+                <a:latin typeface="Cambria" pitchFamily="34" charset="0"/>
+                <a:ea typeface="Cambria" pitchFamily="34" charset="-122"/>
+                <a:cs typeface="Cambria" pitchFamily="34" charset="-120"/>
+              </a:rPr>
+              <a:t>Parcela piloto</a:t>
+            </a:r>
+            <a:endParaRPr lang="en-US" sz="1400" dirty="0"/>
+          </a:p>
+        </p:txBody>
+      </p:sp>
+      <p:sp>
+        <p:nvSpPr>
+          <p:cNvPr id="13" name="Text 11"/>
+          <p:cNvSpPr txBox="1"/>
+          <p:nvPr/>
+        </p:nvSpPr>
+        <p:spPr>
+          <a:xfrm>
+            <a:off x="3642284" y="3291840"/>
+            <a:ext cx="2087804" cy="1234440"/>
+          </a:xfrm>
+          <a:prstGeom prst="rect">
+            <a:avLst/>
+          </a:prstGeom>
+          <a:noFill/>
+          <a:ln/>
+        </p:spPr>
+        <p:txBody>
+          <a:bodyPr wrap="square" lIns="0" tIns="0" rIns="0" bIns="0" rtlCol="0" anchor="t"/>
+          <a:lstStyle/>
+          <a:p>
+            <a:pPr algn="l" indent="0" marL="0">
+              <a:lnSpc>
+                <a:spcPct val="120000"/>
+              </a:lnSpc>
+              <a:buNone/>
+            </a:pPr>
+            <a:r>
+              <a:rPr lang="en-US" sz="1200" dirty="0">
+                <a:solidFill>
+                  <a:srgbClr val="3F3138"/>
+                </a:solidFill>
+                <a:latin typeface="Calibri" pitchFamily="34" charset="0"/>
+                <a:ea typeface="Calibri" pitchFamily="34" charset="-122"/>
+                <a:cs typeface="Calibri" pitchFamily="34" charset="-120"/>
+              </a:rPr>
+              <a:t>Un ensayo comparativo en una parcela, con parcela testigo conducida de forma idéntica.</a:t>
+            </a:r>
+            <a:endParaRPr lang="en-US" sz="1200" dirty="0"/>
+          </a:p>
+        </p:txBody>
+      </p:sp>
+      <p:sp>
+        <p:nvSpPr>
+          <p:cNvPr id="14" name="Shape 12"/>
+          <p:cNvSpPr/>
+          <p:nvPr/>
+        </p:nvSpPr>
+        <p:spPr>
+          <a:xfrm>
+            <a:off x="6233008" y="1874520"/>
+            <a:ext cx="2545004" cy="2834640"/>
+          </a:xfrm>
+          <a:prstGeom prst="roundRect">
+            <a:avLst>
+              <a:gd name="adj" fmla="val 3593"/>
+            </a:avLst>
+          </a:prstGeom>
+          <a:solidFill>
+            <a:srgbClr val="F5EFF1"/>
+          </a:solidFill>
+          <a:ln w="9525">
+            <a:solidFill>
+              <a:srgbClr val="E5D9DE"/>
+            </a:solidFill>
+            <a:prstDash val="solid"/>
+          </a:ln>
+        </p:spPr>
+      </p:sp>
+      <p:sp>
+        <p:nvSpPr>
+          <p:cNvPr id="15" name="Shape 13"/>
+          <p:cNvSpPr/>
+          <p:nvPr/>
+        </p:nvSpPr>
+        <p:spPr>
+          <a:xfrm>
+            <a:off x="6461608" y="2103120"/>
+            <a:ext cx="566928" cy="566928"/>
+          </a:xfrm>
+          <a:prstGeom prst="ellipse">
+            <a:avLst/>
+          </a:prstGeom>
+          <a:solidFill>
+            <a:srgbClr val="6B2A44"/>
+          </a:solidFill>
+          <a:ln/>
+        </p:spPr>
+      </p:sp>
+      <p:sp>
+        <p:nvSpPr>
+          <p:cNvPr id="16" name="Text 14"/>
+          <p:cNvSpPr txBox="1"/>
+          <p:nvPr/>
+        </p:nvSpPr>
+        <p:spPr>
+          <a:xfrm>
+            <a:off x="6461608" y="2103120"/>
+            <a:ext cx="566928" cy="566928"/>
+          </a:xfrm>
+          <a:prstGeom prst="rect">
+            <a:avLst/>
+          </a:prstGeom>
+          <a:noFill/>
+          <a:ln/>
+        </p:spPr>
+        <p:txBody>
+          <a:bodyPr wrap="square" lIns="0" tIns="0" rIns="0" bIns="0" rtlCol="0" anchor="ctr"/>
+          <a:lstStyle/>
+          <a:p>
+            <a:pPr algn="ctr" indent="0" marL="0">
+              <a:buNone/>
+            </a:pPr>
+            <a:r>
+              <a:rPr lang="en-US" sz="1600" b="1" dirty="0">
+                <a:solidFill>
+                  <a:srgbClr val="FFFFFF"/>
+                </a:solidFill>
+                <a:latin typeface="Cambria" pitchFamily="34" charset="0"/>
+                <a:ea typeface="Cambria" pitchFamily="34" charset="-122"/>
+                <a:cs typeface="Cambria" pitchFamily="34" charset="-120"/>
+              </a:rPr>
+              <a:t>3</a:t>
+            </a:r>
+            <a:endParaRPr lang="en-US" sz="1600" dirty="0"/>
+          </a:p>
+        </p:txBody>
+      </p:sp>
+      <p:sp>
+        <p:nvSpPr>
+          <p:cNvPr id="17" name="Text 15"/>
+          <p:cNvSpPr txBox="1"/>
+          <p:nvPr/>
+        </p:nvSpPr>
+        <p:spPr>
+          <a:xfrm>
+            <a:off x="6461608" y="2788920"/>
+            <a:ext cx="2087804" cy="457200"/>
+          </a:xfrm>
+          <a:prstGeom prst="rect">
+            <a:avLst/>
+          </a:prstGeom>
+          <a:noFill/>
+          <a:ln/>
+        </p:spPr>
+        <p:txBody>
+          <a:bodyPr wrap="square" lIns="0" tIns="0" rIns="0" bIns="0" rtlCol="0" anchor="ctr"/>
+          <a:lstStyle/>
+          <a:p>
+            <a:pPr algn="l" indent="0" marL="0">
+              <a:buNone/>
+            </a:pPr>
+            <a:r>
+              <a:rPr lang="en-US" sz="1400" b="1" dirty="0">
+                <a:solidFill>
+                  <a:srgbClr val="6B2A44"/>
+                </a:solidFill>
+                <a:latin typeface="Cambria" pitchFamily="34" charset="0"/>
+                <a:ea typeface="Cambria" pitchFamily="34" charset="-122"/>
+                <a:cs typeface="Cambria" pitchFamily="34" charset="-120"/>
+              </a:rPr>
+              <a:t>Medición</a:t>
+            </a:r>
+            <a:endParaRPr lang="en-US" sz="1400" dirty="0"/>
+          </a:p>
+        </p:txBody>
+      </p:sp>
+      <p:sp>
+        <p:nvSpPr>
+          <p:cNvPr id="18" name="Text 16"/>
+          <p:cNvSpPr txBox="1"/>
+          <p:nvPr/>
+        </p:nvSpPr>
+        <p:spPr>
+          <a:xfrm>
+            <a:off x="6461608" y="3291840"/>
+            <a:ext cx="2087804" cy="1234440"/>
+          </a:xfrm>
+          <a:prstGeom prst="rect">
+            <a:avLst/>
+          </a:prstGeom>
+          <a:noFill/>
+          <a:ln/>
+        </p:spPr>
+        <p:txBody>
+          <a:bodyPr wrap="square" lIns="0" tIns="0" rIns="0" bIns="0" rtlCol="0" anchor="t"/>
+          <a:lstStyle/>
+          <a:p>
+            <a:pPr algn="l" indent="0" marL="0">
+              <a:lnSpc>
+                <a:spcPct val="120000"/>
+              </a:lnSpc>
+              <a:buNone/>
+            </a:pPr>
+            <a:r>
+              <a:rPr lang="en-US" sz="1200" dirty="0">
+                <a:solidFill>
+                  <a:srgbClr val="3F3138"/>
+                </a:solidFill>
+                <a:latin typeface="Calibri" pitchFamily="34" charset="0"/>
+                <a:ea typeface="Calibri" pitchFamily="34" charset="-122"/>
+                <a:cs typeface="Calibri" pitchFamily="34" charset="-120"/>
+              </a:rPr>
+              <a:t>Registro de consumo de agua y de rendimiento durante un ciclo de cultivo completo.</a:t>
+            </a:r>
+            <a:endParaRPr lang="en-US" sz="1200" dirty="0"/>
+          </a:p>
+        </p:txBody>
+      </p:sp>
+      <p:sp>
+        <p:nvSpPr>
+          <p:cNvPr id="19" name="Shape 17"/>
+          <p:cNvSpPr/>
+          <p:nvPr/>
+        </p:nvSpPr>
+        <p:spPr>
+          <a:xfrm>
+            <a:off x="9052331" y="1874520"/>
+            <a:ext cx="2545004" cy="2834640"/>
+          </a:xfrm>
+          <a:prstGeom prst="roundRect">
+            <a:avLst>
+              <a:gd name="adj" fmla="val 3593"/>
+            </a:avLst>
+          </a:prstGeom>
+          <a:solidFill>
+            <a:srgbClr val="F5EFF1"/>
+          </a:solidFill>
+          <a:ln w="9525">
+            <a:solidFill>
+              <a:srgbClr val="E5D9DE"/>
+            </a:solidFill>
+            <a:prstDash val="solid"/>
+          </a:ln>
+        </p:spPr>
+      </p:sp>
+      <p:sp>
+        <p:nvSpPr>
+          <p:cNvPr id="20" name="Shape 18"/>
+          <p:cNvSpPr/>
+          <p:nvPr/>
+        </p:nvSpPr>
+        <p:spPr>
+          <a:xfrm>
+            <a:off x="9280931" y="2103120"/>
+            <a:ext cx="566928" cy="566928"/>
+          </a:xfrm>
+          <a:prstGeom prst="ellipse">
+            <a:avLst/>
+          </a:prstGeom>
+          <a:solidFill>
+            <a:srgbClr val="6B2A44"/>
+          </a:solidFill>
+          <a:ln/>
+        </p:spPr>
+      </p:sp>
+      <p:sp>
+        <p:nvSpPr>
+          <p:cNvPr id="21" name="Text 19"/>
+          <p:cNvSpPr txBox="1"/>
+          <p:nvPr/>
+        </p:nvSpPr>
+        <p:spPr>
+          <a:xfrm>
+            <a:off x="9280931" y="2103120"/>
+            <a:ext cx="566928" cy="566928"/>
+          </a:xfrm>
+          <a:prstGeom prst="rect">
+            <a:avLst/>
+          </a:prstGeom>
+          <a:noFill/>
+          <a:ln/>
+        </p:spPr>
+        <p:txBody>
+          <a:bodyPr wrap="square" lIns="0" tIns="0" rIns="0" bIns="0" rtlCol="0" anchor="ctr"/>
+          <a:lstStyle/>
+          <a:p>
+            <a:pPr algn="ctr" indent="0" marL="0">
+              <a:buNone/>
+            </a:pPr>
+            <a:r>
+              <a:rPr lang="en-US" sz="1600" b="1" dirty="0">
+                <a:solidFill>
+                  <a:srgbClr val="FFFFFF"/>
+                </a:solidFill>
+                <a:latin typeface="Cambria" pitchFamily="34" charset="0"/>
+                <a:ea typeface="Cambria" pitchFamily="34" charset="-122"/>
+                <a:cs typeface="Cambria" pitchFamily="34" charset="-120"/>
+              </a:rPr>
+              <a:t>4</a:t>
+            </a:r>
+            <a:endParaRPr lang="en-US" sz="1600" dirty="0"/>
+          </a:p>
+        </p:txBody>
+      </p:sp>
+      <p:sp>
+        <p:nvSpPr>
+          <p:cNvPr id="22" name="Text 20"/>
+          <p:cNvSpPr txBox="1"/>
+          <p:nvPr/>
+        </p:nvSpPr>
+        <p:spPr>
+          <a:xfrm>
+            <a:off x="9280931" y="2788920"/>
+            <a:ext cx="2087804" cy="457200"/>
+          </a:xfrm>
+          <a:prstGeom prst="rect">
+            <a:avLst/>
+          </a:prstGeom>
+          <a:noFill/>
+          <a:ln/>
+        </p:spPr>
+        <p:txBody>
+          <a:bodyPr wrap="square" lIns="0" tIns="0" rIns="0" bIns="0" rtlCol="0" anchor="ctr"/>
+          <a:lstStyle/>
+          <a:p>
+            <a:pPr algn="l" indent="0" marL="0">
+              <a:buNone/>
+            </a:pPr>
+            <a:r>
+              <a:rPr lang="en-US" sz="1400" b="1" dirty="0">
+                <a:solidFill>
+                  <a:srgbClr val="6B2A44"/>
+                </a:solidFill>
+                <a:latin typeface="Cambria" pitchFamily="34" charset="0"/>
+                <a:ea typeface="Cambria" pitchFamily="34" charset="-122"/>
+                <a:cs typeface="Cambria" pitchFamily="34" charset="-120"/>
+              </a:rPr>
+              <a:t>Extensión</a:t>
+            </a:r>
+            <a:endParaRPr lang="en-US" sz="1400" dirty="0"/>
+          </a:p>
+        </p:txBody>
+      </p:sp>
+      <p:sp>
+        <p:nvSpPr>
+          <p:cNvPr id="23" name="Text 21"/>
+          <p:cNvSpPr txBox="1"/>
+          <p:nvPr/>
+        </p:nvSpPr>
+        <p:spPr>
+          <a:xfrm>
+            <a:off x="9280931" y="3291840"/>
+            <a:ext cx="2087804" cy="1234440"/>
+          </a:xfrm>
+          <a:prstGeom prst="rect">
+            <a:avLst/>
+          </a:prstGeom>
+          <a:noFill/>
+          <a:ln/>
+        </p:spPr>
+        <p:txBody>
+          <a:bodyPr wrap="square" lIns="0" tIns="0" rIns="0" bIns="0" rtlCol="0" anchor="t"/>
+          <a:lstStyle/>
+          <a:p>
+            <a:pPr algn="l" indent="0" marL="0">
+              <a:lnSpc>
+                <a:spcPct val="120000"/>
+              </a:lnSpc>
+              <a:buNone/>
+            </a:pPr>
+            <a:r>
+              <a:rPr lang="en-US" sz="1200" dirty="0">
+                <a:solidFill>
+                  <a:srgbClr val="3F3138"/>
+                </a:solidFill>
+                <a:latin typeface="Calibri" pitchFamily="34" charset="0"/>
+                <a:ea typeface="Calibri" pitchFamily="34" charset="-122"/>
+                <a:cs typeface="Calibri" pitchFamily="34" charset="-120"/>
+              </a:rPr>
+              <a:t>Ampliación gradual a las demás parcelas sobre la base de los resultados constatados.</a:t>
+            </a:r>
+            <a:endParaRPr lang="en-US" sz="1200" dirty="0"/>
+          </a:p>
+        </p:txBody>
+      </p:sp>
+      <p:sp>
+        <p:nvSpPr>
+          <p:cNvPr id="24" name="Text 22"/>
+          <p:cNvSpPr txBox="1"/>
+          <p:nvPr/>
+        </p:nvSpPr>
+        <p:spPr>
+          <a:xfrm>
+            <a:off x="594360" y="4983480"/>
+            <a:ext cx="11002975" cy="822960"/>
+          </a:xfrm>
+          <a:prstGeom prst="rect">
+            <a:avLst/>
+          </a:prstGeom>
+          <a:noFill/>
+          <a:ln/>
+        </p:spPr>
+        <p:txBody>
+          <a:bodyPr wrap="square" lIns="0" tIns="0" rIns="0" bIns="0" rtlCol="0" anchor="t"/>
+          <a:lstStyle/>
+          <a:p>
+            <a:pPr algn="l" indent="0" marL="0">
+              <a:lnSpc>
+                <a:spcPct val="125000"/>
+              </a:lnSpc>
+              <a:buNone/>
+            </a:pPr>
+            <a:r>
+              <a:rPr lang="en-US" sz="1250" i="1" dirty="0">
+                <a:solidFill>
+                  <a:srgbClr val="7C6B73"/>
+                </a:solidFill>
+                <a:latin typeface="Calibri" pitchFamily="34" charset="0"/>
+                <a:ea typeface="Calibri" pitchFamily="34" charset="-122"/>
+                <a:cs typeface="Calibri" pitchFamily="34" charset="-120"/>
+              </a:rPr>
+              <a:t>La regla de dosificación es la misma en todas partes: 3 gramos por litro de tierra útil. Lo que cambia de una finca a otra es el volumen de suelo que las raíces exploran realmente.</a:t>
+            </a:r>
+            <a:endParaRPr lang="en-US" sz="1250" dirty="0"/>
+          </a:p>
+        </p:txBody>
+      </p:sp>
+      <p:sp>
+        <p:nvSpPr>
+          <p:cNvPr id="25" name="Text 23"/>
+          <p:cNvSpPr txBox="1"/>
+          <p:nvPr/>
+        </p:nvSpPr>
+        <p:spPr>
+          <a:xfrm>
+            <a:off x="502920" y="6382512"/>
+            <a:ext cx="8229600" cy="274320"/>
+          </a:xfrm>
+          <a:prstGeom prst="rect">
+            <a:avLst/>
+          </a:prstGeom>
+          <a:noFill/>
+          <a:ln/>
+        </p:spPr>
+        <p:txBody>
+          <a:bodyPr wrap="square" lIns="0" tIns="0" rIns="0" bIns="0" rtlCol="0" anchor="ctr"/>
+          <a:lstStyle/>
+          <a:p>
+            <a:pPr algn="l" indent="0" marL="0">
+              <a:buNone/>
+            </a:pPr>
+            <a:r>
+              <a:rPr lang="en-US" sz="950" dirty="0">
+                <a:solidFill>
+                  <a:srgbClr val="7C6B73">
+                    <a:alpha val="80000"/>
+                  </a:srgbClr>
+                </a:solidFill>
+                <a:latin typeface="Calibri" pitchFamily="34" charset="0"/>
+                <a:ea typeface="Calibri" pitchFamily="34" charset="-122"/>
+                <a:cs typeface="Calibri" pitchFamily="34" charset="-120"/>
+              </a:rPr>
+              <a:t>Green Solutions · Estudio de mercado España</a:t>
+            </a:r>
+            <a:endParaRPr lang="en-US" sz="950" dirty="0"/>
+          </a:p>
+        </p:txBody>
+      </p:sp>
+      <p:sp>
+        <p:nvSpPr>
+          <p:cNvPr id="26" name="Text 24"/>
+          <p:cNvSpPr txBox="1"/>
+          <p:nvPr/>
+        </p:nvSpPr>
+        <p:spPr>
+          <a:xfrm>
+            <a:off x="11140135" y="6382512"/>
+            <a:ext cx="548640" cy="274320"/>
+          </a:xfrm>
+          <a:prstGeom prst="rect">
+            <a:avLst/>
+          </a:prstGeom>
+          <a:noFill/>
+          <a:ln/>
+        </p:spPr>
+        <p:txBody>
+          <a:bodyPr wrap="square" lIns="0" tIns="0" rIns="0" bIns="0" rtlCol="0" anchor="ctr"/>
+          <a:lstStyle/>
+          <a:p>
+            <a:pPr algn="r" indent="0" marL="0">
+              <a:buNone/>
+            </a:pPr>
+            <a:r>
+              <a:rPr lang="en-US" sz="950" dirty="0">
+                <a:solidFill>
+                  <a:srgbClr val="7C6B73">
+                    <a:alpha val="80000"/>
+                  </a:srgbClr>
+                </a:solidFill>
+                <a:latin typeface="Calibri" pitchFamily="34" charset="0"/>
+                <a:ea typeface="Calibri" pitchFamily="34" charset="-122"/>
+                <a:cs typeface="Calibri" pitchFamily="34" charset="-120"/>
+              </a:rPr>
+              <a:t>13</a:t>
+            </a:r>
+            <a:endParaRPr lang="en-US" sz="950" dirty="0"/>
+          </a:p>
+        </p:txBody>
+      </p:sp>
+    </p:spTree>
+  </p:cSld>
+  <p:clrMapOvr>
+    <a:masterClrMapping/>
+  </p:clrMapOvr>
+</p:sld>
+</file>
+
+<file path=ppt/slides/slide15.xml><?xml version="1.0" encoding="utf-8"?>
+<p:sld xmlns:a="http://schemas.openxmlformats.org/drawingml/2006/main" xmlns:r="http://schemas.openxmlformats.org/officeDocument/2006/relationships" xmlns:p="http://schemas.openxmlformats.org/presentationml/2006/main">
+  <p:cSld name="Slide 15">
+    <p:bg>
+      <p:bgPr>
+        <a:solidFill>
+          <a:srgbClr val="FCFAFA"/>
+        </a:solidFill>
+      </p:bgPr>
+    </p:bg>
+    <p:spTree>
+      <p:nvGrpSpPr>
+        <p:cNvPr id="1" name=""/>
+        <p:cNvGrpSpPr/>
+        <p:nvPr/>
+      </p:nvGrpSpPr>
+      <p:grpSpPr>
+        <a:xfrm>
+          <a:off x="0" y="0"/>
+          <a:ext cx="0" cy="0"/>
+          <a:chOff x="0" y="0"/>
+          <a:chExt cx="0" cy="0"/>
+        </a:xfrm>
+      </p:grpSpPr>
+      <p:sp>
+        <p:nvSpPr>
+          <p:cNvPr id="2" name="Text 0"/>
+          <p:cNvSpPr txBox="1"/>
+          <p:nvPr/>
+        </p:nvSpPr>
+        <p:spPr>
+          <a:xfrm>
+            <a:off x="594360" y="411480"/>
+            <a:ext cx="10515600" cy="274320"/>
+          </a:xfrm>
+          <a:prstGeom prst="rect">
+            <a:avLst/>
+          </a:prstGeom>
+          <a:noFill/>
+          <a:ln/>
+        </p:spPr>
+        <p:txBody>
+          <a:bodyPr wrap="square" lIns="0" tIns="0" rIns="0" bIns="0" rtlCol="0" anchor="ctr"/>
+          <a:lstStyle/>
+          <a:p>
+            <a:pPr algn="l" indent="0" marL="0">
+              <a:buNone/>
+            </a:pPr>
+            <a:r>
+              <a:rPr lang="en-US" sz="1150" b="1" spc="200" kern="0" dirty="0">
+                <a:solidFill>
+                  <a:srgbClr val="C9A227"/>
+                </a:solidFill>
+                <a:latin typeface="Calibri" pitchFamily="34" charset="0"/>
+                <a:ea typeface="Calibri" pitchFamily="34" charset="-122"/>
+                <a:cs typeface="Calibri" pitchFamily="34" charset="-120"/>
+              </a:rPr>
+              <a:t>Trabajar juntos</a:t>
+            </a:r>
+            <a:endParaRPr lang="en-US" sz="1150" dirty="0"/>
+          </a:p>
+        </p:txBody>
+      </p:sp>
+      <p:sp>
+        <p:nvSpPr>
+          <p:cNvPr id="3" name="Text 1"/>
+          <p:cNvSpPr txBox="1"/>
+          <p:nvPr/>
+        </p:nvSpPr>
+        <p:spPr>
+          <a:xfrm>
+            <a:off x="594360" y="731520"/>
+            <a:ext cx="10881360" cy="731520"/>
+          </a:xfrm>
+          <a:prstGeom prst="rect">
+            <a:avLst/>
+          </a:prstGeom>
+          <a:noFill/>
+          <a:ln/>
+        </p:spPr>
+        <p:txBody>
+          <a:bodyPr wrap="square" lIns="0" tIns="0" rIns="0" bIns="0" rtlCol="0" anchor="ctr"/>
+          <a:lstStyle/>
+          <a:p>
+            <a:pPr algn="l" indent="0" marL="0">
+              <a:buNone/>
+            </a:pPr>
+            <a:r>
+              <a:rPr lang="en-US" sz="3000" b="1" dirty="0">
+                <a:solidFill>
+                  <a:srgbClr val="3F162A"/>
+                </a:solidFill>
+                <a:latin typeface="Cambria" pitchFamily="34" charset="0"/>
+                <a:ea typeface="Cambria" pitchFamily="34" charset="-122"/>
+                <a:cs typeface="Cambria" pitchFamily="34" charset="-120"/>
+              </a:rPr>
+              <a:t>Un socio local para España</a:t>
+            </a:r>
+            <a:endParaRPr lang="en-US" sz="3000" dirty="0"/>
+          </a:p>
+        </p:txBody>
+      </p:sp>
+      <p:sp>
+        <p:nvSpPr>
+          <p:cNvPr id="4" name="Shape 2"/>
+          <p:cNvSpPr/>
+          <p:nvPr/>
+        </p:nvSpPr>
+        <p:spPr>
+          <a:xfrm>
+            <a:off x="594360" y="1874520"/>
+            <a:ext cx="2545004" cy="2834640"/>
+          </a:xfrm>
+          <a:prstGeom prst="roundRect">
+            <a:avLst>
+              <a:gd name="adj" fmla="val 3593"/>
+            </a:avLst>
+          </a:prstGeom>
+          <a:solidFill>
+            <a:srgbClr val="F5EFF1"/>
+          </a:solidFill>
+          <a:ln w="9525">
+            <a:solidFill>
+              <a:srgbClr val="E5D9DE"/>
+            </a:solidFill>
+            <a:prstDash val="solid"/>
+          </a:ln>
+        </p:spPr>
+      </p:sp>
+      <p:sp>
+        <p:nvSpPr>
+          <p:cNvPr id="5" name="Shape 3"/>
+          <p:cNvSpPr/>
+          <p:nvPr/>
+        </p:nvSpPr>
+        <p:spPr>
+          <a:xfrm>
+            <a:off x="822960" y="2103120"/>
+            <a:ext cx="566928" cy="566928"/>
+          </a:xfrm>
+          <a:prstGeom prst="ellipse">
+            <a:avLst/>
+          </a:prstGeom>
+          <a:solidFill>
+            <a:srgbClr val="6B2A44"/>
+          </a:solidFill>
+          <a:ln/>
+        </p:spPr>
+      </p:sp>
+      <p:sp>
+        <p:nvSpPr>
+          <p:cNvPr id="6" name="Text 4"/>
+          <p:cNvSpPr txBox="1"/>
+          <p:nvPr/>
+        </p:nvSpPr>
+        <p:spPr>
+          <a:xfrm>
+            <a:off x="822960" y="2103120"/>
+            <a:ext cx="566928" cy="566928"/>
+          </a:xfrm>
+          <a:prstGeom prst="rect">
+            <a:avLst/>
+          </a:prstGeom>
+          <a:noFill/>
+          <a:ln/>
+        </p:spPr>
+        <p:txBody>
+          <a:bodyPr wrap="square" lIns="0" tIns="0" rIns="0" bIns="0" rtlCol="0" anchor="ctr"/>
+          <a:lstStyle/>
+          <a:p>
+            <a:pPr algn="ctr" indent="0" marL="0">
+              <a:buNone/>
+            </a:pPr>
+            <a:r>
+              <a:rPr lang="en-US" sz="1600" b="1" dirty="0">
+                <a:solidFill>
+                  <a:srgbClr val="FFFFFF"/>
+                </a:solidFill>
+                <a:latin typeface="Cambria" pitchFamily="34" charset="0"/>
+                <a:ea typeface="Cambria" pitchFamily="34" charset="-122"/>
+                <a:cs typeface="Cambria" pitchFamily="34" charset="-120"/>
+              </a:rPr>
+              <a:t>1</a:t>
+            </a:r>
+            <a:endParaRPr lang="en-US" sz="1600" dirty="0"/>
+          </a:p>
+        </p:txBody>
+      </p:sp>
+      <p:sp>
+        <p:nvSpPr>
+          <p:cNvPr id="7" name="Text 5"/>
+          <p:cNvSpPr txBox="1"/>
+          <p:nvPr/>
+        </p:nvSpPr>
+        <p:spPr>
+          <a:xfrm>
+            <a:off x="822960" y="2788920"/>
+            <a:ext cx="2087804" cy="457200"/>
+          </a:xfrm>
+          <a:prstGeom prst="rect">
+            <a:avLst/>
+          </a:prstGeom>
+          <a:noFill/>
+          <a:ln/>
+        </p:spPr>
+        <p:txBody>
+          <a:bodyPr wrap="square" lIns="0" tIns="0" rIns="0" bIns="0" rtlCol="0" anchor="ctr"/>
+          <a:lstStyle/>
+          <a:p>
+            <a:pPr algn="l" indent="0" marL="0">
+              <a:buNone/>
+            </a:pPr>
+            <a:r>
+              <a:rPr lang="en-US" sz="1400" b="1" dirty="0">
+                <a:solidFill>
+                  <a:srgbClr val="6B2A44"/>
+                </a:solidFill>
+                <a:latin typeface="Cambria" pitchFamily="34" charset="0"/>
+                <a:ea typeface="Cambria" pitchFamily="34" charset="-122"/>
+                <a:cs typeface="Cambria" pitchFamily="34" charset="-120"/>
+              </a:rPr>
+              <a:t>Distribución</a:t>
+            </a:r>
+            <a:endParaRPr lang="en-US" sz="1400" dirty="0"/>
+          </a:p>
+        </p:txBody>
+      </p:sp>
+      <p:sp>
+        <p:nvSpPr>
+          <p:cNvPr id="8" name="Text 6"/>
+          <p:cNvSpPr txBox="1"/>
+          <p:nvPr/>
+        </p:nvSpPr>
+        <p:spPr>
+          <a:xfrm>
+            <a:off x="822960" y="3291840"/>
+            <a:ext cx="2087804" cy="1234440"/>
+          </a:xfrm>
+          <a:prstGeom prst="rect">
+            <a:avLst/>
+          </a:prstGeom>
+          <a:noFill/>
+          <a:ln/>
+        </p:spPr>
+        <p:txBody>
+          <a:bodyPr wrap="square" lIns="0" tIns="0" rIns="0" bIns="0" rtlCol="0" anchor="t"/>
+          <a:lstStyle/>
+          <a:p>
+            <a:pPr algn="l" indent="0" marL="0">
+              <a:lnSpc>
+                <a:spcPct val="120000"/>
+              </a:lnSpc>
+              <a:buNone/>
+            </a:pPr>
+            <a:r>
+              <a:rPr lang="en-US" sz="1200" dirty="0">
+                <a:solidFill>
+                  <a:srgbClr val="3F3138"/>
+                </a:solidFill>
+                <a:latin typeface="Calibri" pitchFamily="34" charset="0"/>
+                <a:ea typeface="Calibri" pitchFamily="34" charset="-122"/>
+                <a:cs typeface="Calibri" pitchFamily="34" charset="-120"/>
+              </a:rPr>
+              <a:t>Exclusividad territorial y stock de lanzamiento para la primera campaña comercial.</a:t>
+            </a:r>
+            <a:endParaRPr lang="en-US" sz="1200" dirty="0"/>
+          </a:p>
+        </p:txBody>
+      </p:sp>
+      <p:sp>
+        <p:nvSpPr>
+          <p:cNvPr id="9" name="Shape 7"/>
+          <p:cNvSpPr/>
+          <p:nvPr/>
+        </p:nvSpPr>
+        <p:spPr>
+          <a:xfrm>
+            <a:off x="3413684" y="1874520"/>
+            <a:ext cx="2545004" cy="2834640"/>
+          </a:xfrm>
+          <a:prstGeom prst="roundRect">
+            <a:avLst>
+              <a:gd name="adj" fmla="val 3593"/>
+            </a:avLst>
+          </a:prstGeom>
+          <a:solidFill>
+            <a:srgbClr val="F5EFF1"/>
+          </a:solidFill>
+          <a:ln w="9525">
+            <a:solidFill>
+              <a:srgbClr val="E5D9DE"/>
+            </a:solidFill>
+            <a:prstDash val="solid"/>
+          </a:ln>
+        </p:spPr>
+      </p:sp>
+      <p:sp>
+        <p:nvSpPr>
+          <p:cNvPr id="10" name="Shape 8"/>
+          <p:cNvSpPr/>
+          <p:nvPr/>
+        </p:nvSpPr>
+        <p:spPr>
+          <a:xfrm>
+            <a:off x="3642284" y="2103120"/>
+            <a:ext cx="566928" cy="566928"/>
+          </a:xfrm>
+          <a:prstGeom prst="ellipse">
+            <a:avLst/>
+          </a:prstGeom>
+          <a:solidFill>
+            <a:srgbClr val="6B2A44"/>
+          </a:solidFill>
+          <a:ln/>
+        </p:spPr>
+      </p:sp>
+      <p:sp>
+        <p:nvSpPr>
+          <p:cNvPr id="11" name="Text 9"/>
+          <p:cNvSpPr txBox="1"/>
+          <p:nvPr/>
+        </p:nvSpPr>
+        <p:spPr>
+          <a:xfrm>
+            <a:off x="3642284" y="2103120"/>
+            <a:ext cx="566928" cy="566928"/>
+          </a:xfrm>
+          <a:prstGeom prst="rect">
+            <a:avLst/>
+          </a:prstGeom>
+          <a:noFill/>
+          <a:ln/>
+        </p:spPr>
+        <p:txBody>
+          <a:bodyPr wrap="square" lIns="0" tIns="0" rIns="0" bIns="0" rtlCol="0" anchor="ctr"/>
+          <a:lstStyle/>
+          <a:p>
+            <a:pPr algn="ctr" indent="0" marL="0">
+              <a:buNone/>
+            </a:pPr>
+            <a:r>
+              <a:rPr lang="en-US" sz="1600" b="1" dirty="0">
+                <a:solidFill>
+                  <a:srgbClr val="FFFFFF"/>
+                </a:solidFill>
+                <a:latin typeface="Cambria" pitchFamily="34" charset="0"/>
+                <a:ea typeface="Cambria" pitchFamily="34" charset="-122"/>
+                <a:cs typeface="Cambria" pitchFamily="34" charset="-120"/>
+              </a:rPr>
+              <a:t>2</a:t>
+            </a:r>
+            <a:endParaRPr lang="en-US" sz="1600" dirty="0"/>
+          </a:p>
+        </p:txBody>
+      </p:sp>
+      <p:sp>
+        <p:nvSpPr>
+          <p:cNvPr id="12" name="Text 10"/>
+          <p:cNvSpPr txBox="1"/>
+          <p:nvPr/>
+        </p:nvSpPr>
+        <p:spPr>
+          <a:xfrm>
+            <a:off x="3642284" y="2788920"/>
+            <a:ext cx="2087804" cy="457200"/>
+          </a:xfrm>
+          <a:prstGeom prst="rect">
+            <a:avLst/>
+          </a:prstGeom>
+          <a:noFill/>
+          <a:ln/>
+        </p:spPr>
+        <p:txBody>
+          <a:bodyPr wrap="square" lIns="0" tIns="0" rIns="0" bIns="0" rtlCol="0" anchor="ctr"/>
+          <a:lstStyle/>
+          <a:p>
+            <a:pPr algn="l" indent="0" marL="0">
+              <a:buNone/>
+            </a:pPr>
+            <a:r>
+              <a:rPr lang="en-US" sz="1400" b="1" dirty="0">
+                <a:solidFill>
+                  <a:srgbClr val="6B2A44"/>
+                </a:solidFill>
+                <a:latin typeface="Cambria" pitchFamily="34" charset="0"/>
+                <a:ea typeface="Cambria" pitchFamily="34" charset="-122"/>
+                <a:cs typeface="Cambria" pitchFamily="34" charset="-120"/>
+              </a:rPr>
+              <a:t>Formación</a:t>
+            </a:r>
+            <a:endParaRPr lang="en-US" sz="1400" dirty="0"/>
+          </a:p>
+        </p:txBody>
+      </p:sp>
+      <p:sp>
+        <p:nvSpPr>
+          <p:cNvPr id="13" name="Text 11"/>
+          <p:cNvSpPr txBox="1"/>
+          <p:nvPr/>
+        </p:nvSpPr>
+        <p:spPr>
+          <a:xfrm>
+            <a:off x="3642284" y="3291840"/>
+            <a:ext cx="2087804" cy="1234440"/>
+          </a:xfrm>
+          <a:prstGeom prst="rect">
+            <a:avLst/>
+          </a:prstGeom>
+          <a:noFill/>
+          <a:ln/>
+        </p:spPr>
+        <p:txBody>
+          <a:bodyPr wrap="square" lIns="0" tIns="0" rIns="0" bIns="0" rtlCol="0" anchor="t"/>
+          <a:lstStyle/>
+          <a:p>
+            <a:pPr algn="l" indent="0" marL="0">
+              <a:lnSpc>
+                <a:spcPct val="120000"/>
+              </a:lnSpc>
+              <a:buNone/>
+            </a:pPr>
+            <a:r>
+              <a:rPr lang="en-US" sz="1200" dirty="0">
+                <a:solidFill>
+                  <a:srgbClr val="3F3138"/>
+                </a:solidFill>
+                <a:latin typeface="Calibri" pitchFamily="34" charset="0"/>
+                <a:ea typeface="Calibri" pitchFamily="34" charset="-122"/>
+                <a:cs typeface="Calibri" pitchFamily="34" charset="-120"/>
+              </a:rPr>
+              <a:t>Formación técnica de los equipos, protocolos de dosis y actualización cada campaña.</a:t>
+            </a:r>
+            <a:endParaRPr lang="en-US" sz="1200" dirty="0"/>
+          </a:p>
+        </p:txBody>
+      </p:sp>
+      <p:sp>
+        <p:nvSpPr>
+          <p:cNvPr id="14" name="Shape 12"/>
+          <p:cNvSpPr/>
+          <p:nvPr/>
+        </p:nvSpPr>
+        <p:spPr>
+          <a:xfrm>
+            <a:off x="6233008" y="1874520"/>
+            <a:ext cx="2545004" cy="2834640"/>
+          </a:xfrm>
+          <a:prstGeom prst="roundRect">
+            <a:avLst>
+              <a:gd name="adj" fmla="val 3593"/>
+            </a:avLst>
+          </a:prstGeom>
+          <a:solidFill>
+            <a:srgbClr val="F5EFF1"/>
+          </a:solidFill>
+          <a:ln w="9525">
+            <a:solidFill>
+              <a:srgbClr val="E5D9DE"/>
+            </a:solidFill>
+            <a:prstDash val="solid"/>
+          </a:ln>
+        </p:spPr>
+      </p:sp>
+      <p:sp>
+        <p:nvSpPr>
+          <p:cNvPr id="15" name="Shape 13"/>
+          <p:cNvSpPr/>
+          <p:nvPr/>
+        </p:nvSpPr>
+        <p:spPr>
+          <a:xfrm>
+            <a:off x="6461608" y="2103120"/>
+            <a:ext cx="566928" cy="566928"/>
+          </a:xfrm>
+          <a:prstGeom prst="ellipse">
+            <a:avLst/>
+          </a:prstGeom>
+          <a:solidFill>
+            <a:srgbClr val="6B2A44"/>
+          </a:solidFill>
+          <a:ln/>
+        </p:spPr>
+      </p:sp>
+      <p:sp>
+        <p:nvSpPr>
+          <p:cNvPr id="16" name="Text 14"/>
+          <p:cNvSpPr txBox="1"/>
+          <p:nvPr/>
+        </p:nvSpPr>
+        <p:spPr>
+          <a:xfrm>
+            <a:off x="6461608" y="2103120"/>
+            <a:ext cx="566928" cy="566928"/>
+          </a:xfrm>
+          <a:prstGeom prst="rect">
+            <a:avLst/>
+          </a:prstGeom>
+          <a:noFill/>
+          <a:ln/>
+        </p:spPr>
+        <p:txBody>
+          <a:bodyPr wrap="square" lIns="0" tIns="0" rIns="0" bIns="0" rtlCol="0" anchor="ctr"/>
+          <a:lstStyle/>
+          <a:p>
+            <a:pPr algn="ctr" indent="0" marL="0">
+              <a:buNone/>
+            </a:pPr>
+            <a:r>
+              <a:rPr lang="en-US" sz="1600" b="1" dirty="0">
+                <a:solidFill>
+                  <a:srgbClr val="FFFFFF"/>
+                </a:solidFill>
+                <a:latin typeface="Cambria" pitchFamily="34" charset="0"/>
+                <a:ea typeface="Cambria" pitchFamily="34" charset="-122"/>
+                <a:cs typeface="Cambria" pitchFamily="34" charset="-120"/>
+              </a:rPr>
+              <a:t>3</a:t>
+            </a:r>
+            <a:endParaRPr lang="en-US" sz="1600" dirty="0"/>
+          </a:p>
+        </p:txBody>
+      </p:sp>
+      <p:sp>
+        <p:nvSpPr>
+          <p:cNvPr id="17" name="Text 15"/>
+          <p:cNvSpPr txBox="1"/>
+          <p:nvPr/>
+        </p:nvSpPr>
+        <p:spPr>
+          <a:xfrm>
+            <a:off x="6461608" y="2788920"/>
+            <a:ext cx="2087804" cy="457200"/>
+          </a:xfrm>
+          <a:prstGeom prst="rect">
+            <a:avLst/>
+          </a:prstGeom>
+          <a:noFill/>
+          <a:ln/>
+        </p:spPr>
+        <p:txBody>
+          <a:bodyPr wrap="square" lIns="0" tIns="0" rIns="0" bIns="0" rtlCol="0" anchor="ctr"/>
+          <a:lstStyle/>
+          <a:p>
+            <a:pPr algn="l" indent="0" marL="0">
+              <a:buNone/>
+            </a:pPr>
+            <a:r>
+              <a:rPr lang="en-US" sz="1400" b="1" dirty="0">
+                <a:solidFill>
+                  <a:srgbClr val="6B2A44"/>
+                </a:solidFill>
+                <a:latin typeface="Cambria" pitchFamily="34" charset="0"/>
+                <a:ea typeface="Cambria" pitchFamily="34" charset="-122"/>
+                <a:cs typeface="Cambria" pitchFamily="34" charset="-120"/>
+              </a:rPr>
+              <a:t>Ensayos conjuntos</a:t>
+            </a:r>
+            <a:endParaRPr lang="en-US" sz="1400" dirty="0"/>
+          </a:p>
+        </p:txBody>
+      </p:sp>
+      <p:sp>
+        <p:nvSpPr>
+          <p:cNvPr id="18" name="Text 16"/>
+          <p:cNvSpPr txBox="1"/>
+          <p:nvPr/>
+        </p:nvSpPr>
+        <p:spPr>
+          <a:xfrm>
+            <a:off x="6461608" y="3291840"/>
+            <a:ext cx="2087804" cy="1234440"/>
+          </a:xfrm>
+          <a:prstGeom prst="rect">
+            <a:avLst/>
+          </a:prstGeom>
+          <a:noFill/>
+          <a:ln/>
+        </p:spPr>
+        <p:txBody>
+          <a:bodyPr wrap="square" lIns="0" tIns="0" rIns="0" bIns="0" rtlCol="0" anchor="t"/>
+          <a:lstStyle/>
+          <a:p>
+            <a:pPr algn="l" indent="0" marL="0">
+              <a:lnSpc>
+                <a:spcPct val="120000"/>
+              </a:lnSpc>
+              <a:buNone/>
+            </a:pPr>
+            <a:r>
+              <a:rPr lang="en-US" sz="1200" dirty="0">
+                <a:solidFill>
+                  <a:srgbClr val="3F3138"/>
+                </a:solidFill>
+                <a:latin typeface="Calibri" pitchFamily="34" charset="0"/>
+                <a:ea typeface="Calibri" pitchFamily="34" charset="-122"/>
+                <a:cs typeface="Calibri" pitchFamily="34" charset="-120"/>
+              </a:rPr>
+              <a:t>Parcelas de demostración con testigo y resultados compartidos con los productores.</a:t>
+            </a:r>
+            <a:endParaRPr lang="en-US" sz="1200" dirty="0"/>
+          </a:p>
+        </p:txBody>
+      </p:sp>
+      <p:sp>
+        <p:nvSpPr>
+          <p:cNvPr id="19" name="Shape 17"/>
+          <p:cNvSpPr/>
+          <p:nvPr/>
+        </p:nvSpPr>
+        <p:spPr>
+          <a:xfrm>
+            <a:off x="9052331" y="1874520"/>
+            <a:ext cx="2545004" cy="2834640"/>
+          </a:xfrm>
+          <a:prstGeom prst="roundRect">
+            <a:avLst>
+              <a:gd name="adj" fmla="val 3593"/>
+            </a:avLst>
+          </a:prstGeom>
+          <a:solidFill>
+            <a:srgbClr val="F5EFF1"/>
+          </a:solidFill>
+          <a:ln w="9525">
+            <a:solidFill>
+              <a:srgbClr val="E5D9DE"/>
+            </a:solidFill>
+            <a:prstDash val="solid"/>
+          </a:ln>
+        </p:spPr>
+      </p:sp>
+      <p:sp>
+        <p:nvSpPr>
+          <p:cNvPr id="20" name="Shape 18"/>
+          <p:cNvSpPr/>
+          <p:nvPr/>
+        </p:nvSpPr>
+        <p:spPr>
+          <a:xfrm>
+            <a:off x="9280931" y="2103120"/>
+            <a:ext cx="566928" cy="566928"/>
+          </a:xfrm>
+          <a:prstGeom prst="ellipse">
+            <a:avLst/>
+          </a:prstGeom>
+          <a:solidFill>
+            <a:srgbClr val="6B2A44"/>
+          </a:solidFill>
+          <a:ln/>
+        </p:spPr>
+      </p:sp>
+      <p:sp>
+        <p:nvSpPr>
+          <p:cNvPr id="21" name="Text 19"/>
+          <p:cNvSpPr txBox="1"/>
+          <p:nvPr/>
+        </p:nvSpPr>
+        <p:spPr>
+          <a:xfrm>
+            <a:off x="9280931" y="2103120"/>
+            <a:ext cx="566928" cy="566928"/>
+          </a:xfrm>
+          <a:prstGeom prst="rect">
+            <a:avLst/>
+          </a:prstGeom>
+          <a:noFill/>
+          <a:ln/>
+        </p:spPr>
+        <p:txBody>
+          <a:bodyPr wrap="square" lIns="0" tIns="0" rIns="0" bIns="0" rtlCol="0" anchor="ctr"/>
+          <a:lstStyle/>
+          <a:p>
+            <a:pPr algn="ctr" indent="0" marL="0">
+              <a:buNone/>
+            </a:pPr>
+            <a:r>
+              <a:rPr lang="en-US" sz="1600" b="1" dirty="0">
+                <a:solidFill>
+                  <a:srgbClr val="FFFFFF"/>
+                </a:solidFill>
+                <a:latin typeface="Cambria" pitchFamily="34" charset="0"/>
+                <a:ea typeface="Cambria" pitchFamily="34" charset="-122"/>
+                <a:cs typeface="Cambria" pitchFamily="34" charset="-120"/>
+              </a:rPr>
+              <a:t>4</a:t>
+            </a:r>
+            <a:endParaRPr lang="en-US" sz="1600" dirty="0"/>
+          </a:p>
+        </p:txBody>
+      </p:sp>
+      <p:sp>
+        <p:nvSpPr>
+          <p:cNvPr id="22" name="Text 20"/>
+          <p:cNvSpPr txBox="1"/>
+          <p:nvPr/>
+        </p:nvSpPr>
+        <p:spPr>
+          <a:xfrm>
+            <a:off x="9280931" y="2788920"/>
+            <a:ext cx="2087804" cy="457200"/>
+          </a:xfrm>
+          <a:prstGeom prst="rect">
+            <a:avLst/>
+          </a:prstGeom>
+          <a:noFill/>
+          <a:ln/>
+        </p:spPr>
+        <p:txBody>
+          <a:bodyPr wrap="square" lIns="0" tIns="0" rIns="0" bIns="0" rtlCol="0" anchor="ctr"/>
+          <a:lstStyle/>
+          <a:p>
+            <a:pPr algn="l" indent="0" marL="0">
+              <a:buNone/>
+            </a:pPr>
+            <a:r>
+              <a:rPr lang="en-US" sz="1400" b="1" dirty="0">
+                <a:solidFill>
+                  <a:srgbClr val="6B2A44"/>
+                </a:solidFill>
+                <a:latin typeface="Cambria" pitchFamily="34" charset="0"/>
+                <a:ea typeface="Cambria" pitchFamily="34" charset="-122"/>
+                <a:cs typeface="Cambria" pitchFamily="34" charset="-120"/>
+              </a:rPr>
+              <a:t>Instituciones</a:t>
+            </a:r>
+            <a:endParaRPr lang="en-US" sz="1400" dirty="0"/>
+          </a:p>
+        </p:txBody>
+      </p:sp>
+      <p:sp>
+        <p:nvSpPr>
+          <p:cNvPr id="23" name="Text 21"/>
+          <p:cNvSpPr txBox="1"/>
+          <p:nvPr/>
+        </p:nvSpPr>
+        <p:spPr>
+          <a:xfrm>
+            <a:off x="9280931" y="3291840"/>
+            <a:ext cx="2087804" cy="1234440"/>
+          </a:xfrm>
+          <a:prstGeom prst="rect">
+            <a:avLst/>
+          </a:prstGeom>
+          <a:noFill/>
+          <a:ln/>
+        </p:spPr>
+        <p:txBody>
+          <a:bodyPr wrap="square" lIns="0" tIns="0" rIns="0" bIns="0" rtlCol="0" anchor="t"/>
+          <a:lstStyle/>
+          <a:p>
+            <a:pPr algn="l" indent="0" marL="0">
+              <a:lnSpc>
+                <a:spcPct val="120000"/>
+              </a:lnSpc>
+              <a:buNone/>
+            </a:pPr>
+            <a:r>
+              <a:rPr lang="en-US" sz="1200" dirty="0">
+                <a:solidFill>
+                  <a:srgbClr val="3F3138"/>
+                </a:solidFill>
+                <a:latin typeface="Calibri" pitchFamily="34" charset="0"/>
+                <a:ea typeface="Calibri" pitchFamily="34" charset="-122"/>
+                <a:cs typeface="Calibri" pitchFamily="34" charset="-120"/>
+              </a:rPr>
+              <a:t>Diálogo con el Ministerio de Agricultura y los programas de seguridad alimentaria.</a:t>
+            </a:r>
+            <a:endParaRPr lang="en-US" sz="1200" dirty="0"/>
+          </a:p>
+        </p:txBody>
+      </p:sp>
+      <p:sp>
+        <p:nvSpPr>
+          <p:cNvPr id="24" name="Text 22"/>
+          <p:cNvSpPr txBox="1"/>
+          <p:nvPr/>
+        </p:nvSpPr>
+        <p:spPr>
+          <a:xfrm>
+            <a:off x="594360" y="4983480"/>
+            <a:ext cx="11002975" cy="822960"/>
+          </a:xfrm>
+          <a:prstGeom prst="rect">
+            <a:avLst/>
+          </a:prstGeom>
+          <a:noFill/>
+          <a:ln/>
+        </p:spPr>
+        <p:txBody>
+          <a:bodyPr wrap="square" lIns="0" tIns="0" rIns="0" bIns="0" rtlCol="0" anchor="t"/>
+          <a:lstStyle/>
+          <a:p>
+            <a:pPr algn="l" indent="0" marL="0">
+              <a:lnSpc>
+                <a:spcPct val="125000"/>
+              </a:lnSpc>
+              <a:buNone/>
+            </a:pPr>
+            <a:r>
+              <a:rPr lang="en-US" sz="1250" i="1" dirty="0">
+                <a:solidFill>
+                  <a:srgbClr val="7C6B73"/>
+                </a:solidFill>
+                <a:latin typeface="Calibri" pitchFamily="34" charset="0"/>
+                <a:ea typeface="Calibri" pitchFamily="34" charset="-122"/>
+                <a:cs typeface="Calibri" pitchFamily="34" charset="-120"/>
+              </a:rPr>
+              <a:t>El marco se adapta al territorio: un importador, un distribuidor de insumos o una agrupación de productores puede liderar la alianza.</a:t>
+            </a:r>
+            <a:endParaRPr lang="en-US" sz="1250" dirty="0"/>
+          </a:p>
+        </p:txBody>
+      </p:sp>
+      <p:sp>
+        <p:nvSpPr>
+          <p:cNvPr id="25" name="Text 23"/>
+          <p:cNvSpPr txBox="1"/>
+          <p:nvPr/>
+        </p:nvSpPr>
+        <p:spPr>
+          <a:xfrm>
+            <a:off x="502920" y="6382512"/>
+            <a:ext cx="8229600" cy="274320"/>
+          </a:xfrm>
+          <a:prstGeom prst="rect">
+            <a:avLst/>
+          </a:prstGeom>
+          <a:noFill/>
+          <a:ln/>
+        </p:spPr>
+        <p:txBody>
+          <a:bodyPr wrap="square" lIns="0" tIns="0" rIns="0" bIns="0" rtlCol="0" anchor="ctr"/>
+          <a:lstStyle/>
+          <a:p>
+            <a:pPr algn="l" indent="0" marL="0">
+              <a:buNone/>
+            </a:pPr>
+            <a:r>
+              <a:rPr lang="en-US" sz="950" dirty="0">
+                <a:solidFill>
+                  <a:srgbClr val="7C6B73">
+                    <a:alpha val="80000"/>
+                  </a:srgbClr>
+                </a:solidFill>
+                <a:latin typeface="Calibri" pitchFamily="34" charset="0"/>
+                <a:ea typeface="Calibri" pitchFamily="34" charset="-122"/>
+                <a:cs typeface="Calibri" pitchFamily="34" charset="-120"/>
+              </a:rPr>
+              <a:t>Green Solutions · Estudio de mercado España</a:t>
+            </a:r>
+            <a:endParaRPr lang="en-US" sz="950" dirty="0"/>
+          </a:p>
+        </p:txBody>
+      </p:sp>
+      <p:sp>
+        <p:nvSpPr>
+          <p:cNvPr id="26" name="Text 24"/>
+          <p:cNvSpPr txBox="1"/>
+          <p:nvPr/>
+        </p:nvSpPr>
+        <p:spPr>
+          <a:xfrm>
+            <a:off x="11140135" y="6382512"/>
+            <a:ext cx="548640" cy="274320"/>
+          </a:xfrm>
+          <a:prstGeom prst="rect">
+            <a:avLst/>
+          </a:prstGeom>
+          <a:noFill/>
+          <a:ln/>
+        </p:spPr>
+        <p:txBody>
+          <a:bodyPr wrap="square" lIns="0" tIns="0" rIns="0" bIns="0" rtlCol="0" anchor="ctr"/>
+          <a:lstStyle/>
+          <a:p>
+            <a:pPr algn="r" indent="0" marL="0">
+              <a:buNone/>
+            </a:pPr>
+            <a:r>
+              <a:rPr lang="en-US" sz="950" dirty="0">
+                <a:solidFill>
+                  <a:srgbClr val="7C6B73">
+                    <a:alpha val="80000"/>
+                  </a:srgbClr>
+                </a:solidFill>
+                <a:latin typeface="Calibri" pitchFamily="34" charset="0"/>
+                <a:ea typeface="Calibri" pitchFamily="34" charset="-122"/>
+                <a:cs typeface="Calibri" pitchFamily="34" charset="-120"/>
+              </a:rPr>
+              <a:t>14</a:t>
+            </a:r>
+            <a:endParaRPr lang="en-US" sz="950" dirty="0"/>
+          </a:p>
+        </p:txBody>
+      </p:sp>
+    </p:spTree>
+  </p:cSld>
+  <p:clrMapOvr>
+    <a:masterClrMapping/>
+  </p:clrMapOvr>
+</p:sld>
+</file>
+
+<file path=ppt/slides/slide16.xml><?xml version="1.0" encoding="utf-8"?>
+<p:sld xmlns:a="http://schemas.openxmlformats.org/drawingml/2006/main" xmlns:r="http://schemas.openxmlformats.org/officeDocument/2006/relationships" xmlns:p="http://schemas.openxmlformats.org/presentationml/2006/main">
+  <p:cSld name="Slide 16">
+    <p:bg>
+      <p:bgPr>
+        <a:solidFill>
+          <a:srgbClr val="FCFAFA"/>
+        </a:solidFill>
+      </p:bgPr>
+    </p:bg>
+    <p:spTree>
+      <p:nvGrpSpPr>
+        <p:cNvPr id="1" name=""/>
+        <p:cNvGrpSpPr/>
+        <p:nvPr/>
+      </p:nvGrpSpPr>
+      <p:grpSpPr>
+        <a:xfrm>
+          <a:off x="0" y="0"/>
+          <a:ext cx="0" cy="0"/>
+          <a:chOff x="0" y="0"/>
+          <a:chExt cx="0" cy="0"/>
+        </a:xfrm>
+      </p:grpSpPr>
+      <p:sp>
+        <p:nvSpPr>
+          <p:cNvPr id="2" name="Text 0"/>
+          <p:cNvSpPr txBox="1"/>
+          <p:nvPr/>
+        </p:nvSpPr>
+        <p:spPr>
+          <a:xfrm>
+            <a:off x="594360" y="411480"/>
+            <a:ext cx="10515600" cy="274320"/>
+          </a:xfrm>
+          <a:prstGeom prst="rect">
+            <a:avLst/>
+          </a:prstGeom>
+          <a:noFill/>
+          <a:ln/>
+        </p:spPr>
+        <p:txBody>
+          <a:bodyPr wrap="square" lIns="0" tIns="0" rIns="0" bIns="0" rtlCol="0" anchor="ctr"/>
+          <a:lstStyle/>
+          <a:p>
+            <a:pPr algn="l" indent="0" marL="0">
+              <a:buNone/>
+            </a:pPr>
+            <a:r>
+              <a:rPr lang="en-US" sz="1150" b="1" spc="200" kern="0" dirty="0">
+                <a:solidFill>
+                  <a:srgbClr val="C9A227"/>
+                </a:solidFill>
+                <a:latin typeface="Calibri" pitchFamily="34" charset="0"/>
+                <a:ea typeface="Calibri" pitchFamily="34" charset="-122"/>
+                <a:cs typeface="Calibri" pitchFamily="34" charset="-120"/>
+              </a:rPr>
+              <a:t>LO QUE HAY QUE ANTICIPAR</a:t>
+            </a:r>
+            <a:endParaRPr lang="en-US" sz="1150" dirty="0"/>
+          </a:p>
+        </p:txBody>
+      </p:sp>
+      <p:sp>
+        <p:nvSpPr>
+          <p:cNvPr id="3" name="Text 1"/>
+          <p:cNvSpPr txBox="1"/>
+          <p:nvPr/>
+        </p:nvSpPr>
+        <p:spPr>
+          <a:xfrm>
+            <a:off x="594360" y="731520"/>
+            <a:ext cx="10881360" cy="731520"/>
+          </a:xfrm>
+          <a:prstGeom prst="rect">
+            <a:avLst/>
+          </a:prstGeom>
+          <a:noFill/>
+          <a:ln/>
+        </p:spPr>
+        <p:txBody>
+          <a:bodyPr wrap="square" lIns="0" tIns="0" rIns="0" bIns="0" rtlCol="0" anchor="ctr"/>
+          <a:lstStyle/>
+          <a:p>
+            <a:pPr algn="l" indent="0" marL="0">
+              <a:buNone/>
+            </a:pPr>
+            <a:r>
+              <a:rPr lang="en-US" sz="3000" b="1" dirty="0">
+                <a:solidFill>
+                  <a:srgbClr val="3F162A"/>
+                </a:solidFill>
+                <a:latin typeface="Cambria" pitchFamily="34" charset="0"/>
+                <a:ea typeface="Cambria" pitchFamily="34" charset="-122"/>
+                <a:cs typeface="Cambria" pitchFamily="34" charset="-120"/>
+              </a:rPr>
+              <a:t>Riesgos identificados y respuestas</a:t>
+            </a:r>
+            <a:endParaRPr lang="en-US" sz="3000" dirty="0"/>
+          </a:p>
+        </p:txBody>
+      </p:sp>
+      <p:sp>
+        <p:nvSpPr>
+          <p:cNvPr id="4" name="Text 2"/>
+          <p:cNvSpPr txBox="1"/>
+          <p:nvPr/>
+        </p:nvSpPr>
+        <p:spPr>
+          <a:xfrm>
+            <a:off x="594360" y="1783080"/>
+            <a:ext cx="5227168" cy="411480"/>
+          </a:xfrm>
+          <a:prstGeom prst="rect">
+            <a:avLst/>
+          </a:prstGeom>
+          <a:noFill/>
+          <a:ln/>
+        </p:spPr>
+        <p:txBody>
+          <a:bodyPr wrap="square" lIns="0" tIns="0" rIns="0" bIns="0" rtlCol="0" anchor="ctr"/>
+          <a:lstStyle/>
+          <a:p>
+            <a:pPr algn="l" indent="0" marL="0">
+              <a:buNone/>
+            </a:pPr>
+            <a:r>
+              <a:rPr lang="en-US" sz="1600" b="1" dirty="0">
+                <a:solidFill>
+                  <a:srgbClr val="6B2A44"/>
+                </a:solidFill>
+                <a:latin typeface="Cambria" pitchFamily="34" charset="0"/>
+                <a:ea typeface="Cambria" pitchFamily="34" charset="-122"/>
+                <a:cs typeface="Cambria" pitchFamily="34" charset="-120"/>
+              </a:rPr>
+              <a:t>Riesgos</a:t>
+            </a:r>
+            <a:endParaRPr lang="en-US" sz="1600" dirty="0"/>
+          </a:p>
+        </p:txBody>
+      </p:sp>
+      <p:sp>
+        <p:nvSpPr>
+          <p:cNvPr id="5" name="Text 3"/>
+          <p:cNvSpPr txBox="1"/>
+          <p:nvPr/>
+        </p:nvSpPr>
+        <p:spPr>
+          <a:xfrm>
+            <a:off x="594360" y="2286000"/>
+            <a:ext cx="5227168" cy="2468880"/>
+          </a:xfrm>
+          <a:prstGeom prst="rect">
+            <a:avLst/>
+          </a:prstGeom>
+          <a:noFill/>
+          <a:ln/>
+        </p:spPr>
+        <p:txBody>
+          <a:bodyPr wrap="square" lIns="0" tIns="0" rIns="0" bIns="0" rtlCol="0" anchor="t"/>
+          <a:lstStyle/>
+          <a:p>
+            <a:pPr algn="l" marL="342900" indent="-342900">
+              <a:lnSpc>
+                <a:spcPct val="122000"/>
+              </a:lnSpc>
+              <a:spcAft>
+                <a:spcPts val="1000"/>
+              </a:spcAft>
+              <a:buSzPct val="100000"/>
+              <a:buChar char="•"/>
+            </a:pPr>
+            <a:r>
+              <a:rPr lang="en-US" sz="1350" dirty="0">
+                <a:solidFill>
+                  <a:srgbClr val="3F3138"/>
+                </a:solidFill>
+                <a:latin typeface="Calibri" pitchFamily="34" charset="0"/>
+                <a:ea typeface="Calibri" pitchFamily="34" charset="-122"/>
+                <a:cs typeface="Calibri" pitchFamily="34" charset="-120"/>
+              </a:rPr>
+              <a:t>Variabilidad entre campañas: un año lluvioso enmascara el interés del producto.</a:t>
+            </a:r>
+            <a:endParaRPr lang="en-US" sz="1350" dirty="0"/>
+          </a:p>
+          <a:p>
+            <a:pPr algn="l" marL="342900" indent="-342900">
+              <a:lnSpc>
+                <a:spcPct val="122000"/>
+              </a:lnSpc>
+              <a:spcAft>
+                <a:spcPts val="1000"/>
+              </a:spcAft>
+              <a:buSzPct val="100000"/>
+              <a:buChar char="•"/>
+            </a:pPr>
+            <a:r>
+              <a:rPr lang="en-US" sz="1350" dirty="0">
+                <a:solidFill>
+                  <a:srgbClr val="3F3138"/>
+                </a:solidFill>
+                <a:latin typeface="Calibri" pitchFamily="34" charset="0"/>
+                <a:ea typeface="Calibri" pitchFamily="34" charset="-122"/>
+                <a:cs typeface="Calibri" pitchFamily="34" charset="-120"/>
+              </a:rPr>
+              <a:t>Parque de riego ya muy tecnificado: el comprador pregunta qué aporta el producto por encima del goteo que ya tiene instalado.</a:t>
+            </a:r>
+            <a:endParaRPr lang="en-US" sz="1350" dirty="0"/>
+          </a:p>
+          <a:p>
+            <a:pPr algn="l" marL="342900" indent="-342900">
+              <a:lnSpc>
+                <a:spcPct val="122000"/>
+              </a:lnSpc>
+              <a:spcAft>
+                <a:spcPts val="1000"/>
+              </a:spcAft>
+              <a:buSzPct val="100000"/>
+              <a:buChar char="•"/>
+            </a:pPr>
+            <a:r>
+              <a:rPr lang="en-US" sz="1350" dirty="0">
+                <a:solidFill>
+                  <a:srgbClr val="3F3138"/>
+                </a:solidFill>
+                <a:latin typeface="Calibri" pitchFamily="34" charset="0"/>
+                <a:ea typeface="Calibri" pitchFamily="34" charset="-122"/>
+                <a:cs typeface="Calibri" pitchFamily="34" charset="-120"/>
+              </a:rPr>
+              <a:t>Marco europeo sobre microplásticos añadidos intencionadamente: cualquier polímero agrícola queda bajo escrutinio.</a:t>
+            </a:r>
+            <a:endParaRPr lang="en-US" sz="1350" dirty="0"/>
+          </a:p>
+          <a:p>
+            <a:pPr algn="l" marL="342900" indent="-342900">
+              <a:lnSpc>
+                <a:spcPct val="122000"/>
+              </a:lnSpc>
+              <a:spcAft>
+                <a:spcPts val="1000"/>
+              </a:spcAft>
+              <a:buSzPct val="100000"/>
+              <a:buChar char="•"/>
+            </a:pPr>
+            <a:r>
+              <a:rPr lang="en-US" sz="1350" dirty="0">
+                <a:solidFill>
+                  <a:srgbClr val="3F3138"/>
+                </a:solidFill>
+                <a:latin typeface="Calibri" pitchFamily="34" charset="0"/>
+                <a:ea typeface="Calibri" pitchFamily="34" charset="-122"/>
+                <a:cs typeface="Calibri" pitchFamily="34" charset="-120"/>
+              </a:rPr>
+              <a:t>Competencia de polímeros baratos a base de sodio, que dejaron mal recuerdo en suelos ya salinizados.</a:t>
+            </a:r>
+            <a:endParaRPr lang="en-US" sz="1350" dirty="0"/>
+          </a:p>
+        </p:txBody>
+      </p:sp>
+      <p:sp>
+        <p:nvSpPr>
+          <p:cNvPr id="6" name="Text 4"/>
+          <p:cNvSpPr txBox="1"/>
+          <p:nvPr/>
+        </p:nvSpPr>
+        <p:spPr>
+          <a:xfrm>
+            <a:off x="6370168" y="1783080"/>
+            <a:ext cx="5227168" cy="411480"/>
+          </a:xfrm>
+          <a:prstGeom prst="rect">
+            <a:avLst/>
+          </a:prstGeom>
+          <a:noFill/>
+          <a:ln/>
+        </p:spPr>
+        <p:txBody>
+          <a:bodyPr wrap="square" lIns="0" tIns="0" rIns="0" bIns="0" rtlCol="0" anchor="ctr"/>
+          <a:lstStyle/>
+          <a:p>
+            <a:pPr algn="l" indent="0" marL="0">
+              <a:buNone/>
+            </a:pPr>
+            <a:r>
+              <a:rPr lang="en-US" sz="1600" b="1" dirty="0">
+                <a:solidFill>
+                  <a:srgbClr val="6B2A44"/>
+                </a:solidFill>
+                <a:latin typeface="Cambria" pitchFamily="34" charset="0"/>
+                <a:ea typeface="Cambria" pitchFamily="34" charset="-122"/>
+                <a:cs typeface="Cambria" pitchFamily="34" charset="-120"/>
+              </a:rPr>
+              <a:t>Respuestas</a:t>
+            </a:r>
+            <a:endParaRPr lang="en-US" sz="1600" dirty="0"/>
+          </a:p>
+        </p:txBody>
+      </p:sp>
+      <p:sp>
+        <p:nvSpPr>
+          <p:cNvPr id="7" name="Text 5"/>
+          <p:cNvSpPr txBox="1"/>
+          <p:nvPr/>
+        </p:nvSpPr>
+        <p:spPr>
+          <a:xfrm>
+            <a:off x="6370168" y="2286000"/>
+            <a:ext cx="5227168" cy="2468880"/>
+          </a:xfrm>
+          <a:prstGeom prst="rect">
+            <a:avLst/>
+          </a:prstGeom>
+          <a:noFill/>
+          <a:ln/>
+        </p:spPr>
+        <p:txBody>
+          <a:bodyPr wrap="square" lIns="0" tIns="0" rIns="0" bIns="0" rtlCol="0" anchor="t"/>
+          <a:lstStyle/>
+          <a:p>
+            <a:pPr algn="l" marL="342900" indent="-342900">
+              <a:lnSpc>
+                <a:spcPct val="122000"/>
+              </a:lnSpc>
+              <a:spcAft>
+                <a:spcPts val="1000"/>
+              </a:spcAft>
+              <a:buSzPct val="100000"/>
+              <a:buChar char="•"/>
+            </a:pPr>
+            <a:r>
+              <a:rPr lang="en-US" sz="1350" dirty="0">
+                <a:solidFill>
+                  <a:srgbClr val="3F3138"/>
+                </a:solidFill>
+                <a:latin typeface="Calibri" pitchFamily="34" charset="0"/>
+                <a:ea typeface="Calibri" pitchFamily="34" charset="-122"/>
+                <a:cs typeface="Calibri" pitchFamily="34" charset="-120"/>
+              </a:rPr>
+              <a:t>Conducir el ensayo sobre un ciclo completo con parcela testigo, para objetivar la ganancia incluso en año favorable.</a:t>
+            </a:r>
+            <a:endParaRPr lang="en-US" sz="1350" dirty="0"/>
+          </a:p>
+          <a:p>
+            <a:pPr algn="l" marL="342900" indent="-342900">
+              <a:lnSpc>
+                <a:spcPct val="122000"/>
+              </a:lnSpc>
+              <a:spcAft>
+                <a:spcPts val="1000"/>
+              </a:spcAft>
+              <a:buSzPct val="100000"/>
+              <a:buChar char="•"/>
+            </a:pPr>
+            <a:r>
+              <a:rPr lang="en-US" sz="1350" dirty="0">
+                <a:solidFill>
+                  <a:srgbClr val="3F3138"/>
+                </a:solidFill>
+                <a:latin typeface="Calibri" pitchFamily="34" charset="0"/>
+                <a:ea typeface="Calibri" pitchFamily="34" charset="-122"/>
+                <a:cs typeface="Calibri" pitchFamily="34" charset="-120"/>
+              </a:rPr>
+              <a:t>Medir el ahorro sobre el goteo mismo: la hidrorretención actúa en el suelo, no en el método de aplicación.</a:t>
+            </a:r>
+            <a:endParaRPr lang="en-US" sz="1350" dirty="0"/>
+          </a:p>
+          <a:p>
+            <a:pPr algn="l" marL="342900" indent="-342900">
+              <a:lnSpc>
+                <a:spcPct val="122000"/>
+              </a:lnSpc>
+              <a:spcAft>
+                <a:spcPts val="1000"/>
+              </a:spcAft>
+              <a:buSzPct val="100000"/>
+              <a:buChar char="•"/>
+            </a:pPr>
+            <a:r>
+              <a:rPr lang="en-US" sz="1350" dirty="0">
+                <a:solidFill>
+                  <a:srgbClr val="3F3138"/>
+                </a:solidFill>
+                <a:latin typeface="Calibri" pitchFamily="34" charset="0"/>
+                <a:ea typeface="Calibri" pitchFamily="34" charset="-122"/>
+                <a:cs typeface="Calibri" pitchFamily="34" charset="-120"/>
+              </a:rPr>
+              <a:t>Aportar la documentación de degradación —entre 20 y 25 % al año, sin acumulación— y el screening REACH / SVHC.</a:t>
+            </a:r>
+            <a:endParaRPr lang="en-US" sz="1350" dirty="0"/>
+          </a:p>
+          <a:p>
+            <a:pPr algn="l" marL="342900" indent="-342900">
+              <a:lnSpc>
+                <a:spcPct val="122000"/>
+              </a:lnSpc>
+              <a:spcAft>
+                <a:spcPts val="1000"/>
+              </a:spcAft>
+              <a:buSzPct val="100000"/>
+              <a:buChar char="•"/>
+            </a:pPr>
+            <a:r>
+              <a:rPr lang="en-US" sz="1350" dirty="0">
+                <a:solidFill>
+                  <a:srgbClr val="3F3138"/>
+                </a:solidFill>
+                <a:latin typeface="Calibri" pitchFamily="34" charset="0"/>
+                <a:ea typeface="Calibri" pitchFamily="34" charset="-122"/>
+                <a:cs typeface="Calibri" pitchFamily="34" charset="-120"/>
+              </a:rPr>
+              <a:t>Documentar la formulación: potasio y no sodio, compatible con cultivos alimentarios y con suelos salinos.</a:t>
+            </a:r>
+            <a:endParaRPr lang="en-US" sz="1350" dirty="0"/>
+          </a:p>
+        </p:txBody>
+      </p:sp>
+      <p:sp>
+        <p:nvSpPr>
+          <p:cNvPr id="8" name="Shape 6"/>
+          <p:cNvSpPr/>
+          <p:nvPr/>
+        </p:nvSpPr>
+        <p:spPr>
+          <a:xfrm>
+            <a:off x="594360" y="4846320"/>
+            <a:ext cx="11002975" cy="960120"/>
+          </a:xfrm>
+          <a:prstGeom prst="roundRect">
+            <a:avLst>
+              <a:gd name="adj" fmla="val 7619"/>
+            </a:avLst>
+          </a:prstGeom>
+          <a:solidFill>
+            <a:srgbClr val="F5EFF1"/>
+          </a:solidFill>
+          <a:ln w="9525">
+            <a:solidFill>
+              <a:srgbClr val="E5D9DE"/>
+            </a:solidFill>
+            <a:prstDash val="solid"/>
+          </a:ln>
+        </p:spPr>
+      </p:sp>
+      <p:sp>
+        <p:nvSpPr>
+          <p:cNvPr id="9" name="Text 7"/>
+          <p:cNvSpPr txBox="1"/>
+          <p:nvPr/>
+        </p:nvSpPr>
+        <p:spPr>
+          <a:xfrm>
+            <a:off x="822960" y="4983480"/>
+            <a:ext cx="10545775" cy="713232"/>
+          </a:xfrm>
+          <a:prstGeom prst="rect">
+            <a:avLst/>
+          </a:prstGeom>
+          <a:noFill/>
+          <a:ln/>
+        </p:spPr>
+        <p:txBody>
+          <a:bodyPr wrap="square" lIns="0" tIns="0" rIns="0" bIns="0" rtlCol="0" anchor="t"/>
+          <a:lstStyle/>
+          <a:p>
+            <a:pPr algn="l" indent="0" marL="0">
+              <a:lnSpc>
+                <a:spcPct val="118000"/>
+              </a:lnSpc>
+              <a:buNone/>
+            </a:pPr>
+            <a:r>
+              <a:rPr lang="en-US" sz="1100" dirty="0">
+                <a:solidFill>
+                  <a:srgbClr val="7C6B73"/>
+                </a:solidFill>
+                <a:latin typeface="Calibri" pitchFamily="34" charset="0"/>
+                <a:ea typeface="Calibri" pitchFamily="34" charset="-122"/>
+                <a:cs typeface="Calibri" pitchFamily="34" charset="-120"/>
+              </a:rPr>
+              <a:t>Análisis de acrilamida (laboratorio Polymex, ISO 9001, contenido inferior a 3,0 µg/g), screening REACH / SVHC (SGS) y certificado SOHISCERT vigente hasta el 4 de septiembre de 2027, disponibles a solicitud. SOHISCERT tiene su sede en Sevilla: el organismo que nos certifica es el mismo que audita a buena parte de sus vecinos.</a:t>
+            </a:r>
+            <a:endParaRPr lang="en-US" sz="1100" dirty="0"/>
+          </a:p>
+        </p:txBody>
+      </p:sp>
+      <p:sp>
+        <p:nvSpPr>
+          <p:cNvPr id="10" name="Text 8"/>
+          <p:cNvSpPr txBox="1"/>
+          <p:nvPr/>
+        </p:nvSpPr>
+        <p:spPr>
+          <a:xfrm>
+            <a:off x="502920" y="6382512"/>
+            <a:ext cx="8229600" cy="274320"/>
+          </a:xfrm>
+          <a:prstGeom prst="rect">
+            <a:avLst/>
+          </a:prstGeom>
+          <a:noFill/>
+          <a:ln/>
+        </p:spPr>
+        <p:txBody>
+          <a:bodyPr wrap="square" lIns="0" tIns="0" rIns="0" bIns="0" rtlCol="0" anchor="ctr"/>
+          <a:lstStyle/>
+          <a:p>
+            <a:pPr algn="l" indent="0" marL="0">
+              <a:buNone/>
+            </a:pPr>
+            <a:r>
+              <a:rPr lang="en-US" sz="950" dirty="0">
+                <a:solidFill>
+                  <a:srgbClr val="7C6B73">
+                    <a:alpha val="80000"/>
+                  </a:srgbClr>
+                </a:solidFill>
+                <a:latin typeface="Calibri" pitchFamily="34" charset="0"/>
+                <a:ea typeface="Calibri" pitchFamily="34" charset="-122"/>
+                <a:cs typeface="Calibri" pitchFamily="34" charset="-120"/>
+              </a:rPr>
+              <a:t>Green Solutions · Estudio de mercado España</a:t>
+            </a:r>
+            <a:endParaRPr lang="en-US" sz="950" dirty="0"/>
+          </a:p>
+        </p:txBody>
+      </p:sp>
+      <p:sp>
+        <p:nvSpPr>
+          <p:cNvPr id="11" name="Text 9"/>
+          <p:cNvSpPr txBox="1"/>
+          <p:nvPr/>
+        </p:nvSpPr>
+        <p:spPr>
+          <a:xfrm>
+            <a:off x="11140135" y="6382512"/>
+            <a:ext cx="548640" cy="274320"/>
+          </a:xfrm>
+          <a:prstGeom prst="rect">
+            <a:avLst/>
+          </a:prstGeom>
+          <a:noFill/>
+          <a:ln/>
+        </p:spPr>
+        <p:txBody>
+          <a:bodyPr wrap="square" lIns="0" tIns="0" rIns="0" bIns="0" rtlCol="0" anchor="ctr"/>
+          <a:lstStyle/>
+          <a:p>
+            <a:pPr algn="r" indent="0" marL="0">
+              <a:buNone/>
+            </a:pPr>
+            <a:r>
+              <a:rPr lang="en-US" sz="950" dirty="0">
+                <a:solidFill>
+                  <a:srgbClr val="7C6B73">
+                    <a:alpha val="80000"/>
+                  </a:srgbClr>
+                </a:solidFill>
+                <a:latin typeface="Calibri" pitchFamily="34" charset="0"/>
+                <a:ea typeface="Calibri" pitchFamily="34" charset="-122"/>
+                <a:cs typeface="Calibri" pitchFamily="34" charset="-120"/>
+              </a:rPr>
+              <a:t>15</a:t>
+            </a:r>
+            <a:endParaRPr lang="en-US" sz="950" dirty="0"/>
+          </a:p>
+        </p:txBody>
+      </p:sp>
+    </p:spTree>
+  </p:cSld>
+  <p:clrMapOvr>
+    <a:masterClrMapping/>
+  </p:clrMapOvr>
+</p:sld>
+</file>
+
+<file path=ppt/slides/slide17.xml><?xml version="1.0" encoding="utf-8"?>
+<p:sld xmlns:a="http://schemas.openxmlformats.org/drawingml/2006/main" xmlns:r="http://schemas.openxmlformats.org/officeDocument/2006/relationships" xmlns:p="http://schemas.openxmlformats.org/presentationml/2006/main">
+  <p:cSld name="Slide 17">
+    <p:bg>
+      <p:bgPr>
+        <a:solidFill>
+          <a:srgbClr val="FCFAFA"/>
+        </a:solidFill>
+      </p:bgPr>
+    </p:bg>
+    <p:spTree>
+      <p:nvGrpSpPr>
+        <p:cNvPr id="1" name=""/>
+        <p:cNvGrpSpPr/>
+        <p:nvPr/>
+      </p:nvGrpSpPr>
+      <p:grpSpPr>
+        <a:xfrm>
+          <a:off x="0" y="0"/>
+          <a:ext cx="0" cy="0"/>
+          <a:chOff x="0" y="0"/>
+          <a:chExt cx="0" cy="0"/>
+        </a:xfrm>
+      </p:grpSpPr>
+      <p:sp>
+        <p:nvSpPr>
+          <p:cNvPr id="2" name="Text 0"/>
+          <p:cNvSpPr txBox="1"/>
+          <p:nvPr/>
+        </p:nvSpPr>
+        <p:spPr>
+          <a:xfrm>
+            <a:off x="594360" y="411480"/>
+            <a:ext cx="10515600" cy="274320"/>
+          </a:xfrm>
+          <a:prstGeom prst="rect">
+            <a:avLst/>
+          </a:prstGeom>
+          <a:noFill/>
+          <a:ln/>
+        </p:spPr>
+        <p:txBody>
+          <a:bodyPr wrap="square" lIns="0" tIns="0" rIns="0" bIns="0" rtlCol="0" anchor="ctr"/>
+          <a:lstStyle/>
+          <a:p>
+            <a:pPr algn="l" indent="0" marL="0">
+              <a:buNone/>
+            </a:pPr>
+            <a:r>
+              <a:rPr lang="en-US" sz="1150" b="1" spc="200" kern="0" dirty="0">
+                <a:solidFill>
+                  <a:srgbClr val="C9A227"/>
+                </a:solidFill>
+                <a:latin typeface="Calibri" pitchFamily="34" charset="0"/>
+                <a:ea typeface="Calibri" pitchFamily="34" charset="-122"/>
+                <a:cs typeface="Calibri" pitchFamily="34" charset="-120"/>
+              </a:rPr>
+              <a:t>Fuentes</a:t>
+            </a:r>
+            <a:endParaRPr lang="en-US" sz="1150" dirty="0"/>
+          </a:p>
+        </p:txBody>
+      </p:sp>
+      <p:sp>
+        <p:nvSpPr>
+          <p:cNvPr id="3" name="Text 1"/>
+          <p:cNvSpPr txBox="1"/>
+          <p:nvPr/>
+        </p:nvSpPr>
+        <p:spPr>
+          <a:xfrm>
+            <a:off x="594360" y="731520"/>
+            <a:ext cx="10881360" cy="731520"/>
+          </a:xfrm>
+          <a:prstGeom prst="rect">
+            <a:avLst/>
+          </a:prstGeom>
+          <a:noFill/>
+          <a:ln/>
+        </p:spPr>
+        <p:txBody>
+          <a:bodyPr wrap="square" lIns="0" tIns="0" rIns="0" bIns="0" rtlCol="0" anchor="ctr"/>
+          <a:lstStyle/>
+          <a:p>
+            <a:pPr algn="l" indent="0" marL="0">
+              <a:buNone/>
+            </a:pPr>
+            <a:r>
+              <a:rPr lang="en-US" sz="3000" b="1" dirty="0">
+                <a:solidFill>
+                  <a:srgbClr val="3F162A"/>
+                </a:solidFill>
+                <a:latin typeface="Cambria" pitchFamily="34" charset="0"/>
+                <a:ea typeface="Cambria" pitchFamily="34" charset="-122"/>
+                <a:cs typeface="Cambria" pitchFamily="34" charset="-120"/>
+              </a:rPr>
+              <a:t>Fuentes e hipótesis de trabajo</a:t>
+            </a:r>
+            <a:endParaRPr lang="en-US" sz="3000" dirty="0"/>
+          </a:p>
+        </p:txBody>
+      </p:sp>
+      <p:sp>
+        <p:nvSpPr>
+          <p:cNvPr id="4" name="Text 2"/>
+          <p:cNvSpPr txBox="1"/>
+          <p:nvPr/>
+        </p:nvSpPr>
+        <p:spPr>
+          <a:xfrm>
+            <a:off x="594360" y="1783080"/>
+            <a:ext cx="5227168" cy="411480"/>
+          </a:xfrm>
+          <a:prstGeom prst="rect">
+            <a:avLst/>
+          </a:prstGeom>
+          <a:noFill/>
+          <a:ln/>
+        </p:spPr>
+        <p:txBody>
+          <a:bodyPr wrap="square" lIns="0" tIns="0" rIns="0" bIns="0" rtlCol="0" anchor="ctr"/>
+          <a:lstStyle/>
+          <a:p>
+            <a:pPr algn="l" indent="0" marL="0">
+              <a:buNone/>
+            </a:pPr>
+            <a:r>
+              <a:rPr lang="en-US" sz="1600" b="1" dirty="0">
+                <a:solidFill>
+                  <a:srgbClr val="6B2A44"/>
+                </a:solidFill>
+                <a:latin typeface="Cambria" pitchFamily="34" charset="0"/>
+                <a:ea typeface="Cambria" pitchFamily="34" charset="-122"/>
+                <a:cs typeface="Cambria" pitchFamily="34" charset="-120"/>
+              </a:rPr>
+              <a:t>Fuentes principales</a:t>
+            </a:r>
+            <a:endParaRPr lang="en-US" sz="1600" dirty="0"/>
+          </a:p>
+        </p:txBody>
+      </p:sp>
+      <p:sp>
+        <p:nvSpPr>
+          <p:cNvPr id="5" name="Text 3"/>
+          <p:cNvSpPr txBox="1"/>
+          <p:nvPr/>
+        </p:nvSpPr>
+        <p:spPr>
+          <a:xfrm>
+            <a:off x="594360" y="2286000"/>
+            <a:ext cx="5227168" cy="2468880"/>
+          </a:xfrm>
+          <a:prstGeom prst="rect">
+            <a:avLst/>
+          </a:prstGeom>
+          <a:noFill/>
+          <a:ln/>
+        </p:spPr>
+        <p:txBody>
+          <a:bodyPr wrap="square" lIns="0" tIns="0" rIns="0" bIns="0" rtlCol="0" anchor="t"/>
+          <a:lstStyle/>
+          <a:p>
+            <a:pPr algn="l" marL="342900" indent="-342900">
+              <a:lnSpc>
+                <a:spcPct val="122000"/>
+              </a:lnSpc>
+              <a:spcAft>
+                <a:spcPts val="1000"/>
+              </a:spcAft>
+              <a:buSzPct val="100000"/>
+              <a:buChar char="•"/>
+            </a:pPr>
+            <a:r>
+              <a:rPr lang="en-US" sz="1350" dirty="0">
+                <a:solidFill>
+                  <a:srgbClr val="3F3138"/>
+                </a:solidFill>
+                <a:latin typeface="Calibri" pitchFamily="34" charset="0"/>
+                <a:ea typeface="Calibri" pitchFamily="34" charset="-122"/>
+                <a:cs typeface="Calibri" pitchFamily="34" charset="-120"/>
+              </a:rPr>
+              <a:t>INE: Contabilidad Nacional y Encuesta de Población Activa.</a:t>
+            </a:r>
+            <a:endParaRPr lang="en-US" sz="1350" dirty="0"/>
+          </a:p>
+          <a:p>
+            <a:pPr algn="l" marL="342900" indent="-342900">
+              <a:lnSpc>
+                <a:spcPct val="122000"/>
+              </a:lnSpc>
+              <a:spcAft>
+                <a:spcPts val="1000"/>
+              </a:spcAft>
+              <a:buSzPct val="100000"/>
+              <a:buChar char="•"/>
+            </a:pPr>
+            <a:r>
+              <a:rPr lang="en-US" sz="1350" dirty="0">
+                <a:solidFill>
+                  <a:srgbClr val="3F3138"/>
+                </a:solidFill>
+                <a:latin typeface="Calibri" pitchFamily="34" charset="0"/>
+                <a:ea typeface="Calibri" pitchFamily="34" charset="-122"/>
+                <a:cs typeface="Calibri" pitchFamily="34" charset="-120"/>
+              </a:rPr>
+              <a:t>Ministerio de Agricultura, Pesca y Alimentación: ESYRCE, anuario de estadística, comercio exterior agroalimentario.</a:t>
+            </a:r>
+            <a:endParaRPr lang="en-US" sz="1350" dirty="0"/>
+          </a:p>
+          <a:p>
+            <a:pPr algn="l" marL="342900" indent="-342900">
+              <a:lnSpc>
+                <a:spcPct val="122000"/>
+              </a:lnSpc>
+              <a:spcAft>
+                <a:spcPts val="1000"/>
+              </a:spcAft>
+              <a:buSzPct val="100000"/>
+              <a:buChar char="•"/>
+            </a:pPr>
+            <a:r>
+              <a:rPr lang="en-US" sz="1350" dirty="0">
+                <a:solidFill>
+                  <a:srgbClr val="3F3138"/>
+                </a:solidFill>
+                <a:latin typeface="Calibri" pitchFamily="34" charset="0"/>
+                <a:ea typeface="Calibri" pitchFamily="34" charset="-122"/>
+                <a:cs typeface="Calibri" pitchFamily="34" charset="-120"/>
+              </a:rPr>
+              <a:t>Confederaciones Hidrográficas del Guadalquivir y del Segura: dotaciones de riego.</a:t>
+            </a:r>
+            <a:endParaRPr lang="en-US" sz="1350" dirty="0"/>
+          </a:p>
+          <a:p>
+            <a:pPr algn="l" marL="342900" indent="-342900">
+              <a:lnSpc>
+                <a:spcPct val="122000"/>
+              </a:lnSpc>
+              <a:spcAft>
+                <a:spcPts val="1000"/>
+              </a:spcAft>
+              <a:buSzPct val="100000"/>
+              <a:buChar char="•"/>
+            </a:pPr>
+            <a:r>
+              <a:rPr lang="en-US" sz="1350" dirty="0">
+                <a:solidFill>
+                  <a:srgbClr val="3F3138"/>
+                </a:solidFill>
+                <a:latin typeface="Calibri" pitchFamily="34" charset="0"/>
+                <a:ea typeface="Calibri" pitchFamily="34" charset="-122"/>
+                <a:cs typeface="Calibri" pitchFamily="34" charset="-120"/>
+              </a:rPr>
+              <a:t>FAO (FAOSTAT, AQUASTAT) y Banco Mundial (WDI).</a:t>
+            </a:r>
+            <a:endParaRPr lang="en-US" sz="1350" dirty="0"/>
+          </a:p>
+        </p:txBody>
+      </p:sp>
+      <p:sp>
+        <p:nvSpPr>
+          <p:cNvPr id="6" name="Text 4"/>
+          <p:cNvSpPr txBox="1"/>
+          <p:nvPr/>
+        </p:nvSpPr>
+        <p:spPr>
+          <a:xfrm>
+            <a:off x="6370168" y="1783080"/>
+            <a:ext cx="5227168" cy="411480"/>
+          </a:xfrm>
+          <a:prstGeom prst="rect">
+            <a:avLst/>
+          </a:prstGeom>
+          <a:noFill/>
+          <a:ln/>
+        </p:spPr>
+        <p:txBody>
+          <a:bodyPr wrap="square" lIns="0" tIns="0" rIns="0" bIns="0" rtlCol="0" anchor="ctr"/>
+          <a:lstStyle/>
+          <a:p>
+            <a:pPr algn="l" indent="0" marL="0">
+              <a:buNone/>
+            </a:pPr>
+            <a:r>
+              <a:rPr lang="en-US" sz="1600" b="1" dirty="0">
+                <a:solidFill>
+                  <a:srgbClr val="6B2A44"/>
+                </a:solidFill>
+                <a:latin typeface="Cambria" pitchFamily="34" charset="0"/>
+                <a:ea typeface="Cambria" pitchFamily="34" charset="-122"/>
+                <a:cs typeface="Cambria" pitchFamily="34" charset="-120"/>
+              </a:rPr>
+              <a:t>Hipótesis de trabajo</a:t>
+            </a:r>
+            <a:endParaRPr lang="en-US" sz="1600" dirty="0"/>
+          </a:p>
+        </p:txBody>
+      </p:sp>
+      <p:sp>
+        <p:nvSpPr>
+          <p:cNvPr id="7" name="Text 5"/>
+          <p:cNvSpPr txBox="1"/>
+          <p:nvPr/>
+        </p:nvSpPr>
+        <p:spPr>
+          <a:xfrm>
+            <a:off x="6370168" y="2286000"/>
+            <a:ext cx="5227168" cy="2468880"/>
+          </a:xfrm>
+          <a:prstGeom prst="rect">
+            <a:avLst/>
+          </a:prstGeom>
+          <a:noFill/>
+          <a:ln/>
+        </p:spPr>
+        <p:txBody>
+          <a:bodyPr wrap="square" lIns="0" tIns="0" rIns="0" bIns="0" rtlCol="0" anchor="t"/>
+          <a:lstStyle/>
+          <a:p>
+            <a:pPr algn="l" marL="342900" indent="-342900">
+              <a:lnSpc>
+                <a:spcPct val="122000"/>
+              </a:lnSpc>
+              <a:spcAft>
+                <a:spcPts val="1000"/>
+              </a:spcAft>
+              <a:buSzPct val="100000"/>
+              <a:buChar char="•"/>
+            </a:pPr>
+            <a:r>
+              <a:rPr lang="en-US" sz="1350" dirty="0">
+                <a:solidFill>
+                  <a:srgbClr val="3F3138"/>
+                </a:solidFill>
+                <a:latin typeface="Calibri" pitchFamily="34" charset="0"/>
+                <a:ea typeface="Calibri" pitchFamily="34" charset="-122"/>
+                <a:cs typeface="Calibri" pitchFamily="34" charset="-120"/>
+              </a:rPr>
+              <a:t>Las cifras son órdenes de magnitud redondeados, tomados de los últimos datos públicos disponibles.</a:t>
+            </a:r>
+            <a:endParaRPr lang="en-US" sz="1350" dirty="0"/>
+          </a:p>
+          <a:p>
+            <a:pPr algn="l" marL="342900" indent="-342900">
+              <a:lnSpc>
+                <a:spcPct val="122000"/>
+              </a:lnSpc>
+              <a:spcAft>
+                <a:spcPts val="1000"/>
+              </a:spcAft>
+              <a:buSzPct val="100000"/>
+              <a:buChar char="•"/>
+            </a:pPr>
+            <a:r>
+              <a:rPr lang="en-US" sz="1350" dirty="0">
+                <a:solidFill>
+                  <a:srgbClr val="3F3138"/>
+                </a:solidFill>
+                <a:latin typeface="Calibri" pitchFamily="34" charset="0"/>
+                <a:ea typeface="Calibri" pitchFamily="34" charset="-122"/>
+                <a:cs typeface="Calibri" pitchFamily="34" charset="-120"/>
+              </a:rPr>
+              <a:t>Los ahorros de agua y los aumentos de rendimiento son indicativos y varían según suelo, clima y cultivo.</a:t>
+            </a:r>
+            <a:endParaRPr lang="en-US" sz="1350" dirty="0"/>
+          </a:p>
+          <a:p>
+            <a:pPr algn="l" marL="342900" indent="-342900">
+              <a:lnSpc>
+                <a:spcPct val="122000"/>
+              </a:lnSpc>
+              <a:spcAft>
+                <a:spcPts val="1000"/>
+              </a:spcAft>
+              <a:buSzPct val="100000"/>
+              <a:buChar char="•"/>
+            </a:pPr>
+            <a:r>
+              <a:rPr lang="en-US" sz="1350" dirty="0">
+                <a:solidFill>
+                  <a:srgbClr val="3F3138"/>
+                </a:solidFill>
+                <a:latin typeface="Calibri" pitchFamily="34" charset="0"/>
+                <a:ea typeface="Calibri" pitchFamily="34" charset="-122"/>
+                <a:cs typeface="Calibri" pitchFamily="34" charset="-120"/>
+              </a:rPr>
+              <a:t>Documento comercial de trabajo: cifras a actualizar antes de cualquier presentación oficial.</a:t>
+            </a:r>
+            <a:endParaRPr lang="en-US" sz="1350" dirty="0"/>
+          </a:p>
+        </p:txBody>
+      </p:sp>
+      <p:sp>
+        <p:nvSpPr>
+          <p:cNvPr id="8" name="Shape 6"/>
+          <p:cNvSpPr/>
+          <p:nvPr/>
+        </p:nvSpPr>
+        <p:spPr>
+          <a:xfrm>
+            <a:off x="594360" y="4846320"/>
+            <a:ext cx="11002975" cy="960120"/>
+          </a:xfrm>
+          <a:prstGeom prst="roundRect">
+            <a:avLst>
+              <a:gd name="adj" fmla="val 7619"/>
+            </a:avLst>
+          </a:prstGeom>
+          <a:solidFill>
+            <a:srgbClr val="F5EFF1"/>
+          </a:solidFill>
+          <a:ln w="9525">
+            <a:solidFill>
+              <a:srgbClr val="E5D9DE"/>
+            </a:solidFill>
+            <a:prstDash val="solid"/>
+          </a:ln>
+        </p:spPr>
+      </p:sp>
+      <p:sp>
+        <p:nvSpPr>
+          <p:cNvPr id="9" name="Text 7"/>
+          <p:cNvSpPr txBox="1"/>
+          <p:nvPr/>
+        </p:nvSpPr>
+        <p:spPr>
+          <a:xfrm>
+            <a:off x="822960" y="4983480"/>
+            <a:ext cx="10545775" cy="713232"/>
+          </a:xfrm>
+          <a:prstGeom prst="rect">
+            <a:avLst/>
+          </a:prstGeom>
+          <a:noFill/>
+          <a:ln/>
+        </p:spPr>
+        <p:txBody>
+          <a:bodyPr wrap="square" lIns="0" tIns="0" rIns="0" bIns="0" rtlCol="0" anchor="t"/>
+          <a:lstStyle/>
+          <a:p>
+            <a:pPr algn="l" indent="0" marL="0">
+              <a:lnSpc>
+                <a:spcPct val="118000"/>
+              </a:lnSpc>
+              <a:buNone/>
+            </a:pPr>
+            <a:r>
+              <a:rPr lang="en-US" sz="1100" dirty="0">
+                <a:solidFill>
+                  <a:srgbClr val="7C6B73"/>
+                </a:solidFill>
+                <a:latin typeface="Calibri" pitchFamily="34" charset="0"/>
+                <a:ea typeface="Calibri" pitchFamily="34" charset="-122"/>
+                <a:cs typeface="Calibri" pitchFamily="34" charset="-120"/>
+              </a:rPr>
+              <a:t>Informes de ensayo, certificados (SOHISCERT, análisis Polymex y SGS) y fichas técnicas: disponibles a pedido.</a:t>
+            </a:r>
+            <a:endParaRPr lang="en-US" sz="1100" dirty="0"/>
+          </a:p>
+        </p:txBody>
+      </p:sp>
+      <p:sp>
+        <p:nvSpPr>
+          <p:cNvPr id="10" name="Text 8"/>
+          <p:cNvSpPr txBox="1"/>
+          <p:nvPr/>
+        </p:nvSpPr>
+        <p:spPr>
+          <a:xfrm>
+            <a:off x="502920" y="6382512"/>
+            <a:ext cx="8229600" cy="274320"/>
+          </a:xfrm>
+          <a:prstGeom prst="rect">
+            <a:avLst/>
+          </a:prstGeom>
+          <a:noFill/>
+          <a:ln/>
+        </p:spPr>
+        <p:txBody>
+          <a:bodyPr wrap="square" lIns="0" tIns="0" rIns="0" bIns="0" rtlCol="0" anchor="ctr"/>
+          <a:lstStyle/>
+          <a:p>
+            <a:pPr algn="l" indent="0" marL="0">
+              <a:buNone/>
+            </a:pPr>
+            <a:r>
+              <a:rPr lang="en-US" sz="950" dirty="0">
+                <a:solidFill>
+                  <a:srgbClr val="7C6B73">
+                    <a:alpha val="80000"/>
+                  </a:srgbClr>
+                </a:solidFill>
+                <a:latin typeface="Calibri" pitchFamily="34" charset="0"/>
+                <a:ea typeface="Calibri" pitchFamily="34" charset="-122"/>
+                <a:cs typeface="Calibri" pitchFamily="34" charset="-120"/>
+              </a:rPr>
+              <a:t>Green Solutions · Estudio de mercado España</a:t>
+            </a:r>
+            <a:endParaRPr lang="en-US" sz="950" dirty="0"/>
+          </a:p>
+        </p:txBody>
+      </p:sp>
+      <p:sp>
+        <p:nvSpPr>
+          <p:cNvPr id="11" name="Text 9"/>
+          <p:cNvSpPr txBox="1"/>
+          <p:nvPr/>
+        </p:nvSpPr>
+        <p:spPr>
+          <a:xfrm>
+            <a:off x="11140135" y="6382512"/>
+            <a:ext cx="548640" cy="274320"/>
+          </a:xfrm>
+          <a:prstGeom prst="rect">
+            <a:avLst/>
+          </a:prstGeom>
+          <a:noFill/>
+          <a:ln/>
+        </p:spPr>
+        <p:txBody>
+          <a:bodyPr wrap="square" lIns="0" tIns="0" rIns="0" bIns="0" rtlCol="0" anchor="ctr"/>
+          <a:lstStyle/>
+          <a:p>
+            <a:pPr algn="r" indent="0" marL="0">
+              <a:buNone/>
+            </a:pPr>
+            <a:r>
+              <a:rPr lang="en-US" sz="950" dirty="0">
+                <a:solidFill>
+                  <a:srgbClr val="7C6B73">
+                    <a:alpha val="80000"/>
+                  </a:srgbClr>
+                </a:solidFill>
+                <a:latin typeface="Calibri" pitchFamily="34" charset="0"/>
+                <a:ea typeface="Calibri" pitchFamily="34" charset="-122"/>
+                <a:cs typeface="Calibri" pitchFamily="34" charset="-120"/>
+              </a:rPr>
+              <a:t>16</a:t>
+            </a:r>
+            <a:endParaRPr lang="en-US" sz="950" dirty="0"/>
+          </a:p>
+        </p:txBody>
+      </p:sp>
+    </p:spTree>
+  </p:cSld>
+  <p:clrMapOvr>
+    <a:masterClrMapping/>
+  </p:clrMapOvr>
+</p:sld>
+</file>
+
+<file path=ppt/slides/slide18.xml><?xml version="1.0" encoding="utf-8"?>
+<p:sld xmlns:a="http://schemas.openxmlformats.org/drawingml/2006/main" xmlns:r="http://schemas.openxmlformats.org/officeDocument/2006/relationships" xmlns:p="http://schemas.openxmlformats.org/presentationml/2006/main">
+  <p:cSld name="Slide 18">
     <p:spTree>
       <p:nvGrpSpPr>
         <p:cNvPr id="1" name=""/>
@@ -3944,7 +9643,7 @@
                 <a:ea typeface="Calibri" pitchFamily="34" charset="-122"/>
                 <a:cs typeface="Calibri" pitchFamily="34" charset="-120"/>
               </a:rPr>
-              <a:t>10</a:t>
+              <a:t>17</a:t>
             </a:r>
             <a:endParaRPr lang="en-US" sz="950" dirty="0"/>
           </a:p>
@@ -5423,7 +11122,7 @@
                 <a:ea typeface="Calibri" pitchFamily="34" charset="-122"/>
                 <a:cs typeface="Calibri" pitchFamily="34" charset="-120"/>
               </a:rPr>
-              <a:t>LOS CULTIVOS</a:t>
+              <a:t>ECONOMÍA Y SEGURIDAD ALIMENTARIA</a:t>
             </a:r>
             <a:endParaRPr lang="en-US" sz="1150" dirty="0"/>
           </a:p>
@@ -5462,42 +11161,26 @@
                 <a:ea typeface="Cambria" pitchFamily="34" charset="-122"/>
                 <a:cs typeface="Cambria" pitchFamily="34" charset="-120"/>
               </a:rPr>
-              <a:t>Cinco producciones concentran el volumen</a:t>
+              <a:t>Un sector exportador que sostiene el medio rural</a:t>
             </a:r>
             <a:endParaRPr lang="en-US" sz="3000" dirty="0"/>
           </a:p>
         </p:txBody>
       </p:sp>
-      <p:graphicFrame>
-        <p:nvGraphicFramePr>
-          <p:cNvPr id="4" name="Chart 0" descr=""/>
-          <p:cNvGraphicFramePr/>
-          <p:nvPr/>
-        </p:nvGraphicFramePr>
-        <p:xfrm>
-          <a:off x="594360" y="1783080"/>
-          <a:ext cx="7360920" cy="3977640"/>
-        </p:xfrm>
-        <a:graphic xmlns:a="http://schemas.openxmlformats.org/drawingml/2006/main">
-          <a:graphicData uri="http://schemas.openxmlformats.org/drawingml/2006/chart">
-            <c:chart xmlns:c="http://schemas.openxmlformats.org/drawingml/2006/chart" r:id="rId1"/>
-          </a:graphicData>
-        </a:graphic>
-      </p:graphicFrame>
-      <p:sp>
-        <p:nvSpPr>
-          <p:cNvPr id="5" name="Shape 2"/>
+      <p:sp>
+        <p:nvSpPr>
+          <p:cNvPr id="4" name="Shape 2"/>
           <p:cNvSpPr/>
           <p:nvPr/>
         </p:nvSpPr>
         <p:spPr>
           <a:xfrm>
-            <a:off x="8275320" y="1783080"/>
-            <a:ext cx="3291840" cy="3977640"/>
+            <a:off x="594360" y="1874520"/>
+            <a:ext cx="2545004" cy="2514600"/>
           </a:xfrm>
           <a:prstGeom prst="roundRect">
             <a:avLst>
-              <a:gd name="adj" fmla="val 2778"/>
+              <a:gd name="adj" fmla="val 3636"/>
             </a:avLst>
           </a:prstGeom>
           <a:solidFill>
@@ -5513,14 +11196,14 @@
       </p:sp>
       <p:sp>
         <p:nvSpPr>
-          <p:cNvPr id="6" name="Text 3"/>
-          <p:cNvSpPr txBox="1"/>
-          <p:nvPr/>
-        </p:nvSpPr>
-        <p:spPr>
-          <a:xfrm>
-            <a:off x="8503920" y="2011680"/>
-            <a:ext cx="2834640" cy="457200"/>
+          <p:cNvPr id="5" name="Text 3"/>
+          <p:cNvSpPr txBox="1"/>
+          <p:nvPr/>
+        </p:nvSpPr>
+        <p:spPr>
+          <a:xfrm>
+            <a:off x="777240" y="2148840"/>
+            <a:ext cx="2179244" cy="960120"/>
           </a:xfrm>
           <a:prstGeom prst="rect">
             <a:avLst/>
@@ -5532,11 +11215,11 @@
           <a:bodyPr wrap="square" lIns="0" tIns="0" rIns="0" bIns="0" rtlCol="0" anchor="ctr"/>
           <a:lstStyle/>
           <a:p>
-            <a:pPr algn="l" indent="0" marL="0">
-              <a:buNone/>
-            </a:pPr>
-            <a:r>
-              <a:rPr lang="en-US" sz="1300" b="1" dirty="0">
+            <a:pPr algn="ctr" indent="0" marL="0">
+              <a:buNone/>
+            </a:pPr>
+            <a:r>
+              <a:rPr lang="en-US" sz="3000" b="1" dirty="0">
                 <a:solidFill>
                   <a:srgbClr val="6B2A44"/>
                 </a:solidFill>
@@ -5544,22 +11227,388 @@
                 <a:ea typeface="Cambria" pitchFamily="34" charset="-122"/>
                 <a:cs typeface="Cambria" pitchFamily="34" charset="-120"/>
               </a:rPr>
-              <a:t>Lectura</a:t>
-            </a:r>
-            <a:endParaRPr lang="en-US" sz="1300" dirty="0"/>
-          </a:p>
-        </p:txBody>
-      </p:sp>
-      <p:sp>
-        <p:nvSpPr>
-          <p:cNvPr id="7" name="Text 4"/>
-          <p:cNvSpPr txBox="1"/>
-          <p:nvPr/>
-        </p:nvSpPr>
-        <p:spPr>
-          <a:xfrm>
-            <a:off x="8503920" y="2560320"/>
-            <a:ext cx="2834640" cy="3017520"/>
+              <a:t>≈ 70 000 M€</a:t>
+            </a:r>
+            <a:endParaRPr lang="en-US" sz="3000" dirty="0"/>
+          </a:p>
+        </p:txBody>
+      </p:sp>
+      <p:sp>
+        <p:nvSpPr>
+          <p:cNvPr id="6" name="Text 4"/>
+          <p:cNvSpPr txBox="1"/>
+          <p:nvPr/>
+        </p:nvSpPr>
+        <p:spPr>
+          <a:xfrm>
+            <a:off x="795528" y="3154680"/>
+            <a:ext cx="2142668" cy="1051560"/>
+          </a:xfrm>
+          <a:prstGeom prst="rect">
+            <a:avLst/>
+          </a:prstGeom>
+          <a:noFill/>
+          <a:ln/>
+        </p:spPr>
+        <p:txBody>
+          <a:bodyPr wrap="square" lIns="0" tIns="0" rIns="0" bIns="0" rtlCol="0" anchor="t"/>
+          <a:lstStyle/>
+          <a:p>
+            <a:pPr algn="ctr" indent="0" marL="0">
+              <a:lnSpc>
+                <a:spcPct val="118000"/>
+              </a:lnSpc>
+              <a:buNone/>
+            </a:pPr>
+            <a:r>
+              <a:rPr lang="en-US" sz="1250" dirty="0">
+                <a:solidFill>
+                  <a:srgbClr val="3F3138"/>
+                </a:solidFill>
+                <a:latin typeface="Calibri" pitchFamily="34" charset="0"/>
+                <a:ea typeface="Calibri" pitchFamily="34" charset="-122"/>
+                <a:cs typeface="Calibri" pitchFamily="34" charset="-120"/>
+              </a:rPr>
+              <a:t>de exportaciones agroalimentarias en 2023</a:t>
+            </a:r>
+            <a:endParaRPr lang="en-US" sz="1250" dirty="0"/>
+          </a:p>
+        </p:txBody>
+      </p:sp>
+      <p:sp>
+        <p:nvSpPr>
+          <p:cNvPr id="7" name="Shape 5"/>
+          <p:cNvSpPr/>
+          <p:nvPr/>
+        </p:nvSpPr>
+        <p:spPr>
+          <a:xfrm>
+            <a:off x="3413684" y="1874520"/>
+            <a:ext cx="2545004" cy="2514600"/>
+          </a:xfrm>
+          <a:prstGeom prst="roundRect">
+            <a:avLst>
+              <a:gd name="adj" fmla="val 3636"/>
+            </a:avLst>
+          </a:prstGeom>
+          <a:solidFill>
+            <a:srgbClr val="F5EFF1"/>
+          </a:solidFill>
+          <a:ln w="9525">
+            <a:solidFill>
+              <a:srgbClr val="E5D9DE"/>
+            </a:solidFill>
+            <a:prstDash val="solid"/>
+          </a:ln>
+        </p:spPr>
+      </p:sp>
+      <p:sp>
+        <p:nvSpPr>
+          <p:cNvPr id="8" name="Text 6"/>
+          <p:cNvSpPr txBox="1"/>
+          <p:nvPr/>
+        </p:nvSpPr>
+        <p:spPr>
+          <a:xfrm>
+            <a:off x="3596564" y="2148840"/>
+            <a:ext cx="2179244" cy="960120"/>
+          </a:xfrm>
+          <a:prstGeom prst="rect">
+            <a:avLst/>
+          </a:prstGeom>
+          <a:noFill/>
+          <a:ln/>
+        </p:spPr>
+        <p:txBody>
+          <a:bodyPr wrap="square" lIns="0" tIns="0" rIns="0" bIns="0" rtlCol="0" anchor="ctr"/>
+          <a:lstStyle/>
+          <a:p>
+            <a:pPr algn="ctr" indent="0" marL="0">
+              <a:buNone/>
+            </a:pPr>
+            <a:r>
+              <a:rPr lang="en-US" sz="3800" b="1" dirty="0">
+                <a:solidFill>
+                  <a:srgbClr val="6B2A44"/>
+                </a:solidFill>
+                <a:latin typeface="Cambria" pitchFamily="34" charset="0"/>
+                <a:ea typeface="Cambria" pitchFamily="34" charset="-122"/>
+                <a:cs typeface="Cambria" pitchFamily="34" charset="-120"/>
+              </a:rPr>
+              <a:t>N.º 1</a:t>
+            </a:r>
+            <a:endParaRPr lang="en-US" sz="3800" dirty="0"/>
+          </a:p>
+        </p:txBody>
+      </p:sp>
+      <p:sp>
+        <p:nvSpPr>
+          <p:cNvPr id="9" name="Text 7"/>
+          <p:cNvSpPr txBox="1"/>
+          <p:nvPr/>
+        </p:nvSpPr>
+        <p:spPr>
+          <a:xfrm>
+            <a:off x="3614852" y="3154680"/>
+            <a:ext cx="2142668" cy="1051560"/>
+          </a:xfrm>
+          <a:prstGeom prst="rect">
+            <a:avLst/>
+          </a:prstGeom>
+          <a:noFill/>
+          <a:ln/>
+        </p:spPr>
+        <p:txBody>
+          <a:bodyPr wrap="square" lIns="0" tIns="0" rIns="0" bIns="0" rtlCol="0" anchor="t"/>
+          <a:lstStyle/>
+          <a:p>
+            <a:pPr algn="ctr" indent="0" marL="0">
+              <a:lnSpc>
+                <a:spcPct val="118000"/>
+              </a:lnSpc>
+              <a:buNone/>
+            </a:pPr>
+            <a:r>
+              <a:rPr lang="en-US" sz="1250" dirty="0">
+                <a:solidFill>
+                  <a:srgbClr val="3F3138"/>
+                </a:solidFill>
+                <a:latin typeface="Calibri" pitchFamily="34" charset="0"/>
+                <a:ea typeface="Calibri" pitchFamily="34" charset="-122"/>
+                <a:cs typeface="Calibri" pitchFamily="34" charset="-120"/>
+              </a:rPr>
+              <a:t>exportador mundial de aceite de oliva y de cítricos frescos</a:t>
+            </a:r>
+            <a:endParaRPr lang="en-US" sz="1250" dirty="0"/>
+          </a:p>
+        </p:txBody>
+      </p:sp>
+      <p:sp>
+        <p:nvSpPr>
+          <p:cNvPr id="10" name="Shape 8"/>
+          <p:cNvSpPr/>
+          <p:nvPr/>
+        </p:nvSpPr>
+        <p:spPr>
+          <a:xfrm>
+            <a:off x="6233008" y="1874520"/>
+            <a:ext cx="2545004" cy="2514600"/>
+          </a:xfrm>
+          <a:prstGeom prst="roundRect">
+            <a:avLst>
+              <a:gd name="adj" fmla="val 3636"/>
+            </a:avLst>
+          </a:prstGeom>
+          <a:solidFill>
+            <a:srgbClr val="F5EFF1"/>
+          </a:solidFill>
+          <a:ln w="9525">
+            <a:solidFill>
+              <a:srgbClr val="E5D9DE"/>
+            </a:solidFill>
+            <a:prstDash val="solid"/>
+          </a:ln>
+        </p:spPr>
+      </p:sp>
+      <p:sp>
+        <p:nvSpPr>
+          <p:cNvPr id="11" name="Text 9"/>
+          <p:cNvSpPr txBox="1"/>
+          <p:nvPr/>
+        </p:nvSpPr>
+        <p:spPr>
+          <a:xfrm>
+            <a:off x="6415888" y="2148840"/>
+            <a:ext cx="2179244" cy="960120"/>
+          </a:xfrm>
+          <a:prstGeom prst="rect">
+            <a:avLst/>
+          </a:prstGeom>
+          <a:noFill/>
+          <a:ln/>
+        </p:spPr>
+        <p:txBody>
+          <a:bodyPr wrap="square" lIns="0" tIns="0" rIns="0" bIns="0" rtlCol="0" anchor="ctr"/>
+          <a:lstStyle/>
+          <a:p>
+            <a:pPr algn="ctr" indent="0" marL="0">
+              <a:buNone/>
+            </a:pPr>
+            <a:r>
+              <a:rPr lang="en-US" sz="3800" b="1" dirty="0">
+                <a:solidFill>
+                  <a:srgbClr val="6B2A44"/>
+                </a:solidFill>
+                <a:latin typeface="Cambria" pitchFamily="34" charset="0"/>
+                <a:ea typeface="Cambria" pitchFamily="34" charset="-122"/>
+                <a:cs typeface="Cambria" pitchFamily="34" charset="-120"/>
+              </a:rPr>
+              <a:t>≈ 0,75 M</a:t>
+            </a:r>
+            <a:endParaRPr lang="en-US" sz="3800" dirty="0"/>
+          </a:p>
+        </p:txBody>
+      </p:sp>
+      <p:sp>
+        <p:nvSpPr>
+          <p:cNvPr id="12" name="Text 10"/>
+          <p:cNvSpPr txBox="1"/>
+          <p:nvPr/>
+        </p:nvSpPr>
+        <p:spPr>
+          <a:xfrm>
+            <a:off x="6434176" y="3154680"/>
+            <a:ext cx="2142668" cy="1051560"/>
+          </a:xfrm>
+          <a:prstGeom prst="rect">
+            <a:avLst/>
+          </a:prstGeom>
+          <a:noFill/>
+          <a:ln/>
+        </p:spPr>
+        <p:txBody>
+          <a:bodyPr wrap="square" lIns="0" tIns="0" rIns="0" bIns="0" rtlCol="0" anchor="t"/>
+          <a:lstStyle/>
+          <a:p>
+            <a:pPr algn="ctr" indent="0" marL="0">
+              <a:lnSpc>
+                <a:spcPct val="118000"/>
+              </a:lnSpc>
+              <a:buNone/>
+            </a:pPr>
+            <a:r>
+              <a:rPr lang="en-US" sz="1250" dirty="0">
+                <a:solidFill>
+                  <a:srgbClr val="3F3138"/>
+                </a:solidFill>
+                <a:latin typeface="Calibri" pitchFamily="34" charset="0"/>
+                <a:ea typeface="Calibri" pitchFamily="34" charset="-122"/>
+                <a:cs typeface="Calibri" pitchFamily="34" charset="-120"/>
+              </a:rPr>
+              <a:t>de personas ocupadas en la agricultura</a:t>
+            </a:r>
+            <a:endParaRPr lang="en-US" sz="1250" dirty="0"/>
+          </a:p>
+        </p:txBody>
+      </p:sp>
+      <p:sp>
+        <p:nvSpPr>
+          <p:cNvPr id="13" name="Shape 11"/>
+          <p:cNvSpPr/>
+          <p:nvPr/>
+        </p:nvSpPr>
+        <p:spPr>
+          <a:xfrm>
+            <a:off x="9052331" y="1874520"/>
+            <a:ext cx="2545004" cy="2514600"/>
+          </a:xfrm>
+          <a:prstGeom prst="roundRect">
+            <a:avLst>
+              <a:gd name="adj" fmla="val 3636"/>
+            </a:avLst>
+          </a:prstGeom>
+          <a:solidFill>
+            <a:srgbClr val="F5EFF1"/>
+          </a:solidFill>
+          <a:ln w="9525">
+            <a:solidFill>
+              <a:srgbClr val="E5D9DE"/>
+            </a:solidFill>
+            <a:prstDash val="solid"/>
+          </a:ln>
+        </p:spPr>
+      </p:sp>
+      <p:sp>
+        <p:nvSpPr>
+          <p:cNvPr id="14" name="Text 12"/>
+          <p:cNvSpPr txBox="1"/>
+          <p:nvPr/>
+        </p:nvSpPr>
+        <p:spPr>
+          <a:xfrm>
+            <a:off x="9235211" y="2148840"/>
+            <a:ext cx="2179244" cy="960120"/>
+          </a:xfrm>
+          <a:prstGeom prst="rect">
+            <a:avLst/>
+          </a:prstGeom>
+          <a:noFill/>
+          <a:ln/>
+        </p:spPr>
+        <p:txBody>
+          <a:bodyPr wrap="square" lIns="0" tIns="0" rIns="0" bIns="0" rtlCol="0" anchor="ctr"/>
+          <a:lstStyle/>
+          <a:p>
+            <a:pPr algn="ctr" indent="0" marL="0">
+              <a:buNone/>
+            </a:pPr>
+            <a:r>
+              <a:rPr lang="en-US" sz="3800" b="1" dirty="0">
+                <a:solidFill>
+                  <a:srgbClr val="6B2A44"/>
+                </a:solidFill>
+                <a:latin typeface="Cambria" pitchFamily="34" charset="0"/>
+                <a:ea typeface="Cambria" pitchFamily="34" charset="-122"/>
+                <a:cs typeface="Cambria" pitchFamily="34" charset="-120"/>
+              </a:rPr>
+              <a:t>≈ 2,5 %</a:t>
+            </a:r>
+            <a:endParaRPr lang="en-US" sz="3800" dirty="0"/>
+          </a:p>
+        </p:txBody>
+      </p:sp>
+      <p:sp>
+        <p:nvSpPr>
+          <p:cNvPr id="15" name="Text 13"/>
+          <p:cNvSpPr txBox="1"/>
+          <p:nvPr/>
+        </p:nvSpPr>
+        <p:spPr>
+          <a:xfrm>
+            <a:off x="9253499" y="3154680"/>
+            <a:ext cx="2142668" cy="1051560"/>
+          </a:xfrm>
+          <a:prstGeom prst="rect">
+            <a:avLst/>
+          </a:prstGeom>
+          <a:noFill/>
+          <a:ln/>
+        </p:spPr>
+        <p:txBody>
+          <a:bodyPr wrap="square" lIns="0" tIns="0" rIns="0" bIns="0" rtlCol="0" anchor="t"/>
+          <a:lstStyle/>
+          <a:p>
+            <a:pPr algn="ctr" indent="0" marL="0">
+              <a:lnSpc>
+                <a:spcPct val="118000"/>
+              </a:lnSpc>
+              <a:buNone/>
+            </a:pPr>
+            <a:r>
+              <a:rPr lang="en-US" sz="1250" dirty="0">
+                <a:solidFill>
+                  <a:srgbClr val="3F3138"/>
+                </a:solidFill>
+                <a:latin typeface="Calibri" pitchFamily="34" charset="0"/>
+                <a:ea typeface="Calibri" pitchFamily="34" charset="-122"/>
+                <a:cs typeface="Calibri" pitchFamily="34" charset="-120"/>
+              </a:rPr>
+              <a:t>del PIB procede de la agricultura, la ganadería y la pesca</a:t>
+            </a:r>
+            <a:endParaRPr lang="en-US" sz="1250" dirty="0"/>
+          </a:p>
+        </p:txBody>
+      </p:sp>
+      <p:sp>
+        <p:nvSpPr>
+          <p:cNvPr id="16" name="Text 14"/>
+          <p:cNvSpPr txBox="1"/>
+          <p:nvPr/>
+        </p:nvSpPr>
+        <p:spPr>
+          <a:xfrm>
+            <a:off x="594360" y="4709160"/>
+            <a:ext cx="11002975" cy="1097280"/>
           </a:xfrm>
           <a:prstGeom prst="rect">
             <a:avLst/>
@@ -5573,12 +11622,12 @@
           <a:p>
             <a:pPr algn="l" indent="0" marL="0">
               <a:lnSpc>
-                <a:spcPct val="125000"/>
+                <a:spcPct val="130000"/>
               </a:lnSpc>
               <a:buNone/>
             </a:pPr>
             <a:r>
-              <a:rPr lang="en-US" sz="1200" dirty="0">
+              <a:rPr lang="en-US" sz="1350" dirty="0">
                 <a:solidFill>
                   <a:srgbClr val="3F3138"/>
                 </a:solidFill>
@@ -5586,44 +11635,15 @@
                 <a:ea typeface="Calibri" pitchFamily="34" charset="-122"/>
                 <a:cs typeface="Calibri" pitchFamily="34" charset="-120"/>
               </a:rPr>
-              <a:t>* Cereal y aceituna son los dos rubros que más oscilan de una campaña a otra, porque dependen de la lluvia: la cosecha de aceituna de 2022/23 cayó a menos de la mitad de una campaña normal.</a:t>
-            </a:r>
-            <a:endParaRPr lang="en-US" sz="1200" dirty="0"/>
-          </a:p>
-          <a:p>
-            <a:pPr algn="l" indent="0" marL="0">
-              <a:lnSpc>
-                <a:spcPct val="125000"/>
-              </a:lnSpc>
-              <a:buNone/>
-            </a:pPr>
-            <a:endParaRPr lang="en-US" sz="1200" dirty="0"/>
-          </a:p>
-          <a:p>
-            <a:pPr algn="l" indent="0" marL="0">
-              <a:lnSpc>
-                <a:spcPct val="125000"/>
-              </a:lnSpc>
-              <a:buNone/>
-            </a:pPr>
-            <a:r>
-              <a:rPr lang="en-US" sz="1200" dirty="0">
-                <a:solidFill>
-                  <a:srgbClr val="3F3138"/>
-                </a:solidFill>
-                <a:latin typeface="Calibri" pitchFamily="34" charset="0"/>
-                <a:ea typeface="Calibri" pitchFamily="34" charset="-122"/>
-                <a:cs typeface="Calibri" pitchFamily="34" charset="-120"/>
-              </a:rPr>
-              <a:t>Hortalizas y cítricos se riegan en su práctica totalidad y se destinan a la exportación. Ahí el ahorro de agua se convierte directamente en margen.</a:t>
-            </a:r>
-            <a:endParaRPr lang="en-US" sz="1200" dirty="0"/>
-          </a:p>
-        </p:txBody>
-      </p:sp>
-      <p:sp>
-        <p:nvSpPr>
-          <p:cNvPr id="8" name="Text 5"/>
+              <a:t>La sequía de 2022–2024 redujo a la mitad la cosecha de aceite en dos campañas seguidas y obligó a recortar las dotaciones de riego en cuencas como la del Guadalquivir y la del Segura. Los fondos europeos financian la modernización de regadíos, pero el agua disponible por hectárea sigue bajando.</a:t>
+            </a:r>
+            <a:endParaRPr lang="en-US" sz="1350" dirty="0"/>
+          </a:p>
+        </p:txBody>
+      </p:sp>
+      <p:sp>
+        <p:nvSpPr>
+          <p:cNvPr id="17" name="Text 15"/>
           <p:cNvSpPr txBox="1"/>
           <p:nvPr/>
         </p:nvSpPr>
@@ -5664,7 +11684,7 @@
       </p:sp>
       <p:sp>
         <p:nvSpPr>
-          <p:cNvPr id="9" name="Text 6"/>
+          <p:cNvPr id="18" name="Text 16"/>
           <p:cNvSpPr txBox="1"/>
           <p:nvPr/>
         </p:nvSpPr>
@@ -5768,7 +11788,7 @@
                 <a:ea typeface="Calibri" pitchFamily="34" charset="-122"/>
                 <a:cs typeface="Calibri" pitchFamily="34" charset="-120"/>
               </a:rPr>
-              <a:t>NUESTRA RESPUESTA</a:t>
+              <a:t>LOS CULTIVOS</a:t>
             </a:r>
             <a:endParaRPr lang="en-US" sz="1150" dirty="0"/>
           </a:p>
@@ -5807,340 +11827,42 @@
                 <a:ea typeface="Cambria" pitchFamily="34" charset="-122"/>
                 <a:cs typeface="Cambria" pitchFamily="34" charset="-120"/>
               </a:rPr>
-              <a:t>Dos tecnologías para dos restricciones distintas</a:t>
+              <a:t>Cinco producciones concentran el volumen</a:t>
             </a:r>
             <a:endParaRPr lang="en-US" sz="3000" dirty="0"/>
           </a:p>
         </p:txBody>
       </p:sp>
-      <p:sp>
-        <p:nvSpPr>
-          <p:cNvPr id="4" name="Text 2"/>
-          <p:cNvSpPr txBox="1"/>
-          <p:nvPr/>
-        </p:nvSpPr>
-        <p:spPr>
-          <a:xfrm>
-            <a:off x="594360" y="1783080"/>
-            <a:ext cx="5227168" cy="411480"/>
-          </a:xfrm>
-          <a:prstGeom prst="rect">
-            <a:avLst/>
-          </a:prstGeom>
-          <a:noFill/>
-          <a:ln/>
-        </p:spPr>
-        <p:txBody>
-          <a:bodyPr wrap="square" lIns="0" tIns="0" rIns="0" bIns="0" rtlCol="0" anchor="ctr"/>
-          <a:lstStyle/>
-          <a:p>
-            <a:pPr algn="l" indent="0" marL="0">
-              <a:buNone/>
-            </a:pPr>
-            <a:r>
-              <a:rPr lang="en-US" sz="1600" b="1" dirty="0">
-                <a:solidFill>
-                  <a:srgbClr val="6B2A44"/>
-                </a:solidFill>
-                <a:latin typeface="Cambria" pitchFamily="34" charset="0"/>
-                <a:ea typeface="Cambria" pitchFamily="34" charset="-122"/>
-                <a:cs typeface="Cambria" pitchFamily="34" charset="-120"/>
-              </a:rPr>
-              <a:t>EVERGREEN® — retener el agua</a:t>
-            </a:r>
-            <a:endParaRPr lang="en-US" sz="1600" dirty="0"/>
-          </a:p>
-        </p:txBody>
-      </p:sp>
-      <p:sp>
-        <p:nvSpPr>
-          <p:cNvPr id="5" name="Text 3"/>
-          <p:cNvSpPr txBox="1"/>
-          <p:nvPr/>
-        </p:nvSpPr>
-        <p:spPr>
-          <a:xfrm>
-            <a:off x="594360" y="2286000"/>
-            <a:ext cx="5227168" cy="2468880"/>
-          </a:xfrm>
-          <a:prstGeom prst="rect">
-            <a:avLst/>
-          </a:prstGeom>
-          <a:noFill/>
-          <a:ln/>
-        </p:spPr>
-        <p:txBody>
-          <a:bodyPr wrap="square" lIns="0" tIns="0" rIns="0" bIns="0" rtlCol="0" anchor="t"/>
-          <a:lstStyle/>
-          <a:p>
-            <a:pPr algn="l" marL="342900" indent="-342900">
-              <a:lnSpc>
-                <a:spcPct val="122000"/>
-              </a:lnSpc>
-              <a:spcAft>
-                <a:spcPts val="1000"/>
-              </a:spcAft>
-              <a:buSzPct val="100000"/>
-              <a:buChar char="•"/>
-            </a:pPr>
-            <a:r>
-              <a:rPr lang="en-US" sz="1350" dirty="0">
-                <a:solidFill>
-                  <a:srgbClr val="3F3138"/>
-                </a:solidFill>
-                <a:latin typeface="Calibri" pitchFamily="34" charset="0"/>
-                <a:ea typeface="Calibri" pitchFamily="34" charset="-122"/>
-                <a:cs typeface="Calibri" pitchFamily="34" charset="-120"/>
-              </a:rPr>
-              <a:t>Hidrorretenedor a base de potasio, incorporado en la zona radicular a la plantación o en la reposición de plantas.</a:t>
-            </a:r>
-            <a:endParaRPr lang="en-US" sz="1350" dirty="0"/>
-          </a:p>
-          <a:p>
-            <a:pPr algn="l" marL="342900" indent="-342900">
-              <a:lnSpc>
-                <a:spcPct val="122000"/>
-              </a:lnSpc>
-              <a:spcAft>
-                <a:spcPts val="1000"/>
-              </a:spcAft>
-              <a:buSzPct val="100000"/>
-              <a:buChar char="•"/>
-            </a:pPr>
-            <a:r>
-              <a:rPr lang="en-US" sz="1350" dirty="0">
-                <a:solidFill>
-                  <a:srgbClr val="3F3138"/>
-                </a:solidFill>
-                <a:latin typeface="Calibri" pitchFamily="34" charset="0"/>
-                <a:ea typeface="Calibri" pitchFamily="34" charset="-122"/>
-                <a:cs typeface="Calibri" pitchFamily="34" charset="-120"/>
-              </a:rPr>
-              <a:t>Capta el agua de lluvia o de riego y la devuelve a la planta de forma gradual, suprimiendo el estrés hídrico en las etapas críticas.</a:t>
-            </a:r>
-            <a:endParaRPr lang="en-US" sz="1350" dirty="0"/>
-          </a:p>
-          <a:p>
-            <a:pPr algn="l" marL="342900" indent="-342900">
-              <a:lnSpc>
-                <a:spcPct val="122000"/>
-              </a:lnSpc>
-              <a:spcAft>
-                <a:spcPts val="1000"/>
-              </a:spcAft>
-              <a:buSzPct val="100000"/>
-              <a:buChar char="•"/>
-            </a:pPr>
-            <a:r>
-              <a:rPr lang="en-US" sz="1350" dirty="0">
-                <a:solidFill>
-                  <a:srgbClr val="3F3138"/>
-                </a:solidFill>
-                <a:latin typeface="Calibri" pitchFamily="34" charset="0"/>
-                <a:ea typeface="Calibri" pitchFamily="34" charset="-122"/>
-                <a:cs typeface="Calibri" pitchFamily="34" charset="-120"/>
-              </a:rPr>
-              <a:t>Capacidad de absorción del orden de 300 veces su peso; efecto útil de 3 a 4 años en el suelo.</a:t>
-            </a:r>
-            <a:endParaRPr lang="en-US" sz="1350" dirty="0"/>
-          </a:p>
-          <a:p>
-            <a:pPr algn="l" marL="342900" indent="-342900">
-              <a:lnSpc>
-                <a:spcPct val="122000"/>
-              </a:lnSpc>
-              <a:spcAft>
-                <a:spcPts val="1000"/>
-              </a:spcAft>
-              <a:buSzPct val="100000"/>
-              <a:buChar char="•"/>
-            </a:pPr>
-            <a:r>
-              <a:rPr lang="en-US" sz="1350" dirty="0">
-                <a:solidFill>
-                  <a:srgbClr val="3F3138"/>
-                </a:solidFill>
-                <a:latin typeface="Calibri" pitchFamily="34" charset="0"/>
-                <a:ea typeface="Calibri" pitchFamily="34" charset="-122"/>
-                <a:cs typeface="Calibri" pitchFamily="34" charset="-120"/>
-              </a:rPr>
-              <a:t>Se degrada entre 20 y 25 % al año, sin acumulación ni riesgo de sobredosis.</a:t>
-            </a:r>
-            <a:endParaRPr lang="en-US" sz="1350" dirty="0"/>
-          </a:p>
-        </p:txBody>
-      </p:sp>
-      <p:sp>
-        <p:nvSpPr>
-          <p:cNvPr id="6" name="Text 4"/>
-          <p:cNvSpPr txBox="1"/>
-          <p:nvPr/>
-        </p:nvSpPr>
-        <p:spPr>
-          <a:xfrm>
-            <a:off x="6370168" y="1783080"/>
-            <a:ext cx="5227168" cy="411480"/>
-          </a:xfrm>
-          <a:prstGeom prst="rect">
-            <a:avLst/>
-          </a:prstGeom>
-          <a:noFill/>
-          <a:ln/>
-        </p:spPr>
-        <p:txBody>
-          <a:bodyPr wrap="square" lIns="0" tIns="0" rIns="0" bIns="0" rtlCol="0" anchor="ctr"/>
-          <a:lstStyle/>
-          <a:p>
-            <a:pPr algn="l" indent="0" marL="0">
-              <a:buNone/>
-            </a:pPr>
-            <a:r>
-              <a:rPr lang="en-US" sz="1600" b="1" dirty="0">
-                <a:solidFill>
-                  <a:srgbClr val="6B2A44"/>
-                </a:solidFill>
-                <a:latin typeface="Cambria" pitchFamily="34" charset="0"/>
-                <a:ea typeface="Cambria" pitchFamily="34" charset="-122"/>
-                <a:cs typeface="Cambria" pitchFamily="34" charset="-120"/>
-              </a:rPr>
-              <a:t>ECOFERT® — nutrir sin agotar el suelo</a:t>
-            </a:r>
-            <a:endParaRPr lang="en-US" sz="1600" dirty="0"/>
-          </a:p>
-        </p:txBody>
-      </p:sp>
-      <p:sp>
-        <p:nvSpPr>
-          <p:cNvPr id="7" name="Text 5"/>
-          <p:cNvSpPr txBox="1"/>
-          <p:nvPr/>
-        </p:nvSpPr>
-        <p:spPr>
-          <a:xfrm>
-            <a:off x="6370168" y="2286000"/>
-            <a:ext cx="5227168" cy="2468880"/>
-          </a:xfrm>
-          <a:prstGeom prst="rect">
-            <a:avLst/>
-          </a:prstGeom>
-          <a:noFill/>
-          <a:ln/>
-        </p:spPr>
-        <p:txBody>
-          <a:bodyPr wrap="square" lIns="0" tIns="0" rIns="0" bIns="0" rtlCol="0" anchor="t"/>
-          <a:lstStyle/>
-          <a:p>
-            <a:pPr algn="l" marL="342900" indent="-342900">
-              <a:lnSpc>
-                <a:spcPct val="122000"/>
-              </a:lnSpc>
-              <a:spcAft>
-                <a:spcPts val="1000"/>
-              </a:spcAft>
-              <a:buSzPct val="100000"/>
-              <a:buChar char="•"/>
-            </a:pPr>
-            <a:r>
-              <a:rPr lang="en-US" sz="1350" dirty="0">
-                <a:solidFill>
-                  <a:srgbClr val="3F3138"/>
-                </a:solidFill>
-                <a:latin typeface="Calibri" pitchFamily="34" charset="0"/>
-                <a:ea typeface="Calibri" pitchFamily="34" charset="-122"/>
-                <a:cs typeface="Calibri" pitchFamily="34" charset="-120"/>
-              </a:rPr>
-              <a:t>Fertilizante en microdosis de aminoácidos, nitrógeno, fósforo y potasio, obtenido de recursos renovables.</a:t>
-            </a:r>
-            <a:endParaRPr lang="en-US" sz="1350" dirty="0"/>
-          </a:p>
-          <a:p>
-            <a:pPr algn="l" marL="342900" indent="-342900">
-              <a:lnSpc>
-                <a:spcPct val="122000"/>
-              </a:lnSpc>
-              <a:spcAft>
-                <a:spcPts val="1000"/>
-              </a:spcAft>
-              <a:buSzPct val="100000"/>
-              <a:buChar char="•"/>
-            </a:pPr>
-            <a:r>
-              <a:rPr lang="en-US" sz="1350" dirty="0">
-                <a:solidFill>
-                  <a:srgbClr val="3F3138"/>
-                </a:solidFill>
-                <a:latin typeface="Calibri" pitchFamily="34" charset="0"/>
-                <a:ea typeface="Calibri" pitchFamily="34" charset="-122"/>
-                <a:cs typeface="Calibri" pitchFamily="34" charset="-120"/>
-              </a:rPr>
-              <a:t>No quelante: no empobrece el complejo arcillo-húmico y no incrementa la salinidad ni el contenido de nitratos.</a:t>
-            </a:r>
-            <a:endParaRPr lang="en-US" sz="1350" dirty="0"/>
-          </a:p>
-          <a:p>
-            <a:pPr algn="l" marL="342900" indent="-342900">
-              <a:lnSpc>
-                <a:spcPct val="122000"/>
-              </a:lnSpc>
-              <a:spcAft>
-                <a:spcPts val="1000"/>
-              </a:spcAft>
-              <a:buSzPct val="100000"/>
-              <a:buChar char="•"/>
-            </a:pPr>
-            <a:r>
-              <a:rPr lang="en-US" sz="1350" dirty="0">
-                <a:solidFill>
-                  <a:srgbClr val="3F3138"/>
-                </a:solidFill>
-                <a:latin typeface="Calibri" pitchFamily="34" charset="0"/>
-                <a:ea typeface="Calibri" pitchFamily="34" charset="-122"/>
-                <a:cs typeface="Calibri" pitchFamily="34" charset="-120"/>
-              </a:rPr>
-              <a:t>Certificado por SOHISCERT, entidad andaluza, y conforme a la normativa europea de producción ecológica.</a:t>
-            </a:r>
-            <a:endParaRPr lang="en-US" sz="1350" dirty="0"/>
-          </a:p>
-          <a:p>
-            <a:pPr algn="l" marL="342900" indent="-342900">
-              <a:lnSpc>
-                <a:spcPct val="122000"/>
-              </a:lnSpc>
-              <a:spcAft>
-                <a:spcPts val="1000"/>
-              </a:spcAft>
-              <a:buSzPct val="100000"/>
-              <a:buChar char="•"/>
-            </a:pPr>
-            <a:r>
-              <a:rPr lang="en-US" sz="1350" dirty="0">
-                <a:solidFill>
-                  <a:srgbClr val="3F3138"/>
-                </a:solidFill>
-                <a:latin typeface="Calibri" pitchFamily="34" charset="0"/>
-                <a:ea typeface="Calibri" pitchFamily="34" charset="-122"/>
-                <a:cs typeface="Calibri" pitchFamily="34" charset="-120"/>
-              </a:rPr>
-              <a:t>De 1 a 4 frascos de 140 ml por hectárea, compatible con los equipos de fertirriego ya instalados.</a:t>
-            </a:r>
-            <a:endParaRPr lang="en-US" sz="1350" dirty="0"/>
-          </a:p>
-        </p:txBody>
-      </p:sp>
-      <p:sp>
-        <p:nvSpPr>
-          <p:cNvPr id="8" name="Shape 6"/>
+      <p:graphicFrame>
+        <p:nvGraphicFramePr>
+          <p:cNvPr id="4" name="Chart 0" descr=""/>
+          <p:cNvGraphicFramePr/>
+          <p:nvPr/>
+        </p:nvGraphicFramePr>
+        <p:xfrm>
+          <a:off x="594360" y="1783080"/>
+          <a:ext cx="7360920" cy="3977640"/>
+        </p:xfrm>
+        <a:graphic xmlns:a="http://schemas.openxmlformats.org/drawingml/2006/main">
+          <a:graphicData uri="http://schemas.openxmlformats.org/drawingml/2006/chart">
+            <c:chart xmlns:c="http://schemas.openxmlformats.org/drawingml/2006/chart" r:id="rId1"/>
+          </a:graphicData>
+        </a:graphic>
+      </p:graphicFrame>
+      <p:sp>
+        <p:nvSpPr>
+          <p:cNvPr id="5" name="Shape 2"/>
           <p:cNvSpPr/>
           <p:nvPr/>
         </p:nvSpPr>
         <p:spPr>
           <a:xfrm>
-            <a:off x="594360" y="4846320"/>
-            <a:ext cx="11002975" cy="960120"/>
+            <a:off x="8275320" y="1783080"/>
+            <a:ext cx="3291840" cy="3977640"/>
           </a:xfrm>
           <a:prstGeom prst="roundRect">
             <a:avLst>
-              <a:gd name="adj" fmla="val 7619"/>
+              <a:gd name="adj" fmla="val 2778"/>
             </a:avLst>
           </a:prstGeom>
           <a:solidFill>
@@ -6156,14 +11878,53 @@
       </p:sp>
       <p:sp>
         <p:nvSpPr>
-          <p:cNvPr id="9" name="Text 7"/>
-          <p:cNvSpPr txBox="1"/>
-          <p:nvPr/>
-        </p:nvSpPr>
-        <p:spPr>
-          <a:xfrm>
-            <a:off x="822960" y="4983480"/>
-            <a:ext cx="10545775" cy="713232"/>
+          <p:cNvPr id="6" name="Text 3"/>
+          <p:cNvSpPr txBox="1"/>
+          <p:nvPr/>
+        </p:nvSpPr>
+        <p:spPr>
+          <a:xfrm>
+            <a:off x="8503920" y="2011680"/>
+            <a:ext cx="2834640" cy="457200"/>
+          </a:xfrm>
+          <a:prstGeom prst="rect">
+            <a:avLst/>
+          </a:prstGeom>
+          <a:noFill/>
+          <a:ln/>
+        </p:spPr>
+        <p:txBody>
+          <a:bodyPr wrap="square" lIns="0" tIns="0" rIns="0" bIns="0" rtlCol="0" anchor="ctr"/>
+          <a:lstStyle/>
+          <a:p>
+            <a:pPr algn="l" indent="0" marL="0">
+              <a:buNone/>
+            </a:pPr>
+            <a:r>
+              <a:rPr lang="en-US" sz="1300" b="1" dirty="0">
+                <a:solidFill>
+                  <a:srgbClr val="6B2A44"/>
+                </a:solidFill>
+                <a:latin typeface="Cambria" pitchFamily="34" charset="0"/>
+                <a:ea typeface="Cambria" pitchFamily="34" charset="-122"/>
+                <a:cs typeface="Cambria" pitchFamily="34" charset="-120"/>
+              </a:rPr>
+              <a:t>Lectura</a:t>
+            </a:r>
+            <a:endParaRPr lang="en-US" sz="1300" dirty="0"/>
+          </a:p>
+        </p:txBody>
+      </p:sp>
+      <p:sp>
+        <p:nvSpPr>
+          <p:cNvPr id="7" name="Text 4"/>
+          <p:cNvSpPr txBox="1"/>
+          <p:nvPr/>
+        </p:nvSpPr>
+        <p:spPr>
+          <a:xfrm>
+            <a:off x="8503920" y="2560320"/>
+            <a:ext cx="2834640" cy="3017520"/>
           </a:xfrm>
           <a:prstGeom prst="rect">
             <a:avLst/>
@@ -6177,28 +11938,57 @@
           <a:p>
             <a:pPr algn="l" indent="0" marL="0">
               <a:lnSpc>
-                <a:spcPct val="118000"/>
+                <a:spcPct val="125000"/>
               </a:lnSpc>
               <a:buNone/>
             </a:pPr>
             <a:r>
-              <a:rPr lang="en-US" sz="1100" dirty="0">
-                <a:solidFill>
-                  <a:srgbClr val="7C6B73"/>
-                </a:solidFill>
-                <a:latin typeface="Calibri" pitchFamily="34" charset="0"/>
-                <a:ea typeface="Calibri" pitchFamily="34" charset="-122"/>
-                <a:cs typeface="Calibri" pitchFamily="34" charset="-120"/>
-              </a:rPr>
-              <a:t>Los dos productos se venden por separado, pero fueron concebidos para reforzarse: el hidrorretenedor prolonga la disponibilidad del agua y el fertilizante valoriza esa agua disponible sin degradar el suelo. En zona vulnerable a nitratos, el carácter no quelante y la microdosis del segundo importan tanto como el ahorro de agua del primero.</a:t>
-            </a:r>
-            <a:endParaRPr lang="en-US" sz="1100" dirty="0"/>
-          </a:p>
-        </p:txBody>
-      </p:sp>
-      <p:sp>
-        <p:nvSpPr>
-          <p:cNvPr id="10" name="Text 8"/>
+              <a:rPr lang="en-US" sz="1200" dirty="0">
+                <a:solidFill>
+                  <a:srgbClr val="3F3138"/>
+                </a:solidFill>
+                <a:latin typeface="Calibri" pitchFamily="34" charset="0"/>
+                <a:ea typeface="Calibri" pitchFamily="34" charset="-122"/>
+                <a:cs typeface="Calibri" pitchFamily="34" charset="-120"/>
+              </a:rPr>
+              <a:t>* Cereal y aceituna son los dos rubros que más oscilan de una campaña a otra, porque dependen de la lluvia: la cosecha de aceituna de 2022/23 cayó a menos de la mitad de una campaña normal.</a:t>
+            </a:r>
+            <a:endParaRPr lang="en-US" sz="1200" dirty="0"/>
+          </a:p>
+          <a:p>
+            <a:pPr algn="l" indent="0" marL="0">
+              <a:lnSpc>
+                <a:spcPct val="125000"/>
+              </a:lnSpc>
+              <a:buNone/>
+            </a:pPr>
+            <a:endParaRPr lang="en-US" sz="1200" dirty="0"/>
+          </a:p>
+          <a:p>
+            <a:pPr algn="l" indent="0" marL="0">
+              <a:lnSpc>
+                <a:spcPct val="125000"/>
+              </a:lnSpc>
+              <a:buNone/>
+            </a:pPr>
+            <a:r>
+              <a:rPr lang="en-US" sz="1200" dirty="0">
+                <a:solidFill>
+                  <a:srgbClr val="3F3138"/>
+                </a:solidFill>
+                <a:latin typeface="Calibri" pitchFamily="34" charset="0"/>
+                <a:ea typeface="Calibri" pitchFamily="34" charset="-122"/>
+                <a:cs typeface="Calibri" pitchFamily="34" charset="-120"/>
+              </a:rPr>
+              <a:t>Hortalizas y cítricos se riegan en su práctica totalidad y se destinan a la exportación. Ahí el ahorro de agua se convierte directamente en margen.</a:t>
+            </a:r>
+            <a:endParaRPr lang="en-US" sz="1200" dirty="0"/>
+          </a:p>
+        </p:txBody>
+      </p:sp>
+      <p:sp>
+        <p:nvSpPr>
+          <p:cNvPr id="8" name="Text 5"/>
           <p:cNvSpPr txBox="1"/>
           <p:nvPr/>
         </p:nvSpPr>
@@ -6239,7 +12029,7 @@
       </p:sp>
       <p:sp>
         <p:nvSpPr>
-          <p:cNvPr id="11" name="Text 9"/>
+          <p:cNvPr id="9" name="Text 6"/>
           <p:cNvSpPr txBox="1"/>
           <p:nvPr/>
         </p:nvSpPr>
@@ -6343,7 +12133,7 @@
                 <a:ea typeface="Calibri" pitchFamily="34" charset="-122"/>
                 <a:cs typeface="Calibri" pitchFamily="34" charset="-120"/>
               </a:rPr>
-              <a:t>ÓRDENES DE MAGNITUD</a:t>
+              <a:t>PRIMER SECTOR</a:t>
             </a:r>
             <a:endParaRPr lang="en-US" sz="1150" dirty="0"/>
           </a:p>
@@ -6382,168 +12172,181 @@
                 <a:ea typeface="Cambria" pitchFamily="34" charset="-122"/>
                 <a:cs typeface="Cambria" pitchFamily="34" charset="-120"/>
               </a:rPr>
-              <a:t>Ahorro de agua esperado según el método de riego</a:t>
+              <a:t>Olivar andaluz: la sequía se nota en la almazara</a:t>
             </a:r>
             <a:endParaRPr lang="en-US" sz="3000" dirty="0"/>
           </a:p>
         </p:txBody>
       </p:sp>
-      <p:graphicFrame>
-        <p:nvGraphicFramePr>
-          <p:cNvPr id="4" name="Chart 0" descr=""/>
-          <p:cNvGraphicFramePr/>
-          <p:nvPr/>
-        </p:nvGraphicFramePr>
-        <p:xfrm>
-          <a:off x="594360" y="1783080"/>
-          <a:ext cx="7360920" cy="3977640"/>
-        </p:xfrm>
-        <a:graphic xmlns:a="http://schemas.openxmlformats.org/drawingml/2006/main">
-          <a:graphicData uri="http://schemas.openxmlformats.org/drawingml/2006/chart">
-            <c:chart xmlns:c="http://schemas.openxmlformats.org/drawingml/2006/chart" r:id="rId1"/>
-          </a:graphicData>
-        </a:graphic>
-      </p:graphicFrame>
-      <p:sp>
-        <p:nvSpPr>
-          <p:cNvPr id="5" name="Shape 2"/>
-          <p:cNvSpPr/>
-          <p:nvPr/>
-        </p:nvSpPr>
-        <p:spPr>
-          <a:xfrm>
-            <a:off x="8275320" y="1783080"/>
-            <a:ext cx="3291840" cy="3977640"/>
-          </a:xfrm>
-          <a:prstGeom prst="roundRect">
-            <a:avLst>
-              <a:gd name="adj" fmla="val 2778"/>
-            </a:avLst>
-          </a:prstGeom>
-          <a:solidFill>
-            <a:srgbClr val="F5EFF1"/>
-          </a:solidFill>
-          <a:ln w="9525">
-            <a:solidFill>
-              <a:srgbClr val="E5D9DE"/>
-            </a:solidFill>
-            <a:prstDash val="solid"/>
-          </a:ln>
-        </p:spPr>
+      <p:pic>
+        <p:nvPicPr>
+          <p:cNvPr id="4" name="Image 0" descr="preencoded.png">    </p:cNvPr>
+          <p:cNvPicPr>
+            <a:picLocks noChangeAspect="1"/>
+          </p:cNvPicPr>
+          <p:nvPr/>
+        </p:nvPicPr>
+        <p:blipFill>
+          <a:blip r:embed="rId1"/>
+          <a:stretch>
+            <a:fillRect/>
+          </a:stretch>
+        </p:blipFill>
+        <p:spPr>
+          <a:xfrm>
+            <a:off x="6522415" y="1783080"/>
+            <a:ext cx="5074920" cy="3794760"/>
+          </a:xfrm>
+          <a:prstGeom prst="rect">
+            <a:avLst/>
+          </a:prstGeom>
+        </p:spPr>
+      </p:pic>
+      <p:sp>
+        <p:nvSpPr>
+          <p:cNvPr id="5" name="Text 2"/>
+          <p:cNvSpPr txBox="1"/>
+          <p:nvPr/>
+        </p:nvSpPr>
+        <p:spPr>
+          <a:xfrm>
+            <a:off x="594360" y="1783080"/>
+            <a:ext cx="5379415" cy="4251960"/>
+          </a:xfrm>
+          <a:prstGeom prst="rect">
+            <a:avLst/>
+          </a:prstGeom>
+          <a:noFill/>
+          <a:ln/>
+        </p:spPr>
+        <p:txBody>
+          <a:bodyPr wrap="square" lIns="0" tIns="0" rIns="0" bIns="0" rtlCol="0" anchor="t"/>
+          <a:lstStyle/>
+          <a:p>
+            <a:pPr algn="l" marL="342900" indent="-342900">
+              <a:lnSpc>
+                <a:spcPct val="122000"/>
+              </a:lnSpc>
+              <a:spcAft>
+                <a:spcPts val="1100"/>
+              </a:spcAft>
+              <a:buSzPct val="100000"/>
+              <a:buChar char="•"/>
+            </a:pPr>
+            <a:r>
+              <a:rPr lang="en-US" sz="1400" dirty="0">
+                <a:solidFill>
+                  <a:srgbClr val="3F3138"/>
+                </a:solidFill>
+                <a:latin typeface="Calibri" pitchFamily="34" charset="0"/>
+                <a:ea typeface="Calibri" pitchFamily="34" charset="-122"/>
+                <a:cs typeface="Calibri" pitchFamily="34" charset="-120"/>
+              </a:rPr>
+              <a:t>Andalucía reúne la mayor parte del olivar español; Jaén y Córdoba son el corazón del aceite de oliva.</a:t>
+            </a:r>
+            <a:endParaRPr lang="en-US" sz="1400" dirty="0"/>
+          </a:p>
+          <a:p>
+            <a:pPr algn="l" marL="342900" indent="-342900">
+              <a:lnSpc>
+                <a:spcPct val="122000"/>
+              </a:lnSpc>
+              <a:spcAft>
+                <a:spcPts val="1100"/>
+              </a:spcAft>
+              <a:buSzPct val="100000"/>
+              <a:buChar char="•"/>
+            </a:pPr>
+            <a:r>
+              <a:rPr lang="en-US" sz="1400" dirty="0">
+                <a:solidFill>
+                  <a:srgbClr val="3F3138"/>
+                </a:solidFill>
+                <a:latin typeface="Calibri" pitchFamily="34" charset="0"/>
+                <a:ea typeface="Calibri" pitchFamily="34" charset="-122"/>
+                <a:cs typeface="Calibri" pitchFamily="34" charset="-120"/>
+              </a:rPr>
+              <a:t>La mayor parte del olivar tradicional es de secano: sin lluvia en primavera, la floración y el cuajado fallan.</a:t>
+            </a:r>
+            <a:endParaRPr lang="en-US" sz="1400" dirty="0"/>
+          </a:p>
+          <a:p>
+            <a:pPr algn="l" marL="342900" indent="-342900">
+              <a:lnSpc>
+                <a:spcPct val="122000"/>
+              </a:lnSpc>
+              <a:spcAft>
+                <a:spcPts val="1100"/>
+              </a:spcAft>
+              <a:buSzPct val="100000"/>
+              <a:buChar char="•"/>
+            </a:pPr>
+            <a:r>
+              <a:rPr lang="en-US" sz="1400" dirty="0">
+                <a:solidFill>
+                  <a:srgbClr val="3F3138"/>
+                </a:solidFill>
+                <a:latin typeface="Calibri" pitchFamily="34" charset="0"/>
+                <a:ea typeface="Calibri" pitchFamily="34" charset="-122"/>
+                <a:cs typeface="Calibri" pitchFamily="34" charset="-120"/>
+              </a:rPr>
+              <a:t>Las campañas 2022/23 y 2023/24 dejaron cosechas muy por debajo de la media y precios récord.</a:t>
+            </a:r>
+            <a:endParaRPr lang="en-US" sz="1400" dirty="0"/>
+          </a:p>
+          <a:p>
+            <a:pPr algn="l" marL="342900" indent="-342900">
+              <a:lnSpc>
+                <a:spcPct val="122000"/>
+              </a:lnSpc>
+              <a:spcAft>
+                <a:spcPts val="1100"/>
+              </a:spcAft>
+              <a:buSzPct val="100000"/>
+              <a:buChar char="•"/>
+            </a:pPr>
+            <a:r>
+              <a:rPr lang="en-US" sz="1400" dirty="0">
+                <a:solidFill>
+                  <a:srgbClr val="3F3138"/>
+                </a:solidFill>
+                <a:latin typeface="Calibri" pitchFamily="34" charset="0"/>
+                <a:ea typeface="Calibri" pitchFamily="34" charset="-122"/>
+                <a:cs typeface="Calibri" pitchFamily="34" charset="-120"/>
+              </a:rPr>
+              <a:t>El olivar intensivo y superintensivo depende del goteo, con dotaciones que se recortan en sequía.</a:t>
+            </a:r>
+            <a:endParaRPr lang="en-US" sz="1400" dirty="0"/>
+          </a:p>
+          <a:p>
+            <a:pPr algn="l" marL="342900" indent="-342900">
+              <a:lnSpc>
+                <a:spcPct val="122000"/>
+              </a:lnSpc>
+              <a:spcAft>
+                <a:spcPts val="1100"/>
+              </a:spcAft>
+              <a:buSzPct val="100000"/>
+              <a:buChar char="•"/>
+            </a:pPr>
+            <a:r>
+              <a:rPr lang="en-US" sz="1400" dirty="0">
+                <a:solidFill>
+                  <a:srgbClr val="3F3138"/>
+                </a:solidFill>
+                <a:latin typeface="Calibri" pitchFamily="34" charset="0"/>
+                <a:ea typeface="Calibri" pitchFamily="34" charset="-122"/>
+                <a:cs typeface="Calibri" pitchFamily="34" charset="-120"/>
+              </a:rPr>
+              <a:t>EVERGREEN® en la plantación o en la línea de goteo mantiene el agua en la zona radicular entre riegos.</a:t>
+            </a:r>
+            <a:endParaRPr lang="en-US" sz="1400" dirty="0"/>
+          </a:p>
+        </p:txBody>
       </p:sp>
       <p:sp>
         <p:nvSpPr>
           <p:cNvPr id="6" name="Text 3"/>
-          <p:cNvSpPr txBox="1"/>
-          <p:nvPr/>
-        </p:nvSpPr>
-        <p:spPr>
-          <a:xfrm>
-            <a:off x="8503920" y="2011680"/>
-            <a:ext cx="2834640" cy="457200"/>
-          </a:xfrm>
-          <a:prstGeom prst="rect">
-            <a:avLst/>
-          </a:prstGeom>
-          <a:noFill/>
-          <a:ln/>
-        </p:spPr>
-        <p:txBody>
-          <a:bodyPr wrap="square" lIns="0" tIns="0" rIns="0" bIns="0" rtlCol="0" anchor="ctr"/>
-          <a:lstStyle/>
-          <a:p>
-            <a:pPr algn="l" indent="0" marL="0">
-              <a:buNone/>
-            </a:pPr>
-            <a:r>
-              <a:rPr lang="en-US" sz="1300" b="1" dirty="0">
-                <a:solidFill>
-                  <a:srgbClr val="6B2A44"/>
-                </a:solidFill>
-                <a:latin typeface="Cambria" pitchFamily="34" charset="0"/>
-                <a:ea typeface="Cambria" pitchFamily="34" charset="-122"/>
-                <a:cs typeface="Cambria" pitchFamily="34" charset="-120"/>
-              </a:rPr>
-              <a:t>Leer con prudencia</a:t>
-            </a:r>
-            <a:endParaRPr lang="en-US" sz="1300" dirty="0"/>
-          </a:p>
-        </p:txBody>
-      </p:sp>
-      <p:sp>
-        <p:nvSpPr>
-          <p:cNvPr id="7" name="Text 4"/>
-          <p:cNvSpPr txBox="1"/>
-          <p:nvPr/>
-        </p:nvSpPr>
-        <p:spPr>
-          <a:xfrm>
-            <a:off x="8503920" y="2560320"/>
-            <a:ext cx="2834640" cy="3017520"/>
-          </a:xfrm>
-          <a:prstGeom prst="rect">
-            <a:avLst/>
-          </a:prstGeom>
-          <a:noFill/>
-          <a:ln/>
-        </p:spPr>
-        <p:txBody>
-          <a:bodyPr wrap="square" lIns="0" tIns="0" rIns="0" bIns="0" rtlCol="0" anchor="t"/>
-          <a:lstStyle/>
-          <a:p>
-            <a:pPr algn="l" indent="0" marL="0">
-              <a:lnSpc>
-                <a:spcPct val="125000"/>
-              </a:lnSpc>
-              <a:buNone/>
-            </a:pPr>
-            <a:r>
-              <a:rPr lang="en-US" sz="1200" dirty="0">
-                <a:solidFill>
-                  <a:srgbClr val="3F3138"/>
-                </a:solidFill>
-                <a:latin typeface="Calibri" pitchFamily="34" charset="0"/>
-                <a:ea typeface="Calibri" pitchFamily="34" charset="-122"/>
-                <a:cs typeface="Calibri" pitchFamily="34" charset="-120"/>
-              </a:rPr>
-              <a:t>Estos rangos son indicativos y se apoyan en las ganancias documentadas de nuestros hidrorretenedores.</a:t>
-            </a:r>
-            <a:endParaRPr lang="en-US" sz="1200" dirty="0"/>
-          </a:p>
-          <a:p>
-            <a:pPr algn="l" indent="0" marL="0">
-              <a:lnSpc>
-                <a:spcPct val="125000"/>
-              </a:lnSpc>
-              <a:buNone/>
-            </a:pPr>
-            <a:endParaRPr lang="en-US" sz="1200" dirty="0"/>
-          </a:p>
-          <a:p>
-            <a:pPr algn="l" indent="0" marL="0">
-              <a:lnSpc>
-                <a:spcPct val="125000"/>
-              </a:lnSpc>
-              <a:buNone/>
-            </a:pPr>
-            <a:r>
-              <a:rPr lang="en-US" sz="1200" dirty="0">
-                <a:solidFill>
-                  <a:srgbClr val="3F3138"/>
-                </a:solidFill>
-                <a:latin typeface="Calibri" pitchFamily="34" charset="0"/>
-                <a:ea typeface="Calibri" pitchFamily="34" charset="-122"/>
-                <a:cs typeface="Calibri" pitchFamily="34" charset="-120"/>
-              </a:rPr>
-              <a:t>El resultado real depende del suelo, del clima y del cultivo. Estas cifras dan un orden de magnitud: en ningún caso constituyen un valor garantizado, contractual ni absoluto.</a:t>
-            </a:r>
-            <a:endParaRPr lang="en-US" sz="1200" dirty="0"/>
-          </a:p>
-        </p:txBody>
-      </p:sp>
-      <p:sp>
-        <p:nvSpPr>
-          <p:cNvPr id="8" name="Text 5"/>
           <p:cNvSpPr txBox="1"/>
           <p:nvPr/>
         </p:nvSpPr>
@@ -6584,7 +12387,7 @@
       </p:sp>
       <p:sp>
         <p:nvSpPr>
-          <p:cNvPr id="9" name="Text 6"/>
+          <p:cNvPr id="7" name="Text 4"/>
           <p:cNvSpPr txBox="1"/>
           <p:nvPr/>
         </p:nvSpPr>
@@ -6688,7 +12491,7 @@
                 <a:ea typeface="Calibri" pitchFamily="34" charset="-122"/>
                 <a:cs typeface="Calibri" pitchFamily="34" charset="-120"/>
               </a:rPr>
-              <a:t>TRES ZONAS PRIORITARIAS</a:t>
+              <a:t>SEGUNDO SECTOR</a:t>
             </a:r>
             <a:endParaRPr lang="en-US" sz="1150" dirty="0"/>
           </a:p>
@@ -6727,42 +12530,15 @@
                 <a:ea typeface="Cambria" pitchFamily="34" charset="-122"/>
                 <a:cs typeface="Cambria" pitchFamily="34" charset="-120"/>
               </a:rPr>
-              <a:t>Dónde iniciar los primeros ensayos</a:t>
+              <a:t>Hortalizas de Almería y Murcia: cada metro cúbico cuenta</a:t>
             </a:r>
             <a:endParaRPr lang="en-US" sz="3000" dirty="0"/>
           </a:p>
         </p:txBody>
-      </p:sp>
-      <p:sp>
-        <p:nvSpPr>
-          <p:cNvPr id="4" name="Shape 2"/>
-          <p:cNvSpPr/>
-          <p:nvPr/>
-        </p:nvSpPr>
-        <p:spPr>
-          <a:xfrm>
-            <a:off x="594360" y="1783080"/>
-            <a:ext cx="3472586" cy="4069080"/>
-          </a:xfrm>
-          <a:prstGeom prst="roundRect">
-            <a:avLst>
-              <a:gd name="adj" fmla="val 2633"/>
-            </a:avLst>
-          </a:prstGeom>
-          <a:solidFill>
-            <a:srgbClr val="F5EFF1"/>
-          </a:solidFill>
-          <a:ln w="9525">
-            <a:solidFill>
-              <a:srgbClr val="E5D9DE"/>
-            </a:solidFill>
-            <a:prstDash val="solid"/>
-          </a:ln>
-        </p:spPr>
       </p:sp>
       <p:pic>
         <p:nvPicPr>
-          <p:cNvPr id="5" name="Image 0" descr="preencoded.png">    </p:cNvPr>
+          <p:cNvPr id="4" name="Image 0" descr="preencoded.png">    </p:cNvPr>
           <p:cNvPicPr>
             <a:picLocks noChangeAspect="1"/>
           </p:cNvPicPr>
@@ -6777,7 +12553,7 @@
         <p:spPr>
           <a:xfrm>
             <a:off x="594360" y="1783080"/>
-            <a:ext cx="3472586" cy="1691640"/>
+            <a:ext cx="5074920" cy="3794760"/>
           </a:xfrm>
           <a:prstGeom prst="rect">
             <a:avLst/>
@@ -6786,92 +12562,14 @@
       </p:pic>
       <p:sp>
         <p:nvSpPr>
-          <p:cNvPr id="6" name="Text 3"/>
-          <p:cNvSpPr txBox="1"/>
-          <p:nvPr/>
-        </p:nvSpPr>
-        <p:spPr>
-          <a:xfrm>
-            <a:off x="795528" y="3639312"/>
-            <a:ext cx="3070250" cy="384048"/>
-          </a:xfrm>
-          <a:prstGeom prst="rect">
-            <a:avLst/>
-          </a:prstGeom>
-          <a:noFill/>
-          <a:ln/>
-        </p:spPr>
-        <p:txBody>
-          <a:bodyPr wrap="square" lIns="0" tIns="0" rIns="0" bIns="0" rtlCol="0" anchor="ctr"/>
-          <a:lstStyle/>
-          <a:p>
-            <a:pPr algn="l" indent="0" marL="0">
-              <a:buNone/>
-            </a:pPr>
-            <a:r>
-              <a:rPr lang="en-US" sz="1500" b="1" dirty="0">
-                <a:solidFill>
-                  <a:srgbClr val="6B2A44"/>
-                </a:solidFill>
-                <a:latin typeface="Cambria" pitchFamily="34" charset="0"/>
-                <a:ea typeface="Cambria" pitchFamily="34" charset="-122"/>
-                <a:cs typeface="Cambria" pitchFamily="34" charset="-120"/>
-              </a:rPr>
-              <a:t>Jaén y Córdoba</a:t>
-            </a:r>
-            <a:endParaRPr lang="en-US" sz="1500" dirty="0"/>
-          </a:p>
-        </p:txBody>
-      </p:sp>
-      <p:sp>
-        <p:nvSpPr>
-          <p:cNvPr id="7" name="Text 4"/>
-          <p:cNvSpPr txBox="1"/>
-          <p:nvPr/>
-        </p:nvSpPr>
-        <p:spPr>
-          <a:xfrm>
-            <a:off x="795528" y="4041648"/>
-            <a:ext cx="3070250" cy="329184"/>
-          </a:xfrm>
-          <a:prstGeom prst="rect">
-            <a:avLst/>
-          </a:prstGeom>
-          <a:noFill/>
-          <a:ln/>
-        </p:spPr>
-        <p:txBody>
-          <a:bodyPr wrap="square" lIns="0" tIns="0" rIns="0" bIns="0" rtlCol="0" anchor="ctr"/>
-          <a:lstStyle/>
-          <a:p>
-            <a:pPr algn="l" indent="0" marL="0">
-              <a:buNone/>
-            </a:pPr>
-            <a:r>
-              <a:rPr lang="en-US" sz="1250" b="1" dirty="0">
-                <a:solidFill>
-                  <a:srgbClr val="8F6D0F"/>
-                </a:solidFill>
-                <a:latin typeface="Calibri" pitchFamily="34" charset="0"/>
-                <a:ea typeface="Calibri" pitchFamily="34" charset="-122"/>
-                <a:cs typeface="Calibri" pitchFamily="34" charset="-120"/>
-              </a:rPr>
-              <a:t>≈ 1,6 M ha de olivar en Andalucía</a:t>
-            </a:r>
-            <a:endParaRPr lang="en-US" sz="1250" dirty="0"/>
-          </a:p>
-        </p:txBody>
-      </p:sp>
-      <p:sp>
-        <p:nvSpPr>
-          <p:cNvPr id="8" name="Text 5"/>
-          <p:cNvSpPr txBox="1"/>
-          <p:nvPr/>
-        </p:nvSpPr>
-        <p:spPr>
-          <a:xfrm>
-            <a:off x="795528" y="4407408"/>
-            <a:ext cx="3070250" cy="1280160"/>
+          <p:cNvPr id="5" name="Text 2"/>
+          <p:cNvSpPr txBox="1"/>
+          <p:nvPr/>
+        </p:nvSpPr>
+        <p:spPr>
+          <a:xfrm>
+            <a:off x="6217920" y="1783080"/>
+            <a:ext cx="5379415" cy="4251960"/>
           </a:xfrm>
           <a:prstGeom prst="rect">
             <a:avLst/>
@@ -6885,16 +12583,16 @@
           <a:p>
             <a:pPr algn="l" marL="342900" indent="-342900">
               <a:lnSpc>
-                <a:spcPct val="116000"/>
+                <a:spcPct val="122000"/>
               </a:lnSpc>
               <a:spcAft>
-                <a:spcPts val="700"/>
+                <a:spcPts val="1100"/>
               </a:spcAft>
               <a:buSzPct val="100000"/>
               <a:buChar char="•"/>
             </a:pPr>
             <a:r>
-              <a:rPr lang="en-US" sz="1150" dirty="0">
+              <a:rPr lang="en-US" sz="1400" dirty="0">
                 <a:solidFill>
                   <a:srgbClr val="3F3138"/>
                 </a:solidFill>
@@ -6902,23 +12600,23 @@
                 <a:ea typeface="Calibri" pitchFamily="34" charset="-122"/>
                 <a:cs typeface="Calibri" pitchFamily="34" charset="-120"/>
               </a:rPr>
-              <a:t>Mayor concentración de olivar del mundo, con buena parte aún en secano: el hidrorretenedor actúa donde no hay riego.</a:t>
-            </a:r>
-            <a:endParaRPr lang="en-US" sz="1150" dirty="0"/>
+              <a:t>El Campo de Dalías y el Campo de Cartagena abastecen a Europa de tomate, pimiento, pepino y lechuga casi todo el año.</a:t>
+            </a:r>
+            <a:endParaRPr lang="en-US" sz="1400" dirty="0"/>
           </a:p>
           <a:p>
             <a:pPr algn="l" marL="342900" indent="-342900">
               <a:lnSpc>
-                <a:spcPct val="116000"/>
+                <a:spcPct val="122000"/>
               </a:lnSpc>
               <a:spcAft>
-                <a:spcPts val="700"/>
+                <a:spcPts val="1100"/>
               </a:spcAft>
               <a:buSzPct val="100000"/>
               <a:buChar char="•"/>
             </a:pPr>
             <a:r>
-              <a:rPr lang="en-US" sz="1150" dirty="0">
+              <a:rPr lang="en-US" sz="1400" dirty="0">
                 <a:solidFill>
                   <a:srgbClr val="3F3138"/>
                 </a:solidFill>
@@ -6926,23 +12624,23 @@
                 <a:ea typeface="Calibri" pitchFamily="34" charset="-122"/>
                 <a:cs typeface="Calibri" pitchFamily="34" charset="-120"/>
               </a:rPr>
-              <a:t>Las campañas 2022/23 y 2023/24 mostraron lo que cuesta una floración sin agua.</a:t>
-            </a:r>
-            <a:endParaRPr lang="en-US" sz="1150" dirty="0"/>
+              <a:t>Los acuíferos están sobreexplotados y el trasvase Tajo-Segura se reduce: crece el uso de agua desalada y regenerada.</a:t>
+            </a:r>
+            <a:endParaRPr lang="en-US" sz="1400" dirty="0"/>
           </a:p>
           <a:p>
             <a:pPr algn="l" marL="342900" indent="-342900">
               <a:lnSpc>
-                <a:spcPct val="116000"/>
+                <a:spcPct val="122000"/>
               </a:lnSpc>
               <a:spcAft>
-                <a:spcPts val="700"/>
+                <a:spcPts val="1100"/>
               </a:spcAft>
               <a:buSzPct val="100000"/>
               <a:buChar char="•"/>
             </a:pPr>
             <a:r>
-              <a:rPr lang="en-US" sz="1150" dirty="0">
+              <a:rPr lang="en-US" sz="1400" dirty="0">
                 <a:solidFill>
                   <a:srgbClr val="3F3138"/>
                 </a:solidFill>
@@ -6950,174 +12648,23 @@
                 <a:ea typeface="Calibri" pitchFamily="34" charset="-122"/>
                 <a:cs typeface="Calibri" pitchFamily="34" charset="-120"/>
               </a:rPr>
-              <a:t>Tejido cooperativo denso: el ensayo se decide en grupo, no finca por finca.</a:t>
-            </a:r>
-            <a:endParaRPr lang="en-US" sz="1150" dirty="0"/>
-          </a:p>
-        </p:txBody>
-      </p:sp>
-      <p:sp>
-        <p:nvSpPr>
-          <p:cNvPr id="9" name="Shape 6"/>
-          <p:cNvSpPr/>
-          <p:nvPr/>
-        </p:nvSpPr>
-        <p:spPr>
-          <a:xfrm>
-            <a:off x="4359554" y="1783080"/>
-            <a:ext cx="3472586" cy="4069080"/>
-          </a:xfrm>
-          <a:prstGeom prst="roundRect">
-            <a:avLst>
-              <a:gd name="adj" fmla="val 2633"/>
-            </a:avLst>
-          </a:prstGeom>
-          <a:solidFill>
-            <a:srgbClr val="F5EFF1"/>
-          </a:solidFill>
-          <a:ln w="9525">
-            <a:solidFill>
-              <a:srgbClr val="E5D9DE"/>
-            </a:solidFill>
-            <a:prstDash val="solid"/>
-          </a:ln>
-        </p:spPr>
-      </p:sp>
-      <p:pic>
-        <p:nvPicPr>
-          <p:cNvPr id="10" name="Image 1" descr="preencoded.png">    </p:cNvPr>
-          <p:cNvPicPr>
-            <a:picLocks noChangeAspect="1"/>
-          </p:cNvPicPr>
-          <p:nvPr/>
-        </p:nvPicPr>
-        <p:blipFill>
-          <a:blip r:embed="rId2"/>
-          <a:stretch>
-            <a:fillRect/>
-          </a:stretch>
-        </p:blipFill>
-        <p:spPr>
-          <a:xfrm>
-            <a:off x="4359554" y="1783080"/>
-            <a:ext cx="3472586" cy="1691640"/>
-          </a:xfrm>
-          <a:prstGeom prst="rect">
-            <a:avLst/>
-          </a:prstGeom>
-        </p:spPr>
-      </p:pic>
-      <p:sp>
-        <p:nvSpPr>
-          <p:cNvPr id="11" name="Text 7"/>
-          <p:cNvSpPr txBox="1"/>
-          <p:nvPr/>
-        </p:nvSpPr>
-        <p:spPr>
-          <a:xfrm>
-            <a:off x="4560722" y="3639312"/>
-            <a:ext cx="3070250" cy="384048"/>
-          </a:xfrm>
-          <a:prstGeom prst="rect">
-            <a:avLst/>
-          </a:prstGeom>
-          <a:noFill/>
-          <a:ln/>
-        </p:spPr>
-        <p:txBody>
-          <a:bodyPr wrap="square" lIns="0" tIns="0" rIns="0" bIns="0" rtlCol="0" anchor="ctr"/>
-          <a:lstStyle/>
-          <a:p>
-            <a:pPr algn="l" indent="0" marL="0">
-              <a:buNone/>
-            </a:pPr>
-            <a:r>
-              <a:rPr lang="en-US" sz="1500" b="1" dirty="0">
-                <a:solidFill>
-                  <a:srgbClr val="6B2A44"/>
-                </a:solidFill>
-                <a:latin typeface="Cambria" pitchFamily="34" charset="0"/>
-                <a:ea typeface="Cambria" pitchFamily="34" charset="-122"/>
-                <a:cs typeface="Cambria" pitchFamily="34" charset="-120"/>
-              </a:rPr>
-              <a:t>Murcia — Campo de Cartagena</a:t>
-            </a:r>
-            <a:endParaRPr lang="en-US" sz="1500" dirty="0"/>
-          </a:p>
-        </p:txBody>
-      </p:sp>
-      <p:sp>
-        <p:nvSpPr>
-          <p:cNvPr id="12" name="Text 8"/>
-          <p:cNvSpPr txBox="1"/>
-          <p:nvPr/>
-        </p:nvSpPr>
-        <p:spPr>
-          <a:xfrm>
-            <a:off x="4560722" y="4041648"/>
-            <a:ext cx="3070250" cy="329184"/>
-          </a:xfrm>
-          <a:prstGeom prst="rect">
-            <a:avLst/>
-          </a:prstGeom>
-          <a:noFill/>
-          <a:ln/>
-        </p:spPr>
-        <p:txBody>
-          <a:bodyPr wrap="square" lIns="0" tIns="0" rIns="0" bIns="0" rtlCol="0" anchor="ctr"/>
-          <a:lstStyle/>
-          <a:p>
-            <a:pPr algn="l" indent="0" marL="0">
-              <a:buNone/>
-            </a:pPr>
-            <a:r>
-              <a:rPr lang="en-US" sz="1250" b="1" dirty="0">
-                <a:solidFill>
-                  <a:srgbClr val="8F6D0F"/>
-                </a:solidFill>
-                <a:latin typeface="Calibri" pitchFamily="34" charset="0"/>
-                <a:ea typeface="Calibri" pitchFamily="34" charset="-122"/>
-                <a:cs typeface="Calibri" pitchFamily="34" charset="-120"/>
-              </a:rPr>
-              <a:t>Hortícola de exportación</a:t>
-            </a:r>
-            <a:endParaRPr lang="en-US" sz="1250" dirty="0"/>
-          </a:p>
-        </p:txBody>
-      </p:sp>
-      <p:sp>
-        <p:nvSpPr>
-          <p:cNvPr id="13" name="Text 9"/>
-          <p:cNvSpPr txBox="1"/>
-          <p:nvPr/>
-        </p:nvSpPr>
-        <p:spPr>
-          <a:xfrm>
-            <a:off x="4560722" y="4407408"/>
-            <a:ext cx="3070250" cy="1280160"/>
-          </a:xfrm>
-          <a:prstGeom prst="rect">
-            <a:avLst/>
-          </a:prstGeom>
-          <a:noFill/>
-          <a:ln/>
-        </p:spPr>
-        <p:txBody>
-          <a:bodyPr wrap="square" lIns="0" tIns="0" rIns="0" bIns="0" rtlCol="0" anchor="t"/>
-          <a:lstStyle/>
+              <a:t>El agua desalada es más cara: ahorrar agua por hectárea mejora directamente la cuenta del agricultor.</a:t>
+            </a:r>
+            <a:endParaRPr lang="en-US" sz="1400" dirty="0"/>
+          </a:p>
           <a:p>
             <a:pPr algn="l" marL="342900" indent="-342900">
               <a:lnSpc>
-                <a:spcPct val="116000"/>
+                <a:spcPct val="122000"/>
               </a:lnSpc>
               <a:spcAft>
-                <a:spcPts val="700"/>
+                <a:spcPts val="1100"/>
               </a:spcAft>
               <a:buSzPct val="100000"/>
               <a:buChar char="•"/>
             </a:pPr>
             <a:r>
-              <a:rPr lang="en-US" sz="1150" dirty="0">
+              <a:rPr lang="en-US" sz="1400" dirty="0">
                 <a:solidFill>
                   <a:srgbClr val="3F3138"/>
                 </a:solidFill>
@@ -7125,23 +12672,23 @@
                 <a:ea typeface="Calibri" pitchFamily="34" charset="-122"/>
                 <a:cs typeface="Calibri" pitchFamily="34" charset="-120"/>
               </a:rPr>
-              <a:t>La huerta de exportación por excelencia, con dotaciones dependientes del trasvase Tajo-Segura y sometidas a recortes reiterados.</a:t>
-            </a:r>
-            <a:endParaRPr lang="en-US" sz="1150" dirty="0"/>
+              <a:t>La crisis del Mar Menor ha traído normas estrictas sobre fertilizantes y lixiviados en su entorno.</a:t>
+            </a:r>
+            <a:endParaRPr lang="en-US" sz="1400" dirty="0"/>
           </a:p>
           <a:p>
             <a:pPr algn="l" marL="342900" indent="-342900">
               <a:lnSpc>
-                <a:spcPct val="116000"/>
+                <a:spcPct val="122000"/>
               </a:lnSpc>
               <a:spcAft>
-                <a:spcPts val="700"/>
+                <a:spcPts val="1100"/>
               </a:spcAft>
               <a:buSzPct val="100000"/>
               <a:buChar char="•"/>
             </a:pPr>
             <a:r>
-              <a:rPr lang="en-US" sz="1150" dirty="0">
+              <a:rPr lang="en-US" sz="1400" dirty="0">
                 <a:solidFill>
                   <a:srgbClr val="3F3138"/>
                 </a:solidFill>
@@ -7149,262 +12696,15 @@
                 <a:ea typeface="Calibri" pitchFamily="34" charset="-122"/>
                 <a:cs typeface="Calibri" pitchFamily="34" charset="-120"/>
               </a:rPr>
-              <a:t>El Mar Menor ha impuesto el marco regulatorio más estricto del país en materia de nitratos: reducir aportes sin perder rendimiento es la exigencia central.</a:t>
-            </a:r>
-            <a:endParaRPr lang="en-US" sz="1150" dirty="0"/>
-          </a:p>
-          <a:p>
-            <a:pPr algn="l" marL="342900" indent="-342900">
-              <a:lnSpc>
-                <a:spcPct val="116000"/>
-              </a:lnSpc>
-              <a:spcAft>
-                <a:spcPts val="700"/>
-              </a:spcAft>
-              <a:buSzPct val="100000"/>
-              <a:buChar char="•"/>
-            </a:pPr>
-            <a:r>
-              <a:rPr lang="en-US" sz="1150" dirty="0">
-                <a:solidFill>
-                  <a:srgbClr val="3F3138"/>
-                </a:solidFill>
-                <a:latin typeface="Calibri" pitchFamily="34" charset="0"/>
-                <a:ea typeface="Calibri" pitchFamily="34" charset="-122"/>
-                <a:cs typeface="Calibri" pitchFamily="34" charset="-120"/>
-              </a:rPr>
-              <a:t>Riego localizado generalizado: el margen de ahorro ya no está en el método, sino en lo que el suelo es capaz de retener.</a:t>
-            </a:r>
-            <a:endParaRPr lang="en-US" sz="1150" dirty="0"/>
-          </a:p>
-        </p:txBody>
-      </p:sp>
-      <p:sp>
-        <p:nvSpPr>
-          <p:cNvPr id="14" name="Shape 10"/>
-          <p:cNvSpPr/>
-          <p:nvPr/>
-        </p:nvSpPr>
-        <p:spPr>
-          <a:xfrm>
-            <a:off x="8124749" y="1783080"/>
-            <a:ext cx="3472586" cy="4069080"/>
-          </a:xfrm>
-          <a:prstGeom prst="roundRect">
-            <a:avLst>
-              <a:gd name="adj" fmla="val 2633"/>
-            </a:avLst>
-          </a:prstGeom>
-          <a:solidFill>
-            <a:srgbClr val="F5EFF1"/>
-          </a:solidFill>
-          <a:ln w="9525">
-            <a:solidFill>
-              <a:srgbClr val="E5D9DE"/>
-            </a:solidFill>
-            <a:prstDash val="solid"/>
-          </a:ln>
-        </p:spPr>
-      </p:sp>
-      <p:pic>
-        <p:nvPicPr>
-          <p:cNvPr id="15" name="Image 2" descr="preencoded.png">    </p:cNvPr>
-          <p:cNvPicPr>
-            <a:picLocks noChangeAspect="1"/>
-          </p:cNvPicPr>
-          <p:nvPr/>
-        </p:nvPicPr>
-        <p:blipFill>
-          <a:blip r:embed="rId3"/>
-          <a:stretch>
-            <a:fillRect/>
-          </a:stretch>
-        </p:blipFill>
-        <p:spPr>
-          <a:xfrm>
-            <a:off x="8124749" y="1783080"/>
-            <a:ext cx="3472586" cy="1691640"/>
-          </a:xfrm>
-          <a:prstGeom prst="rect">
-            <a:avLst/>
-          </a:prstGeom>
-        </p:spPr>
-      </p:pic>
-      <p:sp>
-        <p:nvSpPr>
-          <p:cNvPr id="16" name="Text 11"/>
-          <p:cNvSpPr txBox="1"/>
-          <p:nvPr/>
-        </p:nvSpPr>
-        <p:spPr>
-          <a:xfrm>
-            <a:off x="8325917" y="3639312"/>
-            <a:ext cx="3070250" cy="384048"/>
-          </a:xfrm>
-          <a:prstGeom prst="rect">
-            <a:avLst/>
-          </a:prstGeom>
-          <a:noFill/>
-          <a:ln/>
-        </p:spPr>
-        <p:txBody>
-          <a:bodyPr wrap="square" lIns="0" tIns="0" rIns="0" bIns="0" rtlCol="0" anchor="ctr"/>
-          <a:lstStyle/>
-          <a:p>
-            <a:pPr algn="l" indent="0" marL="0">
-              <a:buNone/>
-            </a:pPr>
-            <a:r>
-              <a:rPr lang="en-US" sz="1500" b="1" dirty="0">
-                <a:solidFill>
-                  <a:srgbClr val="6B2A44"/>
-                </a:solidFill>
-                <a:latin typeface="Cambria" pitchFamily="34" charset="0"/>
-                <a:ea typeface="Cambria" pitchFamily="34" charset="-122"/>
-                <a:cs typeface="Cambria" pitchFamily="34" charset="-120"/>
-              </a:rPr>
-              <a:t>Almería — Campo de Dalías</a:t>
-            </a:r>
-            <a:endParaRPr lang="en-US" sz="1500" dirty="0"/>
-          </a:p>
-        </p:txBody>
-      </p:sp>
-      <p:sp>
-        <p:nvSpPr>
-          <p:cNvPr id="17" name="Text 12"/>
-          <p:cNvSpPr txBox="1"/>
-          <p:nvPr/>
-        </p:nvSpPr>
-        <p:spPr>
-          <a:xfrm>
-            <a:off x="8325917" y="4041648"/>
-            <a:ext cx="3070250" cy="329184"/>
-          </a:xfrm>
-          <a:prstGeom prst="rect">
-            <a:avLst/>
-          </a:prstGeom>
-          <a:noFill/>
-          <a:ln/>
-        </p:spPr>
-        <p:txBody>
-          <a:bodyPr wrap="square" lIns="0" tIns="0" rIns="0" bIns="0" rtlCol="0" anchor="ctr"/>
-          <a:lstStyle/>
-          <a:p>
-            <a:pPr algn="l" indent="0" marL="0">
-              <a:buNone/>
-            </a:pPr>
-            <a:r>
-              <a:rPr lang="en-US" sz="1250" b="1" dirty="0">
-                <a:solidFill>
-                  <a:srgbClr val="8F6D0F"/>
-                </a:solidFill>
-                <a:latin typeface="Calibri" pitchFamily="34" charset="0"/>
-                <a:ea typeface="Calibri" pitchFamily="34" charset="-122"/>
-                <a:cs typeface="Calibri" pitchFamily="34" charset="-120"/>
-              </a:rPr>
-              <a:t>≈ 33 000 ha de invernadero</a:t>
-            </a:r>
-            <a:endParaRPr lang="en-US" sz="1250" dirty="0"/>
-          </a:p>
-        </p:txBody>
-      </p:sp>
-      <p:sp>
-        <p:nvSpPr>
-          <p:cNvPr id="18" name="Text 13"/>
-          <p:cNvSpPr txBox="1"/>
-          <p:nvPr/>
-        </p:nvSpPr>
-        <p:spPr>
-          <a:xfrm>
-            <a:off x="8325917" y="4407408"/>
-            <a:ext cx="3070250" cy="1280160"/>
-          </a:xfrm>
-          <a:prstGeom prst="rect">
-            <a:avLst/>
-          </a:prstGeom>
-          <a:noFill/>
-          <a:ln/>
-        </p:spPr>
-        <p:txBody>
-          <a:bodyPr wrap="square" lIns="0" tIns="0" rIns="0" bIns="0" rtlCol="0" anchor="t"/>
-          <a:lstStyle/>
-          <a:p>
-            <a:pPr algn="l" marL="342900" indent="-342900">
-              <a:lnSpc>
-                <a:spcPct val="116000"/>
-              </a:lnSpc>
-              <a:spcAft>
-                <a:spcPts val="700"/>
-              </a:spcAft>
-              <a:buSzPct val="100000"/>
-              <a:buChar char="•"/>
-            </a:pPr>
-            <a:r>
-              <a:rPr lang="en-US" sz="1150" dirty="0">
-                <a:solidFill>
-                  <a:srgbClr val="3F3138"/>
-                </a:solidFill>
-                <a:latin typeface="Calibri" pitchFamily="34" charset="0"/>
-                <a:ea typeface="Calibri" pitchFamily="34" charset="-122"/>
-                <a:cs typeface="Calibri" pitchFamily="34" charset="-120"/>
-              </a:rPr>
-              <a:t>La mayor superficie de cultivo bajo plástico del mundo, sobre acuíferos sobreexplotados y con intrusión salina en la franja costera.</a:t>
-            </a:r>
-            <a:endParaRPr lang="en-US" sz="1150" dirty="0"/>
-          </a:p>
-          <a:p>
-            <a:pPr algn="l" marL="342900" indent="-342900">
-              <a:lnSpc>
-                <a:spcPct val="116000"/>
-              </a:lnSpc>
-              <a:spcAft>
-                <a:spcPts val="700"/>
-              </a:spcAft>
-              <a:buSzPct val="100000"/>
-              <a:buChar char="•"/>
-            </a:pPr>
-            <a:r>
-              <a:rPr lang="en-US" sz="1150" dirty="0">
-                <a:solidFill>
-                  <a:srgbClr val="3F3138"/>
-                </a:solidFill>
-                <a:latin typeface="Calibri" pitchFamily="34" charset="0"/>
-                <a:ea typeface="Calibri" pitchFamily="34" charset="-122"/>
-                <a:cs typeface="Calibri" pitchFamily="34" charset="-120"/>
-              </a:rPr>
-              <a:t>Ciclos cortos y rotaciones rápidas: el ensayo da resultado en una campaña, no en cuatro años.</a:t>
-            </a:r>
-            <a:endParaRPr lang="en-US" sz="1150" dirty="0"/>
-          </a:p>
-          <a:p>
-            <a:pPr algn="l" marL="342900" indent="-342900">
-              <a:lnSpc>
-                <a:spcPct val="116000"/>
-              </a:lnSpc>
-              <a:spcAft>
-                <a:spcPts val="700"/>
-              </a:spcAft>
-              <a:buSzPct val="100000"/>
-              <a:buChar char="•"/>
-            </a:pPr>
-            <a:r>
-              <a:rPr lang="en-US" sz="1150" dirty="0">
-                <a:solidFill>
-                  <a:srgbClr val="3F3138"/>
-                </a:solidFill>
-                <a:latin typeface="Calibri" pitchFamily="34" charset="0"/>
-                <a:ea typeface="Calibri" pitchFamily="34" charset="-122"/>
-                <a:cs typeface="Calibri" pitchFamily="34" charset="-120"/>
-              </a:rPr>
-              <a:t>Compradores del norte de Europa que auditan la huella hídrica de sus proveedores y piden trazabilidad documental.</a:t>
-            </a:r>
-            <a:endParaRPr lang="en-US" sz="1150" dirty="0"/>
-          </a:p>
-        </p:txBody>
-      </p:sp>
-      <p:sp>
-        <p:nvSpPr>
-          <p:cNvPr id="19" name="Text 14"/>
+              <a:t>NAPEMA® controla plagas sin residuos, en cultivos donde la lucha biológica ya es la norma.</a:t>
+            </a:r>
+            <a:endParaRPr lang="en-US" sz="1400" dirty="0"/>
+          </a:p>
+        </p:txBody>
+      </p:sp>
+      <p:sp>
+        <p:nvSpPr>
+          <p:cNvPr id="6" name="Text 3"/>
           <p:cNvSpPr txBox="1"/>
           <p:nvPr/>
         </p:nvSpPr>
@@ -7445,7 +12745,7 @@
       </p:sp>
       <p:sp>
         <p:nvSpPr>
-          <p:cNvPr id="20" name="Text 15"/>
+          <p:cNvPr id="7" name="Text 4"/>
           <p:cNvSpPr txBox="1"/>
           <p:nvPr/>
         </p:nvSpPr>
@@ -7549,7 +12849,7 @@
                 <a:ea typeface="Calibri" pitchFamily="34" charset="-122"/>
                 <a:cs typeface="Calibri" pitchFamily="34" charset="-120"/>
               </a:rPr>
-              <a:t>CÓMO TRABAJAMOS</a:t>
+              <a:t>Potencial de rendimiento</a:t>
             </a:r>
             <a:endParaRPr lang="en-US" sz="1150" dirty="0"/>
           </a:p>
@@ -7588,26 +12888,42 @@
                 <a:ea typeface="Cambria" pitchFamily="34" charset="-122"/>
                 <a:cs typeface="Cambria" pitchFamily="34" charset="-120"/>
               </a:rPr>
-              <a:t>Un despliegue por etapas, medido en cada paso</a:t>
+              <a:t>Aumento de rendimiento esperado por cultivo</a:t>
             </a:r>
             <a:endParaRPr lang="en-US" sz="3000" dirty="0"/>
           </a:p>
         </p:txBody>
       </p:sp>
-      <p:sp>
-        <p:nvSpPr>
-          <p:cNvPr id="4" name="Shape 2"/>
+      <p:graphicFrame>
+        <p:nvGraphicFramePr>
+          <p:cNvPr id="4" name="Chart 0" descr=""/>
+          <p:cNvGraphicFramePr/>
+          <p:nvPr/>
+        </p:nvGraphicFramePr>
+        <p:xfrm>
+          <a:off x="594360" y="1783080"/>
+          <a:ext cx="7360920" cy="3977640"/>
+        </p:xfrm>
+        <a:graphic xmlns:a="http://schemas.openxmlformats.org/drawingml/2006/main">
+          <a:graphicData uri="http://schemas.openxmlformats.org/drawingml/2006/chart">
+            <c:chart xmlns:c="http://schemas.openxmlformats.org/drawingml/2006/chart" r:id="rId1"/>
+          </a:graphicData>
+        </a:graphic>
+      </p:graphicFrame>
+      <p:sp>
+        <p:nvSpPr>
+          <p:cNvPr id="5" name="Shape 2"/>
           <p:cNvSpPr/>
           <p:nvPr/>
         </p:nvSpPr>
         <p:spPr>
           <a:xfrm>
-            <a:off x="594360" y="1874520"/>
-            <a:ext cx="2545004" cy="2834640"/>
+            <a:off x="8275320" y="1783080"/>
+            <a:ext cx="3291840" cy="3977640"/>
           </a:xfrm>
           <a:prstGeom prst="roundRect">
             <a:avLst>
-              <a:gd name="adj" fmla="val 3593"/>
+              <a:gd name="adj" fmla="val 2778"/>
             </a:avLst>
           </a:prstGeom>
           <a:solidFill>
@@ -7623,34 +12939,14 @@
       </p:sp>
       <p:sp>
         <p:nvSpPr>
-          <p:cNvPr id="5" name="Shape 3"/>
-          <p:cNvSpPr/>
-          <p:nvPr/>
-        </p:nvSpPr>
-        <p:spPr>
-          <a:xfrm>
-            <a:off x="822960" y="2103120"/>
-            <a:ext cx="566928" cy="566928"/>
-          </a:xfrm>
-          <a:prstGeom prst="ellipse">
-            <a:avLst/>
-          </a:prstGeom>
-          <a:solidFill>
-            <a:srgbClr val="6B2A44"/>
-          </a:solidFill>
-          <a:ln/>
-        </p:spPr>
-      </p:sp>
-      <p:sp>
-        <p:nvSpPr>
-          <p:cNvPr id="6" name="Text 4"/>
-          <p:cNvSpPr txBox="1"/>
-          <p:nvPr/>
-        </p:nvSpPr>
-        <p:spPr>
-          <a:xfrm>
-            <a:off x="822960" y="2103120"/>
-            <a:ext cx="566928" cy="566928"/>
+          <p:cNvPr id="6" name="Text 3"/>
+          <p:cNvSpPr txBox="1"/>
+          <p:nvPr/>
+        </p:nvSpPr>
+        <p:spPr>
+          <a:xfrm>
+            <a:off x="8503920" y="2011680"/>
+            <a:ext cx="2834640" cy="457200"/>
           </a:xfrm>
           <a:prstGeom prst="rect">
             <a:avLst/>
@@ -7662,616 +12958,34 @@
           <a:bodyPr wrap="square" lIns="0" tIns="0" rIns="0" bIns="0" rtlCol="0" anchor="ctr"/>
           <a:lstStyle/>
           <a:p>
-            <a:pPr algn="ctr" indent="0" marL="0">
-              <a:buNone/>
-            </a:pPr>
-            <a:r>
-              <a:rPr lang="en-US" sz="1600" b="1" dirty="0">
-                <a:solidFill>
-                  <a:srgbClr val="FFFFFF"/>
+            <a:pPr algn="l" indent="0" marL="0">
+              <a:buNone/>
+            </a:pPr>
+            <a:r>
+              <a:rPr lang="en-US" sz="1300" b="1" dirty="0">
+                <a:solidFill>
+                  <a:srgbClr val="6B2A44"/>
                 </a:solidFill>
                 <a:latin typeface="Cambria" pitchFamily="34" charset="0"/>
                 <a:ea typeface="Cambria" pitchFamily="34" charset="-122"/>
                 <a:cs typeface="Cambria" pitchFamily="34" charset="-120"/>
               </a:rPr>
-              <a:t>1</a:t>
-            </a:r>
-            <a:endParaRPr lang="en-US" sz="1600" dirty="0"/>
-          </a:p>
-        </p:txBody>
-      </p:sp>
-      <p:sp>
-        <p:nvSpPr>
-          <p:cNvPr id="7" name="Text 5"/>
-          <p:cNvSpPr txBox="1"/>
-          <p:nvPr/>
-        </p:nvSpPr>
-        <p:spPr>
-          <a:xfrm>
-            <a:off x="822960" y="2788920"/>
-            <a:ext cx="2087804" cy="457200"/>
-          </a:xfrm>
-          <a:prstGeom prst="rect">
-            <a:avLst/>
-          </a:prstGeom>
-          <a:noFill/>
-          <a:ln/>
-        </p:spPr>
-        <p:txBody>
-          <a:bodyPr wrap="square" lIns="0" tIns="0" rIns="0" bIns="0" rtlCol="0" anchor="ctr"/>
-          <a:lstStyle/>
-          <a:p>
-            <a:pPr algn="l" indent="0" marL="0">
-              <a:buNone/>
-            </a:pPr>
-            <a:r>
-              <a:rPr lang="en-US" sz="1400" b="1" dirty="0">
-                <a:solidFill>
-                  <a:srgbClr val="6B2A44"/>
-                </a:solidFill>
-                <a:latin typeface="Cambria" pitchFamily="34" charset="0"/>
-                <a:ea typeface="Cambria" pitchFamily="34" charset="-122"/>
-                <a:cs typeface="Cambria" pitchFamily="34" charset="-120"/>
-              </a:rPr>
-              <a:t>Diagnóstico</a:t>
-            </a:r>
-            <a:endParaRPr lang="en-US" sz="1400" dirty="0"/>
-          </a:p>
-        </p:txBody>
-      </p:sp>
-      <p:sp>
-        <p:nvSpPr>
-          <p:cNvPr id="8" name="Text 6"/>
-          <p:cNvSpPr txBox="1"/>
-          <p:nvPr/>
-        </p:nvSpPr>
-        <p:spPr>
-          <a:xfrm>
-            <a:off x="822960" y="3291840"/>
-            <a:ext cx="2087804" cy="1234440"/>
-          </a:xfrm>
-          <a:prstGeom prst="rect">
-            <a:avLst/>
-          </a:prstGeom>
-          <a:noFill/>
-          <a:ln/>
-        </p:spPr>
-        <p:txBody>
-          <a:bodyPr wrap="square" lIns="0" tIns="0" rIns="0" bIns="0" rtlCol="0" anchor="t"/>
-          <a:lstStyle/>
-          <a:p>
-            <a:pPr algn="l" indent="0" marL="0">
-              <a:lnSpc>
-                <a:spcPct val="120000"/>
-              </a:lnSpc>
-              <a:buNone/>
-            </a:pPr>
-            <a:r>
-              <a:rPr lang="en-US" sz="1200" dirty="0">
-                <a:solidFill>
-                  <a:srgbClr val="3F3138"/>
-                </a:solidFill>
-                <a:latin typeface="Calibri" pitchFamily="34" charset="0"/>
-                <a:ea typeface="Calibri" pitchFamily="34" charset="-122"/>
-                <a:cs typeface="Calibri" pitchFamily="34" charset="-120"/>
-              </a:rPr>
-              <a:t>Análisis del suelo, del método de riego y del cultivo. Sin compromiso en esta etapa.</a:t>
-            </a:r>
-            <a:endParaRPr lang="en-US" sz="1200" dirty="0"/>
-          </a:p>
-        </p:txBody>
-      </p:sp>
-      <p:sp>
-        <p:nvSpPr>
-          <p:cNvPr id="9" name="Shape 7"/>
-          <p:cNvSpPr/>
-          <p:nvPr/>
-        </p:nvSpPr>
-        <p:spPr>
-          <a:xfrm>
-            <a:off x="3413684" y="1874520"/>
-            <a:ext cx="2545004" cy="2834640"/>
-          </a:xfrm>
-          <a:prstGeom prst="roundRect">
-            <a:avLst>
-              <a:gd name="adj" fmla="val 3593"/>
-            </a:avLst>
-          </a:prstGeom>
-          <a:solidFill>
-            <a:srgbClr val="F5EFF1"/>
-          </a:solidFill>
-          <a:ln w="9525">
-            <a:solidFill>
-              <a:srgbClr val="E5D9DE"/>
-            </a:solidFill>
-            <a:prstDash val="solid"/>
-          </a:ln>
-        </p:spPr>
-      </p:sp>
-      <p:sp>
-        <p:nvSpPr>
-          <p:cNvPr id="10" name="Shape 8"/>
-          <p:cNvSpPr/>
-          <p:nvPr/>
-        </p:nvSpPr>
-        <p:spPr>
-          <a:xfrm>
-            <a:off x="3642284" y="2103120"/>
-            <a:ext cx="566928" cy="566928"/>
-          </a:xfrm>
-          <a:prstGeom prst="ellipse">
-            <a:avLst/>
-          </a:prstGeom>
-          <a:solidFill>
-            <a:srgbClr val="6B2A44"/>
-          </a:solidFill>
-          <a:ln/>
-        </p:spPr>
-      </p:sp>
-      <p:sp>
-        <p:nvSpPr>
-          <p:cNvPr id="11" name="Text 9"/>
-          <p:cNvSpPr txBox="1"/>
-          <p:nvPr/>
-        </p:nvSpPr>
-        <p:spPr>
-          <a:xfrm>
-            <a:off x="3642284" y="2103120"/>
-            <a:ext cx="566928" cy="566928"/>
-          </a:xfrm>
-          <a:prstGeom prst="rect">
-            <a:avLst/>
-          </a:prstGeom>
-          <a:noFill/>
-          <a:ln/>
-        </p:spPr>
-        <p:txBody>
-          <a:bodyPr wrap="square" lIns="0" tIns="0" rIns="0" bIns="0" rtlCol="0" anchor="ctr"/>
-          <a:lstStyle/>
-          <a:p>
-            <a:pPr algn="ctr" indent="0" marL="0">
-              <a:buNone/>
-            </a:pPr>
-            <a:r>
-              <a:rPr lang="en-US" sz="1600" b="1" dirty="0">
-                <a:solidFill>
-                  <a:srgbClr val="FFFFFF"/>
-                </a:solidFill>
-                <a:latin typeface="Cambria" pitchFamily="34" charset="0"/>
-                <a:ea typeface="Cambria" pitchFamily="34" charset="-122"/>
-                <a:cs typeface="Cambria" pitchFamily="34" charset="-120"/>
-              </a:rPr>
-              <a:t>2</a:t>
-            </a:r>
-            <a:endParaRPr lang="en-US" sz="1600" dirty="0"/>
-          </a:p>
-        </p:txBody>
-      </p:sp>
-      <p:sp>
-        <p:nvSpPr>
-          <p:cNvPr id="12" name="Text 10"/>
-          <p:cNvSpPr txBox="1"/>
-          <p:nvPr/>
-        </p:nvSpPr>
-        <p:spPr>
-          <a:xfrm>
-            <a:off x="3642284" y="2788920"/>
-            <a:ext cx="2087804" cy="457200"/>
-          </a:xfrm>
-          <a:prstGeom prst="rect">
-            <a:avLst/>
-          </a:prstGeom>
-          <a:noFill/>
-          <a:ln/>
-        </p:spPr>
-        <p:txBody>
-          <a:bodyPr wrap="square" lIns="0" tIns="0" rIns="0" bIns="0" rtlCol="0" anchor="ctr"/>
-          <a:lstStyle/>
-          <a:p>
-            <a:pPr algn="l" indent="0" marL="0">
-              <a:buNone/>
-            </a:pPr>
-            <a:r>
-              <a:rPr lang="en-US" sz="1400" b="1" dirty="0">
-                <a:solidFill>
-                  <a:srgbClr val="6B2A44"/>
-                </a:solidFill>
-                <a:latin typeface="Cambria" pitchFamily="34" charset="0"/>
-                <a:ea typeface="Cambria" pitchFamily="34" charset="-122"/>
-                <a:cs typeface="Cambria" pitchFamily="34" charset="-120"/>
-              </a:rPr>
-              <a:t>Parcela piloto</a:t>
-            </a:r>
-            <a:endParaRPr lang="en-US" sz="1400" dirty="0"/>
-          </a:p>
-        </p:txBody>
-      </p:sp>
-      <p:sp>
-        <p:nvSpPr>
-          <p:cNvPr id="13" name="Text 11"/>
-          <p:cNvSpPr txBox="1"/>
-          <p:nvPr/>
-        </p:nvSpPr>
-        <p:spPr>
-          <a:xfrm>
-            <a:off x="3642284" y="3291840"/>
-            <a:ext cx="2087804" cy="1234440"/>
-          </a:xfrm>
-          <a:prstGeom prst="rect">
-            <a:avLst/>
-          </a:prstGeom>
-          <a:noFill/>
-          <a:ln/>
-        </p:spPr>
-        <p:txBody>
-          <a:bodyPr wrap="square" lIns="0" tIns="0" rIns="0" bIns="0" rtlCol="0" anchor="t"/>
-          <a:lstStyle/>
-          <a:p>
-            <a:pPr algn="l" indent="0" marL="0">
-              <a:lnSpc>
-                <a:spcPct val="120000"/>
-              </a:lnSpc>
-              <a:buNone/>
-            </a:pPr>
-            <a:r>
-              <a:rPr lang="en-US" sz="1200" dirty="0">
-                <a:solidFill>
-                  <a:srgbClr val="3F3138"/>
-                </a:solidFill>
-                <a:latin typeface="Calibri" pitchFamily="34" charset="0"/>
-                <a:ea typeface="Calibri" pitchFamily="34" charset="-122"/>
-                <a:cs typeface="Calibri" pitchFamily="34" charset="-120"/>
-              </a:rPr>
-              <a:t>Un ensayo comparativo en una parcela, con parcela testigo conducida de forma idéntica.</a:t>
-            </a:r>
-            <a:endParaRPr lang="en-US" sz="1200" dirty="0"/>
-          </a:p>
-        </p:txBody>
-      </p:sp>
-      <p:sp>
-        <p:nvSpPr>
-          <p:cNvPr id="14" name="Shape 12"/>
-          <p:cNvSpPr/>
-          <p:nvPr/>
-        </p:nvSpPr>
-        <p:spPr>
-          <a:xfrm>
-            <a:off x="6233008" y="1874520"/>
-            <a:ext cx="2545004" cy="2834640"/>
-          </a:xfrm>
-          <a:prstGeom prst="roundRect">
-            <a:avLst>
-              <a:gd name="adj" fmla="val 3593"/>
-            </a:avLst>
-          </a:prstGeom>
-          <a:solidFill>
-            <a:srgbClr val="F5EFF1"/>
-          </a:solidFill>
-          <a:ln w="9525">
-            <a:solidFill>
-              <a:srgbClr val="E5D9DE"/>
-            </a:solidFill>
-            <a:prstDash val="solid"/>
-          </a:ln>
-        </p:spPr>
-      </p:sp>
-      <p:sp>
-        <p:nvSpPr>
-          <p:cNvPr id="15" name="Shape 13"/>
-          <p:cNvSpPr/>
-          <p:nvPr/>
-        </p:nvSpPr>
-        <p:spPr>
-          <a:xfrm>
-            <a:off x="6461608" y="2103120"/>
-            <a:ext cx="566928" cy="566928"/>
-          </a:xfrm>
-          <a:prstGeom prst="ellipse">
-            <a:avLst/>
-          </a:prstGeom>
-          <a:solidFill>
-            <a:srgbClr val="6B2A44"/>
-          </a:solidFill>
-          <a:ln/>
-        </p:spPr>
-      </p:sp>
-      <p:sp>
-        <p:nvSpPr>
-          <p:cNvPr id="16" name="Text 14"/>
-          <p:cNvSpPr txBox="1"/>
-          <p:nvPr/>
-        </p:nvSpPr>
-        <p:spPr>
-          <a:xfrm>
-            <a:off x="6461608" y="2103120"/>
-            <a:ext cx="566928" cy="566928"/>
-          </a:xfrm>
-          <a:prstGeom prst="rect">
-            <a:avLst/>
-          </a:prstGeom>
-          <a:noFill/>
-          <a:ln/>
-        </p:spPr>
-        <p:txBody>
-          <a:bodyPr wrap="square" lIns="0" tIns="0" rIns="0" bIns="0" rtlCol="0" anchor="ctr"/>
-          <a:lstStyle/>
-          <a:p>
-            <a:pPr algn="ctr" indent="0" marL="0">
-              <a:buNone/>
-            </a:pPr>
-            <a:r>
-              <a:rPr lang="en-US" sz="1600" b="1" dirty="0">
-                <a:solidFill>
-                  <a:srgbClr val="FFFFFF"/>
-                </a:solidFill>
-                <a:latin typeface="Cambria" pitchFamily="34" charset="0"/>
-                <a:ea typeface="Cambria" pitchFamily="34" charset="-122"/>
-                <a:cs typeface="Cambria" pitchFamily="34" charset="-120"/>
-              </a:rPr>
-              <a:t>3</a:t>
-            </a:r>
-            <a:endParaRPr lang="en-US" sz="1600" dirty="0"/>
-          </a:p>
-        </p:txBody>
-      </p:sp>
-      <p:sp>
-        <p:nvSpPr>
-          <p:cNvPr id="17" name="Text 15"/>
-          <p:cNvSpPr txBox="1"/>
-          <p:nvPr/>
-        </p:nvSpPr>
-        <p:spPr>
-          <a:xfrm>
-            <a:off x="6461608" y="2788920"/>
-            <a:ext cx="2087804" cy="457200"/>
-          </a:xfrm>
-          <a:prstGeom prst="rect">
-            <a:avLst/>
-          </a:prstGeom>
-          <a:noFill/>
-          <a:ln/>
-        </p:spPr>
-        <p:txBody>
-          <a:bodyPr wrap="square" lIns="0" tIns="0" rIns="0" bIns="0" rtlCol="0" anchor="ctr"/>
-          <a:lstStyle/>
-          <a:p>
-            <a:pPr algn="l" indent="0" marL="0">
-              <a:buNone/>
-            </a:pPr>
-            <a:r>
-              <a:rPr lang="en-US" sz="1400" b="1" dirty="0">
-                <a:solidFill>
-                  <a:srgbClr val="6B2A44"/>
-                </a:solidFill>
-                <a:latin typeface="Cambria" pitchFamily="34" charset="0"/>
-                <a:ea typeface="Cambria" pitchFamily="34" charset="-122"/>
-                <a:cs typeface="Cambria" pitchFamily="34" charset="-120"/>
-              </a:rPr>
-              <a:t>Medición</a:t>
-            </a:r>
-            <a:endParaRPr lang="en-US" sz="1400" dirty="0"/>
-          </a:p>
-        </p:txBody>
-      </p:sp>
-      <p:sp>
-        <p:nvSpPr>
-          <p:cNvPr id="18" name="Text 16"/>
-          <p:cNvSpPr txBox="1"/>
-          <p:nvPr/>
-        </p:nvSpPr>
-        <p:spPr>
-          <a:xfrm>
-            <a:off x="6461608" y="3291840"/>
-            <a:ext cx="2087804" cy="1234440"/>
-          </a:xfrm>
-          <a:prstGeom prst="rect">
-            <a:avLst/>
-          </a:prstGeom>
-          <a:noFill/>
-          <a:ln/>
-        </p:spPr>
-        <p:txBody>
-          <a:bodyPr wrap="square" lIns="0" tIns="0" rIns="0" bIns="0" rtlCol="0" anchor="t"/>
-          <a:lstStyle/>
-          <a:p>
-            <a:pPr algn="l" indent="0" marL="0">
-              <a:lnSpc>
-                <a:spcPct val="120000"/>
-              </a:lnSpc>
-              <a:buNone/>
-            </a:pPr>
-            <a:r>
-              <a:rPr lang="en-US" sz="1200" dirty="0">
-                <a:solidFill>
-                  <a:srgbClr val="3F3138"/>
-                </a:solidFill>
-                <a:latin typeface="Calibri" pitchFamily="34" charset="0"/>
-                <a:ea typeface="Calibri" pitchFamily="34" charset="-122"/>
-                <a:cs typeface="Calibri" pitchFamily="34" charset="-120"/>
-              </a:rPr>
-              <a:t>Registro de consumo de agua y de rendimiento durante un ciclo de cultivo completo.</a:t>
-            </a:r>
-            <a:endParaRPr lang="en-US" sz="1200" dirty="0"/>
-          </a:p>
-        </p:txBody>
-      </p:sp>
-      <p:sp>
-        <p:nvSpPr>
-          <p:cNvPr id="19" name="Shape 17"/>
-          <p:cNvSpPr/>
-          <p:nvPr/>
-        </p:nvSpPr>
-        <p:spPr>
-          <a:xfrm>
-            <a:off x="9052331" y="1874520"/>
-            <a:ext cx="2545004" cy="2834640"/>
-          </a:xfrm>
-          <a:prstGeom prst="roundRect">
-            <a:avLst>
-              <a:gd name="adj" fmla="val 3593"/>
-            </a:avLst>
-          </a:prstGeom>
-          <a:solidFill>
-            <a:srgbClr val="F5EFF1"/>
-          </a:solidFill>
-          <a:ln w="9525">
-            <a:solidFill>
-              <a:srgbClr val="E5D9DE"/>
-            </a:solidFill>
-            <a:prstDash val="solid"/>
-          </a:ln>
-        </p:spPr>
-      </p:sp>
-      <p:sp>
-        <p:nvSpPr>
-          <p:cNvPr id="20" name="Shape 18"/>
-          <p:cNvSpPr/>
-          <p:nvPr/>
-        </p:nvSpPr>
-        <p:spPr>
-          <a:xfrm>
-            <a:off x="9280931" y="2103120"/>
-            <a:ext cx="566928" cy="566928"/>
-          </a:xfrm>
-          <a:prstGeom prst="ellipse">
-            <a:avLst/>
-          </a:prstGeom>
-          <a:solidFill>
-            <a:srgbClr val="6B2A44"/>
-          </a:solidFill>
-          <a:ln/>
-        </p:spPr>
-      </p:sp>
-      <p:sp>
-        <p:nvSpPr>
-          <p:cNvPr id="21" name="Text 19"/>
-          <p:cNvSpPr txBox="1"/>
-          <p:nvPr/>
-        </p:nvSpPr>
-        <p:spPr>
-          <a:xfrm>
-            <a:off x="9280931" y="2103120"/>
-            <a:ext cx="566928" cy="566928"/>
-          </a:xfrm>
-          <a:prstGeom prst="rect">
-            <a:avLst/>
-          </a:prstGeom>
-          <a:noFill/>
-          <a:ln/>
-        </p:spPr>
-        <p:txBody>
-          <a:bodyPr wrap="square" lIns="0" tIns="0" rIns="0" bIns="0" rtlCol="0" anchor="ctr"/>
-          <a:lstStyle/>
-          <a:p>
-            <a:pPr algn="ctr" indent="0" marL="0">
-              <a:buNone/>
-            </a:pPr>
-            <a:r>
-              <a:rPr lang="en-US" sz="1600" b="1" dirty="0">
-                <a:solidFill>
-                  <a:srgbClr val="FFFFFF"/>
-                </a:solidFill>
-                <a:latin typeface="Cambria" pitchFamily="34" charset="0"/>
-                <a:ea typeface="Cambria" pitchFamily="34" charset="-122"/>
-                <a:cs typeface="Cambria" pitchFamily="34" charset="-120"/>
-              </a:rPr>
-              <a:t>4</a:t>
-            </a:r>
-            <a:endParaRPr lang="en-US" sz="1600" dirty="0"/>
-          </a:p>
-        </p:txBody>
-      </p:sp>
-      <p:sp>
-        <p:nvSpPr>
-          <p:cNvPr id="22" name="Text 20"/>
-          <p:cNvSpPr txBox="1"/>
-          <p:nvPr/>
-        </p:nvSpPr>
-        <p:spPr>
-          <a:xfrm>
-            <a:off x="9280931" y="2788920"/>
-            <a:ext cx="2087804" cy="457200"/>
-          </a:xfrm>
-          <a:prstGeom prst="rect">
-            <a:avLst/>
-          </a:prstGeom>
-          <a:noFill/>
-          <a:ln/>
-        </p:spPr>
-        <p:txBody>
-          <a:bodyPr wrap="square" lIns="0" tIns="0" rIns="0" bIns="0" rtlCol="0" anchor="ctr"/>
-          <a:lstStyle/>
-          <a:p>
-            <a:pPr algn="l" indent="0" marL="0">
-              <a:buNone/>
-            </a:pPr>
-            <a:r>
-              <a:rPr lang="en-US" sz="1400" b="1" dirty="0">
-                <a:solidFill>
-                  <a:srgbClr val="6B2A44"/>
-                </a:solidFill>
-                <a:latin typeface="Cambria" pitchFamily="34" charset="0"/>
-                <a:ea typeface="Cambria" pitchFamily="34" charset="-122"/>
-                <a:cs typeface="Cambria" pitchFamily="34" charset="-120"/>
-              </a:rPr>
-              <a:t>Extensión</a:t>
-            </a:r>
-            <a:endParaRPr lang="en-US" sz="1400" dirty="0"/>
-          </a:p>
-        </p:txBody>
-      </p:sp>
-      <p:sp>
-        <p:nvSpPr>
-          <p:cNvPr id="23" name="Text 21"/>
-          <p:cNvSpPr txBox="1"/>
-          <p:nvPr/>
-        </p:nvSpPr>
-        <p:spPr>
-          <a:xfrm>
-            <a:off x="9280931" y="3291840"/>
-            <a:ext cx="2087804" cy="1234440"/>
-          </a:xfrm>
-          <a:prstGeom prst="rect">
-            <a:avLst/>
-          </a:prstGeom>
-          <a:noFill/>
-          <a:ln/>
-        </p:spPr>
-        <p:txBody>
-          <a:bodyPr wrap="square" lIns="0" tIns="0" rIns="0" bIns="0" rtlCol="0" anchor="t"/>
-          <a:lstStyle/>
-          <a:p>
-            <a:pPr algn="l" indent="0" marL="0">
-              <a:lnSpc>
-                <a:spcPct val="120000"/>
-              </a:lnSpc>
-              <a:buNone/>
-            </a:pPr>
-            <a:r>
-              <a:rPr lang="en-US" sz="1200" dirty="0">
-                <a:solidFill>
-                  <a:srgbClr val="3F3138"/>
-                </a:solidFill>
-                <a:latin typeface="Calibri" pitchFamily="34" charset="0"/>
-                <a:ea typeface="Calibri" pitchFamily="34" charset="-122"/>
-                <a:cs typeface="Calibri" pitchFamily="34" charset="-120"/>
-              </a:rPr>
-              <a:t>Ampliación gradual a las demás parcelas sobre la base de los resultados constatados.</a:t>
-            </a:r>
-            <a:endParaRPr lang="en-US" sz="1200" dirty="0"/>
-          </a:p>
-        </p:txBody>
-      </p:sp>
-      <p:sp>
-        <p:nvSpPr>
-          <p:cNvPr id="24" name="Text 22"/>
-          <p:cNvSpPr txBox="1"/>
-          <p:nvPr/>
-        </p:nvSpPr>
-        <p:spPr>
-          <a:xfrm>
-            <a:off x="594360" y="4983480"/>
-            <a:ext cx="11002975" cy="822960"/>
+              <a:t>Leer con prudencia</a:t>
+            </a:r>
+            <a:endParaRPr lang="en-US" sz="1300" dirty="0"/>
+          </a:p>
+        </p:txBody>
+      </p:sp>
+      <p:sp>
+        <p:nvSpPr>
+          <p:cNvPr id="7" name="Text 4"/>
+          <p:cNvSpPr txBox="1"/>
+          <p:nvPr/>
+        </p:nvSpPr>
+        <p:spPr>
+          <a:xfrm>
+            <a:off x="8503920" y="2560320"/>
+            <a:ext cx="2834640" cy="3017520"/>
           </a:xfrm>
           <a:prstGeom prst="rect">
             <a:avLst/>
@@ -8290,23 +13004,52 @@
               <a:buNone/>
             </a:pPr>
             <a:r>
-              <a:rPr lang="en-US" sz="1250" i="1" dirty="0">
-                <a:solidFill>
-                  <a:srgbClr val="7C6B73"/>
-                </a:solidFill>
-                <a:latin typeface="Calibri" pitchFamily="34" charset="0"/>
-                <a:ea typeface="Calibri" pitchFamily="34" charset="-122"/>
-                <a:cs typeface="Calibri" pitchFamily="34" charset="-120"/>
-              </a:rPr>
-              <a:t>La regla de dosificación es la misma en todas partes: 3 gramos por litro de tierra útil. Lo que cambia de una finca a otra es el volumen de suelo que las raíces exploran realmente.</a:t>
-            </a:r>
-            <a:endParaRPr lang="en-US" sz="1250" dirty="0"/>
-          </a:p>
-        </p:txBody>
-      </p:sp>
-      <p:sp>
-        <p:nvSpPr>
-          <p:cNvPr id="25" name="Text 23"/>
+              <a:rPr lang="en-US" sz="1200" dirty="0">
+                <a:solidFill>
+                  <a:srgbClr val="3F3138"/>
+                </a:solidFill>
+                <a:latin typeface="Calibri" pitchFamily="34" charset="0"/>
+                <a:ea typeface="Calibri" pitchFamily="34" charset="-122"/>
+                <a:cs typeface="Calibri" pitchFamily="34" charset="-120"/>
+              </a:rPr>
+              <a:t>Rangos que usa nuestra calculadora de dosis, para un cultivo manejado con normalidad y EVERGREEN® aplicado en la plantación.</a:t>
+            </a:r>
+            <a:endParaRPr lang="en-US" sz="1200" dirty="0"/>
+          </a:p>
+          <a:p>
+            <a:pPr algn="l" indent="0" marL="0">
+              <a:lnSpc>
+                <a:spcPct val="125000"/>
+              </a:lnSpc>
+              <a:buNone/>
+            </a:pPr>
+            <a:endParaRPr lang="en-US" sz="1200" dirty="0"/>
+          </a:p>
+          <a:p>
+            <a:pPr algn="l" indent="0" marL="0">
+              <a:lnSpc>
+                <a:spcPct val="125000"/>
+              </a:lnSpc>
+              <a:buNone/>
+            </a:pPr>
+            <a:r>
+              <a:rPr lang="en-US" sz="1200" dirty="0">
+                <a:solidFill>
+                  <a:srgbClr val="3F3138"/>
+                </a:solidFill>
+                <a:latin typeface="Calibri" pitchFamily="34" charset="0"/>
+                <a:ea typeface="Calibri" pitchFamily="34" charset="-122"/>
+                <a:cs typeface="Calibri" pitchFamily="34" charset="-120"/>
+              </a:rPr>
+              <a:t>El resultado real depende del suelo, el clima y el manejo. En cereales no se anuncia ningún aumento sin ensayo de campo.</a:t>
+            </a:r>
+            <a:endParaRPr lang="en-US" sz="1200" dirty="0"/>
+          </a:p>
+        </p:txBody>
+      </p:sp>
+      <p:sp>
+        <p:nvSpPr>
+          <p:cNvPr id="8" name="Text 5"/>
           <p:cNvSpPr txBox="1"/>
           <p:nvPr/>
         </p:nvSpPr>
@@ -8347,7 +13090,7 @@
       </p:sp>
       <p:sp>
         <p:nvSpPr>
-          <p:cNvPr id="26" name="Text 24"/>
+          <p:cNvPr id="9" name="Text 6"/>
           <p:cNvSpPr txBox="1"/>
           <p:nvPr/>
         </p:nvSpPr>

--- a/public/documents/countries/espagne.pptx
+++ b/public/documents/countries/espagne.pptx
@@ -3744,7 +3744,7 @@
       </p:sp>
       <p:pic>
         <p:nvPicPr>
-          <p:cNvPr id="5" name="Image 1" descr="C:\Users\Utilisateur\dev\green-solutions-web\public\images\logo-icon.png">    </p:cNvPr>
+          <p:cNvPr id="5" name="Image 1" descr="C:\Users\Utilisateur\dev\gsw-dossiers\public\images\logo-icon.png">    </p:cNvPr>
           <p:cNvPicPr>
             <a:picLocks noChangeAspect="1"/>
           </p:cNvPicPr>
@@ -3768,7 +3768,7 @@
       </p:pic>
       <p:pic>
         <p:nvPicPr>
-          <p:cNvPr id="6" name="Image 2" descr="C:\Users\Utilisateur\dev\green-solutions-web\scripts\dossiers\drapeaux\espagne.png">    </p:cNvPr>
+          <p:cNvPr id="6" name="Image 2" descr="C:\Users\Utilisateur\dev\gsw-dossiers\scripts\dossiers\drapeaux\espagne.png">    </p:cNvPr>
           <p:cNvPicPr>
             <a:picLocks noChangeAspect="1"/>
           </p:cNvPicPr>
@@ -9535,7 +9535,7 @@
                 <a:ea typeface="Calibri" pitchFamily="34" charset="-122"/>
                 <a:cs typeface="Calibri" pitchFamily="34" charset="-120"/>
               </a:rPr>
-              <a:t>contact@evergreen-ecosorb.com · 821 Chemin des Clapiers, 83220 Le Pradet, France</a:t>
+              <a:t>contact@evergreen-ecosorb.com · Green Solutions Groupe AIM SA, 46, route de la Condémine, 1475 Forel, Suiza</a:t>
             </a:r>
             <a:endParaRPr lang="en-US" sz="1400" dirty="0"/>
           </a:p>
@@ -9543,7 +9543,7 @@
       </p:sp>
       <p:pic>
         <p:nvPicPr>
-          <p:cNvPr id="6" name="Image 1" descr="C:\Users\Utilisateur\dev\green-solutions-web\scripts\dossiers\sceau-aim-clair.png">    </p:cNvPr>
+          <p:cNvPr id="6" name="Image 1" descr="C:\Users\Utilisateur\dev\gsw-dossiers\scripts\dossiers\sceau-aim-clair.png">    </p:cNvPr>
           <p:cNvPicPr>
             <a:picLocks noChangeAspect="1"/>
           </p:cNvPicPr>

--- a/public/documents/countries/espagne.pptx
+++ b/public/documents/countries/espagne.pptx
@@ -3744,7 +3744,7 @@
       </p:sp>
       <p:pic>
         <p:nvPicPr>
-          <p:cNvPr id="5" name="Image 1" descr="C:\Users\Utilisateur\dev\gsw-dossiers\public\images\logo-icon.png">    </p:cNvPr>
+          <p:cNvPr id="5" name="Image 1" descr="C:\Users\Utilisateur\dev\green-solutions-web\public\images\logo-icon.png">    </p:cNvPr>
           <p:cNvPicPr>
             <a:picLocks noChangeAspect="1"/>
           </p:cNvPicPr>
@@ -3768,7 +3768,7 @@
       </p:pic>
       <p:pic>
         <p:nvPicPr>
-          <p:cNvPr id="6" name="Image 2" descr="C:\Users\Utilisateur\dev\gsw-dossiers\scripts\dossiers\drapeaux\espagne.png">    </p:cNvPr>
+          <p:cNvPr id="6" name="Image 2" descr="C:\Users\Utilisateur\dev\green-solutions-web\scripts\dossiers\drapeaux\espagne.png">    </p:cNvPr>
           <p:cNvPicPr>
             <a:picLocks noChangeAspect="1"/>
           </p:cNvPicPr>
@@ -3782,8 +3782,8 @@
         </p:blipFill>
         <p:spPr>
           <a:xfrm>
-            <a:off x="3648456" y="1389888"/>
-            <a:ext cx="1965960" cy="1310640"/>
+            <a:off x="3649991" y="1389888"/>
+            <a:ext cx="1964425" cy="1310640"/>
           </a:xfrm>
           <a:prstGeom prst="rect">
             <a:avLst/>
@@ -3798,8 +3798,8 @@
         </p:nvSpPr>
         <p:spPr>
           <a:xfrm>
-            <a:off x="3648456" y="1389888"/>
-            <a:ext cx="1965960" cy="1310640"/>
+            <a:off x="3649991" y="1389888"/>
+            <a:ext cx="1964425" cy="1310640"/>
           </a:xfrm>
           <a:prstGeom prst="rect">
             <a:avLst/>
@@ -9053,6 +9053,30 @@
             </a:r>
             <a:endParaRPr lang="en-US" sz="1350" dirty="0"/>
           </a:p>
+          <a:p>
+            <a:pPr algn="l" marL="342900" indent="-342900">
+              <a:lnSpc>
+                <a:spcPct val="122000"/>
+              </a:lnSpc>
+              <a:spcAft>
+                <a:spcPts val="1000"/>
+              </a:spcAft>
+              <a:buSzPct val="100000"/>
+              <a:buChar char="•"/>
+            </a:pPr>
+            <a:r>
+              <a:rPr lang="en-US" sz="1350" dirty="0">
+                <a:solidFill>
+                  <a:srgbClr val="3F3138"/>
+                </a:solidFill>
+                <a:latin typeface="Calibri" pitchFamily="34" charset="0"/>
+                <a:ea typeface="Calibri" pitchFamily="34" charset="-122"/>
+                <a:cs typeface="Calibri" pitchFamily="34" charset="-120"/>
+              </a:rPr>
+              <a:t>Fotografías: Galimatiasgg (CC0), Jebulon (CC0), Raul2009 (CC BY-SA 3.0), User:Coentor (CC BY-SA 1.0) — vía Wikimedia Commons.</a:t>
+            </a:r>
+            <a:endParaRPr lang="en-US" sz="1350" dirty="0"/>
+          </a:p>
         </p:txBody>
       </p:sp>
       <p:sp>
@@ -9543,7 +9567,7 @@
       </p:sp>
       <p:pic>
         <p:nvPicPr>
-          <p:cNvPr id="6" name="Image 1" descr="C:\Users\Utilisateur\dev\gsw-dossiers\scripts\dossiers\sceau-aim-clair.png">    </p:cNvPr>
+          <p:cNvPr id="6" name="Image 1" descr="C:\Users\Utilisateur\dev\green-solutions-web\scripts\dossiers\sceau-aim-clair.png">    </p:cNvPr>
           <p:cNvPicPr>
             <a:picLocks noChangeAspect="1"/>
           </p:cNvPicPr>

--- a/public/documents/countries/espagne.pptx
+++ b/public/documents/countries/espagne.pptx
@@ -23,9 +23,10 @@
     <p:sldId id="271" r:id="rId17"/>
     <p:sldId id="272" r:id="rId18"/>
     <p:sldId id="273" r:id="rId19"/>
+    <p:sldId id="274" r:id="rId20"/>
   </p:sldIdLst>
   <p:notesMasterIdLst>
-    <p:notesMasterId r:id="rId20"/>
+    <p:notesMasterId r:id="rId21"/>
   </p:notesMasterIdLst>
   <p:sldSz cx="12192000" cy="6858000"/>
   <p:notesSz cx="6858000" cy="12192000"/>
@@ -124,7 +125,266 @@
 </p:presentation>
 </file>
 
-<file path=ppt/charts/chart29.xml><?xml version="1.0" encoding="utf-8"?>
+<file path=ppt/charts/chart45.xml><?xml version="1.0" encoding="utf-8"?>
+<c:chartSpace xmlns:c="http://schemas.openxmlformats.org/drawingml/2006/chart" xmlns:a="http://schemas.openxmlformats.org/drawingml/2006/main" xmlns:r="http://schemas.openxmlformats.org/officeDocument/2006/relationships">
+  <c:date1904 val="0"/>
+  <c:roundedCorners val="1"/>
+  <c:chart>
+    <c:autoTitleDeleted val="1"/>
+    <c:plotArea>
+      <c:layout/>
+      <c:barChart>
+        <c:barDir val="col"/>
+        <c:grouping val="clustered"/>
+        <c:varyColors val="0"/>
+        <c:ser>
+          <c:idx val="0"/>
+          <c:order val="0"/>
+          <c:tx>
+            <c:strRef>
+              <c:f>Sheet1!$B$1</c:f>
+              <c:strCache>
+                <c:ptCount val="1"/>
+                <c:pt idx="0">
+                  <c:v>Índice mundial del número y duración de las sequías</c:v>
+                </c:pt>
+              </c:strCache>
+            </c:strRef>
+          </c:tx>
+          <c:spPr>
+            <a:solidFill>
+              <a:srgbClr val="6B2A44"/>
+            </a:solidFill>
+            <a:effectLst/>
+          </c:spPr>
+          <c:invertIfNegative val="0"/>
+          <c:dLbls>
+            <c:numFmt formatCode="[$-C0A]0" sourceLinked="0"/>
+            <c:txPr>
+              <a:bodyPr/>
+              <a:lstStyle/>
+              <a:p>
+                <a:pPr>
+                  <a:defRPr b="0" i="0" strike="noStrike" sz="1100" u="none">
+                    <a:solidFill>
+                      <a:srgbClr val="3F162A"/>
+                    </a:solidFill>
+                    <a:latin typeface="Calibri"/>
+                  </a:defRPr>
+                </a:pPr>
+              </a:p>
+            </c:txPr>
+            <c:showLegendKey val="0"/>
+            <c:showVal val="1"/>
+            <c:showCatName val="0"/>
+            <c:showSerName val="0"/>
+            <c:showPercent val="0"/>
+            <c:showBubbleSize val="0"/>
+            <c:showLeaderLines val="0"/>
+          </c:dLbls>
+          <c:dPt>
+            <c:idx val="0"/>
+            <c:invertIfNegative val="0"/>
+            <c:bubble3D val="0"/>
+            <c:spPr>
+              <a:solidFill>
+                <a:srgbClr val="6B2A44"/>
+              </a:solidFill>
+              <a:effectLst/>
+            </c:spPr>
+          </c:dPt>
+          <c:dPt>
+            <c:idx val="1"/>
+            <c:invertIfNegative val="0"/>
+            <c:bubble3D val="0"/>
+            <c:spPr>
+              <a:solidFill>
+                <a:srgbClr val="C9A227"/>
+              </a:solidFill>
+              <a:effectLst/>
+            </c:spPr>
+          </c:dPt>
+          <c:cat>
+            <c:multiLvlStrRef>
+              <c:f>Sheet1!$A$2:$A$3</c:f>
+              <c:multiLvlStrCache>
+                <c:ptCount val="2"/>
+                <c:lvl>
+                  <c:pt idx="0">
+                    <c:v>1980–1999</c:v>
+                  </c:pt>
+                  <c:pt idx="1">
+                    <c:v>Desde 2000</c:v>
+                  </c:pt>
+                </c:lvl>
+              </c:multiLvlStrCache>
+            </c:multiLvlStrRef>
+          </c:cat>
+          <c:val>
+            <c:numRef>
+              <c:f>Sheet1!$B$2:$B$3</c:f>
+              <c:numCache>
+                <c:formatCode>General</c:formatCode>
+                <c:ptCount val="2"/>
+                <c:pt idx="0">
+                  <c:v>100</c:v>
+                </c:pt>
+                <c:pt idx="1">
+                  <c:v>129</c:v>
+                </c:pt>
+              </c:numCache>
+            </c:numRef>
+          </c:val>
+        </c:ser>
+        <c:dLbls>
+          <c:numFmt formatCode="[$-C0A]0" sourceLinked="0"/>
+          <c:txPr>
+            <a:bodyPr/>
+            <a:lstStyle/>
+            <a:p>
+              <a:pPr>
+                <a:defRPr b="0" i="0" strike="noStrike" sz="1100" u="none">
+                  <a:solidFill>
+                    <a:srgbClr val="3F162A"/>
+                  </a:solidFill>
+                  <a:latin typeface="Calibri"/>
+                </a:defRPr>
+              </a:pPr>
+            </a:p>
+          </c:txPr>
+          <c:showLegendKey val="0"/>
+          <c:showVal val="1"/>
+          <c:showCatName val="0"/>
+          <c:showSerName val="0"/>
+          <c:showPercent val="0"/>
+          <c:showBubbleSize val="0"/>
+          <c:showLeaderLines val="0"/>
+        </c:dLbls>
+        <c:gapWidth val="150"/>
+        <c:overlap val="0"/>
+        <c:axId val="2094734554"/>
+        <c:axId val="2094734552"/>
+        <c:axId val="2094734556"/>
+      </c:barChart>
+      <c:catAx>
+        <c:axId val="2094734554"/>
+        <c:scaling>
+          <c:orientation val="minMax"/>
+        </c:scaling>
+        <c:delete val="0"/>
+        <c:axPos val="b"/>
+        <c:numFmt formatCode="General" sourceLinked="1"/>
+        <c:majorTickMark val="out"/>
+        <c:minorTickMark val="none"/>
+        <c:tickLblPos val="low"/>
+        <c:spPr>
+          <a:ln w="12700" cap="flat">
+            <a:solidFill>
+              <a:srgbClr val="888888"/>
+            </a:solidFill>
+            <a:prstDash val="solid"/>
+            <a:round/>
+          </a:ln>
+        </c:spPr>
+        <c:txPr>
+          <a:bodyPr/>
+          <a:lstStyle/>
+          <a:p>
+            <a:pPr>
+              <a:defRPr sz="1100" b="0" i="0" u="none" strike="noStrike">
+                <a:solidFill>
+                  <a:srgbClr val="7C6B73"/>
+                </a:solidFill>
+                <a:latin typeface="Calibri"/>
+              </a:defRPr>
+            </a:pPr>
+            <a:endParaRPr lang="en-US"/>
+          </a:p>
+        </c:txPr>
+        <c:crossAx val="2094734552"/>
+        <c:crosses val="autoZero"/>
+        <c:auto val="1"/>
+        <c:lblAlgn val="ctr"/>
+        <c:noMultiLvlLbl val="1"/>
+      </c:catAx>
+      <c:valAx>
+        <c:axId val="2094734552"/>
+        <c:scaling>
+          <c:orientation val="minMax"/>
+          <c:max val="140"/>
+          <c:min val="0"/>
+        </c:scaling>
+        <c:delete val="0"/>
+        <c:axPos val="l"/>
+        <c:majorGridlines>
+          <c:spPr>
+            <a:ln w="9525" cap="flat">
+              <a:solidFill>
+                <a:srgbClr val="E5D9DE"/>
+              </a:solidFill>
+              <a:prstDash val="solid"/>
+              <a:round/>
+            </a:ln>
+          </c:spPr>
+        </c:majorGridlines>
+        <c:numFmt formatCode="General" sourceLinked="0"/>
+        <c:majorTickMark val="out"/>
+        <c:minorTickMark val="none"/>
+        <c:tickLblPos val="nextTo"/>
+        <c:spPr>
+          <a:ln w="12700" cap="flat">
+            <a:solidFill>
+              <a:srgbClr val="888888"/>
+            </a:solidFill>
+            <a:prstDash val="solid"/>
+            <a:round/>
+          </a:ln>
+        </c:spPr>
+        <c:txPr>
+          <a:bodyPr/>
+          <a:lstStyle/>
+          <a:p>
+            <a:pPr>
+              <a:defRPr sz="1100" b="0" i="0" u="none" strike="noStrike">
+                <a:solidFill>
+                  <a:srgbClr val="7C6B73"/>
+                </a:solidFill>
+                <a:latin typeface="Calibri"/>
+              </a:defRPr>
+            </a:pPr>
+            <a:endParaRPr lang="en-US"/>
+          </a:p>
+        </c:txPr>
+        <c:crossAx val="2094734554"/>
+        <c:crosses val="autoZero"/>
+        <c:crossBetween val="between"/>
+        <c:majorUnit val="20"/>
+      </c:valAx>
+      <c:spPr>
+        <a:noFill/>
+        <a:ln>
+          <a:noFill/>
+        </a:ln>
+        <a:effectLst/>
+      </c:spPr>
+    </c:plotArea>
+    <c:plotVisOnly val="1"/>
+    <c:dispBlanksAs val="span"/>
+  </c:chart>
+  <c:spPr>
+    <a:noFill/>
+    <a:ln>
+      <a:noFill/>
+    </a:ln>
+    <a:effectLst/>
+  </c:spPr>
+  <c:externalData r:id="rId1">
+    <c:autoUpdate val="0"/>
+  </c:externalData>
+</c:chartSpace>
+</file>
+
+<file path=ppt/charts/chart46.xml><?xml version="1.0" encoding="utf-8"?>
 <c:chartSpace xmlns:c="http://schemas.openxmlformats.org/drawingml/2006/chart" xmlns:a="http://schemas.openxmlformats.org/drawingml/2006/main" xmlns:r="http://schemas.openxmlformats.org/officeDocument/2006/relationships">
   <c:date1904 val="0"/>
   <c:roundedCorners val="1"/>
@@ -369,7 +629,7 @@
 </c:chartSpace>
 </file>
 
-<file path=ppt/charts/chart30.xml><?xml version="1.0" encoding="utf-8"?>
+<file path=ppt/charts/chart47.xml><?xml version="1.0" encoding="utf-8"?>
 <c:chartSpace xmlns:c="http://schemas.openxmlformats.org/drawingml/2006/chart" xmlns:a="http://schemas.openxmlformats.org/drawingml/2006/main" xmlns:r="http://schemas.openxmlformats.org/officeDocument/2006/relationships">
   <c:date1904 val="0"/>
   <c:roundedCorners val="1"/>
@@ -677,7 +937,7 @@
 </c:chartSpace>
 </file>
 
-<file path=ppt/charts/chart31.xml><?xml version="1.0" encoding="utf-8"?>
+<file path=ppt/charts/chart48.xml><?xml version="1.0" encoding="utf-8"?>
 <c:chartSpace xmlns:c="http://schemas.openxmlformats.org/drawingml/2006/chart" xmlns:a="http://schemas.openxmlformats.org/drawingml/2006/main" xmlns:r="http://schemas.openxmlformats.org/officeDocument/2006/relationships">
   <c:date1904 val="0"/>
   <c:roundedCorners val="1"/>
@@ -1042,7 +1302,7 @@
 </c:chartSpace>
 </file>
 
-<file path=ppt/charts/chart32.xml><?xml version="1.0" encoding="utf-8"?>
+<file path=ppt/charts/chart49.xml><?xml version="1.0" encoding="utf-8"?>
 <c:chartSpace xmlns:c="http://schemas.openxmlformats.org/drawingml/2006/chart" xmlns:a="http://schemas.openxmlformats.org/drawingml/2006/main" xmlns:r="http://schemas.openxmlformats.org/officeDocument/2006/relationships">
   <c:date1904 val="0"/>
   <c:roundedCorners val="1"/>
@@ -2606,6 +2866,94 @@
             <a:fld id="{F7021451-1387-4CA6-816F-3879F97B5CBC}" type="slidenum">
               <a:rPr lang="en-US"/>
               <a:t>18</a:t>
+            </a:fld>
+            <a:endParaRPr lang="en-US"/>
+          </a:p>
+        </p:txBody>
+      </p:sp>
+    </p:spTree>
+    <p:extLst>
+      <p:ext uri="{BB962C8B-B14F-4D97-AF65-F5344CB8AC3E}">
+        <p14:creationId xmlns:p14="http://schemas.microsoft.com/office/powerpoint/2010/main" val="1024086991"/>
+      </p:ext>
+    </p:extLst>
+  </p:cSld>
+  <p:clrMapOvr>
+    <a:masterClrMapping/>
+  </p:clrMapOvr>
+</p:notes>
+</file>
+
+<file path=ppt/notesSlides/notesSlide19.xml><?xml version="1.0" encoding="utf-8"?>
+<p:notes xmlns:a="http://schemas.openxmlformats.org/drawingml/2006/main" xmlns:r="http://schemas.openxmlformats.org/officeDocument/2006/relationships" xmlns:p="http://schemas.openxmlformats.org/presentationml/2006/main">
+  <p:cSld>
+    <p:spTree>
+      <p:nvGrpSpPr>
+        <p:cNvPr id="1" name=""/>
+        <p:cNvGrpSpPr/>
+        <p:nvPr/>
+      </p:nvGrpSpPr>
+      <p:grpSpPr>
+        <a:xfrm>
+          <a:off x="0" y="0"/>
+          <a:ext cx="0" cy="0"/>
+          <a:chOff x="0" y="0"/>
+          <a:chExt cx="0" cy="0"/>
+        </a:xfrm>
+      </p:grpSpPr>
+      <p:sp>
+        <p:nvSpPr>
+          <p:cNvPr id="2" name="Slide Image Placeholder 1"/>
+          <p:cNvSpPr>
+            <a:spLocks noGrp="1" noRot="1" noChangeAspect="1"/>
+          </p:cNvSpPr>
+          <p:nvPr>
+            <p:ph type="sldImg"/>
+          </p:nvPr>
+        </p:nvSpPr>
+        <p:spPr/>
+      </p:sp>
+      <p:sp>
+        <p:nvSpPr>
+          <p:cNvPr id="3" name="Notes Placeholder 2"/>
+          <p:cNvSpPr>
+            <a:spLocks noGrp="1"/>
+          </p:cNvSpPr>
+          <p:nvPr>
+            <p:ph type="body" idx="1"/>
+          </p:nvPr>
+        </p:nvSpPr>
+        <p:spPr/>
+        <p:txBody>
+          <a:bodyPr/>
+          <a:lstStyle/>
+          <a:p>
+            <a:r>
+              <a:rPr lang="en-US" dirty="0"/>
+              <a:t/>
+            </a:r>
+            <a:endParaRPr lang="en-US" dirty="0"/>
+          </a:p>
+        </p:txBody>
+      </p:sp>
+      <p:sp>
+        <p:nvSpPr>
+          <p:cNvPr id="4" name="Slide Number Placeholder 3"/>
+          <p:cNvSpPr>
+            <a:spLocks noGrp="1"/>
+          </p:cNvSpPr>
+          <p:nvPr>
+            <p:ph type="sldNum" sz="quarter" idx="10"/>
+          </p:nvPr>
+        </p:nvSpPr>
+        <p:spPr/>
+        <p:txBody>
+          <a:bodyPr/>
+          <a:lstStyle/>
+          <a:p>
+            <a:fld id="{F7021451-1387-4CA6-816F-3879F97B5CBC}" type="slidenum">
+              <a:rPr lang="en-US"/>
+              <a:t>19</a:t>
             </a:fld>
             <a:endParaRPr lang="en-US"/>
           </a:p>
@@ -3744,7 +4092,7 @@
       </p:sp>
       <p:pic>
         <p:nvPicPr>
-          <p:cNvPr id="5" name="Image 1" descr="C:\Users\Utilisateur\dev\green-solutions-web\public\images\logo-icon.png">    </p:cNvPr>
+          <p:cNvPr id="5" name="Image 1" descr="/workspace/scratch/50eb4f7d8e13/green-solutions-web/public/images/logo-icon.png">    </p:cNvPr>
           <p:cNvPicPr>
             <a:picLocks noChangeAspect="1"/>
           </p:cNvPicPr>
@@ -3768,7 +4116,7 @@
       </p:pic>
       <p:pic>
         <p:nvPicPr>
-          <p:cNvPr id="6" name="Image 2" descr="C:\Users\Utilisateur\dev\green-solutions-web\scripts\dossiers\drapeaux\espagne.png">    </p:cNvPr>
+          <p:cNvPr id="6" name="Image 2" descr="/workspace/scratch/50eb4f7d8e13/green-solutions-web/scripts/dossiers/drapeaux/espagne.png">    </p:cNvPr>
           <p:cNvPicPr>
             <a:picLocks noChangeAspect="1"/>
           </p:cNvPicPr>
@@ -4118,7 +4466,7 @@
                 <a:ea typeface="Calibri" pitchFamily="34" charset="-122"/>
                 <a:cs typeface="Calibri" pitchFamily="34" charset="-120"/>
               </a:rPr>
-              <a:t>NUESTRA RESPUESTA</a:t>
+              <a:t>Potencial de rendimiento</a:t>
             </a:r>
             <a:endParaRPr lang="en-US" sz="1150" dirty="0"/>
           </a:p>
@@ -4157,340 +4505,42 @@
                 <a:ea typeface="Cambria" pitchFamily="34" charset="-122"/>
                 <a:cs typeface="Cambria" pitchFamily="34" charset="-120"/>
               </a:rPr>
-              <a:t>Dos tecnologías para dos restricciones distintas</a:t>
+              <a:t>Aumento de rendimiento esperado por cultivo</a:t>
             </a:r>
             <a:endParaRPr lang="en-US" sz="3000" dirty="0"/>
           </a:p>
         </p:txBody>
       </p:sp>
-      <p:sp>
-        <p:nvSpPr>
-          <p:cNvPr id="4" name="Text 2"/>
-          <p:cNvSpPr txBox="1"/>
-          <p:nvPr/>
-        </p:nvSpPr>
-        <p:spPr>
-          <a:xfrm>
-            <a:off x="594360" y="1783080"/>
-            <a:ext cx="5227168" cy="411480"/>
-          </a:xfrm>
-          <a:prstGeom prst="rect">
-            <a:avLst/>
-          </a:prstGeom>
-          <a:noFill/>
-          <a:ln/>
-        </p:spPr>
-        <p:txBody>
-          <a:bodyPr wrap="square" lIns="0" tIns="0" rIns="0" bIns="0" rtlCol="0" anchor="ctr"/>
-          <a:lstStyle/>
-          <a:p>
-            <a:pPr algn="l" indent="0" marL="0">
-              <a:buNone/>
-            </a:pPr>
-            <a:r>
-              <a:rPr lang="en-US" sz="1600" b="1" dirty="0">
-                <a:solidFill>
-                  <a:srgbClr val="6B2A44"/>
-                </a:solidFill>
-                <a:latin typeface="Cambria" pitchFamily="34" charset="0"/>
-                <a:ea typeface="Cambria" pitchFamily="34" charset="-122"/>
-                <a:cs typeface="Cambria" pitchFamily="34" charset="-120"/>
-              </a:rPr>
-              <a:t>EVERGREEN® — retener el agua</a:t>
-            </a:r>
-            <a:endParaRPr lang="en-US" sz="1600" dirty="0"/>
-          </a:p>
-        </p:txBody>
-      </p:sp>
-      <p:sp>
-        <p:nvSpPr>
-          <p:cNvPr id="5" name="Text 3"/>
-          <p:cNvSpPr txBox="1"/>
-          <p:nvPr/>
-        </p:nvSpPr>
-        <p:spPr>
-          <a:xfrm>
-            <a:off x="594360" y="2286000"/>
-            <a:ext cx="5227168" cy="2468880"/>
-          </a:xfrm>
-          <a:prstGeom prst="rect">
-            <a:avLst/>
-          </a:prstGeom>
-          <a:noFill/>
-          <a:ln/>
-        </p:spPr>
-        <p:txBody>
-          <a:bodyPr wrap="square" lIns="0" tIns="0" rIns="0" bIns="0" rtlCol="0" anchor="t"/>
-          <a:lstStyle/>
-          <a:p>
-            <a:pPr algn="l" marL="342900" indent="-342900">
-              <a:lnSpc>
-                <a:spcPct val="122000"/>
-              </a:lnSpc>
-              <a:spcAft>
-                <a:spcPts val="1000"/>
-              </a:spcAft>
-              <a:buSzPct val="100000"/>
-              <a:buChar char="•"/>
-            </a:pPr>
-            <a:r>
-              <a:rPr lang="en-US" sz="1350" dirty="0">
-                <a:solidFill>
-                  <a:srgbClr val="3F3138"/>
-                </a:solidFill>
-                <a:latin typeface="Calibri" pitchFamily="34" charset="0"/>
-                <a:ea typeface="Calibri" pitchFamily="34" charset="-122"/>
-                <a:cs typeface="Calibri" pitchFamily="34" charset="-120"/>
-              </a:rPr>
-              <a:t>Hidrorretenedor a base de potasio, incorporado en la zona radicular a la plantación o en la reposición de plantas.</a:t>
-            </a:r>
-            <a:endParaRPr lang="en-US" sz="1350" dirty="0"/>
-          </a:p>
-          <a:p>
-            <a:pPr algn="l" marL="342900" indent="-342900">
-              <a:lnSpc>
-                <a:spcPct val="122000"/>
-              </a:lnSpc>
-              <a:spcAft>
-                <a:spcPts val="1000"/>
-              </a:spcAft>
-              <a:buSzPct val="100000"/>
-              <a:buChar char="•"/>
-            </a:pPr>
-            <a:r>
-              <a:rPr lang="en-US" sz="1350" dirty="0">
-                <a:solidFill>
-                  <a:srgbClr val="3F3138"/>
-                </a:solidFill>
-                <a:latin typeface="Calibri" pitchFamily="34" charset="0"/>
-                <a:ea typeface="Calibri" pitchFamily="34" charset="-122"/>
-                <a:cs typeface="Calibri" pitchFamily="34" charset="-120"/>
-              </a:rPr>
-              <a:t>Capta el agua de lluvia o de riego y la devuelve a la planta de forma gradual, suprimiendo el estrés hídrico en las etapas críticas.</a:t>
-            </a:r>
-            <a:endParaRPr lang="en-US" sz="1350" dirty="0"/>
-          </a:p>
-          <a:p>
-            <a:pPr algn="l" marL="342900" indent="-342900">
-              <a:lnSpc>
-                <a:spcPct val="122000"/>
-              </a:lnSpc>
-              <a:spcAft>
-                <a:spcPts val="1000"/>
-              </a:spcAft>
-              <a:buSzPct val="100000"/>
-              <a:buChar char="•"/>
-            </a:pPr>
-            <a:r>
-              <a:rPr lang="en-US" sz="1350" dirty="0">
-                <a:solidFill>
-                  <a:srgbClr val="3F3138"/>
-                </a:solidFill>
-                <a:latin typeface="Calibri" pitchFamily="34" charset="0"/>
-                <a:ea typeface="Calibri" pitchFamily="34" charset="-122"/>
-                <a:cs typeface="Calibri" pitchFamily="34" charset="-120"/>
-              </a:rPr>
-              <a:t>Capacidad de absorción del orden de 300 veces su peso; efecto útil de 3 a 4 años en el suelo.</a:t>
-            </a:r>
-            <a:endParaRPr lang="en-US" sz="1350" dirty="0"/>
-          </a:p>
-          <a:p>
-            <a:pPr algn="l" marL="342900" indent="-342900">
-              <a:lnSpc>
-                <a:spcPct val="122000"/>
-              </a:lnSpc>
-              <a:spcAft>
-                <a:spcPts val="1000"/>
-              </a:spcAft>
-              <a:buSzPct val="100000"/>
-              <a:buChar char="•"/>
-            </a:pPr>
-            <a:r>
-              <a:rPr lang="en-US" sz="1350" dirty="0">
-                <a:solidFill>
-                  <a:srgbClr val="3F3138"/>
-                </a:solidFill>
-                <a:latin typeface="Calibri" pitchFamily="34" charset="0"/>
-                <a:ea typeface="Calibri" pitchFamily="34" charset="-122"/>
-                <a:cs typeface="Calibri" pitchFamily="34" charset="-120"/>
-              </a:rPr>
-              <a:t>Se degrada entre 20 y 25 % al año, sin acumulación ni riesgo de sobredosis.</a:t>
-            </a:r>
-            <a:endParaRPr lang="en-US" sz="1350" dirty="0"/>
-          </a:p>
-        </p:txBody>
-      </p:sp>
-      <p:sp>
-        <p:nvSpPr>
-          <p:cNvPr id="6" name="Text 4"/>
-          <p:cNvSpPr txBox="1"/>
-          <p:nvPr/>
-        </p:nvSpPr>
-        <p:spPr>
-          <a:xfrm>
-            <a:off x="6370168" y="1783080"/>
-            <a:ext cx="5227168" cy="411480"/>
-          </a:xfrm>
-          <a:prstGeom prst="rect">
-            <a:avLst/>
-          </a:prstGeom>
-          <a:noFill/>
-          <a:ln/>
-        </p:spPr>
-        <p:txBody>
-          <a:bodyPr wrap="square" lIns="0" tIns="0" rIns="0" bIns="0" rtlCol="0" anchor="ctr"/>
-          <a:lstStyle/>
-          <a:p>
-            <a:pPr algn="l" indent="0" marL="0">
-              <a:buNone/>
-            </a:pPr>
-            <a:r>
-              <a:rPr lang="en-US" sz="1600" b="1" dirty="0">
-                <a:solidFill>
-                  <a:srgbClr val="6B2A44"/>
-                </a:solidFill>
-                <a:latin typeface="Cambria" pitchFamily="34" charset="0"/>
-                <a:ea typeface="Cambria" pitchFamily="34" charset="-122"/>
-                <a:cs typeface="Cambria" pitchFamily="34" charset="-120"/>
-              </a:rPr>
-              <a:t>ECOFERT® — nutrir sin agotar el suelo</a:t>
-            </a:r>
-            <a:endParaRPr lang="en-US" sz="1600" dirty="0"/>
-          </a:p>
-        </p:txBody>
-      </p:sp>
-      <p:sp>
-        <p:nvSpPr>
-          <p:cNvPr id="7" name="Text 5"/>
-          <p:cNvSpPr txBox="1"/>
-          <p:nvPr/>
-        </p:nvSpPr>
-        <p:spPr>
-          <a:xfrm>
-            <a:off x="6370168" y="2286000"/>
-            <a:ext cx="5227168" cy="2468880"/>
-          </a:xfrm>
-          <a:prstGeom prst="rect">
-            <a:avLst/>
-          </a:prstGeom>
-          <a:noFill/>
-          <a:ln/>
-        </p:spPr>
-        <p:txBody>
-          <a:bodyPr wrap="square" lIns="0" tIns="0" rIns="0" bIns="0" rtlCol="0" anchor="t"/>
-          <a:lstStyle/>
-          <a:p>
-            <a:pPr algn="l" marL="342900" indent="-342900">
-              <a:lnSpc>
-                <a:spcPct val="122000"/>
-              </a:lnSpc>
-              <a:spcAft>
-                <a:spcPts val="1000"/>
-              </a:spcAft>
-              <a:buSzPct val="100000"/>
-              <a:buChar char="•"/>
-            </a:pPr>
-            <a:r>
-              <a:rPr lang="en-US" sz="1350" dirty="0">
-                <a:solidFill>
-                  <a:srgbClr val="3F3138"/>
-                </a:solidFill>
-                <a:latin typeface="Calibri" pitchFamily="34" charset="0"/>
-                <a:ea typeface="Calibri" pitchFamily="34" charset="-122"/>
-                <a:cs typeface="Calibri" pitchFamily="34" charset="-120"/>
-              </a:rPr>
-              <a:t>Fertilizante en microdosis de aminoácidos, nitrógeno, fósforo y potasio, obtenido de recursos renovables.</a:t>
-            </a:r>
-            <a:endParaRPr lang="en-US" sz="1350" dirty="0"/>
-          </a:p>
-          <a:p>
-            <a:pPr algn="l" marL="342900" indent="-342900">
-              <a:lnSpc>
-                <a:spcPct val="122000"/>
-              </a:lnSpc>
-              <a:spcAft>
-                <a:spcPts val="1000"/>
-              </a:spcAft>
-              <a:buSzPct val="100000"/>
-              <a:buChar char="•"/>
-            </a:pPr>
-            <a:r>
-              <a:rPr lang="en-US" sz="1350" dirty="0">
-                <a:solidFill>
-                  <a:srgbClr val="3F3138"/>
-                </a:solidFill>
-                <a:latin typeface="Calibri" pitchFamily="34" charset="0"/>
-                <a:ea typeface="Calibri" pitchFamily="34" charset="-122"/>
-                <a:cs typeface="Calibri" pitchFamily="34" charset="-120"/>
-              </a:rPr>
-              <a:t>No quelante: no empobrece el complejo arcillo-húmico y no incrementa la salinidad ni el contenido de nitratos.</a:t>
-            </a:r>
-            <a:endParaRPr lang="en-US" sz="1350" dirty="0"/>
-          </a:p>
-          <a:p>
-            <a:pPr algn="l" marL="342900" indent="-342900">
-              <a:lnSpc>
-                <a:spcPct val="122000"/>
-              </a:lnSpc>
-              <a:spcAft>
-                <a:spcPts val="1000"/>
-              </a:spcAft>
-              <a:buSzPct val="100000"/>
-              <a:buChar char="•"/>
-            </a:pPr>
-            <a:r>
-              <a:rPr lang="en-US" sz="1350" dirty="0">
-                <a:solidFill>
-                  <a:srgbClr val="3F3138"/>
-                </a:solidFill>
-                <a:latin typeface="Calibri" pitchFamily="34" charset="0"/>
-                <a:ea typeface="Calibri" pitchFamily="34" charset="-122"/>
-                <a:cs typeface="Calibri" pitchFamily="34" charset="-120"/>
-              </a:rPr>
-              <a:t>Certificado por SOHISCERT, entidad andaluza, y conforme a la normativa europea de producción ecológica.</a:t>
-            </a:r>
-            <a:endParaRPr lang="en-US" sz="1350" dirty="0"/>
-          </a:p>
-          <a:p>
-            <a:pPr algn="l" marL="342900" indent="-342900">
-              <a:lnSpc>
-                <a:spcPct val="122000"/>
-              </a:lnSpc>
-              <a:spcAft>
-                <a:spcPts val="1000"/>
-              </a:spcAft>
-              <a:buSzPct val="100000"/>
-              <a:buChar char="•"/>
-            </a:pPr>
-            <a:r>
-              <a:rPr lang="en-US" sz="1350" dirty="0">
-                <a:solidFill>
-                  <a:srgbClr val="3F3138"/>
-                </a:solidFill>
-                <a:latin typeface="Calibri" pitchFamily="34" charset="0"/>
-                <a:ea typeface="Calibri" pitchFamily="34" charset="-122"/>
-                <a:cs typeface="Calibri" pitchFamily="34" charset="-120"/>
-              </a:rPr>
-              <a:t>De 1 a 4 frascos de 140 ml por hectárea, compatible con los equipos de fertirriego ya instalados.</a:t>
-            </a:r>
-            <a:endParaRPr lang="en-US" sz="1350" dirty="0"/>
-          </a:p>
-        </p:txBody>
-      </p:sp>
-      <p:sp>
-        <p:nvSpPr>
-          <p:cNvPr id="8" name="Shape 6"/>
+      <p:graphicFrame>
+        <p:nvGraphicFramePr>
+          <p:cNvPr id="4" name="Chart 0" descr=""/>
+          <p:cNvGraphicFramePr/>
+          <p:nvPr/>
+        </p:nvGraphicFramePr>
+        <p:xfrm>
+          <a:off x="594360" y="1783080"/>
+          <a:ext cx="7360920" cy="3977640"/>
+        </p:xfrm>
+        <a:graphic xmlns:a="http://schemas.openxmlformats.org/drawingml/2006/main">
+          <a:graphicData uri="http://schemas.openxmlformats.org/drawingml/2006/chart">
+            <c:chart xmlns:c="http://schemas.openxmlformats.org/drawingml/2006/chart" r:id="rId1"/>
+          </a:graphicData>
+        </a:graphic>
+      </p:graphicFrame>
+      <p:sp>
+        <p:nvSpPr>
+          <p:cNvPr id="5" name="Shape 2"/>
           <p:cNvSpPr/>
           <p:nvPr/>
         </p:nvSpPr>
         <p:spPr>
           <a:xfrm>
-            <a:off x="594360" y="4846320"/>
-            <a:ext cx="11002975" cy="960120"/>
+            <a:off x="8275320" y="1783080"/>
+            <a:ext cx="3291840" cy="3977640"/>
           </a:xfrm>
           <a:prstGeom prst="roundRect">
             <a:avLst>
-              <a:gd name="adj" fmla="val 7619"/>
+              <a:gd name="adj" fmla="val 2778"/>
             </a:avLst>
           </a:prstGeom>
           <a:solidFill>
@@ -4506,14 +4556,53 @@
       </p:sp>
       <p:sp>
         <p:nvSpPr>
-          <p:cNvPr id="9" name="Text 7"/>
-          <p:cNvSpPr txBox="1"/>
-          <p:nvPr/>
-        </p:nvSpPr>
-        <p:spPr>
-          <a:xfrm>
-            <a:off x="822960" y="4983480"/>
-            <a:ext cx="10545775" cy="713232"/>
+          <p:cNvPr id="6" name="Text 3"/>
+          <p:cNvSpPr txBox="1"/>
+          <p:nvPr/>
+        </p:nvSpPr>
+        <p:spPr>
+          <a:xfrm>
+            <a:off x="8503920" y="2011680"/>
+            <a:ext cx="2834640" cy="457200"/>
+          </a:xfrm>
+          <a:prstGeom prst="rect">
+            <a:avLst/>
+          </a:prstGeom>
+          <a:noFill/>
+          <a:ln/>
+        </p:spPr>
+        <p:txBody>
+          <a:bodyPr wrap="square" lIns="0" tIns="0" rIns="0" bIns="0" rtlCol="0" anchor="ctr"/>
+          <a:lstStyle/>
+          <a:p>
+            <a:pPr algn="l" indent="0" marL="0">
+              <a:buNone/>
+            </a:pPr>
+            <a:r>
+              <a:rPr lang="en-US" sz="1300" b="1" dirty="0">
+                <a:solidFill>
+                  <a:srgbClr val="6B2A44"/>
+                </a:solidFill>
+                <a:latin typeface="Cambria" pitchFamily="34" charset="0"/>
+                <a:ea typeface="Cambria" pitchFamily="34" charset="-122"/>
+                <a:cs typeface="Cambria" pitchFamily="34" charset="-120"/>
+              </a:rPr>
+              <a:t>Leer con prudencia</a:t>
+            </a:r>
+            <a:endParaRPr lang="en-US" sz="1300" dirty="0"/>
+          </a:p>
+        </p:txBody>
+      </p:sp>
+      <p:sp>
+        <p:nvSpPr>
+          <p:cNvPr id="7" name="Text 4"/>
+          <p:cNvSpPr txBox="1"/>
+          <p:nvPr/>
+        </p:nvSpPr>
+        <p:spPr>
+          <a:xfrm>
+            <a:off x="8503920" y="2560320"/>
+            <a:ext cx="2834640" cy="3017520"/>
           </a:xfrm>
           <a:prstGeom prst="rect">
             <a:avLst/>
@@ -4527,28 +4616,57 @@
           <a:p>
             <a:pPr algn="l" indent="0" marL="0">
               <a:lnSpc>
-                <a:spcPct val="118000"/>
+                <a:spcPct val="125000"/>
               </a:lnSpc>
               <a:buNone/>
             </a:pPr>
             <a:r>
-              <a:rPr lang="en-US" sz="1100" dirty="0">
-                <a:solidFill>
-                  <a:srgbClr val="7C6B73"/>
-                </a:solidFill>
-                <a:latin typeface="Calibri" pitchFamily="34" charset="0"/>
-                <a:ea typeface="Calibri" pitchFamily="34" charset="-122"/>
-                <a:cs typeface="Calibri" pitchFamily="34" charset="-120"/>
-              </a:rPr>
-              <a:t>Los dos productos se venden por separado, pero fueron concebidos para reforzarse: el hidrorretenedor prolonga la disponibilidad del agua y el fertilizante valoriza esa agua disponible sin degradar el suelo. En zona vulnerable a nitratos, el carácter no quelante y la microdosis del segundo importan tanto como el ahorro de agua del primero.</a:t>
-            </a:r>
-            <a:endParaRPr lang="en-US" sz="1100" dirty="0"/>
-          </a:p>
-        </p:txBody>
-      </p:sp>
-      <p:sp>
-        <p:nvSpPr>
-          <p:cNvPr id="10" name="Text 8"/>
+              <a:rPr lang="en-US" sz="1200" dirty="0">
+                <a:solidFill>
+                  <a:srgbClr val="3F3138"/>
+                </a:solidFill>
+                <a:latin typeface="Calibri" pitchFamily="34" charset="0"/>
+                <a:ea typeface="Calibri" pitchFamily="34" charset="-122"/>
+                <a:cs typeface="Calibri" pitchFamily="34" charset="-120"/>
+              </a:rPr>
+              <a:t>Rangos que usa nuestra calculadora de dosis, para un cultivo manejado con normalidad y EVERGREEN® aplicado en la plantación.</a:t>
+            </a:r>
+            <a:endParaRPr lang="en-US" sz="1200" dirty="0"/>
+          </a:p>
+          <a:p>
+            <a:pPr algn="l" indent="0" marL="0">
+              <a:lnSpc>
+                <a:spcPct val="125000"/>
+              </a:lnSpc>
+              <a:buNone/>
+            </a:pPr>
+            <a:endParaRPr lang="en-US" sz="1200" dirty="0"/>
+          </a:p>
+          <a:p>
+            <a:pPr algn="l" indent="0" marL="0">
+              <a:lnSpc>
+                <a:spcPct val="125000"/>
+              </a:lnSpc>
+              <a:buNone/>
+            </a:pPr>
+            <a:r>
+              <a:rPr lang="en-US" sz="1200" dirty="0">
+                <a:solidFill>
+                  <a:srgbClr val="3F3138"/>
+                </a:solidFill>
+                <a:latin typeface="Calibri" pitchFamily="34" charset="0"/>
+                <a:ea typeface="Calibri" pitchFamily="34" charset="-122"/>
+                <a:cs typeface="Calibri" pitchFamily="34" charset="-120"/>
+              </a:rPr>
+              <a:t>El resultado real depende del suelo, el clima y el manejo. En cereales no se anuncia ningún aumento sin ensayo de campo.</a:t>
+            </a:r>
+            <a:endParaRPr lang="en-US" sz="1200" dirty="0"/>
+          </a:p>
+        </p:txBody>
+      </p:sp>
+      <p:sp>
+        <p:nvSpPr>
+          <p:cNvPr id="8" name="Text 5"/>
           <p:cNvSpPr txBox="1"/>
           <p:nvPr/>
         </p:nvSpPr>
@@ -4589,7 +4707,7 @@
       </p:sp>
       <p:sp>
         <p:nvSpPr>
-          <p:cNvPr id="11" name="Text 9"/>
+          <p:cNvPr id="9" name="Text 6"/>
           <p:cNvSpPr txBox="1"/>
           <p:nvPr/>
         </p:nvSpPr>
@@ -4693,7 +4811,7 @@
                 <a:ea typeface="Calibri" pitchFamily="34" charset="-122"/>
                 <a:cs typeface="Calibri" pitchFamily="34" charset="-120"/>
               </a:rPr>
-              <a:t>El resto de la gama</a:t>
+              <a:t>NUESTRA RESPUESTA</a:t>
             </a:r>
             <a:endParaRPr lang="en-US" sz="1150" dirty="0"/>
           </a:p>
@@ -4732,7 +4850,7 @@
                 <a:ea typeface="Cambria" pitchFamily="34" charset="-122"/>
                 <a:cs typeface="Cambria" pitchFamily="34" charset="-120"/>
               </a:rPr>
-              <a:t>Proteger los cultivos, sujetar los suelos</a:t>
+              <a:t>Dos tecnologías para dos restricciones distintas</a:t>
             </a:r>
             <a:endParaRPr lang="en-US" sz="3000" dirty="0"/>
           </a:p>
@@ -4771,7 +4889,7 @@
                 <a:ea typeface="Cambria" pitchFamily="34" charset="-122"/>
                 <a:cs typeface="Cambria" pitchFamily="34" charset="-120"/>
               </a:rPr>
-              <a:t>NAPEMA® — proteger sin residuos</a:t>
+              <a:t>EVERGREEN® — retener el agua</a:t>
             </a:r>
             <a:endParaRPr lang="en-US" sz="1600" dirty="0"/>
           </a:p>
@@ -4817,7 +4935,7 @@
                 <a:ea typeface="Calibri" pitchFamily="34" charset="-122"/>
                 <a:cs typeface="Calibri" pitchFamily="34" charset="-120"/>
               </a:rPr>
-              <a:t>Controla enfermedades, parásitos, hongos y plagas, sin moléculas de síntesis.</a:t>
+              <a:t>Hidrorretenedor a base de potasio, incorporado en la zona radicular a la plantación o en la reposición de plantas.</a:t>
             </a:r>
             <a:endParaRPr lang="en-US" sz="1350" dirty="0"/>
           </a:p>
@@ -4841,7 +4959,7 @@
                 <a:ea typeface="Calibri" pitchFamily="34" charset="-122"/>
                 <a:cs typeface="Calibri" pitchFamily="34" charset="-120"/>
               </a:rPr>
-              <a:t>Pulverización foliar y radicular, con efecto preventivo y curativo.</a:t>
+              <a:t>Capta el agua de lluvia o de riego y la devuelve a la planta de forma gradual, suprimiendo el estrés hídrico en las etapas críticas.</a:t>
             </a:r>
             <a:endParaRPr lang="en-US" sz="1350" dirty="0"/>
           </a:p>
@@ -4865,7 +4983,7 @@
                 <a:ea typeface="Calibri" pitchFamily="34" charset="-122"/>
                 <a:cs typeface="Calibri" pitchFamily="34" charset="-120"/>
               </a:rPr>
-              <a:t>Ningún residuo en el suelo, la planta ni el aire: polinizadores y auxiliares a salvo.</a:t>
+              <a:t>Capacidad de absorción del orden de 300 veces su peso; efecto útil de 3 a 4 años en el suelo.</a:t>
             </a:r>
             <a:endParaRPr lang="en-US" sz="1350" dirty="0"/>
           </a:p>
@@ -4889,7 +5007,7 @@
                 <a:ea typeface="Calibri" pitchFamily="34" charset="-122"/>
                 <a:cs typeface="Calibri" pitchFamily="34" charset="-120"/>
               </a:rPr>
-              <a:t>Formulado a medida para un problema concreto: cochinilla, HLB de los cítricos, nematodos.</a:t>
+              <a:t>Se degrada entre 20 y 25 % al año, sin acumulación ni riesgo de sobredosis.</a:t>
             </a:r>
             <a:endParaRPr lang="en-US" sz="1350" dirty="0"/>
           </a:p>
@@ -4928,7 +5046,7 @@
                 <a:ea typeface="Cambria" pitchFamily="34" charset="-122"/>
                 <a:cs typeface="Cambria" pitchFamily="34" charset="-120"/>
               </a:rPr>
-              <a:t>Paulownia ALTIFOLIA® — árbol de clima cálido</a:t>
+              <a:t>ECOFERT® — nutrir sin agotar el suelo</a:t>
             </a:r>
             <a:endParaRPr lang="en-US" sz="1600" dirty="0"/>
           </a:p>
@@ -4974,7 +5092,7 @@
                 <a:ea typeface="Calibri" pitchFamily="34" charset="-122"/>
                 <a:cs typeface="Calibri" pitchFamily="34" charset="-120"/>
               </a:rPr>
-              <a:t>De 13 a 15 m en seis a ocho años, con un tronco de gran diámetro.</a:t>
+              <a:t>Fertilizante en microdosis de aminoácidos, nitrógeno, fósforo y potasio, obtenido de recursos renovables.</a:t>
             </a:r>
             <a:endParaRPr lang="en-US" sz="1350" dirty="0"/>
           </a:p>
@@ -4998,7 +5116,7 @@
                 <a:ea typeface="Calibri" pitchFamily="34" charset="-122"/>
                 <a:cs typeface="Calibri" pitchFamily="34" charset="-120"/>
               </a:rPr>
-              <a:t>Con 100 g de EVERGREEN® por planta, el riego necesario disminuye un 50 %.</a:t>
+              <a:t>No quelante: no empobrece el complejo arcillo-húmico y no incrementa la salinidad ni el contenido de nitratos.</a:t>
             </a:r>
             <a:endParaRPr lang="en-US" sz="1350" dirty="0"/>
           </a:p>
@@ -5022,7 +5140,7 @@
                 <a:ea typeface="Calibri" pitchFamily="34" charset="-122"/>
                 <a:cs typeface="Calibri" pitchFamily="34" charset="-120"/>
               </a:rPr>
-              <a:t>Resiste de −25 °C a +45 °C; su madera solo se inflama a partir de 426 °C.</a:t>
+              <a:t>Certificado por SOHISCERT, entidad andaluza, y conforme a la normativa europea de producción ecológica.</a:t>
             </a:r>
             <a:endParaRPr lang="en-US" sz="1350" dirty="0"/>
           </a:p>
@@ -5046,7 +5164,7 @@
                 <a:ea typeface="Calibri" pitchFamily="34" charset="-122"/>
                 <a:cs typeface="Calibri" pitchFamily="34" charset="-120"/>
               </a:rPr>
-              <a:t>Cortavientos, protección del suelo contra la erosión, de 400 a 700 kg de miel por hectárea.</a:t>
+              <a:t>De 1 a 4 frascos de 140 ml por hectárea, compatible con los equipos de fertirriego ya instalados.</a:t>
             </a:r>
             <a:endParaRPr lang="en-US" sz="1350" dirty="0"/>
           </a:p>
@@ -5115,7 +5233,7 @@
                 <a:ea typeface="Calibri" pitchFamily="34" charset="-122"/>
                 <a:cs typeface="Calibri" pitchFamily="34" charset="-120"/>
               </a:rPr>
-              <a:t>Plantas entregadas en maceta (25 a 30 cm), certificadas libres de enfermedades y repuestas en garantía en caso de pérdida. Primera corta al final del sexto año, con la madera valorada en torno a 400-450 € el m³.</a:t>
+              <a:t>Los dos productos se venden por separado, pero fueron concebidos para reforzarse: el hidrorretenedor prolonga la disponibilidad del agua y el fertilizante valoriza esa agua disponible sin degradar el suelo. En zona vulnerable a nitratos, el carácter no quelante y la microdosis del segundo importan tanto como el ahorro de agua del primero.</a:t>
             </a:r>
             <a:endParaRPr lang="en-US" sz="1100" dirty="0"/>
           </a:p>
@@ -5268,7 +5386,7 @@
                 <a:ea typeface="Calibri" pitchFamily="34" charset="-122"/>
                 <a:cs typeface="Calibri" pitchFamily="34" charset="-120"/>
               </a:rPr>
-              <a:t>ÓRDENES DE MAGNITUD</a:t>
+              <a:t>El resto de la gama</a:t>
             </a:r>
             <a:endParaRPr lang="en-US" sz="1150" dirty="0"/>
           </a:p>
@@ -5307,42 +5425,340 @@
                 <a:ea typeface="Cambria" pitchFamily="34" charset="-122"/>
                 <a:cs typeface="Cambria" pitchFamily="34" charset="-120"/>
               </a:rPr>
-              <a:t>Ahorro de agua esperado según el método de riego</a:t>
+              <a:t>Proteger los cultivos, sujetar los suelos</a:t>
             </a:r>
             <a:endParaRPr lang="en-US" sz="3000" dirty="0"/>
           </a:p>
         </p:txBody>
       </p:sp>
-      <p:graphicFrame>
-        <p:nvGraphicFramePr>
-          <p:cNvPr id="4" name="Chart 0" descr=""/>
-          <p:cNvGraphicFramePr/>
-          <p:nvPr/>
-        </p:nvGraphicFramePr>
-        <p:xfrm>
-          <a:off x="594360" y="1783080"/>
-          <a:ext cx="7360920" cy="3977640"/>
-        </p:xfrm>
-        <a:graphic xmlns:a="http://schemas.openxmlformats.org/drawingml/2006/main">
-          <a:graphicData uri="http://schemas.openxmlformats.org/drawingml/2006/chart">
-            <c:chart xmlns:c="http://schemas.openxmlformats.org/drawingml/2006/chart" r:id="rId1"/>
-          </a:graphicData>
-        </a:graphic>
-      </p:graphicFrame>
-      <p:sp>
-        <p:nvSpPr>
-          <p:cNvPr id="5" name="Shape 2"/>
+      <p:sp>
+        <p:nvSpPr>
+          <p:cNvPr id="4" name="Text 2"/>
+          <p:cNvSpPr txBox="1"/>
+          <p:nvPr/>
+        </p:nvSpPr>
+        <p:spPr>
+          <a:xfrm>
+            <a:off x="594360" y="1783080"/>
+            <a:ext cx="5227168" cy="411480"/>
+          </a:xfrm>
+          <a:prstGeom prst="rect">
+            <a:avLst/>
+          </a:prstGeom>
+          <a:noFill/>
+          <a:ln/>
+        </p:spPr>
+        <p:txBody>
+          <a:bodyPr wrap="square" lIns="0" tIns="0" rIns="0" bIns="0" rtlCol="0" anchor="ctr"/>
+          <a:lstStyle/>
+          <a:p>
+            <a:pPr algn="l" indent="0" marL="0">
+              <a:buNone/>
+            </a:pPr>
+            <a:r>
+              <a:rPr lang="en-US" sz="1600" b="1" dirty="0">
+                <a:solidFill>
+                  <a:srgbClr val="6B2A44"/>
+                </a:solidFill>
+                <a:latin typeface="Cambria" pitchFamily="34" charset="0"/>
+                <a:ea typeface="Cambria" pitchFamily="34" charset="-122"/>
+                <a:cs typeface="Cambria" pitchFamily="34" charset="-120"/>
+              </a:rPr>
+              <a:t>NAPEMA® — proteger sin residuos</a:t>
+            </a:r>
+            <a:endParaRPr lang="en-US" sz="1600" dirty="0"/>
+          </a:p>
+        </p:txBody>
+      </p:sp>
+      <p:sp>
+        <p:nvSpPr>
+          <p:cNvPr id="5" name="Text 3"/>
+          <p:cNvSpPr txBox="1"/>
+          <p:nvPr/>
+        </p:nvSpPr>
+        <p:spPr>
+          <a:xfrm>
+            <a:off x="594360" y="2286000"/>
+            <a:ext cx="5227168" cy="2468880"/>
+          </a:xfrm>
+          <a:prstGeom prst="rect">
+            <a:avLst/>
+          </a:prstGeom>
+          <a:noFill/>
+          <a:ln/>
+        </p:spPr>
+        <p:txBody>
+          <a:bodyPr wrap="square" lIns="0" tIns="0" rIns="0" bIns="0" rtlCol="0" anchor="t"/>
+          <a:lstStyle/>
+          <a:p>
+            <a:pPr algn="l" marL="342900" indent="-342900">
+              <a:lnSpc>
+                <a:spcPct val="122000"/>
+              </a:lnSpc>
+              <a:spcAft>
+                <a:spcPts val="1000"/>
+              </a:spcAft>
+              <a:buSzPct val="100000"/>
+              <a:buChar char="•"/>
+            </a:pPr>
+            <a:r>
+              <a:rPr lang="en-US" sz="1350" dirty="0">
+                <a:solidFill>
+                  <a:srgbClr val="3F3138"/>
+                </a:solidFill>
+                <a:latin typeface="Calibri" pitchFamily="34" charset="0"/>
+                <a:ea typeface="Calibri" pitchFamily="34" charset="-122"/>
+                <a:cs typeface="Calibri" pitchFamily="34" charset="-120"/>
+              </a:rPr>
+              <a:t>Controla enfermedades, parásitos, hongos y plagas, sin moléculas de síntesis.</a:t>
+            </a:r>
+            <a:endParaRPr lang="en-US" sz="1350" dirty="0"/>
+          </a:p>
+          <a:p>
+            <a:pPr algn="l" marL="342900" indent="-342900">
+              <a:lnSpc>
+                <a:spcPct val="122000"/>
+              </a:lnSpc>
+              <a:spcAft>
+                <a:spcPts val="1000"/>
+              </a:spcAft>
+              <a:buSzPct val="100000"/>
+              <a:buChar char="•"/>
+            </a:pPr>
+            <a:r>
+              <a:rPr lang="en-US" sz="1350" dirty="0">
+                <a:solidFill>
+                  <a:srgbClr val="3F3138"/>
+                </a:solidFill>
+                <a:latin typeface="Calibri" pitchFamily="34" charset="0"/>
+                <a:ea typeface="Calibri" pitchFamily="34" charset="-122"/>
+                <a:cs typeface="Calibri" pitchFamily="34" charset="-120"/>
+              </a:rPr>
+              <a:t>Pulverización foliar y radicular, con efecto preventivo y curativo.</a:t>
+            </a:r>
+            <a:endParaRPr lang="en-US" sz="1350" dirty="0"/>
+          </a:p>
+          <a:p>
+            <a:pPr algn="l" marL="342900" indent="-342900">
+              <a:lnSpc>
+                <a:spcPct val="122000"/>
+              </a:lnSpc>
+              <a:spcAft>
+                <a:spcPts val="1000"/>
+              </a:spcAft>
+              <a:buSzPct val="100000"/>
+              <a:buChar char="•"/>
+            </a:pPr>
+            <a:r>
+              <a:rPr lang="en-US" sz="1350" dirty="0">
+                <a:solidFill>
+                  <a:srgbClr val="3F3138"/>
+                </a:solidFill>
+                <a:latin typeface="Calibri" pitchFamily="34" charset="0"/>
+                <a:ea typeface="Calibri" pitchFamily="34" charset="-122"/>
+                <a:cs typeface="Calibri" pitchFamily="34" charset="-120"/>
+              </a:rPr>
+              <a:t>Ningún residuo en el suelo, la planta ni el aire: polinizadores y auxiliares a salvo.</a:t>
+            </a:r>
+            <a:endParaRPr lang="en-US" sz="1350" dirty="0"/>
+          </a:p>
+          <a:p>
+            <a:pPr algn="l" marL="342900" indent="-342900">
+              <a:lnSpc>
+                <a:spcPct val="122000"/>
+              </a:lnSpc>
+              <a:spcAft>
+                <a:spcPts val="1000"/>
+              </a:spcAft>
+              <a:buSzPct val="100000"/>
+              <a:buChar char="•"/>
+            </a:pPr>
+            <a:r>
+              <a:rPr lang="en-US" sz="1350" dirty="0">
+                <a:solidFill>
+                  <a:srgbClr val="3F3138"/>
+                </a:solidFill>
+                <a:latin typeface="Calibri" pitchFamily="34" charset="0"/>
+                <a:ea typeface="Calibri" pitchFamily="34" charset="-122"/>
+                <a:cs typeface="Calibri" pitchFamily="34" charset="-120"/>
+              </a:rPr>
+              <a:t>Formulado a medida para un problema concreto: cochinilla, HLB de los cítricos, nematodos.</a:t>
+            </a:r>
+            <a:endParaRPr lang="en-US" sz="1350" dirty="0"/>
+          </a:p>
+        </p:txBody>
+      </p:sp>
+      <p:sp>
+        <p:nvSpPr>
+          <p:cNvPr id="6" name="Text 4"/>
+          <p:cNvSpPr txBox="1"/>
+          <p:nvPr/>
+        </p:nvSpPr>
+        <p:spPr>
+          <a:xfrm>
+            <a:off x="6370168" y="1783080"/>
+            <a:ext cx="5227168" cy="411480"/>
+          </a:xfrm>
+          <a:prstGeom prst="rect">
+            <a:avLst/>
+          </a:prstGeom>
+          <a:noFill/>
+          <a:ln/>
+        </p:spPr>
+        <p:txBody>
+          <a:bodyPr wrap="square" lIns="0" tIns="0" rIns="0" bIns="0" rtlCol="0" anchor="ctr"/>
+          <a:lstStyle/>
+          <a:p>
+            <a:pPr algn="l" indent="0" marL="0">
+              <a:buNone/>
+            </a:pPr>
+            <a:r>
+              <a:rPr lang="en-US" sz="1600" b="1" dirty="0">
+                <a:solidFill>
+                  <a:srgbClr val="6B2A44"/>
+                </a:solidFill>
+                <a:latin typeface="Cambria" pitchFamily="34" charset="0"/>
+                <a:ea typeface="Cambria" pitchFamily="34" charset="-122"/>
+                <a:cs typeface="Cambria" pitchFamily="34" charset="-120"/>
+              </a:rPr>
+              <a:t>Paulownia ALTIFOLIA® — árbol de clima cálido</a:t>
+            </a:r>
+            <a:endParaRPr lang="en-US" sz="1600" dirty="0"/>
+          </a:p>
+        </p:txBody>
+      </p:sp>
+      <p:sp>
+        <p:nvSpPr>
+          <p:cNvPr id="7" name="Text 5"/>
+          <p:cNvSpPr txBox="1"/>
+          <p:nvPr/>
+        </p:nvSpPr>
+        <p:spPr>
+          <a:xfrm>
+            <a:off x="6370168" y="2286000"/>
+            <a:ext cx="5227168" cy="2468880"/>
+          </a:xfrm>
+          <a:prstGeom prst="rect">
+            <a:avLst/>
+          </a:prstGeom>
+          <a:noFill/>
+          <a:ln/>
+        </p:spPr>
+        <p:txBody>
+          <a:bodyPr wrap="square" lIns="0" tIns="0" rIns="0" bIns="0" rtlCol="0" anchor="t"/>
+          <a:lstStyle/>
+          <a:p>
+            <a:pPr algn="l" marL="342900" indent="-342900">
+              <a:lnSpc>
+                <a:spcPct val="122000"/>
+              </a:lnSpc>
+              <a:spcAft>
+                <a:spcPts val="1000"/>
+              </a:spcAft>
+              <a:buSzPct val="100000"/>
+              <a:buChar char="•"/>
+            </a:pPr>
+            <a:r>
+              <a:rPr lang="en-US" sz="1350" dirty="0">
+                <a:solidFill>
+                  <a:srgbClr val="3F3138"/>
+                </a:solidFill>
+                <a:latin typeface="Calibri" pitchFamily="34" charset="0"/>
+                <a:ea typeface="Calibri" pitchFamily="34" charset="-122"/>
+                <a:cs typeface="Calibri" pitchFamily="34" charset="-120"/>
+              </a:rPr>
+              <a:t>De 13 a 15 m en seis a ocho años, con un tronco de gran diámetro.</a:t>
+            </a:r>
+            <a:endParaRPr lang="en-US" sz="1350" dirty="0"/>
+          </a:p>
+          <a:p>
+            <a:pPr algn="l" marL="342900" indent="-342900">
+              <a:lnSpc>
+                <a:spcPct val="122000"/>
+              </a:lnSpc>
+              <a:spcAft>
+                <a:spcPts val="1000"/>
+              </a:spcAft>
+              <a:buSzPct val="100000"/>
+              <a:buChar char="•"/>
+            </a:pPr>
+            <a:r>
+              <a:rPr lang="en-US" sz="1350" dirty="0">
+                <a:solidFill>
+                  <a:srgbClr val="3F3138"/>
+                </a:solidFill>
+                <a:latin typeface="Calibri" pitchFamily="34" charset="0"/>
+                <a:ea typeface="Calibri" pitchFamily="34" charset="-122"/>
+                <a:cs typeface="Calibri" pitchFamily="34" charset="-120"/>
+              </a:rPr>
+              <a:t>Con 100 g de EVERGREEN® por planta, el riego necesario disminuye un 50 %.</a:t>
+            </a:r>
+            <a:endParaRPr lang="en-US" sz="1350" dirty="0"/>
+          </a:p>
+          <a:p>
+            <a:pPr algn="l" marL="342900" indent="-342900">
+              <a:lnSpc>
+                <a:spcPct val="122000"/>
+              </a:lnSpc>
+              <a:spcAft>
+                <a:spcPts val="1000"/>
+              </a:spcAft>
+              <a:buSzPct val="100000"/>
+              <a:buChar char="•"/>
+            </a:pPr>
+            <a:r>
+              <a:rPr lang="en-US" sz="1350" dirty="0">
+                <a:solidFill>
+                  <a:srgbClr val="3F3138"/>
+                </a:solidFill>
+                <a:latin typeface="Calibri" pitchFamily="34" charset="0"/>
+                <a:ea typeface="Calibri" pitchFamily="34" charset="-122"/>
+                <a:cs typeface="Calibri" pitchFamily="34" charset="-120"/>
+              </a:rPr>
+              <a:t>Resiste de −25 °C a +45 °C; su madera solo se inflama a partir de 426 °C.</a:t>
+            </a:r>
+            <a:endParaRPr lang="en-US" sz="1350" dirty="0"/>
+          </a:p>
+          <a:p>
+            <a:pPr algn="l" marL="342900" indent="-342900">
+              <a:lnSpc>
+                <a:spcPct val="122000"/>
+              </a:lnSpc>
+              <a:spcAft>
+                <a:spcPts val="1000"/>
+              </a:spcAft>
+              <a:buSzPct val="100000"/>
+              <a:buChar char="•"/>
+            </a:pPr>
+            <a:r>
+              <a:rPr lang="en-US" sz="1350" dirty="0">
+                <a:solidFill>
+                  <a:srgbClr val="3F3138"/>
+                </a:solidFill>
+                <a:latin typeface="Calibri" pitchFamily="34" charset="0"/>
+                <a:ea typeface="Calibri" pitchFamily="34" charset="-122"/>
+                <a:cs typeface="Calibri" pitchFamily="34" charset="-120"/>
+              </a:rPr>
+              <a:t>Cortavientos, protección del suelo contra la erosión, de 400 a 700 kg de miel por hectárea.</a:t>
+            </a:r>
+            <a:endParaRPr lang="en-US" sz="1350" dirty="0"/>
+          </a:p>
+        </p:txBody>
+      </p:sp>
+      <p:sp>
+        <p:nvSpPr>
+          <p:cNvPr id="8" name="Shape 6"/>
           <p:cNvSpPr/>
           <p:nvPr/>
         </p:nvSpPr>
         <p:spPr>
           <a:xfrm>
-            <a:off x="8275320" y="1783080"/>
-            <a:ext cx="3291840" cy="3977640"/>
+            <a:off x="594360" y="4846320"/>
+            <a:ext cx="11002975" cy="960120"/>
           </a:xfrm>
           <a:prstGeom prst="roundRect">
             <a:avLst>
-              <a:gd name="adj" fmla="val 2778"/>
+              <a:gd name="adj" fmla="val 7619"/>
             </a:avLst>
           </a:prstGeom>
           <a:solidFill>
@@ -5358,53 +5774,14 @@
       </p:sp>
       <p:sp>
         <p:nvSpPr>
-          <p:cNvPr id="6" name="Text 3"/>
-          <p:cNvSpPr txBox="1"/>
-          <p:nvPr/>
-        </p:nvSpPr>
-        <p:spPr>
-          <a:xfrm>
-            <a:off x="8503920" y="2011680"/>
-            <a:ext cx="2834640" cy="457200"/>
-          </a:xfrm>
-          <a:prstGeom prst="rect">
-            <a:avLst/>
-          </a:prstGeom>
-          <a:noFill/>
-          <a:ln/>
-        </p:spPr>
-        <p:txBody>
-          <a:bodyPr wrap="square" lIns="0" tIns="0" rIns="0" bIns="0" rtlCol="0" anchor="ctr"/>
-          <a:lstStyle/>
-          <a:p>
-            <a:pPr algn="l" indent="0" marL="0">
-              <a:buNone/>
-            </a:pPr>
-            <a:r>
-              <a:rPr lang="en-US" sz="1300" b="1" dirty="0">
-                <a:solidFill>
-                  <a:srgbClr val="6B2A44"/>
-                </a:solidFill>
-                <a:latin typeface="Cambria" pitchFamily="34" charset="0"/>
-                <a:ea typeface="Cambria" pitchFamily="34" charset="-122"/>
-                <a:cs typeface="Cambria" pitchFamily="34" charset="-120"/>
-              </a:rPr>
-              <a:t>Leer con prudencia</a:t>
-            </a:r>
-            <a:endParaRPr lang="en-US" sz="1300" dirty="0"/>
-          </a:p>
-        </p:txBody>
-      </p:sp>
-      <p:sp>
-        <p:nvSpPr>
-          <p:cNvPr id="7" name="Text 4"/>
-          <p:cNvSpPr txBox="1"/>
-          <p:nvPr/>
-        </p:nvSpPr>
-        <p:spPr>
-          <a:xfrm>
-            <a:off x="8503920" y="2560320"/>
-            <a:ext cx="2834640" cy="3017520"/>
+          <p:cNvPr id="9" name="Text 7"/>
+          <p:cNvSpPr txBox="1"/>
+          <p:nvPr/>
+        </p:nvSpPr>
+        <p:spPr>
+          <a:xfrm>
+            <a:off x="822960" y="4983480"/>
+            <a:ext cx="10545775" cy="713232"/>
           </a:xfrm>
           <a:prstGeom prst="rect">
             <a:avLst/>
@@ -5418,57 +5795,28 @@
           <a:p>
             <a:pPr algn="l" indent="0" marL="0">
               <a:lnSpc>
-                <a:spcPct val="125000"/>
+                <a:spcPct val="118000"/>
               </a:lnSpc>
               <a:buNone/>
             </a:pPr>
             <a:r>
-              <a:rPr lang="en-US" sz="1200" dirty="0">
-                <a:solidFill>
-                  <a:srgbClr val="3F3138"/>
-                </a:solidFill>
-                <a:latin typeface="Calibri" pitchFamily="34" charset="0"/>
-                <a:ea typeface="Calibri" pitchFamily="34" charset="-122"/>
-                <a:cs typeface="Calibri" pitchFamily="34" charset="-120"/>
-              </a:rPr>
-              <a:t>Estos rangos son indicativos y se apoyan en las ganancias documentadas de nuestros hidrorretenedores.</a:t>
-            </a:r>
-            <a:endParaRPr lang="en-US" sz="1200" dirty="0"/>
-          </a:p>
-          <a:p>
-            <a:pPr algn="l" indent="0" marL="0">
-              <a:lnSpc>
-                <a:spcPct val="125000"/>
-              </a:lnSpc>
-              <a:buNone/>
-            </a:pPr>
-            <a:endParaRPr lang="en-US" sz="1200" dirty="0"/>
-          </a:p>
-          <a:p>
-            <a:pPr algn="l" indent="0" marL="0">
-              <a:lnSpc>
-                <a:spcPct val="125000"/>
-              </a:lnSpc>
-              <a:buNone/>
-            </a:pPr>
-            <a:r>
-              <a:rPr lang="en-US" sz="1200" dirty="0">
-                <a:solidFill>
-                  <a:srgbClr val="3F3138"/>
-                </a:solidFill>
-                <a:latin typeface="Calibri" pitchFamily="34" charset="0"/>
-                <a:ea typeface="Calibri" pitchFamily="34" charset="-122"/>
-                <a:cs typeface="Calibri" pitchFamily="34" charset="-120"/>
-              </a:rPr>
-              <a:t>El resultado real depende del suelo, del clima y del cultivo. Estas cifras dan un orden de magnitud: en ningún caso constituyen un valor garantizado, contractual ni absoluto.</a:t>
-            </a:r>
-            <a:endParaRPr lang="en-US" sz="1200" dirty="0"/>
-          </a:p>
-        </p:txBody>
-      </p:sp>
-      <p:sp>
-        <p:nvSpPr>
-          <p:cNvPr id="8" name="Text 5"/>
+              <a:rPr lang="en-US" sz="1100" dirty="0">
+                <a:solidFill>
+                  <a:srgbClr val="7C6B73"/>
+                </a:solidFill>
+                <a:latin typeface="Calibri" pitchFamily="34" charset="0"/>
+                <a:ea typeface="Calibri" pitchFamily="34" charset="-122"/>
+                <a:cs typeface="Calibri" pitchFamily="34" charset="-120"/>
+              </a:rPr>
+              <a:t>Plantas entregadas en maceta (25 a 30 cm), certificadas libres de enfermedades y repuestas en garantía en caso de pérdida. Primera corta al final del sexto año, con la madera valorada en torno a 400-450 € el m³.</a:t>
+            </a:r>
+            <a:endParaRPr lang="en-US" sz="1100" dirty="0"/>
+          </a:p>
+        </p:txBody>
+      </p:sp>
+      <p:sp>
+        <p:nvSpPr>
+          <p:cNvPr id="10" name="Text 8"/>
           <p:cNvSpPr txBox="1"/>
           <p:nvPr/>
         </p:nvSpPr>
@@ -5509,7 +5857,7 @@
       </p:sp>
       <p:sp>
         <p:nvSpPr>
-          <p:cNvPr id="9" name="Text 6"/>
+          <p:cNvPr id="11" name="Text 9"/>
           <p:cNvSpPr txBox="1"/>
           <p:nvPr/>
         </p:nvSpPr>
@@ -5613,7 +5961,7 @@
                 <a:ea typeface="Calibri" pitchFamily="34" charset="-122"/>
                 <a:cs typeface="Calibri" pitchFamily="34" charset="-120"/>
               </a:rPr>
-              <a:t>TRES ZONAS PRIORITARIAS</a:t>
+              <a:t>ÓRDENES DE MAGNITUD</a:t>
             </a:r>
             <a:endParaRPr lang="en-US" sz="1150" dirty="0"/>
           </a:p>
@@ -5652,26 +6000,42 @@
                 <a:ea typeface="Cambria" pitchFamily="34" charset="-122"/>
                 <a:cs typeface="Cambria" pitchFamily="34" charset="-120"/>
               </a:rPr>
-              <a:t>Dónde iniciar los primeros ensayos</a:t>
+              <a:t>Ahorro de agua esperado según el método de riego</a:t>
             </a:r>
             <a:endParaRPr lang="en-US" sz="3000" dirty="0"/>
           </a:p>
         </p:txBody>
       </p:sp>
-      <p:sp>
-        <p:nvSpPr>
-          <p:cNvPr id="4" name="Shape 2"/>
+      <p:graphicFrame>
+        <p:nvGraphicFramePr>
+          <p:cNvPr id="4" name="Chart 0" descr=""/>
+          <p:cNvGraphicFramePr/>
+          <p:nvPr/>
+        </p:nvGraphicFramePr>
+        <p:xfrm>
+          <a:off x="594360" y="1783080"/>
+          <a:ext cx="7360920" cy="3977640"/>
+        </p:xfrm>
+        <a:graphic xmlns:a="http://schemas.openxmlformats.org/drawingml/2006/main">
+          <a:graphicData uri="http://schemas.openxmlformats.org/drawingml/2006/chart">
+            <c:chart xmlns:c="http://schemas.openxmlformats.org/drawingml/2006/chart" r:id="rId1"/>
+          </a:graphicData>
+        </a:graphic>
+      </p:graphicFrame>
+      <p:sp>
+        <p:nvSpPr>
+          <p:cNvPr id="5" name="Shape 2"/>
           <p:cNvSpPr/>
           <p:nvPr/>
         </p:nvSpPr>
         <p:spPr>
           <a:xfrm>
-            <a:off x="594360" y="1783080"/>
-            <a:ext cx="3472586" cy="4069080"/>
+            <a:off x="8275320" y="1783080"/>
+            <a:ext cx="3291840" cy="3977640"/>
           </a:xfrm>
           <a:prstGeom prst="roundRect">
             <a:avLst>
-              <a:gd name="adj" fmla="val 2633"/>
+              <a:gd name="adj" fmla="val 2778"/>
             </a:avLst>
           </a:prstGeom>
           <a:solidFill>
@@ -5685,30 +6049,6 @@
           </a:ln>
         </p:spPr>
       </p:sp>
-      <p:pic>
-        <p:nvPicPr>
-          <p:cNvPr id="5" name="Image 0" descr="preencoded.png">    </p:cNvPr>
-          <p:cNvPicPr>
-            <a:picLocks noChangeAspect="1"/>
-          </p:cNvPicPr>
-          <p:nvPr/>
-        </p:nvPicPr>
-        <p:blipFill>
-          <a:blip r:embed="rId1"/>
-          <a:stretch>
-            <a:fillRect/>
-          </a:stretch>
-        </p:blipFill>
-        <p:spPr>
-          <a:xfrm>
-            <a:off x="594360" y="1783080"/>
-            <a:ext cx="3472586" cy="1691640"/>
-          </a:xfrm>
-          <a:prstGeom prst="rect">
-            <a:avLst/>
-          </a:prstGeom>
-        </p:spPr>
-      </p:pic>
       <p:sp>
         <p:nvSpPr>
           <p:cNvPr id="6" name="Text 3"/>
@@ -5717,8 +6057,8 @@
         </p:nvSpPr>
         <p:spPr>
           <a:xfrm>
-            <a:off x="795528" y="3639312"/>
-            <a:ext cx="3070250" cy="384048"/>
+            <a:off x="8503920" y="2011680"/>
+            <a:ext cx="2834640" cy="457200"/>
           </a:xfrm>
           <a:prstGeom prst="rect">
             <a:avLst/>
@@ -5734,7 +6074,7 @@
               <a:buNone/>
             </a:pPr>
             <a:r>
-              <a:rPr lang="en-US" sz="1500" b="1" dirty="0">
+              <a:rPr lang="en-US" sz="1300" b="1" dirty="0">
                 <a:solidFill>
                   <a:srgbClr val="6B2A44"/>
                 </a:solidFill>
@@ -5742,9 +6082,9 @@
                 <a:ea typeface="Cambria" pitchFamily="34" charset="-122"/>
                 <a:cs typeface="Cambria" pitchFamily="34" charset="-120"/>
               </a:rPr>
-              <a:t>Jaén y Córdoba</a:t>
-            </a:r>
-            <a:endParaRPr lang="en-US" sz="1500" dirty="0"/>
+              <a:t>Leer con prudencia</a:t>
+            </a:r>
+            <a:endParaRPr lang="en-US" sz="1300" dirty="0"/>
           </a:p>
         </p:txBody>
       </p:sp>
@@ -5756,580 +6096,72 @@
         </p:nvSpPr>
         <p:spPr>
           <a:xfrm>
-            <a:off x="795528" y="4041648"/>
-            <a:ext cx="3070250" cy="329184"/>
-          </a:xfrm>
-          <a:prstGeom prst="rect">
-            <a:avLst/>
-          </a:prstGeom>
-          <a:noFill/>
-          <a:ln/>
-        </p:spPr>
-        <p:txBody>
-          <a:bodyPr wrap="square" lIns="0" tIns="0" rIns="0" bIns="0" rtlCol="0" anchor="ctr"/>
+            <a:off x="8503920" y="2560320"/>
+            <a:ext cx="2834640" cy="3017520"/>
+          </a:xfrm>
+          <a:prstGeom prst="rect">
+            <a:avLst/>
+          </a:prstGeom>
+          <a:noFill/>
+          <a:ln/>
+        </p:spPr>
+        <p:txBody>
+          <a:bodyPr wrap="square" lIns="0" tIns="0" rIns="0" bIns="0" rtlCol="0" anchor="t"/>
           <a:lstStyle/>
           <a:p>
             <a:pPr algn="l" indent="0" marL="0">
-              <a:buNone/>
-            </a:pPr>
-            <a:r>
-              <a:rPr lang="en-US" sz="1250" b="1" dirty="0">
-                <a:solidFill>
-                  <a:srgbClr val="8F6D0F"/>
-                </a:solidFill>
-                <a:latin typeface="Calibri" pitchFamily="34" charset="0"/>
-                <a:ea typeface="Calibri" pitchFamily="34" charset="-122"/>
-                <a:cs typeface="Calibri" pitchFamily="34" charset="-120"/>
-              </a:rPr>
-              <a:t>≈ 1,6 M ha de olivar en Andalucía</a:t>
-            </a:r>
-            <a:endParaRPr lang="en-US" sz="1250" dirty="0"/>
+              <a:lnSpc>
+                <a:spcPct val="125000"/>
+              </a:lnSpc>
+              <a:buNone/>
+            </a:pPr>
+            <a:r>
+              <a:rPr lang="en-US" sz="1200" dirty="0">
+                <a:solidFill>
+                  <a:srgbClr val="3F3138"/>
+                </a:solidFill>
+                <a:latin typeface="Calibri" pitchFamily="34" charset="0"/>
+                <a:ea typeface="Calibri" pitchFamily="34" charset="-122"/>
+                <a:cs typeface="Calibri" pitchFamily="34" charset="-120"/>
+              </a:rPr>
+              <a:t>Estos rangos son indicativos y se apoyan en las ganancias documentadas de nuestros hidrorretenedores.</a:t>
+            </a:r>
+            <a:endParaRPr lang="en-US" sz="1200" dirty="0"/>
+          </a:p>
+          <a:p>
+            <a:pPr algn="l" indent="0" marL="0">
+              <a:lnSpc>
+                <a:spcPct val="125000"/>
+              </a:lnSpc>
+              <a:buNone/>
+            </a:pPr>
+            <a:endParaRPr lang="en-US" sz="1200" dirty="0"/>
+          </a:p>
+          <a:p>
+            <a:pPr algn="l" indent="0" marL="0">
+              <a:lnSpc>
+                <a:spcPct val="125000"/>
+              </a:lnSpc>
+              <a:buNone/>
+            </a:pPr>
+            <a:r>
+              <a:rPr lang="en-US" sz="1200" dirty="0">
+                <a:solidFill>
+                  <a:srgbClr val="3F3138"/>
+                </a:solidFill>
+                <a:latin typeface="Calibri" pitchFamily="34" charset="0"/>
+                <a:ea typeface="Calibri" pitchFamily="34" charset="-122"/>
+                <a:cs typeface="Calibri" pitchFamily="34" charset="-120"/>
+              </a:rPr>
+              <a:t>El resultado real depende del suelo, del clima y del cultivo. Estas cifras dan un orden de magnitud: en ningún caso constituyen un valor garantizado, contractual ni absoluto.</a:t>
+            </a:r>
+            <a:endParaRPr lang="en-US" sz="1200" dirty="0"/>
           </a:p>
         </p:txBody>
       </p:sp>
       <p:sp>
         <p:nvSpPr>
           <p:cNvPr id="8" name="Text 5"/>
-          <p:cNvSpPr txBox="1"/>
-          <p:nvPr/>
-        </p:nvSpPr>
-        <p:spPr>
-          <a:xfrm>
-            <a:off x="795528" y="4407408"/>
-            <a:ext cx="3070250" cy="1280160"/>
-          </a:xfrm>
-          <a:prstGeom prst="rect">
-            <a:avLst/>
-          </a:prstGeom>
-          <a:noFill/>
-          <a:ln/>
-        </p:spPr>
-        <p:txBody>
-          <a:bodyPr wrap="square" lIns="0" tIns="0" rIns="0" bIns="0" rtlCol="0" anchor="t"/>
-          <a:lstStyle/>
-          <a:p>
-            <a:pPr algn="l" marL="342900" indent="-342900">
-              <a:lnSpc>
-                <a:spcPct val="116000"/>
-              </a:lnSpc>
-              <a:spcAft>
-                <a:spcPts val="700"/>
-              </a:spcAft>
-              <a:buSzPct val="100000"/>
-              <a:buChar char="•"/>
-            </a:pPr>
-            <a:r>
-              <a:rPr lang="en-US" sz="1150" dirty="0">
-                <a:solidFill>
-                  <a:srgbClr val="3F3138"/>
-                </a:solidFill>
-                <a:latin typeface="Calibri" pitchFamily="34" charset="0"/>
-                <a:ea typeface="Calibri" pitchFamily="34" charset="-122"/>
-                <a:cs typeface="Calibri" pitchFamily="34" charset="-120"/>
-              </a:rPr>
-              <a:t>Mayor concentración de olivar del mundo, con buena parte aún en secano: el hidrorretenedor actúa donde no hay riego.</a:t>
-            </a:r>
-            <a:endParaRPr lang="en-US" sz="1150" dirty="0"/>
-          </a:p>
-          <a:p>
-            <a:pPr algn="l" marL="342900" indent="-342900">
-              <a:lnSpc>
-                <a:spcPct val="116000"/>
-              </a:lnSpc>
-              <a:spcAft>
-                <a:spcPts val="700"/>
-              </a:spcAft>
-              <a:buSzPct val="100000"/>
-              <a:buChar char="•"/>
-            </a:pPr>
-            <a:r>
-              <a:rPr lang="en-US" sz="1150" dirty="0">
-                <a:solidFill>
-                  <a:srgbClr val="3F3138"/>
-                </a:solidFill>
-                <a:latin typeface="Calibri" pitchFamily="34" charset="0"/>
-                <a:ea typeface="Calibri" pitchFamily="34" charset="-122"/>
-                <a:cs typeface="Calibri" pitchFamily="34" charset="-120"/>
-              </a:rPr>
-              <a:t>Las campañas 2022/23 y 2023/24 mostraron lo que cuesta una floración sin agua.</a:t>
-            </a:r>
-            <a:endParaRPr lang="en-US" sz="1150" dirty="0"/>
-          </a:p>
-          <a:p>
-            <a:pPr algn="l" marL="342900" indent="-342900">
-              <a:lnSpc>
-                <a:spcPct val="116000"/>
-              </a:lnSpc>
-              <a:spcAft>
-                <a:spcPts val="700"/>
-              </a:spcAft>
-              <a:buSzPct val="100000"/>
-              <a:buChar char="•"/>
-            </a:pPr>
-            <a:r>
-              <a:rPr lang="en-US" sz="1150" dirty="0">
-                <a:solidFill>
-                  <a:srgbClr val="3F3138"/>
-                </a:solidFill>
-                <a:latin typeface="Calibri" pitchFamily="34" charset="0"/>
-                <a:ea typeface="Calibri" pitchFamily="34" charset="-122"/>
-                <a:cs typeface="Calibri" pitchFamily="34" charset="-120"/>
-              </a:rPr>
-              <a:t>Tejido cooperativo denso: el ensayo se decide en grupo, no finca por finca.</a:t>
-            </a:r>
-            <a:endParaRPr lang="en-US" sz="1150" dirty="0"/>
-          </a:p>
-        </p:txBody>
-      </p:sp>
-      <p:sp>
-        <p:nvSpPr>
-          <p:cNvPr id="9" name="Shape 6"/>
-          <p:cNvSpPr/>
-          <p:nvPr/>
-        </p:nvSpPr>
-        <p:spPr>
-          <a:xfrm>
-            <a:off x="4359554" y="1783080"/>
-            <a:ext cx="3472586" cy="4069080"/>
-          </a:xfrm>
-          <a:prstGeom prst="roundRect">
-            <a:avLst>
-              <a:gd name="adj" fmla="val 2633"/>
-            </a:avLst>
-          </a:prstGeom>
-          <a:solidFill>
-            <a:srgbClr val="F5EFF1"/>
-          </a:solidFill>
-          <a:ln w="9525">
-            <a:solidFill>
-              <a:srgbClr val="E5D9DE"/>
-            </a:solidFill>
-            <a:prstDash val="solid"/>
-          </a:ln>
-        </p:spPr>
-      </p:sp>
-      <p:pic>
-        <p:nvPicPr>
-          <p:cNvPr id="10" name="Image 1" descr="preencoded.png">    </p:cNvPr>
-          <p:cNvPicPr>
-            <a:picLocks noChangeAspect="1"/>
-          </p:cNvPicPr>
-          <p:nvPr/>
-        </p:nvPicPr>
-        <p:blipFill>
-          <a:blip r:embed="rId2"/>
-          <a:stretch>
-            <a:fillRect/>
-          </a:stretch>
-        </p:blipFill>
-        <p:spPr>
-          <a:xfrm>
-            <a:off x="4359554" y="1783080"/>
-            <a:ext cx="3472586" cy="1691640"/>
-          </a:xfrm>
-          <a:prstGeom prst="rect">
-            <a:avLst/>
-          </a:prstGeom>
-        </p:spPr>
-      </p:pic>
-      <p:sp>
-        <p:nvSpPr>
-          <p:cNvPr id="11" name="Text 7"/>
-          <p:cNvSpPr txBox="1"/>
-          <p:nvPr/>
-        </p:nvSpPr>
-        <p:spPr>
-          <a:xfrm>
-            <a:off x="4560722" y="3639312"/>
-            <a:ext cx="3070250" cy="384048"/>
-          </a:xfrm>
-          <a:prstGeom prst="rect">
-            <a:avLst/>
-          </a:prstGeom>
-          <a:noFill/>
-          <a:ln/>
-        </p:spPr>
-        <p:txBody>
-          <a:bodyPr wrap="square" lIns="0" tIns="0" rIns="0" bIns="0" rtlCol="0" anchor="ctr"/>
-          <a:lstStyle/>
-          <a:p>
-            <a:pPr algn="l" indent="0" marL="0">
-              <a:buNone/>
-            </a:pPr>
-            <a:r>
-              <a:rPr lang="en-US" sz="1500" b="1" dirty="0">
-                <a:solidFill>
-                  <a:srgbClr val="6B2A44"/>
-                </a:solidFill>
-                <a:latin typeface="Cambria" pitchFamily="34" charset="0"/>
-                <a:ea typeface="Cambria" pitchFamily="34" charset="-122"/>
-                <a:cs typeface="Cambria" pitchFamily="34" charset="-120"/>
-              </a:rPr>
-              <a:t>Murcia — Campo de Cartagena</a:t>
-            </a:r>
-            <a:endParaRPr lang="en-US" sz="1500" dirty="0"/>
-          </a:p>
-        </p:txBody>
-      </p:sp>
-      <p:sp>
-        <p:nvSpPr>
-          <p:cNvPr id="12" name="Text 8"/>
-          <p:cNvSpPr txBox="1"/>
-          <p:nvPr/>
-        </p:nvSpPr>
-        <p:spPr>
-          <a:xfrm>
-            <a:off x="4560722" y="4041648"/>
-            <a:ext cx="3070250" cy="329184"/>
-          </a:xfrm>
-          <a:prstGeom prst="rect">
-            <a:avLst/>
-          </a:prstGeom>
-          <a:noFill/>
-          <a:ln/>
-        </p:spPr>
-        <p:txBody>
-          <a:bodyPr wrap="square" lIns="0" tIns="0" rIns="0" bIns="0" rtlCol="0" anchor="ctr"/>
-          <a:lstStyle/>
-          <a:p>
-            <a:pPr algn="l" indent="0" marL="0">
-              <a:buNone/>
-            </a:pPr>
-            <a:r>
-              <a:rPr lang="en-US" sz="1250" b="1" dirty="0">
-                <a:solidFill>
-                  <a:srgbClr val="8F6D0F"/>
-                </a:solidFill>
-                <a:latin typeface="Calibri" pitchFamily="34" charset="0"/>
-                <a:ea typeface="Calibri" pitchFamily="34" charset="-122"/>
-                <a:cs typeface="Calibri" pitchFamily="34" charset="-120"/>
-              </a:rPr>
-              <a:t>Hortícola de exportación</a:t>
-            </a:r>
-            <a:endParaRPr lang="en-US" sz="1250" dirty="0"/>
-          </a:p>
-        </p:txBody>
-      </p:sp>
-      <p:sp>
-        <p:nvSpPr>
-          <p:cNvPr id="13" name="Text 9"/>
-          <p:cNvSpPr txBox="1"/>
-          <p:nvPr/>
-        </p:nvSpPr>
-        <p:spPr>
-          <a:xfrm>
-            <a:off x="4560722" y="4407408"/>
-            <a:ext cx="3070250" cy="1280160"/>
-          </a:xfrm>
-          <a:prstGeom prst="rect">
-            <a:avLst/>
-          </a:prstGeom>
-          <a:noFill/>
-          <a:ln/>
-        </p:spPr>
-        <p:txBody>
-          <a:bodyPr wrap="square" lIns="0" tIns="0" rIns="0" bIns="0" rtlCol="0" anchor="t"/>
-          <a:lstStyle/>
-          <a:p>
-            <a:pPr algn="l" marL="342900" indent="-342900">
-              <a:lnSpc>
-                <a:spcPct val="116000"/>
-              </a:lnSpc>
-              <a:spcAft>
-                <a:spcPts val="700"/>
-              </a:spcAft>
-              <a:buSzPct val="100000"/>
-              <a:buChar char="•"/>
-            </a:pPr>
-            <a:r>
-              <a:rPr lang="en-US" sz="1150" dirty="0">
-                <a:solidFill>
-                  <a:srgbClr val="3F3138"/>
-                </a:solidFill>
-                <a:latin typeface="Calibri" pitchFamily="34" charset="0"/>
-                <a:ea typeface="Calibri" pitchFamily="34" charset="-122"/>
-                <a:cs typeface="Calibri" pitchFamily="34" charset="-120"/>
-              </a:rPr>
-              <a:t>La huerta de exportación por excelencia, con dotaciones dependientes del trasvase Tajo-Segura y sometidas a recortes reiterados.</a:t>
-            </a:r>
-            <a:endParaRPr lang="en-US" sz="1150" dirty="0"/>
-          </a:p>
-          <a:p>
-            <a:pPr algn="l" marL="342900" indent="-342900">
-              <a:lnSpc>
-                <a:spcPct val="116000"/>
-              </a:lnSpc>
-              <a:spcAft>
-                <a:spcPts val="700"/>
-              </a:spcAft>
-              <a:buSzPct val="100000"/>
-              <a:buChar char="•"/>
-            </a:pPr>
-            <a:r>
-              <a:rPr lang="en-US" sz="1150" dirty="0">
-                <a:solidFill>
-                  <a:srgbClr val="3F3138"/>
-                </a:solidFill>
-                <a:latin typeface="Calibri" pitchFamily="34" charset="0"/>
-                <a:ea typeface="Calibri" pitchFamily="34" charset="-122"/>
-                <a:cs typeface="Calibri" pitchFamily="34" charset="-120"/>
-              </a:rPr>
-              <a:t>El Mar Menor ha impuesto el marco regulatorio más estricto del país en materia de nitratos: reducir aportes sin perder rendimiento es la exigencia central.</a:t>
-            </a:r>
-            <a:endParaRPr lang="en-US" sz="1150" dirty="0"/>
-          </a:p>
-          <a:p>
-            <a:pPr algn="l" marL="342900" indent="-342900">
-              <a:lnSpc>
-                <a:spcPct val="116000"/>
-              </a:lnSpc>
-              <a:spcAft>
-                <a:spcPts val="700"/>
-              </a:spcAft>
-              <a:buSzPct val="100000"/>
-              <a:buChar char="•"/>
-            </a:pPr>
-            <a:r>
-              <a:rPr lang="en-US" sz="1150" dirty="0">
-                <a:solidFill>
-                  <a:srgbClr val="3F3138"/>
-                </a:solidFill>
-                <a:latin typeface="Calibri" pitchFamily="34" charset="0"/>
-                <a:ea typeface="Calibri" pitchFamily="34" charset="-122"/>
-                <a:cs typeface="Calibri" pitchFamily="34" charset="-120"/>
-              </a:rPr>
-              <a:t>Riego localizado generalizado: el margen de ahorro ya no está en el método, sino en lo que el suelo es capaz de retener.</a:t>
-            </a:r>
-            <a:endParaRPr lang="en-US" sz="1150" dirty="0"/>
-          </a:p>
-        </p:txBody>
-      </p:sp>
-      <p:sp>
-        <p:nvSpPr>
-          <p:cNvPr id="14" name="Shape 10"/>
-          <p:cNvSpPr/>
-          <p:nvPr/>
-        </p:nvSpPr>
-        <p:spPr>
-          <a:xfrm>
-            <a:off x="8124749" y="1783080"/>
-            <a:ext cx="3472586" cy="4069080"/>
-          </a:xfrm>
-          <a:prstGeom prst="roundRect">
-            <a:avLst>
-              <a:gd name="adj" fmla="val 2633"/>
-            </a:avLst>
-          </a:prstGeom>
-          <a:solidFill>
-            <a:srgbClr val="F5EFF1"/>
-          </a:solidFill>
-          <a:ln w="9525">
-            <a:solidFill>
-              <a:srgbClr val="E5D9DE"/>
-            </a:solidFill>
-            <a:prstDash val="solid"/>
-          </a:ln>
-        </p:spPr>
-      </p:sp>
-      <p:pic>
-        <p:nvPicPr>
-          <p:cNvPr id="15" name="Image 2" descr="preencoded.png">    </p:cNvPr>
-          <p:cNvPicPr>
-            <a:picLocks noChangeAspect="1"/>
-          </p:cNvPicPr>
-          <p:nvPr/>
-        </p:nvPicPr>
-        <p:blipFill>
-          <a:blip r:embed="rId3"/>
-          <a:stretch>
-            <a:fillRect/>
-          </a:stretch>
-        </p:blipFill>
-        <p:spPr>
-          <a:xfrm>
-            <a:off x="8124749" y="1783080"/>
-            <a:ext cx="3472586" cy="1691640"/>
-          </a:xfrm>
-          <a:prstGeom prst="rect">
-            <a:avLst/>
-          </a:prstGeom>
-        </p:spPr>
-      </p:pic>
-      <p:sp>
-        <p:nvSpPr>
-          <p:cNvPr id="16" name="Text 11"/>
-          <p:cNvSpPr txBox="1"/>
-          <p:nvPr/>
-        </p:nvSpPr>
-        <p:spPr>
-          <a:xfrm>
-            <a:off x="8325917" y="3639312"/>
-            <a:ext cx="3070250" cy="384048"/>
-          </a:xfrm>
-          <a:prstGeom prst="rect">
-            <a:avLst/>
-          </a:prstGeom>
-          <a:noFill/>
-          <a:ln/>
-        </p:spPr>
-        <p:txBody>
-          <a:bodyPr wrap="square" lIns="0" tIns="0" rIns="0" bIns="0" rtlCol="0" anchor="ctr"/>
-          <a:lstStyle/>
-          <a:p>
-            <a:pPr algn="l" indent="0" marL="0">
-              <a:buNone/>
-            </a:pPr>
-            <a:r>
-              <a:rPr lang="en-US" sz="1500" b="1" dirty="0">
-                <a:solidFill>
-                  <a:srgbClr val="6B2A44"/>
-                </a:solidFill>
-                <a:latin typeface="Cambria" pitchFamily="34" charset="0"/>
-                <a:ea typeface="Cambria" pitchFamily="34" charset="-122"/>
-                <a:cs typeface="Cambria" pitchFamily="34" charset="-120"/>
-              </a:rPr>
-              <a:t>Almería — Campo de Dalías</a:t>
-            </a:r>
-            <a:endParaRPr lang="en-US" sz="1500" dirty="0"/>
-          </a:p>
-        </p:txBody>
-      </p:sp>
-      <p:sp>
-        <p:nvSpPr>
-          <p:cNvPr id="17" name="Text 12"/>
-          <p:cNvSpPr txBox="1"/>
-          <p:nvPr/>
-        </p:nvSpPr>
-        <p:spPr>
-          <a:xfrm>
-            <a:off x="8325917" y="4041648"/>
-            <a:ext cx="3070250" cy="329184"/>
-          </a:xfrm>
-          <a:prstGeom prst="rect">
-            <a:avLst/>
-          </a:prstGeom>
-          <a:noFill/>
-          <a:ln/>
-        </p:spPr>
-        <p:txBody>
-          <a:bodyPr wrap="square" lIns="0" tIns="0" rIns="0" bIns="0" rtlCol="0" anchor="ctr"/>
-          <a:lstStyle/>
-          <a:p>
-            <a:pPr algn="l" indent="0" marL="0">
-              <a:buNone/>
-            </a:pPr>
-            <a:r>
-              <a:rPr lang="en-US" sz="1250" b="1" dirty="0">
-                <a:solidFill>
-                  <a:srgbClr val="8F6D0F"/>
-                </a:solidFill>
-                <a:latin typeface="Calibri" pitchFamily="34" charset="0"/>
-                <a:ea typeface="Calibri" pitchFamily="34" charset="-122"/>
-                <a:cs typeface="Calibri" pitchFamily="34" charset="-120"/>
-              </a:rPr>
-              <a:t>≈ 33 000 ha de invernadero</a:t>
-            </a:r>
-            <a:endParaRPr lang="en-US" sz="1250" dirty="0"/>
-          </a:p>
-        </p:txBody>
-      </p:sp>
-      <p:sp>
-        <p:nvSpPr>
-          <p:cNvPr id="18" name="Text 13"/>
-          <p:cNvSpPr txBox="1"/>
-          <p:nvPr/>
-        </p:nvSpPr>
-        <p:spPr>
-          <a:xfrm>
-            <a:off x="8325917" y="4407408"/>
-            <a:ext cx="3070250" cy="1280160"/>
-          </a:xfrm>
-          <a:prstGeom prst="rect">
-            <a:avLst/>
-          </a:prstGeom>
-          <a:noFill/>
-          <a:ln/>
-        </p:spPr>
-        <p:txBody>
-          <a:bodyPr wrap="square" lIns="0" tIns="0" rIns="0" bIns="0" rtlCol="0" anchor="t"/>
-          <a:lstStyle/>
-          <a:p>
-            <a:pPr algn="l" marL="342900" indent="-342900">
-              <a:lnSpc>
-                <a:spcPct val="116000"/>
-              </a:lnSpc>
-              <a:spcAft>
-                <a:spcPts val="700"/>
-              </a:spcAft>
-              <a:buSzPct val="100000"/>
-              <a:buChar char="•"/>
-            </a:pPr>
-            <a:r>
-              <a:rPr lang="en-US" sz="1150" dirty="0">
-                <a:solidFill>
-                  <a:srgbClr val="3F3138"/>
-                </a:solidFill>
-                <a:latin typeface="Calibri" pitchFamily="34" charset="0"/>
-                <a:ea typeface="Calibri" pitchFamily="34" charset="-122"/>
-                <a:cs typeface="Calibri" pitchFamily="34" charset="-120"/>
-              </a:rPr>
-              <a:t>La mayor superficie de cultivo bajo plástico del mundo, sobre acuíferos sobreexplotados y con intrusión salina en la franja costera.</a:t>
-            </a:r>
-            <a:endParaRPr lang="en-US" sz="1150" dirty="0"/>
-          </a:p>
-          <a:p>
-            <a:pPr algn="l" marL="342900" indent="-342900">
-              <a:lnSpc>
-                <a:spcPct val="116000"/>
-              </a:lnSpc>
-              <a:spcAft>
-                <a:spcPts val="700"/>
-              </a:spcAft>
-              <a:buSzPct val="100000"/>
-              <a:buChar char="•"/>
-            </a:pPr>
-            <a:r>
-              <a:rPr lang="en-US" sz="1150" dirty="0">
-                <a:solidFill>
-                  <a:srgbClr val="3F3138"/>
-                </a:solidFill>
-                <a:latin typeface="Calibri" pitchFamily="34" charset="0"/>
-                <a:ea typeface="Calibri" pitchFamily="34" charset="-122"/>
-                <a:cs typeface="Calibri" pitchFamily="34" charset="-120"/>
-              </a:rPr>
-              <a:t>Ciclos cortos y rotaciones rápidas: el ensayo da resultado en una campaña, no en cuatro años.</a:t>
-            </a:r>
-            <a:endParaRPr lang="en-US" sz="1150" dirty="0"/>
-          </a:p>
-          <a:p>
-            <a:pPr algn="l" marL="342900" indent="-342900">
-              <a:lnSpc>
-                <a:spcPct val="116000"/>
-              </a:lnSpc>
-              <a:spcAft>
-                <a:spcPts val="700"/>
-              </a:spcAft>
-              <a:buSzPct val="100000"/>
-              <a:buChar char="•"/>
-            </a:pPr>
-            <a:r>
-              <a:rPr lang="en-US" sz="1150" dirty="0">
-                <a:solidFill>
-                  <a:srgbClr val="3F3138"/>
-                </a:solidFill>
-                <a:latin typeface="Calibri" pitchFamily="34" charset="0"/>
-                <a:ea typeface="Calibri" pitchFamily="34" charset="-122"/>
-                <a:cs typeface="Calibri" pitchFamily="34" charset="-120"/>
-              </a:rPr>
-              <a:t>Compradores del norte de Europa que auditan la huella hídrica de sus proveedores y piden trazabilidad documental.</a:t>
-            </a:r>
-            <a:endParaRPr lang="en-US" sz="1150" dirty="0"/>
-          </a:p>
-        </p:txBody>
-      </p:sp>
-      <p:sp>
-        <p:nvSpPr>
-          <p:cNvPr id="19" name="Text 14"/>
           <p:cNvSpPr txBox="1"/>
           <p:nvPr/>
         </p:nvSpPr>
@@ -6370,7 +6202,7 @@
       </p:sp>
       <p:sp>
         <p:nvSpPr>
-          <p:cNvPr id="20" name="Text 15"/>
+          <p:cNvPr id="9" name="Text 6"/>
           <p:cNvSpPr txBox="1"/>
           <p:nvPr/>
         </p:nvSpPr>
@@ -6474,7 +6306,7 @@
                 <a:ea typeface="Calibri" pitchFamily="34" charset="-122"/>
                 <a:cs typeface="Calibri" pitchFamily="34" charset="-120"/>
               </a:rPr>
-              <a:t>CÓMO TRABAJAMOS</a:t>
+              <a:t>TRES ZONAS PRIORITARIAS</a:t>
             </a:r>
             <a:endParaRPr lang="en-US" sz="1150" dirty="0"/>
           </a:p>
@@ -6513,7 +6345,7 @@
                 <a:ea typeface="Cambria" pitchFamily="34" charset="-122"/>
                 <a:cs typeface="Cambria" pitchFamily="34" charset="-120"/>
               </a:rPr>
-              <a:t>Un despliegue por etapas, medido en cada paso</a:t>
+              <a:t>Dónde iniciar los primeros ensayos</a:t>
             </a:r>
             <a:endParaRPr lang="en-US" sz="3000" dirty="0"/>
           </a:p>
@@ -6527,12 +6359,12 @@
         </p:nvSpPr>
         <p:spPr>
           <a:xfrm>
-            <a:off x="594360" y="1874520"/>
-            <a:ext cx="2545004" cy="2834640"/>
+            <a:off x="594360" y="1783080"/>
+            <a:ext cx="3472586" cy="4069080"/>
           </a:xfrm>
           <a:prstGeom prst="roundRect">
             <a:avLst>
-              <a:gd name="adj" fmla="val 3593"/>
+              <a:gd name="adj" fmla="val 2633"/>
             </a:avLst>
           </a:prstGeom>
           <a:solidFill>
@@ -6546,36 +6378,40 @@
           </a:ln>
         </p:spPr>
       </p:sp>
-      <p:sp>
-        <p:nvSpPr>
-          <p:cNvPr id="5" name="Shape 3"/>
-          <p:cNvSpPr/>
-          <p:nvPr/>
-        </p:nvSpPr>
-        <p:spPr>
-          <a:xfrm>
-            <a:off x="822960" y="2103120"/>
-            <a:ext cx="566928" cy="566928"/>
-          </a:xfrm>
-          <a:prstGeom prst="ellipse">
-            <a:avLst/>
-          </a:prstGeom>
-          <a:solidFill>
-            <a:srgbClr val="6B2A44"/>
-          </a:solidFill>
-          <a:ln/>
-        </p:spPr>
-      </p:sp>
-      <p:sp>
-        <p:nvSpPr>
-          <p:cNvPr id="6" name="Text 4"/>
-          <p:cNvSpPr txBox="1"/>
-          <p:nvPr/>
-        </p:nvSpPr>
-        <p:spPr>
-          <a:xfrm>
-            <a:off x="822960" y="2103120"/>
-            <a:ext cx="566928" cy="566928"/>
+      <p:pic>
+        <p:nvPicPr>
+          <p:cNvPr id="5" name="Image 0" descr="preencoded.png">    </p:cNvPr>
+          <p:cNvPicPr>
+            <a:picLocks noChangeAspect="1"/>
+          </p:cNvPicPr>
+          <p:nvPr/>
+        </p:nvPicPr>
+        <p:blipFill>
+          <a:blip r:embed="rId1"/>
+          <a:stretch>
+            <a:fillRect/>
+          </a:stretch>
+        </p:blipFill>
+        <p:spPr>
+          <a:xfrm>
+            <a:off x="594360" y="1783080"/>
+            <a:ext cx="3472586" cy="1691640"/>
+          </a:xfrm>
+          <a:prstGeom prst="rect">
+            <a:avLst/>
+          </a:prstGeom>
+        </p:spPr>
+      </p:pic>
+      <p:sp>
+        <p:nvSpPr>
+          <p:cNvPr id="6" name="Text 3"/>
+          <p:cNvSpPr txBox="1"/>
+          <p:nvPr/>
+        </p:nvSpPr>
+        <p:spPr>
+          <a:xfrm>
+            <a:off x="795528" y="3639312"/>
+            <a:ext cx="3070250" cy="384048"/>
           </a:xfrm>
           <a:prstGeom prst="rect">
             <a:avLst/>
@@ -6587,34 +6423,34 @@
           <a:bodyPr wrap="square" lIns="0" tIns="0" rIns="0" bIns="0" rtlCol="0" anchor="ctr"/>
           <a:lstStyle/>
           <a:p>
-            <a:pPr algn="ctr" indent="0" marL="0">
-              <a:buNone/>
-            </a:pPr>
-            <a:r>
-              <a:rPr lang="en-US" sz="1600" b="1" dirty="0">
-                <a:solidFill>
-                  <a:srgbClr val="FFFFFF"/>
+            <a:pPr algn="l" indent="0" marL="0">
+              <a:buNone/>
+            </a:pPr>
+            <a:r>
+              <a:rPr lang="en-US" sz="1500" b="1" dirty="0">
+                <a:solidFill>
+                  <a:srgbClr val="6B2A44"/>
                 </a:solidFill>
                 <a:latin typeface="Cambria" pitchFamily="34" charset="0"/>
                 <a:ea typeface="Cambria" pitchFamily="34" charset="-122"/>
                 <a:cs typeface="Cambria" pitchFamily="34" charset="-120"/>
               </a:rPr>
-              <a:t>1</a:t>
-            </a:r>
-            <a:endParaRPr lang="en-US" sz="1600" dirty="0"/>
-          </a:p>
-        </p:txBody>
-      </p:sp>
-      <p:sp>
-        <p:nvSpPr>
-          <p:cNvPr id="7" name="Text 5"/>
-          <p:cNvSpPr txBox="1"/>
-          <p:nvPr/>
-        </p:nvSpPr>
-        <p:spPr>
-          <a:xfrm>
-            <a:off x="822960" y="2788920"/>
-            <a:ext cx="2087804" cy="457200"/>
+              <a:t>Jaén y Córdoba</a:t>
+            </a:r>
+            <a:endParaRPr lang="en-US" sz="1500" dirty="0"/>
+          </a:p>
+        </p:txBody>
+      </p:sp>
+      <p:sp>
+        <p:nvSpPr>
+          <p:cNvPr id="7" name="Text 4"/>
+          <p:cNvSpPr txBox="1"/>
+          <p:nvPr/>
+        </p:nvSpPr>
+        <p:spPr>
+          <a:xfrm>
+            <a:off x="795528" y="4041648"/>
+            <a:ext cx="3070250" cy="329184"/>
           </a:xfrm>
           <a:prstGeom prst="rect">
             <a:avLst/>
@@ -6630,30 +6466,30 @@
               <a:buNone/>
             </a:pPr>
             <a:r>
-              <a:rPr lang="en-US" sz="1400" b="1" dirty="0">
-                <a:solidFill>
-                  <a:srgbClr val="6B2A44"/>
-                </a:solidFill>
-                <a:latin typeface="Cambria" pitchFamily="34" charset="0"/>
-                <a:ea typeface="Cambria" pitchFamily="34" charset="-122"/>
-                <a:cs typeface="Cambria" pitchFamily="34" charset="-120"/>
-              </a:rPr>
-              <a:t>Diagnóstico</a:t>
-            </a:r>
-            <a:endParaRPr lang="en-US" sz="1400" dirty="0"/>
-          </a:p>
-        </p:txBody>
-      </p:sp>
-      <p:sp>
-        <p:nvSpPr>
-          <p:cNvPr id="8" name="Text 6"/>
-          <p:cNvSpPr txBox="1"/>
-          <p:nvPr/>
-        </p:nvSpPr>
-        <p:spPr>
-          <a:xfrm>
-            <a:off x="822960" y="3291840"/>
-            <a:ext cx="2087804" cy="1234440"/>
+              <a:rPr lang="en-US" sz="1250" b="1" dirty="0">
+                <a:solidFill>
+                  <a:srgbClr val="8F6D0F"/>
+                </a:solidFill>
+                <a:latin typeface="Calibri" pitchFamily="34" charset="0"/>
+                <a:ea typeface="Calibri" pitchFamily="34" charset="-122"/>
+                <a:cs typeface="Calibri" pitchFamily="34" charset="-120"/>
+              </a:rPr>
+              <a:t>≈ 1,6 M ha de olivar en Andalucía</a:t>
+            </a:r>
+            <a:endParaRPr lang="en-US" sz="1250" dirty="0"/>
+          </a:p>
+        </p:txBody>
+      </p:sp>
+      <p:sp>
+        <p:nvSpPr>
+          <p:cNvPr id="8" name="Text 5"/>
+          <p:cNvSpPr txBox="1"/>
+          <p:nvPr/>
+        </p:nvSpPr>
+        <p:spPr>
+          <a:xfrm>
+            <a:off x="795528" y="4407408"/>
+            <a:ext cx="3070250" cy="1280160"/>
           </a:xfrm>
           <a:prstGeom prst="rect">
             <a:avLst/>
@@ -6665,14 +6501,18 @@
           <a:bodyPr wrap="square" lIns="0" tIns="0" rIns="0" bIns="0" rtlCol="0" anchor="t"/>
           <a:lstStyle/>
           <a:p>
-            <a:pPr algn="l" indent="0" marL="0">
+            <a:pPr algn="l" marL="342900" indent="-342900">
               <a:lnSpc>
-                <a:spcPct val="120000"/>
+                <a:spcPct val="116000"/>
               </a:lnSpc>
-              <a:buNone/>
-            </a:pPr>
-            <a:r>
-              <a:rPr lang="en-US" sz="1200" dirty="0">
+              <a:spcAft>
+                <a:spcPts val="700"/>
+              </a:spcAft>
+              <a:buSzPct val="100000"/>
+              <a:buChar char="•"/>
+            </a:pPr>
+            <a:r>
+              <a:rPr lang="en-US" sz="1150" dirty="0">
                 <a:solidFill>
                   <a:srgbClr val="3F3138"/>
                 </a:solidFill>
@@ -6680,26 +6520,74 @@
                 <a:ea typeface="Calibri" pitchFamily="34" charset="-122"/>
                 <a:cs typeface="Calibri" pitchFamily="34" charset="-120"/>
               </a:rPr>
-              <a:t>Análisis del suelo, del método de riego y del cultivo. Sin compromiso en esta etapa.</a:t>
-            </a:r>
-            <a:endParaRPr lang="en-US" sz="1200" dirty="0"/>
-          </a:p>
-        </p:txBody>
-      </p:sp>
-      <p:sp>
-        <p:nvSpPr>
-          <p:cNvPr id="9" name="Shape 7"/>
+              <a:t>Mayor concentración de olivar del mundo, con buena parte aún en secano: el hidrorretenedor actúa donde no hay riego.</a:t>
+            </a:r>
+            <a:endParaRPr lang="en-US" sz="1150" dirty="0"/>
+          </a:p>
+          <a:p>
+            <a:pPr algn="l" marL="342900" indent="-342900">
+              <a:lnSpc>
+                <a:spcPct val="116000"/>
+              </a:lnSpc>
+              <a:spcAft>
+                <a:spcPts val="700"/>
+              </a:spcAft>
+              <a:buSzPct val="100000"/>
+              <a:buChar char="•"/>
+            </a:pPr>
+            <a:r>
+              <a:rPr lang="en-US" sz="1150" dirty="0">
+                <a:solidFill>
+                  <a:srgbClr val="3F3138"/>
+                </a:solidFill>
+                <a:latin typeface="Calibri" pitchFamily="34" charset="0"/>
+                <a:ea typeface="Calibri" pitchFamily="34" charset="-122"/>
+                <a:cs typeface="Calibri" pitchFamily="34" charset="-120"/>
+              </a:rPr>
+              <a:t>Las campañas 2022/23 y 2023/24 mostraron lo que cuesta una floración sin agua.</a:t>
+            </a:r>
+            <a:endParaRPr lang="en-US" sz="1150" dirty="0"/>
+          </a:p>
+          <a:p>
+            <a:pPr algn="l" marL="342900" indent="-342900">
+              <a:lnSpc>
+                <a:spcPct val="116000"/>
+              </a:lnSpc>
+              <a:spcAft>
+                <a:spcPts val="700"/>
+              </a:spcAft>
+              <a:buSzPct val="100000"/>
+              <a:buChar char="•"/>
+            </a:pPr>
+            <a:r>
+              <a:rPr lang="en-US" sz="1150" dirty="0">
+                <a:solidFill>
+                  <a:srgbClr val="3F3138"/>
+                </a:solidFill>
+                <a:latin typeface="Calibri" pitchFamily="34" charset="0"/>
+                <a:ea typeface="Calibri" pitchFamily="34" charset="-122"/>
+                <a:cs typeface="Calibri" pitchFamily="34" charset="-120"/>
+              </a:rPr>
+              <a:t>Tejido cooperativo denso: el ensayo se decide en grupo, no finca por finca.</a:t>
+            </a:r>
+            <a:endParaRPr lang="en-US" sz="1150" dirty="0"/>
+          </a:p>
+        </p:txBody>
+      </p:sp>
+      <p:sp>
+        <p:nvSpPr>
+          <p:cNvPr id="9" name="Shape 6"/>
           <p:cNvSpPr/>
           <p:nvPr/>
         </p:nvSpPr>
         <p:spPr>
           <a:xfrm>
-            <a:off x="3413684" y="1874520"/>
-            <a:ext cx="2545004" cy="2834640"/>
+            <a:off x="4359554" y="1783080"/>
+            <a:ext cx="3472586" cy="4069080"/>
           </a:xfrm>
           <a:prstGeom prst="roundRect">
             <a:avLst>
-              <a:gd name="adj" fmla="val 3593"/>
+              <a:gd name="adj" fmla="val 2633"/>
             </a:avLst>
           </a:prstGeom>
           <a:solidFill>
@@ -6713,36 +6601,40 @@
           </a:ln>
         </p:spPr>
       </p:sp>
-      <p:sp>
-        <p:nvSpPr>
-          <p:cNvPr id="10" name="Shape 8"/>
-          <p:cNvSpPr/>
-          <p:nvPr/>
-        </p:nvSpPr>
-        <p:spPr>
-          <a:xfrm>
-            <a:off x="3642284" y="2103120"/>
-            <a:ext cx="566928" cy="566928"/>
-          </a:xfrm>
-          <a:prstGeom prst="ellipse">
-            <a:avLst/>
-          </a:prstGeom>
-          <a:solidFill>
-            <a:srgbClr val="6B2A44"/>
-          </a:solidFill>
-          <a:ln/>
-        </p:spPr>
-      </p:sp>
-      <p:sp>
-        <p:nvSpPr>
-          <p:cNvPr id="11" name="Text 9"/>
-          <p:cNvSpPr txBox="1"/>
-          <p:nvPr/>
-        </p:nvSpPr>
-        <p:spPr>
-          <a:xfrm>
-            <a:off x="3642284" y="2103120"/>
-            <a:ext cx="566928" cy="566928"/>
+      <p:pic>
+        <p:nvPicPr>
+          <p:cNvPr id="10" name="Image 1" descr="preencoded.png">    </p:cNvPr>
+          <p:cNvPicPr>
+            <a:picLocks noChangeAspect="1"/>
+          </p:cNvPicPr>
+          <p:nvPr/>
+        </p:nvPicPr>
+        <p:blipFill>
+          <a:blip r:embed="rId2"/>
+          <a:stretch>
+            <a:fillRect/>
+          </a:stretch>
+        </p:blipFill>
+        <p:spPr>
+          <a:xfrm>
+            <a:off x="4359554" y="1783080"/>
+            <a:ext cx="3472586" cy="1691640"/>
+          </a:xfrm>
+          <a:prstGeom prst="rect">
+            <a:avLst/>
+          </a:prstGeom>
+        </p:spPr>
+      </p:pic>
+      <p:sp>
+        <p:nvSpPr>
+          <p:cNvPr id="11" name="Text 7"/>
+          <p:cNvSpPr txBox="1"/>
+          <p:nvPr/>
+        </p:nvSpPr>
+        <p:spPr>
+          <a:xfrm>
+            <a:off x="4560722" y="3639312"/>
+            <a:ext cx="3070250" cy="384048"/>
           </a:xfrm>
           <a:prstGeom prst="rect">
             <a:avLst/>
@@ -6754,34 +6646,34 @@
           <a:bodyPr wrap="square" lIns="0" tIns="0" rIns="0" bIns="0" rtlCol="0" anchor="ctr"/>
           <a:lstStyle/>
           <a:p>
-            <a:pPr algn="ctr" indent="0" marL="0">
-              <a:buNone/>
-            </a:pPr>
-            <a:r>
-              <a:rPr lang="en-US" sz="1600" b="1" dirty="0">
-                <a:solidFill>
-                  <a:srgbClr val="FFFFFF"/>
+            <a:pPr algn="l" indent="0" marL="0">
+              <a:buNone/>
+            </a:pPr>
+            <a:r>
+              <a:rPr lang="en-US" sz="1500" b="1" dirty="0">
+                <a:solidFill>
+                  <a:srgbClr val="6B2A44"/>
                 </a:solidFill>
                 <a:latin typeface="Cambria" pitchFamily="34" charset="0"/>
                 <a:ea typeface="Cambria" pitchFamily="34" charset="-122"/>
                 <a:cs typeface="Cambria" pitchFamily="34" charset="-120"/>
               </a:rPr>
-              <a:t>2</a:t>
-            </a:r>
-            <a:endParaRPr lang="en-US" sz="1600" dirty="0"/>
-          </a:p>
-        </p:txBody>
-      </p:sp>
-      <p:sp>
-        <p:nvSpPr>
-          <p:cNvPr id="12" name="Text 10"/>
-          <p:cNvSpPr txBox="1"/>
-          <p:nvPr/>
-        </p:nvSpPr>
-        <p:spPr>
-          <a:xfrm>
-            <a:off x="3642284" y="2788920"/>
-            <a:ext cx="2087804" cy="457200"/>
+              <a:t>Murcia — Campo de Cartagena</a:t>
+            </a:r>
+            <a:endParaRPr lang="en-US" sz="1500" dirty="0"/>
+          </a:p>
+        </p:txBody>
+      </p:sp>
+      <p:sp>
+        <p:nvSpPr>
+          <p:cNvPr id="12" name="Text 8"/>
+          <p:cNvSpPr txBox="1"/>
+          <p:nvPr/>
+        </p:nvSpPr>
+        <p:spPr>
+          <a:xfrm>
+            <a:off x="4560722" y="4041648"/>
+            <a:ext cx="3070250" cy="329184"/>
           </a:xfrm>
           <a:prstGeom prst="rect">
             <a:avLst/>
@@ -6797,30 +6689,30 @@
               <a:buNone/>
             </a:pPr>
             <a:r>
-              <a:rPr lang="en-US" sz="1400" b="1" dirty="0">
-                <a:solidFill>
-                  <a:srgbClr val="6B2A44"/>
-                </a:solidFill>
-                <a:latin typeface="Cambria" pitchFamily="34" charset="0"/>
-                <a:ea typeface="Cambria" pitchFamily="34" charset="-122"/>
-                <a:cs typeface="Cambria" pitchFamily="34" charset="-120"/>
-              </a:rPr>
-              <a:t>Parcela piloto</a:t>
-            </a:r>
-            <a:endParaRPr lang="en-US" sz="1400" dirty="0"/>
-          </a:p>
-        </p:txBody>
-      </p:sp>
-      <p:sp>
-        <p:nvSpPr>
-          <p:cNvPr id="13" name="Text 11"/>
-          <p:cNvSpPr txBox="1"/>
-          <p:nvPr/>
-        </p:nvSpPr>
-        <p:spPr>
-          <a:xfrm>
-            <a:off x="3642284" y="3291840"/>
-            <a:ext cx="2087804" cy="1234440"/>
+              <a:rPr lang="en-US" sz="1250" b="1" dirty="0">
+                <a:solidFill>
+                  <a:srgbClr val="8F6D0F"/>
+                </a:solidFill>
+                <a:latin typeface="Calibri" pitchFamily="34" charset="0"/>
+                <a:ea typeface="Calibri" pitchFamily="34" charset="-122"/>
+                <a:cs typeface="Calibri" pitchFamily="34" charset="-120"/>
+              </a:rPr>
+              <a:t>Hortícola de exportación</a:t>
+            </a:r>
+            <a:endParaRPr lang="en-US" sz="1250" dirty="0"/>
+          </a:p>
+        </p:txBody>
+      </p:sp>
+      <p:sp>
+        <p:nvSpPr>
+          <p:cNvPr id="13" name="Text 9"/>
+          <p:cNvSpPr txBox="1"/>
+          <p:nvPr/>
+        </p:nvSpPr>
+        <p:spPr>
+          <a:xfrm>
+            <a:off x="4560722" y="4407408"/>
+            <a:ext cx="3070250" cy="1280160"/>
           </a:xfrm>
           <a:prstGeom prst="rect">
             <a:avLst/>
@@ -6832,14 +6724,18 @@
           <a:bodyPr wrap="square" lIns="0" tIns="0" rIns="0" bIns="0" rtlCol="0" anchor="t"/>
           <a:lstStyle/>
           <a:p>
-            <a:pPr algn="l" indent="0" marL="0">
+            <a:pPr algn="l" marL="342900" indent="-342900">
               <a:lnSpc>
-                <a:spcPct val="120000"/>
+                <a:spcPct val="116000"/>
               </a:lnSpc>
-              <a:buNone/>
-            </a:pPr>
-            <a:r>
-              <a:rPr lang="en-US" sz="1200" dirty="0">
+              <a:spcAft>
+                <a:spcPts val="700"/>
+              </a:spcAft>
+              <a:buSzPct val="100000"/>
+              <a:buChar char="•"/>
+            </a:pPr>
+            <a:r>
+              <a:rPr lang="en-US" sz="1150" dirty="0">
                 <a:solidFill>
                   <a:srgbClr val="3F3138"/>
                 </a:solidFill>
@@ -6847,26 +6743,74 @@
                 <a:ea typeface="Calibri" pitchFamily="34" charset="-122"/>
                 <a:cs typeface="Calibri" pitchFamily="34" charset="-120"/>
               </a:rPr>
-              <a:t>Un ensayo comparativo en una parcela, con parcela testigo conducida de forma idéntica.</a:t>
-            </a:r>
-            <a:endParaRPr lang="en-US" sz="1200" dirty="0"/>
-          </a:p>
-        </p:txBody>
-      </p:sp>
-      <p:sp>
-        <p:nvSpPr>
-          <p:cNvPr id="14" name="Shape 12"/>
+              <a:t>La huerta de exportación por excelencia, con dotaciones dependientes del trasvase Tajo-Segura y sometidas a recortes reiterados.</a:t>
+            </a:r>
+            <a:endParaRPr lang="en-US" sz="1150" dirty="0"/>
+          </a:p>
+          <a:p>
+            <a:pPr algn="l" marL="342900" indent="-342900">
+              <a:lnSpc>
+                <a:spcPct val="116000"/>
+              </a:lnSpc>
+              <a:spcAft>
+                <a:spcPts val="700"/>
+              </a:spcAft>
+              <a:buSzPct val="100000"/>
+              <a:buChar char="•"/>
+            </a:pPr>
+            <a:r>
+              <a:rPr lang="en-US" sz="1150" dirty="0">
+                <a:solidFill>
+                  <a:srgbClr val="3F3138"/>
+                </a:solidFill>
+                <a:latin typeface="Calibri" pitchFamily="34" charset="0"/>
+                <a:ea typeface="Calibri" pitchFamily="34" charset="-122"/>
+                <a:cs typeface="Calibri" pitchFamily="34" charset="-120"/>
+              </a:rPr>
+              <a:t>El Mar Menor ha impuesto el marco regulatorio más estricto del país en materia de nitratos: reducir aportes sin perder rendimiento es la exigencia central.</a:t>
+            </a:r>
+            <a:endParaRPr lang="en-US" sz="1150" dirty="0"/>
+          </a:p>
+          <a:p>
+            <a:pPr algn="l" marL="342900" indent="-342900">
+              <a:lnSpc>
+                <a:spcPct val="116000"/>
+              </a:lnSpc>
+              <a:spcAft>
+                <a:spcPts val="700"/>
+              </a:spcAft>
+              <a:buSzPct val="100000"/>
+              <a:buChar char="•"/>
+            </a:pPr>
+            <a:r>
+              <a:rPr lang="en-US" sz="1150" dirty="0">
+                <a:solidFill>
+                  <a:srgbClr val="3F3138"/>
+                </a:solidFill>
+                <a:latin typeface="Calibri" pitchFamily="34" charset="0"/>
+                <a:ea typeface="Calibri" pitchFamily="34" charset="-122"/>
+                <a:cs typeface="Calibri" pitchFamily="34" charset="-120"/>
+              </a:rPr>
+              <a:t>Riego localizado generalizado: el margen de ahorro ya no está en el método, sino en lo que el suelo es capaz de retener.</a:t>
+            </a:r>
+            <a:endParaRPr lang="en-US" sz="1150" dirty="0"/>
+          </a:p>
+        </p:txBody>
+      </p:sp>
+      <p:sp>
+        <p:nvSpPr>
+          <p:cNvPr id="14" name="Shape 10"/>
           <p:cNvSpPr/>
           <p:nvPr/>
         </p:nvSpPr>
         <p:spPr>
           <a:xfrm>
-            <a:off x="6233008" y="1874520"/>
-            <a:ext cx="2545004" cy="2834640"/>
+            <a:off x="8124749" y="1783080"/>
+            <a:ext cx="3472586" cy="4069080"/>
           </a:xfrm>
           <a:prstGeom prst="roundRect">
             <a:avLst>
-              <a:gd name="adj" fmla="val 3593"/>
+              <a:gd name="adj" fmla="val 2633"/>
             </a:avLst>
           </a:prstGeom>
           <a:solidFill>
@@ -6880,36 +6824,40 @@
           </a:ln>
         </p:spPr>
       </p:sp>
-      <p:sp>
-        <p:nvSpPr>
-          <p:cNvPr id="15" name="Shape 13"/>
-          <p:cNvSpPr/>
-          <p:nvPr/>
-        </p:nvSpPr>
-        <p:spPr>
-          <a:xfrm>
-            <a:off x="6461608" y="2103120"/>
-            <a:ext cx="566928" cy="566928"/>
-          </a:xfrm>
-          <a:prstGeom prst="ellipse">
-            <a:avLst/>
-          </a:prstGeom>
-          <a:solidFill>
-            <a:srgbClr val="6B2A44"/>
-          </a:solidFill>
-          <a:ln/>
-        </p:spPr>
-      </p:sp>
-      <p:sp>
-        <p:nvSpPr>
-          <p:cNvPr id="16" name="Text 14"/>
-          <p:cNvSpPr txBox="1"/>
-          <p:nvPr/>
-        </p:nvSpPr>
-        <p:spPr>
-          <a:xfrm>
-            <a:off x="6461608" y="2103120"/>
-            <a:ext cx="566928" cy="566928"/>
+      <p:pic>
+        <p:nvPicPr>
+          <p:cNvPr id="15" name="Image 2" descr="preencoded.png">    </p:cNvPr>
+          <p:cNvPicPr>
+            <a:picLocks noChangeAspect="1"/>
+          </p:cNvPicPr>
+          <p:nvPr/>
+        </p:nvPicPr>
+        <p:blipFill>
+          <a:blip r:embed="rId3"/>
+          <a:stretch>
+            <a:fillRect/>
+          </a:stretch>
+        </p:blipFill>
+        <p:spPr>
+          <a:xfrm>
+            <a:off x="8124749" y="1783080"/>
+            <a:ext cx="3472586" cy="1691640"/>
+          </a:xfrm>
+          <a:prstGeom prst="rect">
+            <a:avLst/>
+          </a:prstGeom>
+        </p:spPr>
+      </p:pic>
+      <p:sp>
+        <p:nvSpPr>
+          <p:cNvPr id="16" name="Text 11"/>
+          <p:cNvSpPr txBox="1"/>
+          <p:nvPr/>
+        </p:nvSpPr>
+        <p:spPr>
+          <a:xfrm>
+            <a:off x="8325917" y="3639312"/>
+            <a:ext cx="3070250" cy="384048"/>
           </a:xfrm>
           <a:prstGeom prst="rect">
             <a:avLst/>
@@ -6921,34 +6869,34 @@
           <a:bodyPr wrap="square" lIns="0" tIns="0" rIns="0" bIns="0" rtlCol="0" anchor="ctr"/>
           <a:lstStyle/>
           <a:p>
-            <a:pPr algn="ctr" indent="0" marL="0">
-              <a:buNone/>
-            </a:pPr>
-            <a:r>
-              <a:rPr lang="en-US" sz="1600" b="1" dirty="0">
-                <a:solidFill>
-                  <a:srgbClr val="FFFFFF"/>
+            <a:pPr algn="l" indent="0" marL="0">
+              <a:buNone/>
+            </a:pPr>
+            <a:r>
+              <a:rPr lang="en-US" sz="1500" b="1" dirty="0">
+                <a:solidFill>
+                  <a:srgbClr val="6B2A44"/>
                 </a:solidFill>
                 <a:latin typeface="Cambria" pitchFamily="34" charset="0"/>
                 <a:ea typeface="Cambria" pitchFamily="34" charset="-122"/>
                 <a:cs typeface="Cambria" pitchFamily="34" charset="-120"/>
               </a:rPr>
-              <a:t>3</a:t>
-            </a:r>
-            <a:endParaRPr lang="en-US" sz="1600" dirty="0"/>
-          </a:p>
-        </p:txBody>
-      </p:sp>
-      <p:sp>
-        <p:nvSpPr>
-          <p:cNvPr id="17" name="Text 15"/>
-          <p:cNvSpPr txBox="1"/>
-          <p:nvPr/>
-        </p:nvSpPr>
-        <p:spPr>
-          <a:xfrm>
-            <a:off x="6461608" y="2788920"/>
-            <a:ext cx="2087804" cy="457200"/>
+              <a:t>Almería — Campo de Dalías</a:t>
+            </a:r>
+            <a:endParaRPr lang="en-US" sz="1500" dirty="0"/>
+          </a:p>
+        </p:txBody>
+      </p:sp>
+      <p:sp>
+        <p:nvSpPr>
+          <p:cNvPr id="17" name="Text 12"/>
+          <p:cNvSpPr txBox="1"/>
+          <p:nvPr/>
+        </p:nvSpPr>
+        <p:spPr>
+          <a:xfrm>
+            <a:off x="8325917" y="4041648"/>
+            <a:ext cx="3070250" cy="329184"/>
           </a:xfrm>
           <a:prstGeom prst="rect">
             <a:avLst/>
@@ -6964,30 +6912,30 @@
               <a:buNone/>
             </a:pPr>
             <a:r>
-              <a:rPr lang="en-US" sz="1400" b="1" dirty="0">
-                <a:solidFill>
-                  <a:srgbClr val="6B2A44"/>
-                </a:solidFill>
-                <a:latin typeface="Cambria" pitchFamily="34" charset="0"/>
-                <a:ea typeface="Cambria" pitchFamily="34" charset="-122"/>
-                <a:cs typeface="Cambria" pitchFamily="34" charset="-120"/>
-              </a:rPr>
-              <a:t>Medición</a:t>
-            </a:r>
-            <a:endParaRPr lang="en-US" sz="1400" dirty="0"/>
-          </a:p>
-        </p:txBody>
-      </p:sp>
-      <p:sp>
-        <p:nvSpPr>
-          <p:cNvPr id="18" name="Text 16"/>
-          <p:cNvSpPr txBox="1"/>
-          <p:nvPr/>
-        </p:nvSpPr>
-        <p:spPr>
-          <a:xfrm>
-            <a:off x="6461608" y="3291840"/>
-            <a:ext cx="2087804" cy="1234440"/>
+              <a:rPr lang="en-US" sz="1250" b="1" dirty="0">
+                <a:solidFill>
+                  <a:srgbClr val="8F6D0F"/>
+                </a:solidFill>
+                <a:latin typeface="Calibri" pitchFamily="34" charset="0"/>
+                <a:ea typeface="Calibri" pitchFamily="34" charset="-122"/>
+                <a:cs typeface="Calibri" pitchFamily="34" charset="-120"/>
+              </a:rPr>
+              <a:t>≈ 33 000 ha de invernadero</a:t>
+            </a:r>
+            <a:endParaRPr lang="en-US" sz="1250" dirty="0"/>
+          </a:p>
+        </p:txBody>
+      </p:sp>
+      <p:sp>
+        <p:nvSpPr>
+          <p:cNvPr id="18" name="Text 13"/>
+          <p:cNvSpPr txBox="1"/>
+          <p:nvPr/>
+        </p:nvSpPr>
+        <p:spPr>
+          <a:xfrm>
+            <a:off x="8325917" y="4407408"/>
+            <a:ext cx="3070250" cy="1280160"/>
           </a:xfrm>
           <a:prstGeom prst="rect">
             <a:avLst/>
@@ -6999,14 +6947,18 @@
           <a:bodyPr wrap="square" lIns="0" tIns="0" rIns="0" bIns="0" rtlCol="0" anchor="t"/>
           <a:lstStyle/>
           <a:p>
-            <a:pPr algn="l" indent="0" marL="0">
+            <a:pPr algn="l" marL="342900" indent="-342900">
               <a:lnSpc>
-                <a:spcPct val="120000"/>
+                <a:spcPct val="116000"/>
               </a:lnSpc>
-              <a:buNone/>
-            </a:pPr>
-            <a:r>
-              <a:rPr lang="en-US" sz="1200" dirty="0">
+              <a:spcAft>
+                <a:spcPts val="700"/>
+              </a:spcAft>
+              <a:buSzPct val="100000"/>
+              <a:buChar char="•"/>
+            </a:pPr>
+            <a:r>
+              <a:rPr lang="en-US" sz="1150" dirty="0">
                 <a:solidFill>
                   <a:srgbClr val="3F3138"/>
                 </a:solidFill>
@@ -7014,166 +6966,23 @@
                 <a:ea typeface="Calibri" pitchFamily="34" charset="-122"/>
                 <a:cs typeface="Calibri" pitchFamily="34" charset="-120"/>
               </a:rPr>
-              <a:t>Registro de consumo de agua y de rendimiento durante un ciclo de cultivo completo.</a:t>
-            </a:r>
-            <a:endParaRPr lang="en-US" sz="1200" dirty="0"/>
-          </a:p>
-        </p:txBody>
-      </p:sp>
-      <p:sp>
-        <p:nvSpPr>
-          <p:cNvPr id="19" name="Shape 17"/>
-          <p:cNvSpPr/>
-          <p:nvPr/>
-        </p:nvSpPr>
-        <p:spPr>
-          <a:xfrm>
-            <a:off x="9052331" y="1874520"/>
-            <a:ext cx="2545004" cy="2834640"/>
-          </a:xfrm>
-          <a:prstGeom prst="roundRect">
-            <a:avLst>
-              <a:gd name="adj" fmla="val 3593"/>
-            </a:avLst>
-          </a:prstGeom>
-          <a:solidFill>
-            <a:srgbClr val="F5EFF1"/>
-          </a:solidFill>
-          <a:ln w="9525">
-            <a:solidFill>
-              <a:srgbClr val="E5D9DE"/>
-            </a:solidFill>
-            <a:prstDash val="solid"/>
-          </a:ln>
-        </p:spPr>
-      </p:sp>
-      <p:sp>
-        <p:nvSpPr>
-          <p:cNvPr id="20" name="Shape 18"/>
-          <p:cNvSpPr/>
-          <p:nvPr/>
-        </p:nvSpPr>
-        <p:spPr>
-          <a:xfrm>
-            <a:off x="9280931" y="2103120"/>
-            <a:ext cx="566928" cy="566928"/>
-          </a:xfrm>
-          <a:prstGeom prst="ellipse">
-            <a:avLst/>
-          </a:prstGeom>
-          <a:solidFill>
-            <a:srgbClr val="6B2A44"/>
-          </a:solidFill>
-          <a:ln/>
-        </p:spPr>
-      </p:sp>
-      <p:sp>
-        <p:nvSpPr>
-          <p:cNvPr id="21" name="Text 19"/>
-          <p:cNvSpPr txBox="1"/>
-          <p:nvPr/>
-        </p:nvSpPr>
-        <p:spPr>
-          <a:xfrm>
-            <a:off x="9280931" y="2103120"/>
-            <a:ext cx="566928" cy="566928"/>
-          </a:xfrm>
-          <a:prstGeom prst="rect">
-            <a:avLst/>
-          </a:prstGeom>
-          <a:noFill/>
-          <a:ln/>
-        </p:spPr>
-        <p:txBody>
-          <a:bodyPr wrap="square" lIns="0" tIns="0" rIns="0" bIns="0" rtlCol="0" anchor="ctr"/>
-          <a:lstStyle/>
-          <a:p>
-            <a:pPr algn="ctr" indent="0" marL="0">
-              <a:buNone/>
-            </a:pPr>
-            <a:r>
-              <a:rPr lang="en-US" sz="1600" b="1" dirty="0">
-                <a:solidFill>
-                  <a:srgbClr val="FFFFFF"/>
-                </a:solidFill>
-                <a:latin typeface="Cambria" pitchFamily="34" charset="0"/>
-                <a:ea typeface="Cambria" pitchFamily="34" charset="-122"/>
-                <a:cs typeface="Cambria" pitchFamily="34" charset="-120"/>
-              </a:rPr>
-              <a:t>4</a:t>
-            </a:r>
-            <a:endParaRPr lang="en-US" sz="1600" dirty="0"/>
-          </a:p>
-        </p:txBody>
-      </p:sp>
-      <p:sp>
-        <p:nvSpPr>
-          <p:cNvPr id="22" name="Text 20"/>
-          <p:cNvSpPr txBox="1"/>
-          <p:nvPr/>
-        </p:nvSpPr>
-        <p:spPr>
-          <a:xfrm>
-            <a:off x="9280931" y="2788920"/>
-            <a:ext cx="2087804" cy="457200"/>
-          </a:xfrm>
-          <a:prstGeom prst="rect">
-            <a:avLst/>
-          </a:prstGeom>
-          <a:noFill/>
-          <a:ln/>
-        </p:spPr>
-        <p:txBody>
-          <a:bodyPr wrap="square" lIns="0" tIns="0" rIns="0" bIns="0" rtlCol="0" anchor="ctr"/>
-          <a:lstStyle/>
-          <a:p>
-            <a:pPr algn="l" indent="0" marL="0">
-              <a:buNone/>
-            </a:pPr>
-            <a:r>
-              <a:rPr lang="en-US" sz="1400" b="1" dirty="0">
-                <a:solidFill>
-                  <a:srgbClr val="6B2A44"/>
-                </a:solidFill>
-                <a:latin typeface="Cambria" pitchFamily="34" charset="0"/>
-                <a:ea typeface="Cambria" pitchFamily="34" charset="-122"/>
-                <a:cs typeface="Cambria" pitchFamily="34" charset="-120"/>
-              </a:rPr>
-              <a:t>Extensión</a:t>
-            </a:r>
-            <a:endParaRPr lang="en-US" sz="1400" dirty="0"/>
-          </a:p>
-        </p:txBody>
-      </p:sp>
-      <p:sp>
-        <p:nvSpPr>
-          <p:cNvPr id="23" name="Text 21"/>
-          <p:cNvSpPr txBox="1"/>
-          <p:nvPr/>
-        </p:nvSpPr>
-        <p:spPr>
-          <a:xfrm>
-            <a:off x="9280931" y="3291840"/>
-            <a:ext cx="2087804" cy="1234440"/>
-          </a:xfrm>
-          <a:prstGeom prst="rect">
-            <a:avLst/>
-          </a:prstGeom>
-          <a:noFill/>
-          <a:ln/>
-        </p:spPr>
-        <p:txBody>
-          <a:bodyPr wrap="square" lIns="0" tIns="0" rIns="0" bIns="0" rtlCol="0" anchor="t"/>
-          <a:lstStyle/>
-          <a:p>
-            <a:pPr algn="l" indent="0" marL="0">
+              <a:t>La mayor superficie de cultivo bajo plástico del mundo, sobre acuíferos sobreexplotados y con intrusión salina en la franja costera.</a:t>
+            </a:r>
+            <a:endParaRPr lang="en-US" sz="1150" dirty="0"/>
+          </a:p>
+          <a:p>
+            <a:pPr algn="l" marL="342900" indent="-342900">
               <a:lnSpc>
-                <a:spcPct val="120000"/>
+                <a:spcPct val="116000"/>
               </a:lnSpc>
-              <a:buNone/>
-            </a:pPr>
-            <a:r>
-              <a:rPr lang="en-US" sz="1200" dirty="0">
+              <a:spcAft>
+                <a:spcPts val="700"/>
+              </a:spcAft>
+              <a:buSzPct val="100000"/>
+              <a:buChar char="•"/>
+            </a:pPr>
+            <a:r>
+              <a:rPr lang="en-US" sz="1150" dirty="0">
                 <a:solidFill>
                   <a:srgbClr val="3F3138"/>
                 </a:solidFill>
@@ -7181,57 +6990,39 @@
                 <a:ea typeface="Calibri" pitchFamily="34" charset="-122"/>
                 <a:cs typeface="Calibri" pitchFamily="34" charset="-120"/>
               </a:rPr>
-              <a:t>Ampliación gradual a las demás parcelas sobre la base de los resultados constatados.</a:t>
-            </a:r>
-            <a:endParaRPr lang="en-US" sz="1200" dirty="0"/>
-          </a:p>
-        </p:txBody>
-      </p:sp>
-      <p:sp>
-        <p:nvSpPr>
-          <p:cNvPr id="24" name="Text 22"/>
-          <p:cNvSpPr txBox="1"/>
-          <p:nvPr/>
-        </p:nvSpPr>
-        <p:spPr>
-          <a:xfrm>
-            <a:off x="594360" y="4983480"/>
-            <a:ext cx="11002975" cy="822960"/>
-          </a:xfrm>
-          <a:prstGeom prst="rect">
-            <a:avLst/>
-          </a:prstGeom>
-          <a:noFill/>
-          <a:ln/>
-        </p:spPr>
-        <p:txBody>
-          <a:bodyPr wrap="square" lIns="0" tIns="0" rIns="0" bIns="0" rtlCol="0" anchor="t"/>
-          <a:lstStyle/>
-          <a:p>
-            <a:pPr algn="l" indent="0" marL="0">
+              <a:t>Ciclos cortos y rotaciones rápidas: el ensayo da resultado en una campaña, no en cuatro años.</a:t>
+            </a:r>
+            <a:endParaRPr lang="en-US" sz="1150" dirty="0"/>
+          </a:p>
+          <a:p>
+            <a:pPr algn="l" marL="342900" indent="-342900">
               <a:lnSpc>
-                <a:spcPct val="125000"/>
+                <a:spcPct val="116000"/>
               </a:lnSpc>
-              <a:buNone/>
-            </a:pPr>
-            <a:r>
-              <a:rPr lang="en-US" sz="1250" i="1" dirty="0">
-                <a:solidFill>
-                  <a:srgbClr val="7C6B73"/>
-                </a:solidFill>
-                <a:latin typeface="Calibri" pitchFamily="34" charset="0"/>
-                <a:ea typeface="Calibri" pitchFamily="34" charset="-122"/>
-                <a:cs typeface="Calibri" pitchFamily="34" charset="-120"/>
-              </a:rPr>
-              <a:t>La regla de dosificación es la misma en todas partes: 3 gramos por litro de tierra útil. Lo que cambia de una finca a otra es el volumen de suelo que las raíces exploran realmente.</a:t>
-            </a:r>
-            <a:endParaRPr lang="en-US" sz="1250" dirty="0"/>
-          </a:p>
-        </p:txBody>
-      </p:sp>
-      <p:sp>
-        <p:nvSpPr>
-          <p:cNvPr id="25" name="Text 23"/>
+              <a:spcAft>
+                <a:spcPts val="700"/>
+              </a:spcAft>
+              <a:buSzPct val="100000"/>
+              <a:buChar char="•"/>
+            </a:pPr>
+            <a:r>
+              <a:rPr lang="en-US" sz="1150" dirty="0">
+                <a:solidFill>
+                  <a:srgbClr val="3F3138"/>
+                </a:solidFill>
+                <a:latin typeface="Calibri" pitchFamily="34" charset="0"/>
+                <a:ea typeface="Calibri" pitchFamily="34" charset="-122"/>
+                <a:cs typeface="Calibri" pitchFamily="34" charset="-120"/>
+              </a:rPr>
+              <a:t>Compradores del norte de Europa que auditan la huella hídrica de sus proveedores y piden trazabilidad documental.</a:t>
+            </a:r>
+            <a:endParaRPr lang="en-US" sz="1150" dirty="0"/>
+          </a:p>
+        </p:txBody>
+      </p:sp>
+      <p:sp>
+        <p:nvSpPr>
+          <p:cNvPr id="19" name="Text 14"/>
           <p:cNvSpPr txBox="1"/>
           <p:nvPr/>
         </p:nvSpPr>
@@ -7272,7 +7063,7 @@
       </p:sp>
       <p:sp>
         <p:nvSpPr>
-          <p:cNvPr id="26" name="Text 24"/>
+          <p:cNvPr id="20" name="Text 15"/>
           <p:cNvSpPr txBox="1"/>
           <p:nvPr/>
         </p:nvSpPr>
@@ -7376,7 +7167,7 @@
                 <a:ea typeface="Calibri" pitchFamily="34" charset="-122"/>
                 <a:cs typeface="Calibri" pitchFamily="34" charset="-120"/>
               </a:rPr>
-              <a:t>Trabajar juntos</a:t>
+              <a:t>CÓMO TRABAJAMOS</a:t>
             </a:r>
             <a:endParaRPr lang="en-US" sz="1150" dirty="0"/>
           </a:p>
@@ -7415,7 +7206,7 @@
                 <a:ea typeface="Cambria" pitchFamily="34" charset="-122"/>
                 <a:cs typeface="Cambria" pitchFamily="34" charset="-120"/>
               </a:rPr>
-              <a:t>Un socio local para España</a:t>
+              <a:t>Un despliegue por etapas, medido en cada paso</a:t>
             </a:r>
             <a:endParaRPr lang="en-US" sz="3000" dirty="0"/>
           </a:p>
@@ -7540,7 +7331,7 @@
                 <a:ea typeface="Cambria" pitchFamily="34" charset="-122"/>
                 <a:cs typeface="Cambria" pitchFamily="34" charset="-120"/>
               </a:rPr>
-              <a:t>Distribución</a:t>
+              <a:t>Diagnóstico</a:t>
             </a:r>
             <a:endParaRPr lang="en-US" sz="1400" dirty="0"/>
           </a:p>
@@ -7582,7 +7373,7 @@
                 <a:ea typeface="Calibri" pitchFamily="34" charset="-122"/>
                 <a:cs typeface="Calibri" pitchFamily="34" charset="-120"/>
               </a:rPr>
-              <a:t>Exclusividad territorial y stock de lanzamiento para la primera campaña comercial.</a:t>
+              <a:t>Análisis del suelo, del método de riego y del cultivo. Sin compromiso en esta etapa.</a:t>
             </a:r>
             <a:endParaRPr lang="en-US" sz="1200" dirty="0"/>
           </a:p>
@@ -7707,7 +7498,7 @@
                 <a:ea typeface="Cambria" pitchFamily="34" charset="-122"/>
                 <a:cs typeface="Cambria" pitchFamily="34" charset="-120"/>
               </a:rPr>
-              <a:t>Formación</a:t>
+              <a:t>Parcela piloto</a:t>
             </a:r>
             <a:endParaRPr lang="en-US" sz="1400" dirty="0"/>
           </a:p>
@@ -7749,7 +7540,7 @@
                 <a:ea typeface="Calibri" pitchFamily="34" charset="-122"/>
                 <a:cs typeface="Calibri" pitchFamily="34" charset="-120"/>
               </a:rPr>
-              <a:t>Formación técnica de los equipos, protocolos de dosis y actualización cada campaña.</a:t>
+              <a:t>Un ensayo comparativo en una parcela, con parcela testigo conducida de forma idéntica.</a:t>
             </a:r>
             <a:endParaRPr lang="en-US" sz="1200" dirty="0"/>
           </a:p>
@@ -7874,7 +7665,7 @@
                 <a:ea typeface="Cambria" pitchFamily="34" charset="-122"/>
                 <a:cs typeface="Cambria" pitchFamily="34" charset="-120"/>
               </a:rPr>
-              <a:t>Ensayos conjuntos</a:t>
+              <a:t>Medición</a:t>
             </a:r>
             <a:endParaRPr lang="en-US" sz="1400" dirty="0"/>
           </a:p>
@@ -7916,7 +7707,7 @@
                 <a:ea typeface="Calibri" pitchFamily="34" charset="-122"/>
                 <a:cs typeface="Calibri" pitchFamily="34" charset="-120"/>
               </a:rPr>
-              <a:t>Parcelas de demostración con testigo y resultados compartidos con los productores.</a:t>
+              <a:t>Registro de consumo de agua y de rendimiento durante un ciclo de cultivo completo.</a:t>
             </a:r>
             <a:endParaRPr lang="en-US" sz="1200" dirty="0"/>
           </a:p>
@@ -8041,7 +7832,7 @@
                 <a:ea typeface="Cambria" pitchFamily="34" charset="-122"/>
                 <a:cs typeface="Cambria" pitchFamily="34" charset="-120"/>
               </a:rPr>
-              <a:t>Instituciones</a:t>
+              <a:t>Extensión</a:t>
             </a:r>
             <a:endParaRPr lang="en-US" sz="1400" dirty="0"/>
           </a:p>
@@ -8083,7 +7874,7 @@
                 <a:ea typeface="Calibri" pitchFamily="34" charset="-122"/>
                 <a:cs typeface="Calibri" pitchFamily="34" charset="-120"/>
               </a:rPr>
-              <a:t>Diálogo con el Ministerio de Agricultura y los programas de seguridad alimentaria.</a:t>
+              <a:t>Ampliación gradual a las demás parcelas sobre la base de los resultados constatados.</a:t>
             </a:r>
             <a:endParaRPr lang="en-US" sz="1200" dirty="0"/>
           </a:p>
@@ -8125,7 +7916,7 @@
                 <a:ea typeface="Calibri" pitchFamily="34" charset="-122"/>
                 <a:cs typeface="Calibri" pitchFamily="34" charset="-120"/>
               </a:rPr>
-              <a:t>El marco se adapta al territorio: un importador, un distribuidor de insumos o una agrupación de productores puede liderar la alianza.</a:t>
+              <a:t>La regla de dosificación es la misma en todas partes: 3 gramos por litro de tierra útil. Lo que cambia de una finca a otra es el volumen de suelo que las raíces exploran realmente.</a:t>
             </a:r>
             <a:endParaRPr lang="en-US" sz="1250" dirty="0"/>
           </a:p>
@@ -8278,7 +8069,7 @@
                 <a:ea typeface="Calibri" pitchFamily="34" charset="-122"/>
                 <a:cs typeface="Calibri" pitchFamily="34" charset="-120"/>
               </a:rPr>
-              <a:t>LO QUE HAY QUE ANTICIPAR</a:t>
+              <a:t>Trabajar juntos</a:t>
             </a:r>
             <a:endParaRPr lang="en-US" sz="1150" dirty="0"/>
           </a:p>
@@ -8317,7 +8108,7 @@
                 <a:ea typeface="Cambria" pitchFamily="34" charset="-122"/>
                 <a:cs typeface="Cambria" pitchFamily="34" charset="-120"/>
               </a:rPr>
-              <a:t>Riesgos identificados y respuestas</a:t>
+              <a:t>Un socio local para España</a:t>
             </a:r>
             <a:endParaRPr lang="en-US" sz="3000" dirty="0"/>
           </a:p>
@@ -8325,332 +8116,18 @@
       </p:sp>
       <p:sp>
         <p:nvSpPr>
-          <p:cNvPr id="4" name="Text 2"/>
-          <p:cNvSpPr txBox="1"/>
-          <p:nvPr/>
-        </p:nvSpPr>
-        <p:spPr>
-          <a:xfrm>
-            <a:off x="594360" y="1783080"/>
-            <a:ext cx="5227168" cy="411480"/>
-          </a:xfrm>
-          <a:prstGeom prst="rect">
-            <a:avLst/>
-          </a:prstGeom>
-          <a:noFill/>
-          <a:ln/>
-        </p:spPr>
-        <p:txBody>
-          <a:bodyPr wrap="square" lIns="0" tIns="0" rIns="0" bIns="0" rtlCol="0" anchor="ctr"/>
-          <a:lstStyle/>
-          <a:p>
-            <a:pPr algn="l" indent="0" marL="0">
-              <a:buNone/>
-            </a:pPr>
-            <a:r>
-              <a:rPr lang="en-US" sz="1600" b="1" dirty="0">
-                <a:solidFill>
-                  <a:srgbClr val="6B2A44"/>
-                </a:solidFill>
-                <a:latin typeface="Cambria" pitchFamily="34" charset="0"/>
-                <a:ea typeface="Cambria" pitchFamily="34" charset="-122"/>
-                <a:cs typeface="Cambria" pitchFamily="34" charset="-120"/>
-              </a:rPr>
-              <a:t>Riesgos</a:t>
-            </a:r>
-            <a:endParaRPr lang="en-US" sz="1600" dirty="0"/>
-          </a:p>
-        </p:txBody>
-      </p:sp>
-      <p:sp>
-        <p:nvSpPr>
-          <p:cNvPr id="5" name="Text 3"/>
-          <p:cNvSpPr txBox="1"/>
-          <p:nvPr/>
-        </p:nvSpPr>
-        <p:spPr>
-          <a:xfrm>
-            <a:off x="594360" y="2286000"/>
-            <a:ext cx="5227168" cy="2468880"/>
-          </a:xfrm>
-          <a:prstGeom prst="rect">
-            <a:avLst/>
-          </a:prstGeom>
-          <a:noFill/>
-          <a:ln/>
-        </p:spPr>
-        <p:txBody>
-          <a:bodyPr wrap="square" lIns="0" tIns="0" rIns="0" bIns="0" rtlCol="0" anchor="t"/>
-          <a:lstStyle/>
-          <a:p>
-            <a:pPr algn="l" marL="342900" indent="-342900">
-              <a:lnSpc>
-                <a:spcPct val="122000"/>
-              </a:lnSpc>
-              <a:spcAft>
-                <a:spcPts val="1000"/>
-              </a:spcAft>
-              <a:buSzPct val="100000"/>
-              <a:buChar char="•"/>
-            </a:pPr>
-            <a:r>
-              <a:rPr lang="en-US" sz="1350" dirty="0">
-                <a:solidFill>
-                  <a:srgbClr val="3F3138"/>
-                </a:solidFill>
-                <a:latin typeface="Calibri" pitchFamily="34" charset="0"/>
-                <a:ea typeface="Calibri" pitchFamily="34" charset="-122"/>
-                <a:cs typeface="Calibri" pitchFamily="34" charset="-120"/>
-              </a:rPr>
-              <a:t>Variabilidad entre campañas: un año lluvioso enmascara el interés del producto.</a:t>
-            </a:r>
-            <a:endParaRPr lang="en-US" sz="1350" dirty="0"/>
-          </a:p>
-          <a:p>
-            <a:pPr algn="l" marL="342900" indent="-342900">
-              <a:lnSpc>
-                <a:spcPct val="122000"/>
-              </a:lnSpc>
-              <a:spcAft>
-                <a:spcPts val="1000"/>
-              </a:spcAft>
-              <a:buSzPct val="100000"/>
-              <a:buChar char="•"/>
-            </a:pPr>
-            <a:r>
-              <a:rPr lang="en-US" sz="1350" dirty="0">
-                <a:solidFill>
-                  <a:srgbClr val="3F3138"/>
-                </a:solidFill>
-                <a:latin typeface="Calibri" pitchFamily="34" charset="0"/>
-                <a:ea typeface="Calibri" pitchFamily="34" charset="-122"/>
-                <a:cs typeface="Calibri" pitchFamily="34" charset="-120"/>
-              </a:rPr>
-              <a:t>Parque de riego ya muy tecnificado: el comprador pregunta qué aporta el producto por encima del goteo que ya tiene instalado.</a:t>
-            </a:r>
-            <a:endParaRPr lang="en-US" sz="1350" dirty="0"/>
-          </a:p>
-          <a:p>
-            <a:pPr algn="l" marL="342900" indent="-342900">
-              <a:lnSpc>
-                <a:spcPct val="122000"/>
-              </a:lnSpc>
-              <a:spcAft>
-                <a:spcPts val="1000"/>
-              </a:spcAft>
-              <a:buSzPct val="100000"/>
-              <a:buChar char="•"/>
-            </a:pPr>
-            <a:r>
-              <a:rPr lang="en-US" sz="1350" dirty="0">
-                <a:solidFill>
-                  <a:srgbClr val="3F3138"/>
-                </a:solidFill>
-                <a:latin typeface="Calibri" pitchFamily="34" charset="0"/>
-                <a:ea typeface="Calibri" pitchFamily="34" charset="-122"/>
-                <a:cs typeface="Calibri" pitchFamily="34" charset="-120"/>
-              </a:rPr>
-              <a:t>Marco europeo sobre microplásticos añadidos intencionadamente: cualquier polímero agrícola queda bajo escrutinio.</a:t>
-            </a:r>
-            <a:endParaRPr lang="en-US" sz="1350" dirty="0"/>
-          </a:p>
-          <a:p>
-            <a:pPr algn="l" marL="342900" indent="-342900">
-              <a:lnSpc>
-                <a:spcPct val="122000"/>
-              </a:lnSpc>
-              <a:spcAft>
-                <a:spcPts val="1000"/>
-              </a:spcAft>
-              <a:buSzPct val="100000"/>
-              <a:buChar char="•"/>
-            </a:pPr>
-            <a:r>
-              <a:rPr lang="en-US" sz="1350" dirty="0">
-                <a:solidFill>
-                  <a:srgbClr val="3F3138"/>
-                </a:solidFill>
-                <a:latin typeface="Calibri" pitchFamily="34" charset="0"/>
-                <a:ea typeface="Calibri" pitchFamily="34" charset="-122"/>
-                <a:cs typeface="Calibri" pitchFamily="34" charset="-120"/>
-              </a:rPr>
-              <a:t>Competencia de polímeros baratos a base de sodio, que dejaron mal recuerdo en suelos ya salinizados.</a:t>
-            </a:r>
-            <a:endParaRPr lang="en-US" sz="1350" dirty="0"/>
-          </a:p>
-        </p:txBody>
-      </p:sp>
-      <p:sp>
-        <p:nvSpPr>
-          <p:cNvPr id="6" name="Text 4"/>
-          <p:cNvSpPr txBox="1"/>
-          <p:nvPr/>
-        </p:nvSpPr>
-        <p:spPr>
-          <a:xfrm>
-            <a:off x="6370168" y="1783080"/>
-            <a:ext cx="5227168" cy="411480"/>
-          </a:xfrm>
-          <a:prstGeom prst="rect">
-            <a:avLst/>
-          </a:prstGeom>
-          <a:noFill/>
-          <a:ln/>
-        </p:spPr>
-        <p:txBody>
-          <a:bodyPr wrap="square" lIns="0" tIns="0" rIns="0" bIns="0" rtlCol="0" anchor="ctr"/>
-          <a:lstStyle/>
-          <a:p>
-            <a:pPr algn="l" indent="0" marL="0">
-              <a:buNone/>
-            </a:pPr>
-            <a:r>
-              <a:rPr lang="en-US" sz="1600" b="1" dirty="0">
-                <a:solidFill>
-                  <a:srgbClr val="6B2A44"/>
-                </a:solidFill>
-                <a:latin typeface="Cambria" pitchFamily="34" charset="0"/>
-                <a:ea typeface="Cambria" pitchFamily="34" charset="-122"/>
-                <a:cs typeface="Cambria" pitchFamily="34" charset="-120"/>
-              </a:rPr>
-              <a:t>Respuestas</a:t>
-            </a:r>
-            <a:endParaRPr lang="en-US" sz="1600" dirty="0"/>
-          </a:p>
-        </p:txBody>
-      </p:sp>
-      <p:sp>
-        <p:nvSpPr>
-          <p:cNvPr id="7" name="Text 5"/>
-          <p:cNvSpPr txBox="1"/>
-          <p:nvPr/>
-        </p:nvSpPr>
-        <p:spPr>
-          <a:xfrm>
-            <a:off x="6370168" y="2286000"/>
-            <a:ext cx="5227168" cy="2468880"/>
-          </a:xfrm>
-          <a:prstGeom prst="rect">
-            <a:avLst/>
-          </a:prstGeom>
-          <a:noFill/>
-          <a:ln/>
-        </p:spPr>
-        <p:txBody>
-          <a:bodyPr wrap="square" lIns="0" tIns="0" rIns="0" bIns="0" rtlCol="0" anchor="t"/>
-          <a:lstStyle/>
-          <a:p>
-            <a:pPr algn="l" marL="342900" indent="-342900">
-              <a:lnSpc>
-                <a:spcPct val="122000"/>
-              </a:lnSpc>
-              <a:spcAft>
-                <a:spcPts val="1000"/>
-              </a:spcAft>
-              <a:buSzPct val="100000"/>
-              <a:buChar char="•"/>
-            </a:pPr>
-            <a:r>
-              <a:rPr lang="en-US" sz="1350" dirty="0">
-                <a:solidFill>
-                  <a:srgbClr val="3F3138"/>
-                </a:solidFill>
-                <a:latin typeface="Calibri" pitchFamily="34" charset="0"/>
-                <a:ea typeface="Calibri" pitchFamily="34" charset="-122"/>
-                <a:cs typeface="Calibri" pitchFamily="34" charset="-120"/>
-              </a:rPr>
-              <a:t>Conducir el ensayo sobre un ciclo completo con parcela testigo, para objetivar la ganancia incluso en año favorable.</a:t>
-            </a:r>
-            <a:endParaRPr lang="en-US" sz="1350" dirty="0"/>
-          </a:p>
-          <a:p>
-            <a:pPr algn="l" marL="342900" indent="-342900">
-              <a:lnSpc>
-                <a:spcPct val="122000"/>
-              </a:lnSpc>
-              <a:spcAft>
-                <a:spcPts val="1000"/>
-              </a:spcAft>
-              <a:buSzPct val="100000"/>
-              <a:buChar char="•"/>
-            </a:pPr>
-            <a:r>
-              <a:rPr lang="en-US" sz="1350" dirty="0">
-                <a:solidFill>
-                  <a:srgbClr val="3F3138"/>
-                </a:solidFill>
-                <a:latin typeface="Calibri" pitchFamily="34" charset="0"/>
-                <a:ea typeface="Calibri" pitchFamily="34" charset="-122"/>
-                <a:cs typeface="Calibri" pitchFamily="34" charset="-120"/>
-              </a:rPr>
-              <a:t>Medir el ahorro sobre el goteo mismo: la hidrorretención actúa en el suelo, no en el método de aplicación.</a:t>
-            </a:r>
-            <a:endParaRPr lang="en-US" sz="1350" dirty="0"/>
-          </a:p>
-          <a:p>
-            <a:pPr algn="l" marL="342900" indent="-342900">
-              <a:lnSpc>
-                <a:spcPct val="122000"/>
-              </a:lnSpc>
-              <a:spcAft>
-                <a:spcPts val="1000"/>
-              </a:spcAft>
-              <a:buSzPct val="100000"/>
-              <a:buChar char="•"/>
-            </a:pPr>
-            <a:r>
-              <a:rPr lang="en-US" sz="1350" dirty="0">
-                <a:solidFill>
-                  <a:srgbClr val="3F3138"/>
-                </a:solidFill>
-                <a:latin typeface="Calibri" pitchFamily="34" charset="0"/>
-                <a:ea typeface="Calibri" pitchFamily="34" charset="-122"/>
-                <a:cs typeface="Calibri" pitchFamily="34" charset="-120"/>
-              </a:rPr>
-              <a:t>Aportar la documentación de degradación —entre 20 y 25 % al año, sin acumulación— y el screening REACH / SVHC.</a:t>
-            </a:r>
-            <a:endParaRPr lang="en-US" sz="1350" dirty="0"/>
-          </a:p>
-          <a:p>
-            <a:pPr algn="l" marL="342900" indent="-342900">
-              <a:lnSpc>
-                <a:spcPct val="122000"/>
-              </a:lnSpc>
-              <a:spcAft>
-                <a:spcPts val="1000"/>
-              </a:spcAft>
-              <a:buSzPct val="100000"/>
-              <a:buChar char="•"/>
-            </a:pPr>
-            <a:r>
-              <a:rPr lang="en-US" sz="1350" dirty="0">
-                <a:solidFill>
-                  <a:srgbClr val="3F3138"/>
-                </a:solidFill>
-                <a:latin typeface="Calibri" pitchFamily="34" charset="0"/>
-                <a:ea typeface="Calibri" pitchFamily="34" charset="-122"/>
-                <a:cs typeface="Calibri" pitchFamily="34" charset="-120"/>
-              </a:rPr>
-              <a:t>Documentar la formulación: potasio y no sodio, compatible con cultivos alimentarios y con suelos salinos.</a:t>
-            </a:r>
-            <a:endParaRPr lang="en-US" sz="1350" dirty="0"/>
-          </a:p>
-        </p:txBody>
-      </p:sp>
-      <p:sp>
-        <p:nvSpPr>
-          <p:cNvPr id="8" name="Shape 6"/>
+          <p:cNvPr id="4" name="Shape 2"/>
           <p:cNvSpPr/>
           <p:nvPr/>
         </p:nvSpPr>
         <p:spPr>
           <a:xfrm>
-            <a:off x="594360" y="4846320"/>
-            <a:ext cx="11002975" cy="960120"/>
+            <a:off x="594360" y="1874520"/>
+            <a:ext cx="2545004" cy="2834640"/>
           </a:xfrm>
           <a:prstGeom prst="roundRect">
             <a:avLst>
-              <a:gd name="adj" fmla="val 7619"/>
+              <a:gd name="adj" fmla="val 3593"/>
             </a:avLst>
           </a:prstGeom>
           <a:solidFill>
@@ -8666,14 +8143,112 @@
       </p:sp>
       <p:sp>
         <p:nvSpPr>
-          <p:cNvPr id="9" name="Text 7"/>
-          <p:cNvSpPr txBox="1"/>
-          <p:nvPr/>
-        </p:nvSpPr>
-        <p:spPr>
-          <a:xfrm>
-            <a:off x="822960" y="4983480"/>
-            <a:ext cx="10545775" cy="713232"/>
+          <p:cNvPr id="5" name="Shape 3"/>
+          <p:cNvSpPr/>
+          <p:nvPr/>
+        </p:nvSpPr>
+        <p:spPr>
+          <a:xfrm>
+            <a:off x="822960" y="2103120"/>
+            <a:ext cx="566928" cy="566928"/>
+          </a:xfrm>
+          <a:prstGeom prst="ellipse">
+            <a:avLst/>
+          </a:prstGeom>
+          <a:solidFill>
+            <a:srgbClr val="6B2A44"/>
+          </a:solidFill>
+          <a:ln/>
+        </p:spPr>
+      </p:sp>
+      <p:sp>
+        <p:nvSpPr>
+          <p:cNvPr id="6" name="Text 4"/>
+          <p:cNvSpPr txBox="1"/>
+          <p:nvPr/>
+        </p:nvSpPr>
+        <p:spPr>
+          <a:xfrm>
+            <a:off x="822960" y="2103120"/>
+            <a:ext cx="566928" cy="566928"/>
+          </a:xfrm>
+          <a:prstGeom prst="rect">
+            <a:avLst/>
+          </a:prstGeom>
+          <a:noFill/>
+          <a:ln/>
+        </p:spPr>
+        <p:txBody>
+          <a:bodyPr wrap="square" lIns="0" tIns="0" rIns="0" bIns="0" rtlCol="0" anchor="ctr"/>
+          <a:lstStyle/>
+          <a:p>
+            <a:pPr algn="ctr" indent="0" marL="0">
+              <a:buNone/>
+            </a:pPr>
+            <a:r>
+              <a:rPr lang="en-US" sz="1600" b="1" dirty="0">
+                <a:solidFill>
+                  <a:srgbClr val="FFFFFF"/>
+                </a:solidFill>
+                <a:latin typeface="Cambria" pitchFamily="34" charset="0"/>
+                <a:ea typeface="Cambria" pitchFamily="34" charset="-122"/>
+                <a:cs typeface="Cambria" pitchFamily="34" charset="-120"/>
+              </a:rPr>
+              <a:t>1</a:t>
+            </a:r>
+            <a:endParaRPr lang="en-US" sz="1600" dirty="0"/>
+          </a:p>
+        </p:txBody>
+      </p:sp>
+      <p:sp>
+        <p:nvSpPr>
+          <p:cNvPr id="7" name="Text 5"/>
+          <p:cNvSpPr txBox="1"/>
+          <p:nvPr/>
+        </p:nvSpPr>
+        <p:spPr>
+          <a:xfrm>
+            <a:off x="822960" y="2788920"/>
+            <a:ext cx="2087804" cy="457200"/>
+          </a:xfrm>
+          <a:prstGeom prst="rect">
+            <a:avLst/>
+          </a:prstGeom>
+          <a:noFill/>
+          <a:ln/>
+        </p:spPr>
+        <p:txBody>
+          <a:bodyPr wrap="square" lIns="0" tIns="0" rIns="0" bIns="0" rtlCol="0" anchor="ctr"/>
+          <a:lstStyle/>
+          <a:p>
+            <a:pPr algn="l" indent="0" marL="0">
+              <a:buNone/>
+            </a:pPr>
+            <a:r>
+              <a:rPr lang="en-US" sz="1400" b="1" dirty="0">
+                <a:solidFill>
+                  <a:srgbClr val="6B2A44"/>
+                </a:solidFill>
+                <a:latin typeface="Cambria" pitchFamily="34" charset="0"/>
+                <a:ea typeface="Cambria" pitchFamily="34" charset="-122"/>
+                <a:cs typeface="Cambria" pitchFamily="34" charset="-120"/>
+              </a:rPr>
+              <a:t>Distribución</a:t>
+            </a:r>
+            <a:endParaRPr lang="en-US" sz="1400" dirty="0"/>
+          </a:p>
+        </p:txBody>
+      </p:sp>
+      <p:sp>
+        <p:nvSpPr>
+          <p:cNvPr id="8" name="Text 6"/>
+          <p:cNvSpPr txBox="1"/>
+          <p:nvPr/>
+        </p:nvSpPr>
+        <p:spPr>
+          <a:xfrm>
+            <a:off x="822960" y="3291840"/>
+            <a:ext cx="2087804" cy="1234440"/>
           </a:xfrm>
           <a:prstGeom prst="rect">
             <a:avLst/>
@@ -8687,12 +8262,555 @@
           <a:p>
             <a:pPr algn="l" indent="0" marL="0">
               <a:lnSpc>
-                <a:spcPct val="118000"/>
+                <a:spcPct val="120000"/>
               </a:lnSpc>
               <a:buNone/>
             </a:pPr>
             <a:r>
-              <a:rPr lang="en-US" sz="1100" dirty="0">
+              <a:rPr lang="en-US" sz="1200" dirty="0">
+                <a:solidFill>
+                  <a:srgbClr val="3F3138"/>
+                </a:solidFill>
+                <a:latin typeface="Calibri" pitchFamily="34" charset="0"/>
+                <a:ea typeface="Calibri" pitchFamily="34" charset="-122"/>
+                <a:cs typeface="Calibri" pitchFamily="34" charset="-120"/>
+              </a:rPr>
+              <a:t>Exclusividad territorial y stock de lanzamiento para la primera campaña comercial.</a:t>
+            </a:r>
+            <a:endParaRPr lang="en-US" sz="1200" dirty="0"/>
+          </a:p>
+        </p:txBody>
+      </p:sp>
+      <p:sp>
+        <p:nvSpPr>
+          <p:cNvPr id="9" name="Shape 7"/>
+          <p:cNvSpPr/>
+          <p:nvPr/>
+        </p:nvSpPr>
+        <p:spPr>
+          <a:xfrm>
+            <a:off x="3413684" y="1874520"/>
+            <a:ext cx="2545004" cy="2834640"/>
+          </a:xfrm>
+          <a:prstGeom prst="roundRect">
+            <a:avLst>
+              <a:gd name="adj" fmla="val 3593"/>
+            </a:avLst>
+          </a:prstGeom>
+          <a:solidFill>
+            <a:srgbClr val="F5EFF1"/>
+          </a:solidFill>
+          <a:ln w="9525">
+            <a:solidFill>
+              <a:srgbClr val="E5D9DE"/>
+            </a:solidFill>
+            <a:prstDash val="solid"/>
+          </a:ln>
+        </p:spPr>
+      </p:sp>
+      <p:sp>
+        <p:nvSpPr>
+          <p:cNvPr id="10" name="Shape 8"/>
+          <p:cNvSpPr/>
+          <p:nvPr/>
+        </p:nvSpPr>
+        <p:spPr>
+          <a:xfrm>
+            <a:off x="3642284" y="2103120"/>
+            <a:ext cx="566928" cy="566928"/>
+          </a:xfrm>
+          <a:prstGeom prst="ellipse">
+            <a:avLst/>
+          </a:prstGeom>
+          <a:solidFill>
+            <a:srgbClr val="6B2A44"/>
+          </a:solidFill>
+          <a:ln/>
+        </p:spPr>
+      </p:sp>
+      <p:sp>
+        <p:nvSpPr>
+          <p:cNvPr id="11" name="Text 9"/>
+          <p:cNvSpPr txBox="1"/>
+          <p:nvPr/>
+        </p:nvSpPr>
+        <p:spPr>
+          <a:xfrm>
+            <a:off x="3642284" y="2103120"/>
+            <a:ext cx="566928" cy="566928"/>
+          </a:xfrm>
+          <a:prstGeom prst="rect">
+            <a:avLst/>
+          </a:prstGeom>
+          <a:noFill/>
+          <a:ln/>
+        </p:spPr>
+        <p:txBody>
+          <a:bodyPr wrap="square" lIns="0" tIns="0" rIns="0" bIns="0" rtlCol="0" anchor="ctr"/>
+          <a:lstStyle/>
+          <a:p>
+            <a:pPr algn="ctr" indent="0" marL="0">
+              <a:buNone/>
+            </a:pPr>
+            <a:r>
+              <a:rPr lang="en-US" sz="1600" b="1" dirty="0">
+                <a:solidFill>
+                  <a:srgbClr val="FFFFFF"/>
+                </a:solidFill>
+                <a:latin typeface="Cambria" pitchFamily="34" charset="0"/>
+                <a:ea typeface="Cambria" pitchFamily="34" charset="-122"/>
+                <a:cs typeface="Cambria" pitchFamily="34" charset="-120"/>
+              </a:rPr>
+              <a:t>2</a:t>
+            </a:r>
+            <a:endParaRPr lang="en-US" sz="1600" dirty="0"/>
+          </a:p>
+        </p:txBody>
+      </p:sp>
+      <p:sp>
+        <p:nvSpPr>
+          <p:cNvPr id="12" name="Text 10"/>
+          <p:cNvSpPr txBox="1"/>
+          <p:nvPr/>
+        </p:nvSpPr>
+        <p:spPr>
+          <a:xfrm>
+            <a:off x="3642284" y="2788920"/>
+            <a:ext cx="2087804" cy="457200"/>
+          </a:xfrm>
+          <a:prstGeom prst="rect">
+            <a:avLst/>
+          </a:prstGeom>
+          <a:noFill/>
+          <a:ln/>
+        </p:spPr>
+        <p:txBody>
+          <a:bodyPr wrap="square" lIns="0" tIns="0" rIns="0" bIns="0" rtlCol="0" anchor="ctr"/>
+          <a:lstStyle/>
+          <a:p>
+            <a:pPr algn="l" indent="0" marL="0">
+              <a:buNone/>
+            </a:pPr>
+            <a:r>
+              <a:rPr lang="en-US" sz="1400" b="1" dirty="0">
+                <a:solidFill>
+                  <a:srgbClr val="6B2A44"/>
+                </a:solidFill>
+                <a:latin typeface="Cambria" pitchFamily="34" charset="0"/>
+                <a:ea typeface="Cambria" pitchFamily="34" charset="-122"/>
+                <a:cs typeface="Cambria" pitchFamily="34" charset="-120"/>
+              </a:rPr>
+              <a:t>Formación</a:t>
+            </a:r>
+            <a:endParaRPr lang="en-US" sz="1400" dirty="0"/>
+          </a:p>
+        </p:txBody>
+      </p:sp>
+      <p:sp>
+        <p:nvSpPr>
+          <p:cNvPr id="13" name="Text 11"/>
+          <p:cNvSpPr txBox="1"/>
+          <p:nvPr/>
+        </p:nvSpPr>
+        <p:spPr>
+          <a:xfrm>
+            <a:off x="3642284" y="3291840"/>
+            <a:ext cx="2087804" cy="1234440"/>
+          </a:xfrm>
+          <a:prstGeom prst="rect">
+            <a:avLst/>
+          </a:prstGeom>
+          <a:noFill/>
+          <a:ln/>
+        </p:spPr>
+        <p:txBody>
+          <a:bodyPr wrap="square" lIns="0" tIns="0" rIns="0" bIns="0" rtlCol="0" anchor="t"/>
+          <a:lstStyle/>
+          <a:p>
+            <a:pPr algn="l" indent="0" marL="0">
+              <a:lnSpc>
+                <a:spcPct val="120000"/>
+              </a:lnSpc>
+              <a:buNone/>
+            </a:pPr>
+            <a:r>
+              <a:rPr lang="en-US" sz="1200" dirty="0">
+                <a:solidFill>
+                  <a:srgbClr val="3F3138"/>
+                </a:solidFill>
+                <a:latin typeface="Calibri" pitchFamily="34" charset="0"/>
+                <a:ea typeface="Calibri" pitchFamily="34" charset="-122"/>
+                <a:cs typeface="Calibri" pitchFamily="34" charset="-120"/>
+              </a:rPr>
+              <a:t>Formación técnica de los equipos, protocolos de dosis y actualización cada campaña.</a:t>
+            </a:r>
+            <a:endParaRPr lang="en-US" sz="1200" dirty="0"/>
+          </a:p>
+        </p:txBody>
+      </p:sp>
+      <p:sp>
+        <p:nvSpPr>
+          <p:cNvPr id="14" name="Shape 12"/>
+          <p:cNvSpPr/>
+          <p:nvPr/>
+        </p:nvSpPr>
+        <p:spPr>
+          <a:xfrm>
+            <a:off x="6233008" y="1874520"/>
+            <a:ext cx="2545004" cy="2834640"/>
+          </a:xfrm>
+          <a:prstGeom prst="roundRect">
+            <a:avLst>
+              <a:gd name="adj" fmla="val 3593"/>
+            </a:avLst>
+          </a:prstGeom>
+          <a:solidFill>
+            <a:srgbClr val="F5EFF1"/>
+          </a:solidFill>
+          <a:ln w="9525">
+            <a:solidFill>
+              <a:srgbClr val="E5D9DE"/>
+            </a:solidFill>
+            <a:prstDash val="solid"/>
+          </a:ln>
+        </p:spPr>
+      </p:sp>
+      <p:sp>
+        <p:nvSpPr>
+          <p:cNvPr id="15" name="Shape 13"/>
+          <p:cNvSpPr/>
+          <p:nvPr/>
+        </p:nvSpPr>
+        <p:spPr>
+          <a:xfrm>
+            <a:off x="6461608" y="2103120"/>
+            <a:ext cx="566928" cy="566928"/>
+          </a:xfrm>
+          <a:prstGeom prst="ellipse">
+            <a:avLst/>
+          </a:prstGeom>
+          <a:solidFill>
+            <a:srgbClr val="6B2A44"/>
+          </a:solidFill>
+          <a:ln/>
+        </p:spPr>
+      </p:sp>
+      <p:sp>
+        <p:nvSpPr>
+          <p:cNvPr id="16" name="Text 14"/>
+          <p:cNvSpPr txBox="1"/>
+          <p:nvPr/>
+        </p:nvSpPr>
+        <p:spPr>
+          <a:xfrm>
+            <a:off x="6461608" y="2103120"/>
+            <a:ext cx="566928" cy="566928"/>
+          </a:xfrm>
+          <a:prstGeom prst="rect">
+            <a:avLst/>
+          </a:prstGeom>
+          <a:noFill/>
+          <a:ln/>
+        </p:spPr>
+        <p:txBody>
+          <a:bodyPr wrap="square" lIns="0" tIns="0" rIns="0" bIns="0" rtlCol="0" anchor="ctr"/>
+          <a:lstStyle/>
+          <a:p>
+            <a:pPr algn="ctr" indent="0" marL="0">
+              <a:buNone/>
+            </a:pPr>
+            <a:r>
+              <a:rPr lang="en-US" sz="1600" b="1" dirty="0">
+                <a:solidFill>
+                  <a:srgbClr val="FFFFFF"/>
+                </a:solidFill>
+                <a:latin typeface="Cambria" pitchFamily="34" charset="0"/>
+                <a:ea typeface="Cambria" pitchFamily="34" charset="-122"/>
+                <a:cs typeface="Cambria" pitchFamily="34" charset="-120"/>
+              </a:rPr>
+              <a:t>3</a:t>
+            </a:r>
+            <a:endParaRPr lang="en-US" sz="1600" dirty="0"/>
+          </a:p>
+        </p:txBody>
+      </p:sp>
+      <p:sp>
+        <p:nvSpPr>
+          <p:cNvPr id="17" name="Text 15"/>
+          <p:cNvSpPr txBox="1"/>
+          <p:nvPr/>
+        </p:nvSpPr>
+        <p:spPr>
+          <a:xfrm>
+            <a:off x="6461608" y="2788920"/>
+            <a:ext cx="2087804" cy="457200"/>
+          </a:xfrm>
+          <a:prstGeom prst="rect">
+            <a:avLst/>
+          </a:prstGeom>
+          <a:noFill/>
+          <a:ln/>
+        </p:spPr>
+        <p:txBody>
+          <a:bodyPr wrap="square" lIns="0" tIns="0" rIns="0" bIns="0" rtlCol="0" anchor="ctr"/>
+          <a:lstStyle/>
+          <a:p>
+            <a:pPr algn="l" indent="0" marL="0">
+              <a:buNone/>
+            </a:pPr>
+            <a:r>
+              <a:rPr lang="en-US" sz="1400" b="1" dirty="0">
+                <a:solidFill>
+                  <a:srgbClr val="6B2A44"/>
+                </a:solidFill>
+                <a:latin typeface="Cambria" pitchFamily="34" charset="0"/>
+                <a:ea typeface="Cambria" pitchFamily="34" charset="-122"/>
+                <a:cs typeface="Cambria" pitchFamily="34" charset="-120"/>
+              </a:rPr>
+              <a:t>Ensayos conjuntos</a:t>
+            </a:r>
+            <a:endParaRPr lang="en-US" sz="1400" dirty="0"/>
+          </a:p>
+        </p:txBody>
+      </p:sp>
+      <p:sp>
+        <p:nvSpPr>
+          <p:cNvPr id="18" name="Text 16"/>
+          <p:cNvSpPr txBox="1"/>
+          <p:nvPr/>
+        </p:nvSpPr>
+        <p:spPr>
+          <a:xfrm>
+            <a:off x="6461608" y="3291840"/>
+            <a:ext cx="2087804" cy="1234440"/>
+          </a:xfrm>
+          <a:prstGeom prst="rect">
+            <a:avLst/>
+          </a:prstGeom>
+          <a:noFill/>
+          <a:ln/>
+        </p:spPr>
+        <p:txBody>
+          <a:bodyPr wrap="square" lIns="0" tIns="0" rIns="0" bIns="0" rtlCol="0" anchor="t"/>
+          <a:lstStyle/>
+          <a:p>
+            <a:pPr algn="l" indent="0" marL="0">
+              <a:lnSpc>
+                <a:spcPct val="120000"/>
+              </a:lnSpc>
+              <a:buNone/>
+            </a:pPr>
+            <a:r>
+              <a:rPr lang="en-US" sz="1200" dirty="0">
+                <a:solidFill>
+                  <a:srgbClr val="3F3138"/>
+                </a:solidFill>
+                <a:latin typeface="Calibri" pitchFamily="34" charset="0"/>
+                <a:ea typeface="Calibri" pitchFamily="34" charset="-122"/>
+                <a:cs typeface="Calibri" pitchFamily="34" charset="-120"/>
+              </a:rPr>
+              <a:t>Parcelas de demostración con testigo y resultados compartidos con los productores.</a:t>
+            </a:r>
+            <a:endParaRPr lang="en-US" sz="1200" dirty="0"/>
+          </a:p>
+        </p:txBody>
+      </p:sp>
+      <p:sp>
+        <p:nvSpPr>
+          <p:cNvPr id="19" name="Shape 17"/>
+          <p:cNvSpPr/>
+          <p:nvPr/>
+        </p:nvSpPr>
+        <p:spPr>
+          <a:xfrm>
+            <a:off x="9052331" y="1874520"/>
+            <a:ext cx="2545004" cy="2834640"/>
+          </a:xfrm>
+          <a:prstGeom prst="roundRect">
+            <a:avLst>
+              <a:gd name="adj" fmla="val 3593"/>
+            </a:avLst>
+          </a:prstGeom>
+          <a:solidFill>
+            <a:srgbClr val="F5EFF1"/>
+          </a:solidFill>
+          <a:ln w="9525">
+            <a:solidFill>
+              <a:srgbClr val="E5D9DE"/>
+            </a:solidFill>
+            <a:prstDash val="solid"/>
+          </a:ln>
+        </p:spPr>
+      </p:sp>
+      <p:sp>
+        <p:nvSpPr>
+          <p:cNvPr id="20" name="Shape 18"/>
+          <p:cNvSpPr/>
+          <p:nvPr/>
+        </p:nvSpPr>
+        <p:spPr>
+          <a:xfrm>
+            <a:off x="9280931" y="2103120"/>
+            <a:ext cx="566928" cy="566928"/>
+          </a:xfrm>
+          <a:prstGeom prst="ellipse">
+            <a:avLst/>
+          </a:prstGeom>
+          <a:solidFill>
+            <a:srgbClr val="6B2A44"/>
+          </a:solidFill>
+          <a:ln/>
+        </p:spPr>
+      </p:sp>
+      <p:sp>
+        <p:nvSpPr>
+          <p:cNvPr id="21" name="Text 19"/>
+          <p:cNvSpPr txBox="1"/>
+          <p:nvPr/>
+        </p:nvSpPr>
+        <p:spPr>
+          <a:xfrm>
+            <a:off x="9280931" y="2103120"/>
+            <a:ext cx="566928" cy="566928"/>
+          </a:xfrm>
+          <a:prstGeom prst="rect">
+            <a:avLst/>
+          </a:prstGeom>
+          <a:noFill/>
+          <a:ln/>
+        </p:spPr>
+        <p:txBody>
+          <a:bodyPr wrap="square" lIns="0" tIns="0" rIns="0" bIns="0" rtlCol="0" anchor="ctr"/>
+          <a:lstStyle/>
+          <a:p>
+            <a:pPr algn="ctr" indent="0" marL="0">
+              <a:buNone/>
+            </a:pPr>
+            <a:r>
+              <a:rPr lang="en-US" sz="1600" b="1" dirty="0">
+                <a:solidFill>
+                  <a:srgbClr val="FFFFFF"/>
+                </a:solidFill>
+                <a:latin typeface="Cambria" pitchFamily="34" charset="0"/>
+                <a:ea typeface="Cambria" pitchFamily="34" charset="-122"/>
+                <a:cs typeface="Cambria" pitchFamily="34" charset="-120"/>
+              </a:rPr>
+              <a:t>4</a:t>
+            </a:r>
+            <a:endParaRPr lang="en-US" sz="1600" dirty="0"/>
+          </a:p>
+        </p:txBody>
+      </p:sp>
+      <p:sp>
+        <p:nvSpPr>
+          <p:cNvPr id="22" name="Text 20"/>
+          <p:cNvSpPr txBox="1"/>
+          <p:nvPr/>
+        </p:nvSpPr>
+        <p:spPr>
+          <a:xfrm>
+            <a:off x="9280931" y="2788920"/>
+            <a:ext cx="2087804" cy="457200"/>
+          </a:xfrm>
+          <a:prstGeom prst="rect">
+            <a:avLst/>
+          </a:prstGeom>
+          <a:noFill/>
+          <a:ln/>
+        </p:spPr>
+        <p:txBody>
+          <a:bodyPr wrap="square" lIns="0" tIns="0" rIns="0" bIns="0" rtlCol="0" anchor="ctr"/>
+          <a:lstStyle/>
+          <a:p>
+            <a:pPr algn="l" indent="0" marL="0">
+              <a:buNone/>
+            </a:pPr>
+            <a:r>
+              <a:rPr lang="en-US" sz="1400" b="1" dirty="0">
+                <a:solidFill>
+                  <a:srgbClr val="6B2A44"/>
+                </a:solidFill>
+                <a:latin typeface="Cambria" pitchFamily="34" charset="0"/>
+                <a:ea typeface="Cambria" pitchFamily="34" charset="-122"/>
+                <a:cs typeface="Cambria" pitchFamily="34" charset="-120"/>
+              </a:rPr>
+              <a:t>Instituciones</a:t>
+            </a:r>
+            <a:endParaRPr lang="en-US" sz="1400" dirty="0"/>
+          </a:p>
+        </p:txBody>
+      </p:sp>
+      <p:sp>
+        <p:nvSpPr>
+          <p:cNvPr id="23" name="Text 21"/>
+          <p:cNvSpPr txBox="1"/>
+          <p:nvPr/>
+        </p:nvSpPr>
+        <p:spPr>
+          <a:xfrm>
+            <a:off x="9280931" y="3291840"/>
+            <a:ext cx="2087804" cy="1234440"/>
+          </a:xfrm>
+          <a:prstGeom prst="rect">
+            <a:avLst/>
+          </a:prstGeom>
+          <a:noFill/>
+          <a:ln/>
+        </p:spPr>
+        <p:txBody>
+          <a:bodyPr wrap="square" lIns="0" tIns="0" rIns="0" bIns="0" rtlCol="0" anchor="t"/>
+          <a:lstStyle/>
+          <a:p>
+            <a:pPr algn="l" indent="0" marL="0">
+              <a:lnSpc>
+                <a:spcPct val="120000"/>
+              </a:lnSpc>
+              <a:buNone/>
+            </a:pPr>
+            <a:r>
+              <a:rPr lang="en-US" sz="1200" dirty="0">
+                <a:solidFill>
+                  <a:srgbClr val="3F3138"/>
+                </a:solidFill>
+                <a:latin typeface="Calibri" pitchFamily="34" charset="0"/>
+                <a:ea typeface="Calibri" pitchFamily="34" charset="-122"/>
+                <a:cs typeface="Calibri" pitchFamily="34" charset="-120"/>
+              </a:rPr>
+              <a:t>Diálogo con el Ministerio de Agricultura y los programas de seguridad alimentaria.</a:t>
+            </a:r>
+            <a:endParaRPr lang="en-US" sz="1200" dirty="0"/>
+          </a:p>
+        </p:txBody>
+      </p:sp>
+      <p:sp>
+        <p:nvSpPr>
+          <p:cNvPr id="24" name="Text 22"/>
+          <p:cNvSpPr txBox="1"/>
+          <p:nvPr/>
+        </p:nvSpPr>
+        <p:spPr>
+          <a:xfrm>
+            <a:off x="594360" y="4983480"/>
+            <a:ext cx="11002975" cy="822960"/>
+          </a:xfrm>
+          <a:prstGeom prst="rect">
+            <a:avLst/>
+          </a:prstGeom>
+          <a:noFill/>
+          <a:ln/>
+        </p:spPr>
+        <p:txBody>
+          <a:bodyPr wrap="square" lIns="0" tIns="0" rIns="0" bIns="0" rtlCol="0" anchor="t"/>
+          <a:lstStyle/>
+          <a:p>
+            <a:pPr algn="l" indent="0" marL="0">
+              <a:lnSpc>
+                <a:spcPct val="125000"/>
+              </a:lnSpc>
+              <a:buNone/>
+            </a:pPr>
+            <a:r>
+              <a:rPr lang="en-US" sz="1250" i="1" dirty="0">
                 <a:solidFill>
                   <a:srgbClr val="7C6B73"/>
                 </a:solidFill>
@@ -8700,15 +8818,15 @@
                 <a:ea typeface="Calibri" pitchFamily="34" charset="-122"/>
                 <a:cs typeface="Calibri" pitchFamily="34" charset="-120"/>
               </a:rPr>
-              <a:t>Análisis de acrilamida (laboratorio Polymex, ISO 9001, contenido inferior a 3,0 µg/g), screening REACH / SVHC (SGS) y certificado SOHISCERT vigente hasta el 4 de septiembre de 2027, disponibles a solicitud. SOHISCERT tiene su sede en Sevilla: el organismo que nos certifica es el mismo que audita a buena parte de sus vecinos.</a:t>
-            </a:r>
-            <a:endParaRPr lang="en-US" sz="1100" dirty="0"/>
-          </a:p>
-        </p:txBody>
-      </p:sp>
-      <p:sp>
-        <p:nvSpPr>
-          <p:cNvPr id="10" name="Text 8"/>
+              <a:t>El marco se adapta al territorio: un importador, un distribuidor de insumos o una agrupación de productores puede liderar la alianza.</a:t>
+            </a:r>
+            <a:endParaRPr lang="en-US" sz="1250" dirty="0"/>
+          </a:p>
+        </p:txBody>
+      </p:sp>
+      <p:sp>
+        <p:nvSpPr>
+          <p:cNvPr id="25" name="Text 23"/>
           <p:cNvSpPr txBox="1"/>
           <p:nvPr/>
         </p:nvSpPr>
@@ -8749,7 +8867,7 @@
       </p:sp>
       <p:sp>
         <p:nvSpPr>
-          <p:cNvPr id="11" name="Text 9"/>
+          <p:cNvPr id="26" name="Text 24"/>
           <p:cNvSpPr txBox="1"/>
           <p:nvPr/>
         </p:nvSpPr>
@@ -8853,7 +8971,7 @@
                 <a:ea typeface="Calibri" pitchFamily="34" charset="-122"/>
                 <a:cs typeface="Calibri" pitchFamily="34" charset="-120"/>
               </a:rPr>
-              <a:t>Fuentes</a:t>
+              <a:t>LO QUE HAY QUE ANTICIPAR</a:t>
             </a:r>
             <a:endParaRPr lang="en-US" sz="1150" dirty="0"/>
           </a:p>
@@ -8892,7 +9010,7 @@
                 <a:ea typeface="Cambria" pitchFamily="34" charset="-122"/>
                 <a:cs typeface="Cambria" pitchFamily="34" charset="-120"/>
               </a:rPr>
-              <a:t>Fuentes e hipótesis de trabajo</a:t>
+              <a:t>Riesgos identificados y respuestas</a:t>
             </a:r>
             <a:endParaRPr lang="en-US" sz="3000" dirty="0"/>
           </a:p>
@@ -8931,7 +9049,7 @@
                 <a:ea typeface="Cambria" pitchFamily="34" charset="-122"/>
                 <a:cs typeface="Cambria" pitchFamily="34" charset="-120"/>
               </a:rPr>
-              <a:t>Fuentes principales</a:t>
+              <a:t>Riesgos</a:t>
             </a:r>
             <a:endParaRPr lang="en-US" sz="1600" dirty="0"/>
           </a:p>
@@ -8977,7 +9095,7 @@
                 <a:ea typeface="Calibri" pitchFamily="34" charset="-122"/>
                 <a:cs typeface="Calibri" pitchFamily="34" charset="-120"/>
               </a:rPr>
-              <a:t>INE: Contabilidad Nacional y Encuesta de Población Activa.</a:t>
+              <a:t>Variabilidad entre campañas: un año lluvioso enmascara el interés del producto.</a:t>
             </a:r>
             <a:endParaRPr lang="en-US" sz="1350" dirty="0"/>
           </a:p>
@@ -9001,7 +9119,7 @@
                 <a:ea typeface="Calibri" pitchFamily="34" charset="-122"/>
                 <a:cs typeface="Calibri" pitchFamily="34" charset="-120"/>
               </a:rPr>
-              <a:t>Ministerio de Agricultura, Pesca y Alimentación: ESYRCE, anuario de estadística, comercio exterior agroalimentario.</a:t>
+              <a:t>Parque de riego ya muy tecnificado: el comprador pregunta qué aporta el producto por encima del goteo que ya tiene instalado.</a:t>
             </a:r>
             <a:endParaRPr lang="en-US" sz="1350" dirty="0"/>
           </a:p>
@@ -9025,7 +9143,7 @@
                 <a:ea typeface="Calibri" pitchFamily="34" charset="-122"/>
                 <a:cs typeface="Calibri" pitchFamily="34" charset="-120"/>
               </a:rPr>
-              <a:t>Confederaciones Hidrográficas del Guadalquivir y del Segura: dotaciones de riego.</a:t>
+              <a:t>Marco europeo sobre microplásticos añadidos intencionadamente: cualquier polímero agrícola queda bajo escrutinio.</a:t>
             </a:r>
             <a:endParaRPr lang="en-US" sz="1350" dirty="0"/>
           </a:p>
@@ -9049,10 +9167,71 @@
                 <a:ea typeface="Calibri" pitchFamily="34" charset="-122"/>
                 <a:cs typeface="Calibri" pitchFamily="34" charset="-120"/>
               </a:rPr>
-              <a:t>FAO (FAOSTAT, AQUASTAT) y Banco Mundial (WDI).</a:t>
+              <a:t>Competencia de polímeros baratos a base de sodio, que dejaron mal recuerdo en suelos ya salinizados.</a:t>
             </a:r>
             <a:endParaRPr lang="en-US" sz="1350" dirty="0"/>
           </a:p>
+        </p:txBody>
+      </p:sp>
+      <p:sp>
+        <p:nvSpPr>
+          <p:cNvPr id="6" name="Text 4"/>
+          <p:cNvSpPr txBox="1"/>
+          <p:nvPr/>
+        </p:nvSpPr>
+        <p:spPr>
+          <a:xfrm>
+            <a:off x="6370168" y="1783080"/>
+            <a:ext cx="5227168" cy="411480"/>
+          </a:xfrm>
+          <a:prstGeom prst="rect">
+            <a:avLst/>
+          </a:prstGeom>
+          <a:noFill/>
+          <a:ln/>
+        </p:spPr>
+        <p:txBody>
+          <a:bodyPr wrap="square" lIns="0" tIns="0" rIns="0" bIns="0" rtlCol="0" anchor="ctr"/>
+          <a:lstStyle/>
+          <a:p>
+            <a:pPr algn="l" indent="0" marL="0">
+              <a:buNone/>
+            </a:pPr>
+            <a:r>
+              <a:rPr lang="en-US" sz="1600" b="1" dirty="0">
+                <a:solidFill>
+                  <a:srgbClr val="6B2A44"/>
+                </a:solidFill>
+                <a:latin typeface="Cambria" pitchFamily="34" charset="0"/>
+                <a:ea typeface="Cambria" pitchFamily="34" charset="-122"/>
+                <a:cs typeface="Cambria" pitchFamily="34" charset="-120"/>
+              </a:rPr>
+              <a:t>Respuestas</a:t>
+            </a:r>
+            <a:endParaRPr lang="en-US" sz="1600" dirty="0"/>
+          </a:p>
+        </p:txBody>
+      </p:sp>
+      <p:sp>
+        <p:nvSpPr>
+          <p:cNvPr id="7" name="Text 5"/>
+          <p:cNvSpPr txBox="1"/>
+          <p:nvPr/>
+        </p:nvSpPr>
+        <p:spPr>
+          <a:xfrm>
+            <a:off x="6370168" y="2286000"/>
+            <a:ext cx="5227168" cy="2468880"/>
+          </a:xfrm>
+          <a:prstGeom prst="rect">
+            <a:avLst/>
+          </a:prstGeom>
+          <a:noFill/>
+          <a:ln/>
+        </p:spPr>
+        <p:txBody>
+          <a:bodyPr wrap="square" lIns="0" tIns="0" rIns="0" bIns="0" rtlCol="0" anchor="t"/>
+          <a:lstStyle/>
           <a:p>
             <a:pPr algn="l" marL="342900" indent="-342900">
               <a:lnSpc>
@@ -9073,71 +9252,10 @@
                 <a:ea typeface="Calibri" pitchFamily="34" charset="-122"/>
                 <a:cs typeface="Calibri" pitchFamily="34" charset="-120"/>
               </a:rPr>
-              <a:t>Fotografías: Galimatiasgg (CC0), Jebulon (CC0), Raul2009 (CC BY-SA 3.0), User:Coentor (CC BY-SA 1.0) — vía Wikimedia Commons.</a:t>
+              <a:t>Conducir el ensayo sobre un ciclo completo con parcela testigo, para objetivar la ganancia incluso en año favorable.</a:t>
             </a:r>
             <a:endParaRPr lang="en-US" sz="1350" dirty="0"/>
           </a:p>
-        </p:txBody>
-      </p:sp>
-      <p:sp>
-        <p:nvSpPr>
-          <p:cNvPr id="6" name="Text 4"/>
-          <p:cNvSpPr txBox="1"/>
-          <p:nvPr/>
-        </p:nvSpPr>
-        <p:spPr>
-          <a:xfrm>
-            <a:off x="6370168" y="1783080"/>
-            <a:ext cx="5227168" cy="411480"/>
-          </a:xfrm>
-          <a:prstGeom prst="rect">
-            <a:avLst/>
-          </a:prstGeom>
-          <a:noFill/>
-          <a:ln/>
-        </p:spPr>
-        <p:txBody>
-          <a:bodyPr wrap="square" lIns="0" tIns="0" rIns="0" bIns="0" rtlCol="0" anchor="ctr"/>
-          <a:lstStyle/>
-          <a:p>
-            <a:pPr algn="l" indent="0" marL="0">
-              <a:buNone/>
-            </a:pPr>
-            <a:r>
-              <a:rPr lang="en-US" sz="1600" b="1" dirty="0">
-                <a:solidFill>
-                  <a:srgbClr val="6B2A44"/>
-                </a:solidFill>
-                <a:latin typeface="Cambria" pitchFamily="34" charset="0"/>
-                <a:ea typeface="Cambria" pitchFamily="34" charset="-122"/>
-                <a:cs typeface="Cambria" pitchFamily="34" charset="-120"/>
-              </a:rPr>
-              <a:t>Hipótesis de trabajo</a:t>
-            </a:r>
-            <a:endParaRPr lang="en-US" sz="1600" dirty="0"/>
-          </a:p>
-        </p:txBody>
-      </p:sp>
-      <p:sp>
-        <p:nvSpPr>
-          <p:cNvPr id="7" name="Text 5"/>
-          <p:cNvSpPr txBox="1"/>
-          <p:nvPr/>
-        </p:nvSpPr>
-        <p:spPr>
-          <a:xfrm>
-            <a:off x="6370168" y="2286000"/>
-            <a:ext cx="5227168" cy="2468880"/>
-          </a:xfrm>
-          <a:prstGeom prst="rect">
-            <a:avLst/>
-          </a:prstGeom>
-          <a:noFill/>
-          <a:ln/>
-        </p:spPr>
-        <p:txBody>
-          <a:bodyPr wrap="square" lIns="0" tIns="0" rIns="0" bIns="0" rtlCol="0" anchor="t"/>
-          <a:lstStyle/>
           <a:p>
             <a:pPr algn="l" marL="342900" indent="-342900">
               <a:lnSpc>
@@ -9158,7 +9276,7 @@
                 <a:ea typeface="Calibri" pitchFamily="34" charset="-122"/>
                 <a:cs typeface="Calibri" pitchFamily="34" charset="-120"/>
               </a:rPr>
-              <a:t>Las cifras son órdenes de magnitud redondeados, tomados de los últimos datos públicos disponibles.</a:t>
+              <a:t>Medir el ahorro sobre el goteo mismo: la hidrorretención actúa en el suelo, no en el método de aplicación.</a:t>
             </a:r>
             <a:endParaRPr lang="en-US" sz="1350" dirty="0"/>
           </a:p>
@@ -9182,7 +9300,7 @@
                 <a:ea typeface="Calibri" pitchFamily="34" charset="-122"/>
                 <a:cs typeface="Calibri" pitchFamily="34" charset="-120"/>
               </a:rPr>
-              <a:t>Los ahorros de agua y los aumentos de rendimiento son indicativos y varían según suelo, clima y cultivo.</a:t>
+              <a:t>Aportar la documentación de degradación —entre 20 y 25 % al año, sin acumulación— y el screening REACH / SVHC.</a:t>
             </a:r>
             <a:endParaRPr lang="en-US" sz="1350" dirty="0"/>
           </a:p>
@@ -9206,7 +9324,7 @@
                 <a:ea typeface="Calibri" pitchFamily="34" charset="-122"/>
                 <a:cs typeface="Calibri" pitchFamily="34" charset="-120"/>
               </a:rPr>
-              <a:t>Documento comercial de trabajo: cifras a actualizar antes de cualquier presentación oficial.</a:t>
+              <a:t>Documentar la formulación: potasio y no sodio, compatible con cultivos alimentarios y con suelos salinos.</a:t>
             </a:r>
             <a:endParaRPr lang="en-US" sz="1350" dirty="0"/>
           </a:p>
@@ -9275,7 +9393,7 @@
                 <a:ea typeface="Calibri" pitchFamily="34" charset="-122"/>
                 <a:cs typeface="Calibri" pitchFamily="34" charset="-120"/>
               </a:rPr>
-              <a:t>Informes de ensayo, certificados (SOHISCERT, análisis Polymex y SGS) y fichas técnicas: disponibles a pedido.</a:t>
+              <a:t>Análisis de acrilamida (laboratorio Polymex, ISO 9001, contenido inferior a 3,0 µg/g), screening REACH / SVHC (SGS) y certificado SOHISCERT vigente hasta el 4 de septiembre de 2027, disponibles a solicitud. SOHISCERT tiene su sede en Sevilla: el organismo que nos certifica es el mismo que audita a buena parte de sus vecinos.</a:t>
             </a:r>
             <a:endParaRPr lang="en-US" sz="1100" dirty="0"/>
           </a:p>
@@ -9374,6 +9492,605 @@
 <file path=ppt/slides/slide18.xml><?xml version="1.0" encoding="utf-8"?>
 <p:sld xmlns:a="http://schemas.openxmlformats.org/drawingml/2006/main" xmlns:r="http://schemas.openxmlformats.org/officeDocument/2006/relationships" xmlns:p="http://schemas.openxmlformats.org/presentationml/2006/main">
   <p:cSld name="Slide 18">
+    <p:bg>
+      <p:bgPr>
+        <a:solidFill>
+          <a:srgbClr val="FCFAFA"/>
+        </a:solidFill>
+      </p:bgPr>
+    </p:bg>
+    <p:spTree>
+      <p:nvGrpSpPr>
+        <p:cNvPr id="1" name=""/>
+        <p:cNvGrpSpPr/>
+        <p:nvPr/>
+      </p:nvGrpSpPr>
+      <p:grpSpPr>
+        <a:xfrm>
+          <a:off x="0" y="0"/>
+          <a:ext cx="0" cy="0"/>
+          <a:chOff x="0" y="0"/>
+          <a:chExt cx="0" cy="0"/>
+        </a:xfrm>
+      </p:grpSpPr>
+      <p:sp>
+        <p:nvSpPr>
+          <p:cNvPr id="2" name="Text 0"/>
+          <p:cNvSpPr txBox="1"/>
+          <p:nvPr/>
+        </p:nvSpPr>
+        <p:spPr>
+          <a:xfrm>
+            <a:off x="594360" y="411480"/>
+            <a:ext cx="10515600" cy="274320"/>
+          </a:xfrm>
+          <a:prstGeom prst="rect">
+            <a:avLst/>
+          </a:prstGeom>
+          <a:noFill/>
+          <a:ln/>
+        </p:spPr>
+        <p:txBody>
+          <a:bodyPr wrap="square" lIns="0" tIns="0" rIns="0" bIns="0" rtlCol="0" anchor="ctr"/>
+          <a:lstStyle/>
+          <a:p>
+            <a:pPr algn="l" indent="0" marL="0">
+              <a:buNone/>
+            </a:pPr>
+            <a:r>
+              <a:rPr lang="en-US" sz="1150" b="1" spc="200" kern="0" dirty="0">
+                <a:solidFill>
+                  <a:srgbClr val="C9A227"/>
+                </a:solidFill>
+                <a:latin typeface="Calibri" pitchFamily="34" charset="0"/>
+                <a:ea typeface="Calibri" pitchFamily="34" charset="-122"/>
+                <a:cs typeface="Calibri" pitchFamily="34" charset="-120"/>
+              </a:rPr>
+              <a:t>Fuentes</a:t>
+            </a:r>
+            <a:endParaRPr lang="en-US" sz="1150" dirty="0"/>
+          </a:p>
+        </p:txBody>
+      </p:sp>
+      <p:sp>
+        <p:nvSpPr>
+          <p:cNvPr id="3" name="Text 1"/>
+          <p:cNvSpPr txBox="1"/>
+          <p:nvPr/>
+        </p:nvSpPr>
+        <p:spPr>
+          <a:xfrm>
+            <a:off x="594360" y="731520"/>
+            <a:ext cx="10881360" cy="731520"/>
+          </a:xfrm>
+          <a:prstGeom prst="rect">
+            <a:avLst/>
+          </a:prstGeom>
+          <a:noFill/>
+          <a:ln/>
+        </p:spPr>
+        <p:txBody>
+          <a:bodyPr wrap="square" lIns="0" tIns="0" rIns="0" bIns="0" rtlCol="0" anchor="ctr"/>
+          <a:lstStyle/>
+          <a:p>
+            <a:pPr algn="l" indent="0" marL="0">
+              <a:buNone/>
+            </a:pPr>
+            <a:r>
+              <a:rPr lang="en-US" sz="3000" b="1" dirty="0">
+                <a:solidFill>
+                  <a:srgbClr val="3F162A"/>
+                </a:solidFill>
+                <a:latin typeface="Cambria" pitchFamily="34" charset="0"/>
+                <a:ea typeface="Cambria" pitchFamily="34" charset="-122"/>
+                <a:cs typeface="Cambria" pitchFamily="34" charset="-120"/>
+              </a:rPr>
+              <a:t>Fuentes e hipótesis de trabajo</a:t>
+            </a:r>
+            <a:endParaRPr lang="en-US" sz="3000" dirty="0"/>
+          </a:p>
+        </p:txBody>
+      </p:sp>
+      <p:sp>
+        <p:nvSpPr>
+          <p:cNvPr id="4" name="Text 2"/>
+          <p:cNvSpPr txBox="1"/>
+          <p:nvPr/>
+        </p:nvSpPr>
+        <p:spPr>
+          <a:xfrm>
+            <a:off x="594360" y="1783080"/>
+            <a:ext cx="5227168" cy="411480"/>
+          </a:xfrm>
+          <a:prstGeom prst="rect">
+            <a:avLst/>
+          </a:prstGeom>
+          <a:noFill/>
+          <a:ln/>
+        </p:spPr>
+        <p:txBody>
+          <a:bodyPr wrap="square" lIns="0" tIns="0" rIns="0" bIns="0" rtlCol="0" anchor="ctr"/>
+          <a:lstStyle/>
+          <a:p>
+            <a:pPr algn="l" indent="0" marL="0">
+              <a:buNone/>
+            </a:pPr>
+            <a:r>
+              <a:rPr lang="en-US" sz="1600" b="1" dirty="0">
+                <a:solidFill>
+                  <a:srgbClr val="6B2A44"/>
+                </a:solidFill>
+                <a:latin typeface="Cambria" pitchFamily="34" charset="0"/>
+                <a:ea typeface="Cambria" pitchFamily="34" charset="-122"/>
+                <a:cs typeface="Cambria" pitchFamily="34" charset="-120"/>
+              </a:rPr>
+              <a:t>Fuentes principales</a:t>
+            </a:r>
+            <a:endParaRPr lang="en-US" sz="1600" dirty="0"/>
+          </a:p>
+        </p:txBody>
+      </p:sp>
+      <p:sp>
+        <p:nvSpPr>
+          <p:cNvPr id="5" name="Text 3"/>
+          <p:cNvSpPr txBox="1"/>
+          <p:nvPr/>
+        </p:nvSpPr>
+        <p:spPr>
+          <a:xfrm>
+            <a:off x="594360" y="2286000"/>
+            <a:ext cx="5227168" cy="2468880"/>
+          </a:xfrm>
+          <a:prstGeom prst="rect">
+            <a:avLst/>
+          </a:prstGeom>
+          <a:noFill/>
+          <a:ln/>
+        </p:spPr>
+        <p:txBody>
+          <a:bodyPr wrap="square" lIns="0" tIns="0" rIns="0" bIns="0" rtlCol="0" anchor="t"/>
+          <a:lstStyle/>
+          <a:p>
+            <a:pPr algn="l" marL="342900" indent="-342900">
+              <a:lnSpc>
+                <a:spcPct val="122000"/>
+              </a:lnSpc>
+              <a:spcAft>
+                <a:spcPts val="1000"/>
+              </a:spcAft>
+              <a:buSzPct val="100000"/>
+              <a:buChar char="•"/>
+            </a:pPr>
+            <a:r>
+              <a:rPr lang="en-US" sz="1350" dirty="0">
+                <a:solidFill>
+                  <a:srgbClr val="3F3138"/>
+                </a:solidFill>
+                <a:latin typeface="Calibri" pitchFamily="34" charset="0"/>
+                <a:ea typeface="Calibri" pitchFamily="34" charset="-122"/>
+                <a:cs typeface="Calibri" pitchFamily="34" charset="-120"/>
+              </a:rPr>
+              <a:t>INE: Contabilidad Nacional y Encuesta de Población Activa.</a:t>
+            </a:r>
+            <a:endParaRPr lang="en-US" sz="1350" dirty="0"/>
+          </a:p>
+          <a:p>
+            <a:pPr algn="l" marL="342900" indent="-342900">
+              <a:lnSpc>
+                <a:spcPct val="122000"/>
+              </a:lnSpc>
+              <a:spcAft>
+                <a:spcPts val="1000"/>
+              </a:spcAft>
+              <a:buSzPct val="100000"/>
+              <a:buChar char="•"/>
+            </a:pPr>
+            <a:r>
+              <a:rPr lang="en-US" sz="1350" dirty="0">
+                <a:solidFill>
+                  <a:srgbClr val="3F3138"/>
+                </a:solidFill>
+                <a:latin typeface="Calibri" pitchFamily="34" charset="0"/>
+                <a:ea typeface="Calibri" pitchFamily="34" charset="-122"/>
+                <a:cs typeface="Calibri" pitchFamily="34" charset="-120"/>
+              </a:rPr>
+              <a:t>Ministerio de Agricultura, Pesca y Alimentación: ESYRCE, anuario de estadística, comercio exterior agroalimentario.</a:t>
+            </a:r>
+            <a:endParaRPr lang="en-US" sz="1350" dirty="0"/>
+          </a:p>
+          <a:p>
+            <a:pPr algn="l" marL="342900" indent="-342900">
+              <a:lnSpc>
+                <a:spcPct val="122000"/>
+              </a:lnSpc>
+              <a:spcAft>
+                <a:spcPts val="1000"/>
+              </a:spcAft>
+              <a:buSzPct val="100000"/>
+              <a:buChar char="•"/>
+            </a:pPr>
+            <a:r>
+              <a:rPr lang="en-US" sz="1350" dirty="0">
+                <a:solidFill>
+                  <a:srgbClr val="3F3138"/>
+                </a:solidFill>
+                <a:latin typeface="Calibri" pitchFamily="34" charset="0"/>
+                <a:ea typeface="Calibri" pitchFamily="34" charset="-122"/>
+                <a:cs typeface="Calibri" pitchFamily="34" charset="-120"/>
+              </a:rPr>
+              <a:t>Confederaciones Hidrográficas del Guadalquivir y del Segura: dotaciones de riego.</a:t>
+            </a:r>
+            <a:endParaRPr lang="en-US" sz="1350" dirty="0"/>
+          </a:p>
+          <a:p>
+            <a:pPr algn="l" marL="342900" indent="-342900">
+              <a:lnSpc>
+                <a:spcPct val="122000"/>
+              </a:lnSpc>
+              <a:spcAft>
+                <a:spcPts val="1000"/>
+              </a:spcAft>
+              <a:buSzPct val="100000"/>
+              <a:buChar char="•"/>
+            </a:pPr>
+            <a:r>
+              <a:rPr lang="en-US" sz="1350" dirty="0">
+                <a:solidFill>
+                  <a:srgbClr val="3F3138"/>
+                </a:solidFill>
+                <a:latin typeface="Calibri" pitchFamily="34" charset="0"/>
+                <a:ea typeface="Calibri" pitchFamily="34" charset="-122"/>
+                <a:cs typeface="Calibri" pitchFamily="34" charset="-120"/>
+              </a:rPr>
+              <a:t>FAO (FAOSTAT, AQUASTAT) y Banco Mundial (WDI).</a:t>
+            </a:r>
+            <a:endParaRPr lang="en-US" sz="1350" dirty="0"/>
+          </a:p>
+          <a:p>
+            <a:pPr algn="l" marL="342900" indent="-342900">
+              <a:lnSpc>
+                <a:spcPct val="122000"/>
+              </a:lnSpc>
+              <a:spcAft>
+                <a:spcPts val="1000"/>
+              </a:spcAft>
+              <a:buSzPct val="100000"/>
+              <a:buChar char="•"/>
+            </a:pPr>
+            <a:r>
+              <a:rPr lang="en-US" sz="1350" dirty="0">
+                <a:solidFill>
+                  <a:srgbClr val="3F3138"/>
+                </a:solidFill>
+                <a:latin typeface="Calibri" pitchFamily="34" charset="0"/>
+                <a:ea typeface="Calibri" pitchFamily="34" charset="-122"/>
+                <a:cs typeface="Calibri" pitchFamily="34" charset="-120"/>
+              </a:rPr>
+              <a:t>UNCCD, Drought in Numbers 2022: número y duración de las sequías, +29 % desde 2000 frente a 1980–1999.</a:t>
+            </a:r>
+            <a:endParaRPr lang="en-US" sz="1350" dirty="0"/>
+          </a:p>
+          <a:p>
+            <a:pPr algn="l" marL="342900" indent="-342900">
+              <a:lnSpc>
+                <a:spcPct val="122000"/>
+              </a:lnSpc>
+              <a:spcAft>
+                <a:spcPts val="1000"/>
+              </a:spcAft>
+              <a:buSzPct val="100000"/>
+              <a:buChar char="•"/>
+            </a:pPr>
+            <a:r>
+              <a:rPr lang="en-US" sz="1350" dirty="0">
+                <a:solidFill>
+                  <a:srgbClr val="3F3138"/>
+                </a:solidFill>
+                <a:latin typeface="Calibri" pitchFamily="34" charset="0"/>
+                <a:ea typeface="Calibri" pitchFamily="34" charset="-122"/>
+                <a:cs typeface="Calibri" pitchFamily="34" charset="-120"/>
+              </a:rPr>
+              <a:t>ONU-Agua / FAO AQUASTAT, indicador ODS 6.4.2: definición y umbrales del estrés hídrico.</a:t>
+            </a:r>
+            <a:endParaRPr lang="en-US" sz="1350" dirty="0"/>
+          </a:p>
+        </p:txBody>
+      </p:sp>
+      <p:sp>
+        <p:nvSpPr>
+          <p:cNvPr id="6" name="Text 4"/>
+          <p:cNvSpPr txBox="1"/>
+          <p:nvPr/>
+        </p:nvSpPr>
+        <p:spPr>
+          <a:xfrm>
+            <a:off x="6370168" y="1783080"/>
+            <a:ext cx="5227168" cy="411480"/>
+          </a:xfrm>
+          <a:prstGeom prst="rect">
+            <a:avLst/>
+          </a:prstGeom>
+          <a:noFill/>
+          <a:ln/>
+        </p:spPr>
+        <p:txBody>
+          <a:bodyPr wrap="square" lIns="0" tIns="0" rIns="0" bIns="0" rtlCol="0" anchor="ctr"/>
+          <a:lstStyle/>
+          <a:p>
+            <a:pPr algn="l" indent="0" marL="0">
+              <a:buNone/>
+            </a:pPr>
+            <a:r>
+              <a:rPr lang="en-US" sz="1600" b="1" dirty="0">
+                <a:solidFill>
+                  <a:srgbClr val="6B2A44"/>
+                </a:solidFill>
+                <a:latin typeface="Cambria" pitchFamily="34" charset="0"/>
+                <a:ea typeface="Cambria" pitchFamily="34" charset="-122"/>
+                <a:cs typeface="Cambria" pitchFamily="34" charset="-120"/>
+              </a:rPr>
+              <a:t>Hipótesis de trabajo</a:t>
+            </a:r>
+            <a:endParaRPr lang="en-US" sz="1600" dirty="0"/>
+          </a:p>
+        </p:txBody>
+      </p:sp>
+      <p:sp>
+        <p:nvSpPr>
+          <p:cNvPr id="7" name="Text 5"/>
+          <p:cNvSpPr txBox="1"/>
+          <p:nvPr/>
+        </p:nvSpPr>
+        <p:spPr>
+          <a:xfrm>
+            <a:off x="6370168" y="2286000"/>
+            <a:ext cx="5227168" cy="2468880"/>
+          </a:xfrm>
+          <a:prstGeom prst="rect">
+            <a:avLst/>
+          </a:prstGeom>
+          <a:noFill/>
+          <a:ln/>
+        </p:spPr>
+        <p:txBody>
+          <a:bodyPr wrap="square" lIns="0" tIns="0" rIns="0" bIns="0" rtlCol="0" anchor="t"/>
+          <a:lstStyle/>
+          <a:p>
+            <a:pPr algn="l" marL="342900" indent="-342900">
+              <a:lnSpc>
+                <a:spcPct val="122000"/>
+              </a:lnSpc>
+              <a:spcAft>
+                <a:spcPts val="1000"/>
+              </a:spcAft>
+              <a:buSzPct val="100000"/>
+              <a:buChar char="•"/>
+            </a:pPr>
+            <a:r>
+              <a:rPr lang="en-US" sz="1350" dirty="0">
+                <a:solidFill>
+                  <a:srgbClr val="3F3138"/>
+                </a:solidFill>
+                <a:latin typeface="Calibri" pitchFamily="34" charset="0"/>
+                <a:ea typeface="Calibri" pitchFamily="34" charset="-122"/>
+                <a:cs typeface="Calibri" pitchFamily="34" charset="-120"/>
+              </a:rPr>
+              <a:t>Las cifras son órdenes de magnitud redondeados, tomados de los últimos datos públicos disponibles.</a:t>
+            </a:r>
+            <a:endParaRPr lang="en-US" sz="1350" dirty="0"/>
+          </a:p>
+          <a:p>
+            <a:pPr algn="l" marL="342900" indent="-342900">
+              <a:lnSpc>
+                <a:spcPct val="122000"/>
+              </a:lnSpc>
+              <a:spcAft>
+                <a:spcPts val="1000"/>
+              </a:spcAft>
+              <a:buSzPct val="100000"/>
+              <a:buChar char="•"/>
+            </a:pPr>
+            <a:r>
+              <a:rPr lang="en-US" sz="1350" dirty="0">
+                <a:solidFill>
+                  <a:srgbClr val="3F3138"/>
+                </a:solidFill>
+                <a:latin typeface="Calibri" pitchFamily="34" charset="0"/>
+                <a:ea typeface="Calibri" pitchFamily="34" charset="-122"/>
+                <a:cs typeface="Calibri" pitchFamily="34" charset="-120"/>
+              </a:rPr>
+              <a:t>Los ahorros de agua y los aumentos de rendimiento son indicativos y varían según suelo, clima y cultivo.</a:t>
+            </a:r>
+            <a:endParaRPr lang="en-US" sz="1350" dirty="0"/>
+          </a:p>
+          <a:p>
+            <a:pPr algn="l" marL="342900" indent="-342900">
+              <a:lnSpc>
+                <a:spcPct val="122000"/>
+              </a:lnSpc>
+              <a:spcAft>
+                <a:spcPts val="1000"/>
+              </a:spcAft>
+              <a:buSzPct val="100000"/>
+              <a:buChar char="•"/>
+            </a:pPr>
+            <a:r>
+              <a:rPr lang="en-US" sz="1350" dirty="0">
+                <a:solidFill>
+                  <a:srgbClr val="3F3138"/>
+                </a:solidFill>
+                <a:latin typeface="Calibri" pitchFamily="34" charset="0"/>
+                <a:ea typeface="Calibri" pitchFamily="34" charset="-122"/>
+                <a:cs typeface="Calibri" pitchFamily="34" charset="-120"/>
+              </a:rPr>
+              <a:t>Documento comercial de trabajo: cifras a actualizar antes de cualquier presentación oficial.</a:t>
+            </a:r>
+            <a:endParaRPr lang="en-US" sz="1350" dirty="0"/>
+          </a:p>
+        </p:txBody>
+      </p:sp>
+      <p:sp>
+        <p:nvSpPr>
+          <p:cNvPr id="8" name="Shape 6"/>
+          <p:cNvSpPr/>
+          <p:nvPr/>
+        </p:nvSpPr>
+        <p:spPr>
+          <a:xfrm>
+            <a:off x="594360" y="4846320"/>
+            <a:ext cx="11002975" cy="960120"/>
+          </a:xfrm>
+          <a:prstGeom prst="roundRect">
+            <a:avLst>
+              <a:gd name="adj" fmla="val 7619"/>
+            </a:avLst>
+          </a:prstGeom>
+          <a:solidFill>
+            <a:srgbClr val="F5EFF1"/>
+          </a:solidFill>
+          <a:ln w="9525">
+            <a:solidFill>
+              <a:srgbClr val="E5D9DE"/>
+            </a:solidFill>
+            <a:prstDash val="solid"/>
+          </a:ln>
+        </p:spPr>
+      </p:sp>
+      <p:sp>
+        <p:nvSpPr>
+          <p:cNvPr id="9" name="Text 7"/>
+          <p:cNvSpPr txBox="1"/>
+          <p:nvPr/>
+        </p:nvSpPr>
+        <p:spPr>
+          <a:xfrm>
+            <a:off x="822960" y="4983480"/>
+            <a:ext cx="10545775" cy="713232"/>
+          </a:xfrm>
+          <a:prstGeom prst="rect">
+            <a:avLst/>
+          </a:prstGeom>
+          <a:noFill/>
+          <a:ln/>
+        </p:spPr>
+        <p:txBody>
+          <a:bodyPr wrap="square" lIns="0" tIns="0" rIns="0" bIns="0" rtlCol="0" anchor="t"/>
+          <a:lstStyle/>
+          <a:p>
+            <a:pPr algn="l" indent="0" marL="0">
+              <a:lnSpc>
+                <a:spcPct val="118000"/>
+              </a:lnSpc>
+              <a:buNone/>
+            </a:pPr>
+            <a:r>
+              <a:rPr lang="en-US" sz="1100" dirty="0">
+                <a:solidFill>
+                  <a:srgbClr val="7C6B73"/>
+                </a:solidFill>
+                <a:latin typeface="Calibri" pitchFamily="34" charset="0"/>
+                <a:ea typeface="Calibri" pitchFamily="34" charset="-122"/>
+                <a:cs typeface="Calibri" pitchFamily="34" charset="-120"/>
+              </a:rPr>
+              <a:t>Informes de ensayo, certificados (SOHISCERT, análisis Polymex y SGS) y fichas técnicas: disponibles a pedido.</a:t>
+            </a:r>
+            <a:endParaRPr lang="en-US" sz="1100" dirty="0"/>
+          </a:p>
+        </p:txBody>
+      </p:sp>
+      <p:sp>
+        <p:nvSpPr>
+          <p:cNvPr id="10" name="Text 8"/>
+          <p:cNvSpPr txBox="1"/>
+          <p:nvPr/>
+        </p:nvSpPr>
+        <p:spPr>
+          <a:xfrm>
+            <a:off x="502920" y="6382512"/>
+            <a:ext cx="8229600" cy="274320"/>
+          </a:xfrm>
+          <a:prstGeom prst="rect">
+            <a:avLst/>
+          </a:prstGeom>
+          <a:noFill/>
+          <a:ln/>
+        </p:spPr>
+        <p:txBody>
+          <a:bodyPr wrap="square" lIns="0" tIns="0" rIns="0" bIns="0" rtlCol="0" anchor="ctr"/>
+          <a:lstStyle/>
+          <a:p>
+            <a:pPr algn="l" indent="0" marL="0">
+              <a:buNone/>
+            </a:pPr>
+            <a:r>
+              <a:rPr lang="en-US" sz="950" dirty="0">
+                <a:solidFill>
+                  <a:srgbClr val="7C6B73">
+                    <a:alpha val="80000"/>
+                  </a:srgbClr>
+                </a:solidFill>
+                <a:latin typeface="Calibri" pitchFamily="34" charset="0"/>
+                <a:ea typeface="Calibri" pitchFamily="34" charset="-122"/>
+                <a:cs typeface="Calibri" pitchFamily="34" charset="-120"/>
+              </a:rPr>
+              <a:t>Green Solutions · Estudio de mercado España</a:t>
+            </a:r>
+            <a:endParaRPr lang="en-US" sz="950" dirty="0"/>
+          </a:p>
+        </p:txBody>
+      </p:sp>
+      <p:sp>
+        <p:nvSpPr>
+          <p:cNvPr id="11" name="Text 9"/>
+          <p:cNvSpPr txBox="1"/>
+          <p:nvPr/>
+        </p:nvSpPr>
+        <p:spPr>
+          <a:xfrm>
+            <a:off x="11140135" y="6382512"/>
+            <a:ext cx="548640" cy="274320"/>
+          </a:xfrm>
+          <a:prstGeom prst="rect">
+            <a:avLst/>
+          </a:prstGeom>
+          <a:noFill/>
+          <a:ln/>
+        </p:spPr>
+        <p:txBody>
+          <a:bodyPr wrap="square" lIns="0" tIns="0" rIns="0" bIns="0" rtlCol="0" anchor="ctr"/>
+          <a:lstStyle/>
+          <a:p>
+            <a:pPr algn="r" indent="0" marL="0">
+              <a:buNone/>
+            </a:pPr>
+            <a:r>
+              <a:rPr lang="en-US" sz="950" dirty="0">
+                <a:solidFill>
+                  <a:srgbClr val="7C6B73">
+                    <a:alpha val="80000"/>
+                  </a:srgbClr>
+                </a:solidFill>
+                <a:latin typeface="Calibri" pitchFamily="34" charset="0"/>
+                <a:ea typeface="Calibri" pitchFamily="34" charset="-122"/>
+                <a:cs typeface="Calibri" pitchFamily="34" charset="-120"/>
+              </a:rPr>
+              <a:t>17</a:t>
+            </a:r>
+            <a:endParaRPr lang="en-US" sz="950" dirty="0"/>
+          </a:p>
+        </p:txBody>
+      </p:sp>
+    </p:spTree>
+  </p:cSld>
+  <p:clrMapOvr>
+    <a:masterClrMapping/>
+  </p:clrMapOvr>
+</p:sld>
+</file>
+
+<file path=ppt/slides/slide19.xml><?xml version="1.0" encoding="utf-8"?>
+<p:sld xmlns:a="http://schemas.openxmlformats.org/drawingml/2006/main" xmlns:r="http://schemas.openxmlformats.org/officeDocument/2006/relationships" xmlns:p="http://schemas.openxmlformats.org/presentationml/2006/main">
+  <p:cSld name="Slide 19">
     <p:spTree>
       <p:nvGrpSpPr>
         <p:cNvPr id="1" name=""/>
@@ -9567,7 +10284,7 @@
       </p:sp>
       <p:pic>
         <p:nvPicPr>
-          <p:cNvPr id="6" name="Image 1" descr="C:\Users\Utilisateur\dev\green-solutions-web\scripts\dossiers\sceau-aim-clair.png">    </p:cNvPr>
+          <p:cNvPr id="6" name="Image 1" descr="/workspace/scratch/50eb4f7d8e13/green-solutions-web/scripts/dossiers/sceau-aim-clair.png">    </p:cNvPr>
           <p:cNvPicPr>
             <a:picLocks noChangeAspect="1"/>
           </p:cNvPicPr>
@@ -9667,7 +10384,7 @@
                 <a:ea typeface="Calibri" pitchFamily="34" charset="-122"/>
                 <a:cs typeface="Calibri" pitchFamily="34" charset="-120"/>
               </a:rPr>
-              <a:t>17</a:t>
+              <a:t>18</a:t>
             </a:r>
             <a:endParaRPr lang="en-US" sz="950" dirty="0"/>
           </a:p>
@@ -10801,7 +11518,7 @@
                 <a:ea typeface="Calibri" pitchFamily="34" charset="-122"/>
                 <a:cs typeface="Calibri" pitchFamily="34" charset="-120"/>
               </a:rPr>
-              <a:t>ADÓNDE VA EL AGUA</a:t>
+              <a:t>SEQUÍA Y ESTRÉS HÍDRICO</a:t>
             </a:r>
             <a:endParaRPr lang="en-US" sz="1150" dirty="0"/>
           </a:p>
@@ -10840,7 +11557,7 @@
                 <a:ea typeface="Cambria" pitchFamily="34" charset="-122"/>
                 <a:cs typeface="Cambria" pitchFamily="34" charset="-120"/>
               </a:rPr>
-              <a:t>El regadío concentra cuatro quintas partes de la extracción</a:t>
+              <a:t>La presión aumenta, pero el riesgo sigue siendo local</a:t>
             </a:r>
             <a:endParaRPr lang="en-US" sz="3000" dirty="0"/>
           </a:p>
@@ -10922,7 +11639,7 @@
                 <a:ea typeface="Cambria" pitchFamily="34" charset="-122"/>
                 <a:cs typeface="Cambria" pitchFamily="34" charset="-120"/>
               </a:rPr>
-              <a:t>Lo que implica</a:t>
+              <a:t>Dos indicadores, no un atajo</a:t>
             </a:r>
             <a:endParaRPr lang="en-US" sz="1300" dirty="0"/>
           </a:p>
@@ -10964,7 +11681,7 @@
                 <a:ea typeface="Calibri" pitchFamily="34" charset="-122"/>
                 <a:cs typeface="Calibri" pitchFamily="34" charset="-120"/>
               </a:rPr>
-              <a:t>Bajar un 10 % el consumo agrícola libera más volumen que suprimir por completo el uso industrial del país.</a:t>
+              <a:t>A escala mundial, el número y la duración de las sequías han aumentado un 29 % desde 2000 frente a las dos décadas anteriores.</a:t>
             </a:r>
             <a:endParaRPr lang="en-US" sz="1200" dirty="0"/>
           </a:p>
@@ -10993,7 +11710,7 @@
                 <a:ea typeface="Calibri" pitchFamily="34" charset="-122"/>
                 <a:cs typeface="Calibri" pitchFamily="34" charset="-120"/>
               </a:rPr>
-              <a:t>Por eso el esfuerzo se concentra en la parcela, y no en los demás usos.</a:t>
+              <a:t>El estrés hídrico mide otra cosa: las extracciones respecto a los recursos renovables disponibles tras las necesidades ambientales. Esta señal mundial no es una previsión nacional; debe leerse con la lluvia, los acuíferos, las estaciones y los usos locales.</a:t>
             </a:r>
             <a:endParaRPr lang="en-US" sz="1200" dirty="0"/>
           </a:p>
@@ -11146,7 +11863,7 @@
                 <a:ea typeface="Calibri" pitchFamily="34" charset="-122"/>
                 <a:cs typeface="Calibri" pitchFamily="34" charset="-120"/>
               </a:rPr>
-              <a:t>ECONOMÍA Y SEGURIDAD ALIMENTARIA</a:t>
+              <a:t>ADÓNDE VA EL AGUA</a:t>
             </a:r>
             <a:endParaRPr lang="en-US" sz="1150" dirty="0"/>
           </a:p>
@@ -11185,26 +11902,42 @@
                 <a:ea typeface="Cambria" pitchFamily="34" charset="-122"/>
                 <a:cs typeface="Cambria" pitchFamily="34" charset="-120"/>
               </a:rPr>
-              <a:t>Un sector exportador que sostiene el medio rural</a:t>
+              <a:t>El regadío concentra cuatro quintas partes de la extracción</a:t>
             </a:r>
             <a:endParaRPr lang="en-US" sz="3000" dirty="0"/>
           </a:p>
         </p:txBody>
       </p:sp>
-      <p:sp>
-        <p:nvSpPr>
-          <p:cNvPr id="4" name="Shape 2"/>
+      <p:graphicFrame>
+        <p:nvGraphicFramePr>
+          <p:cNvPr id="4" name="Chart 0" descr=""/>
+          <p:cNvGraphicFramePr/>
+          <p:nvPr/>
+        </p:nvGraphicFramePr>
+        <p:xfrm>
+          <a:off x="594360" y="1783080"/>
+          <a:ext cx="7360920" cy="3977640"/>
+        </p:xfrm>
+        <a:graphic xmlns:a="http://schemas.openxmlformats.org/drawingml/2006/main">
+          <a:graphicData uri="http://schemas.openxmlformats.org/drawingml/2006/chart">
+            <c:chart xmlns:c="http://schemas.openxmlformats.org/drawingml/2006/chart" r:id="rId1"/>
+          </a:graphicData>
+        </a:graphic>
+      </p:graphicFrame>
+      <p:sp>
+        <p:nvSpPr>
+          <p:cNvPr id="5" name="Shape 2"/>
           <p:cNvSpPr/>
           <p:nvPr/>
         </p:nvSpPr>
         <p:spPr>
           <a:xfrm>
-            <a:off x="594360" y="1874520"/>
-            <a:ext cx="2545004" cy="2514600"/>
+            <a:off x="8275320" y="1783080"/>
+            <a:ext cx="3291840" cy="3977640"/>
           </a:xfrm>
           <a:prstGeom prst="roundRect">
             <a:avLst>
-              <a:gd name="adj" fmla="val 3636"/>
+              <a:gd name="adj" fmla="val 2778"/>
             </a:avLst>
           </a:prstGeom>
           <a:solidFill>
@@ -11220,14 +11953,14 @@
       </p:sp>
       <p:sp>
         <p:nvSpPr>
-          <p:cNvPr id="5" name="Text 3"/>
-          <p:cNvSpPr txBox="1"/>
-          <p:nvPr/>
-        </p:nvSpPr>
-        <p:spPr>
-          <a:xfrm>
-            <a:off x="777240" y="2148840"/>
-            <a:ext cx="2179244" cy="960120"/>
+          <p:cNvPr id="6" name="Text 3"/>
+          <p:cNvSpPr txBox="1"/>
+          <p:nvPr/>
+        </p:nvSpPr>
+        <p:spPr>
+          <a:xfrm>
+            <a:off x="8503920" y="2011680"/>
+            <a:ext cx="2834640" cy="457200"/>
           </a:xfrm>
           <a:prstGeom prst="rect">
             <a:avLst/>
@@ -11239,11 +11972,11 @@
           <a:bodyPr wrap="square" lIns="0" tIns="0" rIns="0" bIns="0" rtlCol="0" anchor="ctr"/>
           <a:lstStyle/>
           <a:p>
-            <a:pPr algn="ctr" indent="0" marL="0">
-              <a:buNone/>
-            </a:pPr>
-            <a:r>
-              <a:rPr lang="en-US" sz="3000" b="1" dirty="0">
+            <a:pPr algn="l" indent="0" marL="0">
+              <a:buNone/>
+            </a:pPr>
+            <a:r>
+              <a:rPr lang="en-US" sz="1300" b="1" dirty="0">
                 <a:solidFill>
                   <a:srgbClr val="6B2A44"/>
                 </a:solidFill>
@@ -11251,388 +11984,22 @@
                 <a:ea typeface="Cambria" pitchFamily="34" charset="-122"/>
                 <a:cs typeface="Cambria" pitchFamily="34" charset="-120"/>
               </a:rPr>
-              <a:t>≈ 70 000 M€</a:t>
-            </a:r>
-            <a:endParaRPr lang="en-US" sz="3000" dirty="0"/>
-          </a:p>
-        </p:txBody>
-      </p:sp>
-      <p:sp>
-        <p:nvSpPr>
-          <p:cNvPr id="6" name="Text 4"/>
-          <p:cNvSpPr txBox="1"/>
-          <p:nvPr/>
-        </p:nvSpPr>
-        <p:spPr>
-          <a:xfrm>
-            <a:off x="795528" y="3154680"/>
-            <a:ext cx="2142668" cy="1051560"/>
-          </a:xfrm>
-          <a:prstGeom prst="rect">
-            <a:avLst/>
-          </a:prstGeom>
-          <a:noFill/>
-          <a:ln/>
-        </p:spPr>
-        <p:txBody>
-          <a:bodyPr wrap="square" lIns="0" tIns="0" rIns="0" bIns="0" rtlCol="0" anchor="t"/>
-          <a:lstStyle/>
-          <a:p>
-            <a:pPr algn="ctr" indent="0" marL="0">
-              <a:lnSpc>
-                <a:spcPct val="118000"/>
-              </a:lnSpc>
-              <a:buNone/>
-            </a:pPr>
-            <a:r>
-              <a:rPr lang="en-US" sz="1250" dirty="0">
-                <a:solidFill>
-                  <a:srgbClr val="3F3138"/>
-                </a:solidFill>
-                <a:latin typeface="Calibri" pitchFamily="34" charset="0"/>
-                <a:ea typeface="Calibri" pitchFamily="34" charset="-122"/>
-                <a:cs typeface="Calibri" pitchFamily="34" charset="-120"/>
-              </a:rPr>
-              <a:t>de exportaciones agroalimentarias en 2023</a:t>
-            </a:r>
-            <a:endParaRPr lang="en-US" sz="1250" dirty="0"/>
-          </a:p>
-        </p:txBody>
-      </p:sp>
-      <p:sp>
-        <p:nvSpPr>
-          <p:cNvPr id="7" name="Shape 5"/>
-          <p:cNvSpPr/>
-          <p:nvPr/>
-        </p:nvSpPr>
-        <p:spPr>
-          <a:xfrm>
-            <a:off x="3413684" y="1874520"/>
-            <a:ext cx="2545004" cy="2514600"/>
-          </a:xfrm>
-          <a:prstGeom prst="roundRect">
-            <a:avLst>
-              <a:gd name="adj" fmla="val 3636"/>
-            </a:avLst>
-          </a:prstGeom>
-          <a:solidFill>
-            <a:srgbClr val="F5EFF1"/>
-          </a:solidFill>
-          <a:ln w="9525">
-            <a:solidFill>
-              <a:srgbClr val="E5D9DE"/>
-            </a:solidFill>
-            <a:prstDash val="solid"/>
-          </a:ln>
-        </p:spPr>
-      </p:sp>
-      <p:sp>
-        <p:nvSpPr>
-          <p:cNvPr id="8" name="Text 6"/>
-          <p:cNvSpPr txBox="1"/>
-          <p:nvPr/>
-        </p:nvSpPr>
-        <p:spPr>
-          <a:xfrm>
-            <a:off x="3596564" y="2148840"/>
-            <a:ext cx="2179244" cy="960120"/>
-          </a:xfrm>
-          <a:prstGeom prst="rect">
-            <a:avLst/>
-          </a:prstGeom>
-          <a:noFill/>
-          <a:ln/>
-        </p:spPr>
-        <p:txBody>
-          <a:bodyPr wrap="square" lIns="0" tIns="0" rIns="0" bIns="0" rtlCol="0" anchor="ctr"/>
-          <a:lstStyle/>
-          <a:p>
-            <a:pPr algn="ctr" indent="0" marL="0">
-              <a:buNone/>
-            </a:pPr>
-            <a:r>
-              <a:rPr lang="en-US" sz="3800" b="1" dirty="0">
-                <a:solidFill>
-                  <a:srgbClr val="6B2A44"/>
-                </a:solidFill>
-                <a:latin typeface="Cambria" pitchFamily="34" charset="0"/>
-                <a:ea typeface="Cambria" pitchFamily="34" charset="-122"/>
-                <a:cs typeface="Cambria" pitchFamily="34" charset="-120"/>
-              </a:rPr>
-              <a:t>N.º 1</a:t>
-            </a:r>
-            <a:endParaRPr lang="en-US" sz="3800" dirty="0"/>
-          </a:p>
-        </p:txBody>
-      </p:sp>
-      <p:sp>
-        <p:nvSpPr>
-          <p:cNvPr id="9" name="Text 7"/>
-          <p:cNvSpPr txBox="1"/>
-          <p:nvPr/>
-        </p:nvSpPr>
-        <p:spPr>
-          <a:xfrm>
-            <a:off x="3614852" y="3154680"/>
-            <a:ext cx="2142668" cy="1051560"/>
-          </a:xfrm>
-          <a:prstGeom prst="rect">
-            <a:avLst/>
-          </a:prstGeom>
-          <a:noFill/>
-          <a:ln/>
-        </p:spPr>
-        <p:txBody>
-          <a:bodyPr wrap="square" lIns="0" tIns="0" rIns="0" bIns="0" rtlCol="0" anchor="t"/>
-          <a:lstStyle/>
-          <a:p>
-            <a:pPr algn="ctr" indent="0" marL="0">
-              <a:lnSpc>
-                <a:spcPct val="118000"/>
-              </a:lnSpc>
-              <a:buNone/>
-            </a:pPr>
-            <a:r>
-              <a:rPr lang="en-US" sz="1250" dirty="0">
-                <a:solidFill>
-                  <a:srgbClr val="3F3138"/>
-                </a:solidFill>
-                <a:latin typeface="Calibri" pitchFamily="34" charset="0"/>
-                <a:ea typeface="Calibri" pitchFamily="34" charset="-122"/>
-                <a:cs typeface="Calibri" pitchFamily="34" charset="-120"/>
-              </a:rPr>
-              <a:t>exportador mundial de aceite de oliva y de cítricos frescos</a:t>
-            </a:r>
-            <a:endParaRPr lang="en-US" sz="1250" dirty="0"/>
-          </a:p>
-        </p:txBody>
-      </p:sp>
-      <p:sp>
-        <p:nvSpPr>
-          <p:cNvPr id="10" name="Shape 8"/>
-          <p:cNvSpPr/>
-          <p:nvPr/>
-        </p:nvSpPr>
-        <p:spPr>
-          <a:xfrm>
-            <a:off x="6233008" y="1874520"/>
-            <a:ext cx="2545004" cy="2514600"/>
-          </a:xfrm>
-          <a:prstGeom prst="roundRect">
-            <a:avLst>
-              <a:gd name="adj" fmla="val 3636"/>
-            </a:avLst>
-          </a:prstGeom>
-          <a:solidFill>
-            <a:srgbClr val="F5EFF1"/>
-          </a:solidFill>
-          <a:ln w="9525">
-            <a:solidFill>
-              <a:srgbClr val="E5D9DE"/>
-            </a:solidFill>
-            <a:prstDash val="solid"/>
-          </a:ln>
-        </p:spPr>
-      </p:sp>
-      <p:sp>
-        <p:nvSpPr>
-          <p:cNvPr id="11" name="Text 9"/>
-          <p:cNvSpPr txBox="1"/>
-          <p:nvPr/>
-        </p:nvSpPr>
-        <p:spPr>
-          <a:xfrm>
-            <a:off x="6415888" y="2148840"/>
-            <a:ext cx="2179244" cy="960120"/>
-          </a:xfrm>
-          <a:prstGeom prst="rect">
-            <a:avLst/>
-          </a:prstGeom>
-          <a:noFill/>
-          <a:ln/>
-        </p:spPr>
-        <p:txBody>
-          <a:bodyPr wrap="square" lIns="0" tIns="0" rIns="0" bIns="0" rtlCol="0" anchor="ctr"/>
-          <a:lstStyle/>
-          <a:p>
-            <a:pPr algn="ctr" indent="0" marL="0">
-              <a:buNone/>
-            </a:pPr>
-            <a:r>
-              <a:rPr lang="en-US" sz="3800" b="1" dirty="0">
-                <a:solidFill>
-                  <a:srgbClr val="6B2A44"/>
-                </a:solidFill>
-                <a:latin typeface="Cambria" pitchFamily="34" charset="0"/>
-                <a:ea typeface="Cambria" pitchFamily="34" charset="-122"/>
-                <a:cs typeface="Cambria" pitchFamily="34" charset="-120"/>
-              </a:rPr>
-              <a:t>≈ 0,75 M</a:t>
-            </a:r>
-            <a:endParaRPr lang="en-US" sz="3800" dirty="0"/>
-          </a:p>
-        </p:txBody>
-      </p:sp>
-      <p:sp>
-        <p:nvSpPr>
-          <p:cNvPr id="12" name="Text 10"/>
-          <p:cNvSpPr txBox="1"/>
-          <p:nvPr/>
-        </p:nvSpPr>
-        <p:spPr>
-          <a:xfrm>
-            <a:off x="6434176" y="3154680"/>
-            <a:ext cx="2142668" cy="1051560"/>
-          </a:xfrm>
-          <a:prstGeom prst="rect">
-            <a:avLst/>
-          </a:prstGeom>
-          <a:noFill/>
-          <a:ln/>
-        </p:spPr>
-        <p:txBody>
-          <a:bodyPr wrap="square" lIns="0" tIns="0" rIns="0" bIns="0" rtlCol="0" anchor="t"/>
-          <a:lstStyle/>
-          <a:p>
-            <a:pPr algn="ctr" indent="0" marL="0">
-              <a:lnSpc>
-                <a:spcPct val="118000"/>
-              </a:lnSpc>
-              <a:buNone/>
-            </a:pPr>
-            <a:r>
-              <a:rPr lang="en-US" sz="1250" dirty="0">
-                <a:solidFill>
-                  <a:srgbClr val="3F3138"/>
-                </a:solidFill>
-                <a:latin typeface="Calibri" pitchFamily="34" charset="0"/>
-                <a:ea typeface="Calibri" pitchFamily="34" charset="-122"/>
-                <a:cs typeface="Calibri" pitchFamily="34" charset="-120"/>
-              </a:rPr>
-              <a:t>de personas ocupadas en la agricultura</a:t>
-            </a:r>
-            <a:endParaRPr lang="en-US" sz="1250" dirty="0"/>
-          </a:p>
-        </p:txBody>
-      </p:sp>
-      <p:sp>
-        <p:nvSpPr>
-          <p:cNvPr id="13" name="Shape 11"/>
-          <p:cNvSpPr/>
-          <p:nvPr/>
-        </p:nvSpPr>
-        <p:spPr>
-          <a:xfrm>
-            <a:off x="9052331" y="1874520"/>
-            <a:ext cx="2545004" cy="2514600"/>
-          </a:xfrm>
-          <a:prstGeom prst="roundRect">
-            <a:avLst>
-              <a:gd name="adj" fmla="val 3636"/>
-            </a:avLst>
-          </a:prstGeom>
-          <a:solidFill>
-            <a:srgbClr val="F5EFF1"/>
-          </a:solidFill>
-          <a:ln w="9525">
-            <a:solidFill>
-              <a:srgbClr val="E5D9DE"/>
-            </a:solidFill>
-            <a:prstDash val="solid"/>
-          </a:ln>
-        </p:spPr>
-      </p:sp>
-      <p:sp>
-        <p:nvSpPr>
-          <p:cNvPr id="14" name="Text 12"/>
-          <p:cNvSpPr txBox="1"/>
-          <p:nvPr/>
-        </p:nvSpPr>
-        <p:spPr>
-          <a:xfrm>
-            <a:off x="9235211" y="2148840"/>
-            <a:ext cx="2179244" cy="960120"/>
-          </a:xfrm>
-          <a:prstGeom prst="rect">
-            <a:avLst/>
-          </a:prstGeom>
-          <a:noFill/>
-          <a:ln/>
-        </p:spPr>
-        <p:txBody>
-          <a:bodyPr wrap="square" lIns="0" tIns="0" rIns="0" bIns="0" rtlCol="0" anchor="ctr"/>
-          <a:lstStyle/>
-          <a:p>
-            <a:pPr algn="ctr" indent="0" marL="0">
-              <a:buNone/>
-            </a:pPr>
-            <a:r>
-              <a:rPr lang="en-US" sz="3800" b="1" dirty="0">
-                <a:solidFill>
-                  <a:srgbClr val="6B2A44"/>
-                </a:solidFill>
-                <a:latin typeface="Cambria" pitchFamily="34" charset="0"/>
-                <a:ea typeface="Cambria" pitchFamily="34" charset="-122"/>
-                <a:cs typeface="Cambria" pitchFamily="34" charset="-120"/>
-              </a:rPr>
-              <a:t>≈ 2,5 %</a:t>
-            </a:r>
-            <a:endParaRPr lang="en-US" sz="3800" dirty="0"/>
-          </a:p>
-        </p:txBody>
-      </p:sp>
-      <p:sp>
-        <p:nvSpPr>
-          <p:cNvPr id="15" name="Text 13"/>
-          <p:cNvSpPr txBox="1"/>
-          <p:nvPr/>
-        </p:nvSpPr>
-        <p:spPr>
-          <a:xfrm>
-            <a:off x="9253499" y="3154680"/>
-            <a:ext cx="2142668" cy="1051560"/>
-          </a:xfrm>
-          <a:prstGeom prst="rect">
-            <a:avLst/>
-          </a:prstGeom>
-          <a:noFill/>
-          <a:ln/>
-        </p:spPr>
-        <p:txBody>
-          <a:bodyPr wrap="square" lIns="0" tIns="0" rIns="0" bIns="0" rtlCol="0" anchor="t"/>
-          <a:lstStyle/>
-          <a:p>
-            <a:pPr algn="ctr" indent="0" marL="0">
-              <a:lnSpc>
-                <a:spcPct val="118000"/>
-              </a:lnSpc>
-              <a:buNone/>
-            </a:pPr>
-            <a:r>
-              <a:rPr lang="en-US" sz="1250" dirty="0">
-                <a:solidFill>
-                  <a:srgbClr val="3F3138"/>
-                </a:solidFill>
-                <a:latin typeface="Calibri" pitchFamily="34" charset="0"/>
-                <a:ea typeface="Calibri" pitchFamily="34" charset="-122"/>
-                <a:cs typeface="Calibri" pitchFamily="34" charset="-120"/>
-              </a:rPr>
-              <a:t>del PIB procede de la agricultura, la ganadería y la pesca</a:t>
-            </a:r>
-            <a:endParaRPr lang="en-US" sz="1250" dirty="0"/>
-          </a:p>
-        </p:txBody>
-      </p:sp>
-      <p:sp>
-        <p:nvSpPr>
-          <p:cNvPr id="16" name="Text 14"/>
-          <p:cNvSpPr txBox="1"/>
-          <p:nvPr/>
-        </p:nvSpPr>
-        <p:spPr>
-          <a:xfrm>
-            <a:off x="594360" y="4709160"/>
-            <a:ext cx="11002975" cy="1097280"/>
+              <a:t>Lo que implica</a:t>
+            </a:r>
+            <a:endParaRPr lang="en-US" sz="1300" dirty="0"/>
+          </a:p>
+        </p:txBody>
+      </p:sp>
+      <p:sp>
+        <p:nvSpPr>
+          <p:cNvPr id="7" name="Text 4"/>
+          <p:cNvSpPr txBox="1"/>
+          <p:nvPr/>
+        </p:nvSpPr>
+        <p:spPr>
+          <a:xfrm>
+            <a:off x="8503920" y="2560320"/>
+            <a:ext cx="2834640" cy="3017520"/>
           </a:xfrm>
           <a:prstGeom prst="rect">
             <a:avLst/>
@@ -11646,12 +12013,12 @@
           <a:p>
             <a:pPr algn="l" indent="0" marL="0">
               <a:lnSpc>
-                <a:spcPct val="130000"/>
+                <a:spcPct val="125000"/>
               </a:lnSpc>
               <a:buNone/>
             </a:pPr>
             <a:r>
-              <a:rPr lang="en-US" sz="1350" dirty="0">
+              <a:rPr lang="en-US" sz="1200" dirty="0">
                 <a:solidFill>
                   <a:srgbClr val="3F3138"/>
                 </a:solidFill>
@@ -11659,15 +12026,44 @@
                 <a:ea typeface="Calibri" pitchFamily="34" charset="-122"/>
                 <a:cs typeface="Calibri" pitchFamily="34" charset="-120"/>
               </a:rPr>
-              <a:t>La sequía de 2022–2024 redujo a la mitad la cosecha de aceite en dos campañas seguidas y obligó a recortar las dotaciones de riego en cuencas como la del Guadalquivir y la del Segura. Los fondos europeos financian la modernización de regadíos, pero el agua disponible por hectárea sigue bajando.</a:t>
-            </a:r>
-            <a:endParaRPr lang="en-US" sz="1350" dirty="0"/>
-          </a:p>
-        </p:txBody>
-      </p:sp>
-      <p:sp>
-        <p:nvSpPr>
-          <p:cNvPr id="17" name="Text 15"/>
+              <a:t>Bajar un 10 % el consumo agrícola libera más volumen que suprimir por completo el uso industrial del país.</a:t>
+            </a:r>
+            <a:endParaRPr lang="en-US" sz="1200" dirty="0"/>
+          </a:p>
+          <a:p>
+            <a:pPr algn="l" indent="0" marL="0">
+              <a:lnSpc>
+                <a:spcPct val="125000"/>
+              </a:lnSpc>
+              <a:buNone/>
+            </a:pPr>
+            <a:endParaRPr lang="en-US" sz="1200" dirty="0"/>
+          </a:p>
+          <a:p>
+            <a:pPr algn="l" indent="0" marL="0">
+              <a:lnSpc>
+                <a:spcPct val="125000"/>
+              </a:lnSpc>
+              <a:buNone/>
+            </a:pPr>
+            <a:r>
+              <a:rPr lang="en-US" sz="1200" dirty="0">
+                <a:solidFill>
+                  <a:srgbClr val="3F3138"/>
+                </a:solidFill>
+                <a:latin typeface="Calibri" pitchFamily="34" charset="0"/>
+                <a:ea typeface="Calibri" pitchFamily="34" charset="-122"/>
+                <a:cs typeface="Calibri" pitchFamily="34" charset="-120"/>
+              </a:rPr>
+              <a:t>Por eso el esfuerzo se concentra en la parcela, y no en los demás usos.</a:t>
+            </a:r>
+            <a:endParaRPr lang="en-US" sz="1200" dirty="0"/>
+          </a:p>
+        </p:txBody>
+      </p:sp>
+      <p:sp>
+        <p:nvSpPr>
+          <p:cNvPr id="8" name="Text 5"/>
           <p:cNvSpPr txBox="1"/>
           <p:nvPr/>
         </p:nvSpPr>
@@ -11708,7 +12104,7 @@
       </p:sp>
       <p:sp>
         <p:nvSpPr>
-          <p:cNvPr id="18" name="Text 16"/>
+          <p:cNvPr id="9" name="Text 6"/>
           <p:cNvSpPr txBox="1"/>
           <p:nvPr/>
         </p:nvSpPr>
@@ -11812,7 +12208,7 @@
                 <a:ea typeface="Calibri" pitchFamily="34" charset="-122"/>
                 <a:cs typeface="Calibri" pitchFamily="34" charset="-120"/>
               </a:rPr>
-              <a:t>LOS CULTIVOS</a:t>
+              <a:t>ECONOMÍA Y SEGURIDAD ALIMENTARIA</a:t>
             </a:r>
             <a:endParaRPr lang="en-US" sz="1150" dirty="0"/>
           </a:p>
@@ -11851,42 +12247,26 @@
                 <a:ea typeface="Cambria" pitchFamily="34" charset="-122"/>
                 <a:cs typeface="Cambria" pitchFamily="34" charset="-120"/>
               </a:rPr>
-              <a:t>Cinco producciones concentran el volumen</a:t>
+              <a:t>Un sector exportador que sostiene el medio rural</a:t>
             </a:r>
             <a:endParaRPr lang="en-US" sz="3000" dirty="0"/>
           </a:p>
         </p:txBody>
       </p:sp>
-      <p:graphicFrame>
-        <p:nvGraphicFramePr>
-          <p:cNvPr id="4" name="Chart 0" descr=""/>
-          <p:cNvGraphicFramePr/>
-          <p:nvPr/>
-        </p:nvGraphicFramePr>
-        <p:xfrm>
-          <a:off x="594360" y="1783080"/>
-          <a:ext cx="7360920" cy="3977640"/>
-        </p:xfrm>
-        <a:graphic xmlns:a="http://schemas.openxmlformats.org/drawingml/2006/main">
-          <a:graphicData uri="http://schemas.openxmlformats.org/drawingml/2006/chart">
-            <c:chart xmlns:c="http://schemas.openxmlformats.org/drawingml/2006/chart" r:id="rId1"/>
-          </a:graphicData>
-        </a:graphic>
-      </p:graphicFrame>
-      <p:sp>
-        <p:nvSpPr>
-          <p:cNvPr id="5" name="Shape 2"/>
+      <p:sp>
+        <p:nvSpPr>
+          <p:cNvPr id="4" name="Shape 2"/>
           <p:cNvSpPr/>
           <p:nvPr/>
         </p:nvSpPr>
         <p:spPr>
           <a:xfrm>
-            <a:off x="8275320" y="1783080"/>
-            <a:ext cx="3291840" cy="3977640"/>
+            <a:off x="594360" y="1874520"/>
+            <a:ext cx="2545004" cy="2514600"/>
           </a:xfrm>
           <a:prstGeom prst="roundRect">
             <a:avLst>
-              <a:gd name="adj" fmla="val 2778"/>
+              <a:gd name="adj" fmla="val 3636"/>
             </a:avLst>
           </a:prstGeom>
           <a:solidFill>
@@ -11902,14 +12282,14 @@
       </p:sp>
       <p:sp>
         <p:nvSpPr>
-          <p:cNvPr id="6" name="Text 3"/>
-          <p:cNvSpPr txBox="1"/>
-          <p:nvPr/>
-        </p:nvSpPr>
-        <p:spPr>
-          <a:xfrm>
-            <a:off x="8503920" y="2011680"/>
-            <a:ext cx="2834640" cy="457200"/>
+          <p:cNvPr id="5" name="Text 3"/>
+          <p:cNvSpPr txBox="1"/>
+          <p:nvPr/>
+        </p:nvSpPr>
+        <p:spPr>
+          <a:xfrm>
+            <a:off x="777240" y="2148840"/>
+            <a:ext cx="2179244" cy="960120"/>
           </a:xfrm>
           <a:prstGeom prst="rect">
             <a:avLst/>
@@ -11921,11 +12301,11 @@
           <a:bodyPr wrap="square" lIns="0" tIns="0" rIns="0" bIns="0" rtlCol="0" anchor="ctr"/>
           <a:lstStyle/>
           <a:p>
-            <a:pPr algn="l" indent="0" marL="0">
-              <a:buNone/>
-            </a:pPr>
-            <a:r>
-              <a:rPr lang="en-US" sz="1300" b="1" dirty="0">
+            <a:pPr algn="ctr" indent="0" marL="0">
+              <a:buNone/>
+            </a:pPr>
+            <a:r>
+              <a:rPr lang="en-US" sz="3000" b="1" dirty="0">
                 <a:solidFill>
                   <a:srgbClr val="6B2A44"/>
                 </a:solidFill>
@@ -11933,22 +12313,388 @@
                 <a:ea typeface="Cambria" pitchFamily="34" charset="-122"/>
                 <a:cs typeface="Cambria" pitchFamily="34" charset="-120"/>
               </a:rPr>
-              <a:t>Lectura</a:t>
-            </a:r>
-            <a:endParaRPr lang="en-US" sz="1300" dirty="0"/>
-          </a:p>
-        </p:txBody>
-      </p:sp>
-      <p:sp>
-        <p:nvSpPr>
-          <p:cNvPr id="7" name="Text 4"/>
-          <p:cNvSpPr txBox="1"/>
-          <p:nvPr/>
-        </p:nvSpPr>
-        <p:spPr>
-          <a:xfrm>
-            <a:off x="8503920" y="2560320"/>
-            <a:ext cx="2834640" cy="3017520"/>
+              <a:t>≈ 70 000 M€</a:t>
+            </a:r>
+            <a:endParaRPr lang="en-US" sz="3000" dirty="0"/>
+          </a:p>
+        </p:txBody>
+      </p:sp>
+      <p:sp>
+        <p:nvSpPr>
+          <p:cNvPr id="6" name="Text 4"/>
+          <p:cNvSpPr txBox="1"/>
+          <p:nvPr/>
+        </p:nvSpPr>
+        <p:spPr>
+          <a:xfrm>
+            <a:off x="795528" y="3154680"/>
+            <a:ext cx="2142668" cy="1051560"/>
+          </a:xfrm>
+          <a:prstGeom prst="rect">
+            <a:avLst/>
+          </a:prstGeom>
+          <a:noFill/>
+          <a:ln/>
+        </p:spPr>
+        <p:txBody>
+          <a:bodyPr wrap="square" lIns="0" tIns="0" rIns="0" bIns="0" rtlCol="0" anchor="t"/>
+          <a:lstStyle/>
+          <a:p>
+            <a:pPr algn="ctr" indent="0" marL="0">
+              <a:lnSpc>
+                <a:spcPct val="118000"/>
+              </a:lnSpc>
+              <a:buNone/>
+            </a:pPr>
+            <a:r>
+              <a:rPr lang="en-US" sz="1250" dirty="0">
+                <a:solidFill>
+                  <a:srgbClr val="3F3138"/>
+                </a:solidFill>
+                <a:latin typeface="Calibri" pitchFamily="34" charset="0"/>
+                <a:ea typeface="Calibri" pitchFamily="34" charset="-122"/>
+                <a:cs typeface="Calibri" pitchFamily="34" charset="-120"/>
+              </a:rPr>
+              <a:t>de exportaciones agroalimentarias en 2023</a:t>
+            </a:r>
+            <a:endParaRPr lang="en-US" sz="1250" dirty="0"/>
+          </a:p>
+        </p:txBody>
+      </p:sp>
+      <p:sp>
+        <p:nvSpPr>
+          <p:cNvPr id="7" name="Shape 5"/>
+          <p:cNvSpPr/>
+          <p:nvPr/>
+        </p:nvSpPr>
+        <p:spPr>
+          <a:xfrm>
+            <a:off x="3413684" y="1874520"/>
+            <a:ext cx="2545004" cy="2514600"/>
+          </a:xfrm>
+          <a:prstGeom prst="roundRect">
+            <a:avLst>
+              <a:gd name="adj" fmla="val 3636"/>
+            </a:avLst>
+          </a:prstGeom>
+          <a:solidFill>
+            <a:srgbClr val="F5EFF1"/>
+          </a:solidFill>
+          <a:ln w="9525">
+            <a:solidFill>
+              <a:srgbClr val="E5D9DE"/>
+            </a:solidFill>
+            <a:prstDash val="solid"/>
+          </a:ln>
+        </p:spPr>
+      </p:sp>
+      <p:sp>
+        <p:nvSpPr>
+          <p:cNvPr id="8" name="Text 6"/>
+          <p:cNvSpPr txBox="1"/>
+          <p:nvPr/>
+        </p:nvSpPr>
+        <p:spPr>
+          <a:xfrm>
+            <a:off x="3596564" y="2148840"/>
+            <a:ext cx="2179244" cy="960120"/>
+          </a:xfrm>
+          <a:prstGeom prst="rect">
+            <a:avLst/>
+          </a:prstGeom>
+          <a:noFill/>
+          <a:ln/>
+        </p:spPr>
+        <p:txBody>
+          <a:bodyPr wrap="square" lIns="0" tIns="0" rIns="0" bIns="0" rtlCol="0" anchor="ctr"/>
+          <a:lstStyle/>
+          <a:p>
+            <a:pPr algn="ctr" indent="0" marL="0">
+              <a:buNone/>
+            </a:pPr>
+            <a:r>
+              <a:rPr lang="en-US" sz="3800" b="1" dirty="0">
+                <a:solidFill>
+                  <a:srgbClr val="6B2A44"/>
+                </a:solidFill>
+                <a:latin typeface="Cambria" pitchFamily="34" charset="0"/>
+                <a:ea typeface="Cambria" pitchFamily="34" charset="-122"/>
+                <a:cs typeface="Cambria" pitchFamily="34" charset="-120"/>
+              </a:rPr>
+              <a:t>N.º 1</a:t>
+            </a:r>
+            <a:endParaRPr lang="en-US" sz="3800" dirty="0"/>
+          </a:p>
+        </p:txBody>
+      </p:sp>
+      <p:sp>
+        <p:nvSpPr>
+          <p:cNvPr id="9" name="Text 7"/>
+          <p:cNvSpPr txBox="1"/>
+          <p:nvPr/>
+        </p:nvSpPr>
+        <p:spPr>
+          <a:xfrm>
+            <a:off x="3614852" y="3154680"/>
+            <a:ext cx="2142668" cy="1051560"/>
+          </a:xfrm>
+          <a:prstGeom prst="rect">
+            <a:avLst/>
+          </a:prstGeom>
+          <a:noFill/>
+          <a:ln/>
+        </p:spPr>
+        <p:txBody>
+          <a:bodyPr wrap="square" lIns="0" tIns="0" rIns="0" bIns="0" rtlCol="0" anchor="t"/>
+          <a:lstStyle/>
+          <a:p>
+            <a:pPr algn="ctr" indent="0" marL="0">
+              <a:lnSpc>
+                <a:spcPct val="118000"/>
+              </a:lnSpc>
+              <a:buNone/>
+            </a:pPr>
+            <a:r>
+              <a:rPr lang="en-US" sz="1250" dirty="0">
+                <a:solidFill>
+                  <a:srgbClr val="3F3138"/>
+                </a:solidFill>
+                <a:latin typeface="Calibri" pitchFamily="34" charset="0"/>
+                <a:ea typeface="Calibri" pitchFamily="34" charset="-122"/>
+                <a:cs typeface="Calibri" pitchFamily="34" charset="-120"/>
+              </a:rPr>
+              <a:t>exportador mundial de aceite de oliva y de cítricos frescos</a:t>
+            </a:r>
+            <a:endParaRPr lang="en-US" sz="1250" dirty="0"/>
+          </a:p>
+        </p:txBody>
+      </p:sp>
+      <p:sp>
+        <p:nvSpPr>
+          <p:cNvPr id="10" name="Shape 8"/>
+          <p:cNvSpPr/>
+          <p:nvPr/>
+        </p:nvSpPr>
+        <p:spPr>
+          <a:xfrm>
+            <a:off x="6233008" y="1874520"/>
+            <a:ext cx="2545004" cy="2514600"/>
+          </a:xfrm>
+          <a:prstGeom prst="roundRect">
+            <a:avLst>
+              <a:gd name="adj" fmla="val 3636"/>
+            </a:avLst>
+          </a:prstGeom>
+          <a:solidFill>
+            <a:srgbClr val="F5EFF1"/>
+          </a:solidFill>
+          <a:ln w="9525">
+            <a:solidFill>
+              <a:srgbClr val="E5D9DE"/>
+            </a:solidFill>
+            <a:prstDash val="solid"/>
+          </a:ln>
+        </p:spPr>
+      </p:sp>
+      <p:sp>
+        <p:nvSpPr>
+          <p:cNvPr id="11" name="Text 9"/>
+          <p:cNvSpPr txBox="1"/>
+          <p:nvPr/>
+        </p:nvSpPr>
+        <p:spPr>
+          <a:xfrm>
+            <a:off x="6415888" y="2148840"/>
+            <a:ext cx="2179244" cy="960120"/>
+          </a:xfrm>
+          <a:prstGeom prst="rect">
+            <a:avLst/>
+          </a:prstGeom>
+          <a:noFill/>
+          <a:ln/>
+        </p:spPr>
+        <p:txBody>
+          <a:bodyPr wrap="square" lIns="0" tIns="0" rIns="0" bIns="0" rtlCol="0" anchor="ctr"/>
+          <a:lstStyle/>
+          <a:p>
+            <a:pPr algn="ctr" indent="0" marL="0">
+              <a:buNone/>
+            </a:pPr>
+            <a:r>
+              <a:rPr lang="en-US" sz="3800" b="1" dirty="0">
+                <a:solidFill>
+                  <a:srgbClr val="6B2A44"/>
+                </a:solidFill>
+                <a:latin typeface="Cambria" pitchFamily="34" charset="0"/>
+                <a:ea typeface="Cambria" pitchFamily="34" charset="-122"/>
+                <a:cs typeface="Cambria" pitchFamily="34" charset="-120"/>
+              </a:rPr>
+              <a:t>≈ 0,75 M</a:t>
+            </a:r>
+            <a:endParaRPr lang="en-US" sz="3800" dirty="0"/>
+          </a:p>
+        </p:txBody>
+      </p:sp>
+      <p:sp>
+        <p:nvSpPr>
+          <p:cNvPr id="12" name="Text 10"/>
+          <p:cNvSpPr txBox="1"/>
+          <p:nvPr/>
+        </p:nvSpPr>
+        <p:spPr>
+          <a:xfrm>
+            <a:off x="6434176" y="3154680"/>
+            <a:ext cx="2142668" cy="1051560"/>
+          </a:xfrm>
+          <a:prstGeom prst="rect">
+            <a:avLst/>
+          </a:prstGeom>
+          <a:noFill/>
+          <a:ln/>
+        </p:spPr>
+        <p:txBody>
+          <a:bodyPr wrap="square" lIns="0" tIns="0" rIns="0" bIns="0" rtlCol="0" anchor="t"/>
+          <a:lstStyle/>
+          <a:p>
+            <a:pPr algn="ctr" indent="0" marL="0">
+              <a:lnSpc>
+                <a:spcPct val="118000"/>
+              </a:lnSpc>
+              <a:buNone/>
+            </a:pPr>
+            <a:r>
+              <a:rPr lang="en-US" sz="1250" dirty="0">
+                <a:solidFill>
+                  <a:srgbClr val="3F3138"/>
+                </a:solidFill>
+                <a:latin typeface="Calibri" pitchFamily="34" charset="0"/>
+                <a:ea typeface="Calibri" pitchFamily="34" charset="-122"/>
+                <a:cs typeface="Calibri" pitchFamily="34" charset="-120"/>
+              </a:rPr>
+              <a:t>de personas ocupadas en la agricultura</a:t>
+            </a:r>
+            <a:endParaRPr lang="en-US" sz="1250" dirty="0"/>
+          </a:p>
+        </p:txBody>
+      </p:sp>
+      <p:sp>
+        <p:nvSpPr>
+          <p:cNvPr id="13" name="Shape 11"/>
+          <p:cNvSpPr/>
+          <p:nvPr/>
+        </p:nvSpPr>
+        <p:spPr>
+          <a:xfrm>
+            <a:off x="9052331" y="1874520"/>
+            <a:ext cx="2545004" cy="2514600"/>
+          </a:xfrm>
+          <a:prstGeom prst="roundRect">
+            <a:avLst>
+              <a:gd name="adj" fmla="val 3636"/>
+            </a:avLst>
+          </a:prstGeom>
+          <a:solidFill>
+            <a:srgbClr val="F5EFF1"/>
+          </a:solidFill>
+          <a:ln w="9525">
+            <a:solidFill>
+              <a:srgbClr val="E5D9DE"/>
+            </a:solidFill>
+            <a:prstDash val="solid"/>
+          </a:ln>
+        </p:spPr>
+      </p:sp>
+      <p:sp>
+        <p:nvSpPr>
+          <p:cNvPr id="14" name="Text 12"/>
+          <p:cNvSpPr txBox="1"/>
+          <p:nvPr/>
+        </p:nvSpPr>
+        <p:spPr>
+          <a:xfrm>
+            <a:off x="9235211" y="2148840"/>
+            <a:ext cx="2179244" cy="960120"/>
+          </a:xfrm>
+          <a:prstGeom prst="rect">
+            <a:avLst/>
+          </a:prstGeom>
+          <a:noFill/>
+          <a:ln/>
+        </p:spPr>
+        <p:txBody>
+          <a:bodyPr wrap="square" lIns="0" tIns="0" rIns="0" bIns="0" rtlCol="0" anchor="ctr"/>
+          <a:lstStyle/>
+          <a:p>
+            <a:pPr algn="ctr" indent="0" marL="0">
+              <a:buNone/>
+            </a:pPr>
+            <a:r>
+              <a:rPr lang="en-US" sz="3800" b="1" dirty="0">
+                <a:solidFill>
+                  <a:srgbClr val="6B2A44"/>
+                </a:solidFill>
+                <a:latin typeface="Cambria" pitchFamily="34" charset="0"/>
+                <a:ea typeface="Cambria" pitchFamily="34" charset="-122"/>
+                <a:cs typeface="Cambria" pitchFamily="34" charset="-120"/>
+              </a:rPr>
+              <a:t>≈ 2,5 %</a:t>
+            </a:r>
+            <a:endParaRPr lang="en-US" sz="3800" dirty="0"/>
+          </a:p>
+        </p:txBody>
+      </p:sp>
+      <p:sp>
+        <p:nvSpPr>
+          <p:cNvPr id="15" name="Text 13"/>
+          <p:cNvSpPr txBox="1"/>
+          <p:nvPr/>
+        </p:nvSpPr>
+        <p:spPr>
+          <a:xfrm>
+            <a:off x="9253499" y="3154680"/>
+            <a:ext cx="2142668" cy="1051560"/>
+          </a:xfrm>
+          <a:prstGeom prst="rect">
+            <a:avLst/>
+          </a:prstGeom>
+          <a:noFill/>
+          <a:ln/>
+        </p:spPr>
+        <p:txBody>
+          <a:bodyPr wrap="square" lIns="0" tIns="0" rIns="0" bIns="0" rtlCol="0" anchor="t"/>
+          <a:lstStyle/>
+          <a:p>
+            <a:pPr algn="ctr" indent="0" marL="0">
+              <a:lnSpc>
+                <a:spcPct val="118000"/>
+              </a:lnSpc>
+              <a:buNone/>
+            </a:pPr>
+            <a:r>
+              <a:rPr lang="en-US" sz="1250" dirty="0">
+                <a:solidFill>
+                  <a:srgbClr val="3F3138"/>
+                </a:solidFill>
+                <a:latin typeface="Calibri" pitchFamily="34" charset="0"/>
+                <a:ea typeface="Calibri" pitchFamily="34" charset="-122"/>
+                <a:cs typeface="Calibri" pitchFamily="34" charset="-120"/>
+              </a:rPr>
+              <a:t>del PIB procede de la agricultura, la ganadería y la pesca</a:t>
+            </a:r>
+            <a:endParaRPr lang="en-US" sz="1250" dirty="0"/>
+          </a:p>
+        </p:txBody>
+      </p:sp>
+      <p:sp>
+        <p:nvSpPr>
+          <p:cNvPr id="16" name="Text 14"/>
+          <p:cNvSpPr txBox="1"/>
+          <p:nvPr/>
+        </p:nvSpPr>
+        <p:spPr>
+          <a:xfrm>
+            <a:off x="594360" y="4709160"/>
+            <a:ext cx="11002975" cy="1097280"/>
           </a:xfrm>
           <a:prstGeom prst="rect">
             <a:avLst/>
@@ -11962,12 +12708,12 @@
           <a:p>
             <a:pPr algn="l" indent="0" marL="0">
               <a:lnSpc>
-                <a:spcPct val="125000"/>
+                <a:spcPct val="130000"/>
               </a:lnSpc>
               <a:buNone/>
             </a:pPr>
             <a:r>
-              <a:rPr lang="en-US" sz="1200" dirty="0">
+              <a:rPr lang="en-US" sz="1350" dirty="0">
                 <a:solidFill>
                   <a:srgbClr val="3F3138"/>
                 </a:solidFill>
@@ -11975,44 +12721,15 @@
                 <a:ea typeface="Calibri" pitchFamily="34" charset="-122"/>
                 <a:cs typeface="Calibri" pitchFamily="34" charset="-120"/>
               </a:rPr>
-              <a:t>* Cereal y aceituna son los dos rubros que más oscilan de una campaña a otra, porque dependen de la lluvia: la cosecha de aceituna de 2022/23 cayó a menos de la mitad de una campaña normal.</a:t>
-            </a:r>
-            <a:endParaRPr lang="en-US" sz="1200" dirty="0"/>
-          </a:p>
-          <a:p>
-            <a:pPr algn="l" indent="0" marL="0">
-              <a:lnSpc>
-                <a:spcPct val="125000"/>
-              </a:lnSpc>
-              <a:buNone/>
-            </a:pPr>
-            <a:endParaRPr lang="en-US" sz="1200" dirty="0"/>
-          </a:p>
-          <a:p>
-            <a:pPr algn="l" indent="0" marL="0">
-              <a:lnSpc>
-                <a:spcPct val="125000"/>
-              </a:lnSpc>
-              <a:buNone/>
-            </a:pPr>
-            <a:r>
-              <a:rPr lang="en-US" sz="1200" dirty="0">
-                <a:solidFill>
-                  <a:srgbClr val="3F3138"/>
-                </a:solidFill>
-                <a:latin typeface="Calibri" pitchFamily="34" charset="0"/>
-                <a:ea typeface="Calibri" pitchFamily="34" charset="-122"/>
-                <a:cs typeface="Calibri" pitchFamily="34" charset="-120"/>
-              </a:rPr>
-              <a:t>Hortalizas y cítricos se riegan en su práctica totalidad y se destinan a la exportación. Ahí el ahorro de agua se convierte directamente en margen.</a:t>
-            </a:r>
-            <a:endParaRPr lang="en-US" sz="1200" dirty="0"/>
-          </a:p>
-        </p:txBody>
-      </p:sp>
-      <p:sp>
-        <p:nvSpPr>
-          <p:cNvPr id="8" name="Text 5"/>
+              <a:t>La sequía de 2022–2024 redujo a la mitad la cosecha de aceite en dos campañas seguidas y obligó a recortar las dotaciones de riego en cuencas como la del Guadalquivir y la del Segura. Los fondos europeos financian la modernización de regadíos, pero el agua disponible por hectárea sigue bajando.</a:t>
+            </a:r>
+            <a:endParaRPr lang="en-US" sz="1350" dirty="0"/>
+          </a:p>
+        </p:txBody>
+      </p:sp>
+      <p:sp>
+        <p:nvSpPr>
+          <p:cNvPr id="17" name="Text 15"/>
           <p:cNvSpPr txBox="1"/>
           <p:nvPr/>
         </p:nvSpPr>
@@ -12053,7 +12770,7 @@
       </p:sp>
       <p:sp>
         <p:nvSpPr>
-          <p:cNvPr id="9" name="Text 6"/>
+          <p:cNvPr id="18" name="Text 16"/>
           <p:cNvSpPr txBox="1"/>
           <p:nvPr/>
         </p:nvSpPr>
@@ -12157,7 +12874,7 @@
                 <a:ea typeface="Calibri" pitchFamily="34" charset="-122"/>
                 <a:cs typeface="Calibri" pitchFamily="34" charset="-120"/>
               </a:rPr>
-              <a:t>PRIMER SECTOR</a:t>
+              <a:t>LOS CULTIVOS</a:t>
             </a:r>
             <a:endParaRPr lang="en-US" sz="1150" dirty="0"/>
           </a:p>
@@ -12196,46 +12913,104 @@
                 <a:ea typeface="Cambria" pitchFamily="34" charset="-122"/>
                 <a:cs typeface="Cambria" pitchFamily="34" charset="-120"/>
               </a:rPr>
-              <a:t>Olivar andaluz: la sequía se nota en la almazara</a:t>
+              <a:t>Cinco producciones concentran el volumen</a:t>
             </a:r>
             <a:endParaRPr lang="en-US" sz="3000" dirty="0"/>
           </a:p>
         </p:txBody>
       </p:sp>
-      <p:pic>
-        <p:nvPicPr>
-          <p:cNvPr id="4" name="Image 0" descr="preencoded.png">    </p:cNvPr>
-          <p:cNvPicPr>
-            <a:picLocks noChangeAspect="1"/>
-          </p:cNvPicPr>
-          <p:nvPr/>
-        </p:nvPicPr>
-        <p:blipFill>
-          <a:blip r:embed="rId1"/>
-          <a:stretch>
-            <a:fillRect/>
-          </a:stretch>
-        </p:blipFill>
-        <p:spPr>
-          <a:xfrm>
-            <a:off x="6522415" y="1783080"/>
-            <a:ext cx="5074920" cy="3794760"/>
-          </a:xfrm>
-          <a:prstGeom prst="rect">
-            <a:avLst/>
-          </a:prstGeom>
-        </p:spPr>
-      </p:pic>
-      <p:sp>
-        <p:nvSpPr>
-          <p:cNvPr id="5" name="Text 2"/>
-          <p:cNvSpPr txBox="1"/>
-          <p:nvPr/>
-        </p:nvSpPr>
-        <p:spPr>
-          <a:xfrm>
-            <a:off x="594360" y="1783080"/>
-            <a:ext cx="5379415" cy="4251960"/>
+      <p:graphicFrame>
+        <p:nvGraphicFramePr>
+          <p:cNvPr id="4" name="Chart 0" descr=""/>
+          <p:cNvGraphicFramePr/>
+          <p:nvPr/>
+        </p:nvGraphicFramePr>
+        <p:xfrm>
+          <a:off x="594360" y="1783080"/>
+          <a:ext cx="7360920" cy="3977640"/>
+        </p:xfrm>
+        <a:graphic xmlns:a="http://schemas.openxmlformats.org/drawingml/2006/main">
+          <a:graphicData uri="http://schemas.openxmlformats.org/drawingml/2006/chart">
+            <c:chart xmlns:c="http://schemas.openxmlformats.org/drawingml/2006/chart" r:id="rId1"/>
+          </a:graphicData>
+        </a:graphic>
+      </p:graphicFrame>
+      <p:sp>
+        <p:nvSpPr>
+          <p:cNvPr id="5" name="Shape 2"/>
+          <p:cNvSpPr/>
+          <p:nvPr/>
+        </p:nvSpPr>
+        <p:spPr>
+          <a:xfrm>
+            <a:off x="8275320" y="1783080"/>
+            <a:ext cx="3291840" cy="3977640"/>
+          </a:xfrm>
+          <a:prstGeom prst="roundRect">
+            <a:avLst>
+              <a:gd name="adj" fmla="val 2778"/>
+            </a:avLst>
+          </a:prstGeom>
+          <a:solidFill>
+            <a:srgbClr val="F5EFF1"/>
+          </a:solidFill>
+          <a:ln w="9525">
+            <a:solidFill>
+              <a:srgbClr val="E5D9DE"/>
+            </a:solidFill>
+            <a:prstDash val="solid"/>
+          </a:ln>
+        </p:spPr>
+      </p:sp>
+      <p:sp>
+        <p:nvSpPr>
+          <p:cNvPr id="6" name="Text 3"/>
+          <p:cNvSpPr txBox="1"/>
+          <p:nvPr/>
+        </p:nvSpPr>
+        <p:spPr>
+          <a:xfrm>
+            <a:off x="8503920" y="2011680"/>
+            <a:ext cx="2834640" cy="457200"/>
+          </a:xfrm>
+          <a:prstGeom prst="rect">
+            <a:avLst/>
+          </a:prstGeom>
+          <a:noFill/>
+          <a:ln/>
+        </p:spPr>
+        <p:txBody>
+          <a:bodyPr wrap="square" lIns="0" tIns="0" rIns="0" bIns="0" rtlCol="0" anchor="ctr"/>
+          <a:lstStyle/>
+          <a:p>
+            <a:pPr algn="l" indent="0" marL="0">
+              <a:buNone/>
+            </a:pPr>
+            <a:r>
+              <a:rPr lang="en-US" sz="1300" b="1" dirty="0">
+                <a:solidFill>
+                  <a:srgbClr val="6B2A44"/>
+                </a:solidFill>
+                <a:latin typeface="Cambria" pitchFamily="34" charset="0"/>
+                <a:ea typeface="Cambria" pitchFamily="34" charset="-122"/>
+                <a:cs typeface="Cambria" pitchFamily="34" charset="-120"/>
+              </a:rPr>
+              <a:t>Lectura</a:t>
+            </a:r>
+            <a:endParaRPr lang="en-US" sz="1300" dirty="0"/>
+          </a:p>
+        </p:txBody>
+      </p:sp>
+      <p:sp>
+        <p:nvSpPr>
+          <p:cNvPr id="7" name="Text 4"/>
+          <p:cNvSpPr txBox="1"/>
+          <p:nvPr/>
+        </p:nvSpPr>
+        <p:spPr>
+          <a:xfrm>
+            <a:off x="8503920" y="2560320"/>
+            <a:ext cx="2834640" cy="3017520"/>
           </a:xfrm>
           <a:prstGeom prst="rect">
             <a:avLst/>
@@ -12247,18 +13022,14 @@
           <a:bodyPr wrap="square" lIns="0" tIns="0" rIns="0" bIns="0" rtlCol="0" anchor="t"/>
           <a:lstStyle/>
           <a:p>
-            <a:pPr algn="l" marL="342900" indent="-342900">
+            <a:pPr algn="l" indent="0" marL="0">
               <a:lnSpc>
-                <a:spcPct val="122000"/>
+                <a:spcPct val="125000"/>
               </a:lnSpc>
-              <a:spcAft>
-                <a:spcPts val="1100"/>
-              </a:spcAft>
-              <a:buSzPct val="100000"/>
-              <a:buChar char="•"/>
-            </a:pPr>
-            <a:r>
-              <a:rPr lang="en-US" sz="1400" dirty="0">
+              <a:buNone/>
+            </a:pPr>
+            <a:r>
+              <a:rPr lang="en-US" sz="1200" dirty="0">
                 <a:solidFill>
                   <a:srgbClr val="3F3138"/>
                 </a:solidFill>
@@ -12266,23 +13037,28 @@
                 <a:ea typeface="Calibri" pitchFamily="34" charset="-122"/>
                 <a:cs typeface="Calibri" pitchFamily="34" charset="-120"/>
               </a:rPr>
-              <a:t>Andalucía reúne la mayor parte del olivar español; Jaén y Córdoba son el corazón del aceite de oliva.</a:t>
-            </a:r>
-            <a:endParaRPr lang="en-US" sz="1400" dirty="0"/>
-          </a:p>
-          <a:p>
-            <a:pPr algn="l" marL="342900" indent="-342900">
+              <a:t>* Cereal y aceituna son los dos rubros que más oscilan de una campaña a otra, porque dependen de la lluvia: la cosecha de aceituna de 2022/23 cayó a menos de la mitad de una campaña normal.</a:t>
+            </a:r>
+            <a:endParaRPr lang="en-US" sz="1200" dirty="0"/>
+          </a:p>
+          <a:p>
+            <a:pPr algn="l" indent="0" marL="0">
               <a:lnSpc>
-                <a:spcPct val="122000"/>
+                <a:spcPct val="125000"/>
               </a:lnSpc>
-              <a:spcAft>
-                <a:spcPts val="1100"/>
-              </a:spcAft>
-              <a:buSzPct val="100000"/>
-              <a:buChar char="•"/>
-            </a:pPr>
-            <a:r>
-              <a:rPr lang="en-US" sz="1400" dirty="0">
+              <a:buNone/>
+            </a:pPr>
+            <a:endParaRPr lang="en-US" sz="1200" dirty="0"/>
+          </a:p>
+          <a:p>
+            <a:pPr algn="l" indent="0" marL="0">
+              <a:lnSpc>
+                <a:spcPct val="125000"/>
+              </a:lnSpc>
+              <a:buNone/>
+            </a:pPr>
+            <a:r>
+              <a:rPr lang="en-US" sz="1200" dirty="0">
                 <a:solidFill>
                   <a:srgbClr val="3F3138"/>
                 </a:solidFill>
@@ -12290,87 +13066,15 @@
                 <a:ea typeface="Calibri" pitchFamily="34" charset="-122"/>
                 <a:cs typeface="Calibri" pitchFamily="34" charset="-120"/>
               </a:rPr>
-              <a:t>La mayor parte del olivar tradicional es de secano: sin lluvia en primavera, la floración y el cuajado fallan.</a:t>
-            </a:r>
-            <a:endParaRPr lang="en-US" sz="1400" dirty="0"/>
-          </a:p>
-          <a:p>
-            <a:pPr algn="l" marL="342900" indent="-342900">
-              <a:lnSpc>
-                <a:spcPct val="122000"/>
-              </a:lnSpc>
-              <a:spcAft>
-                <a:spcPts val="1100"/>
-              </a:spcAft>
-              <a:buSzPct val="100000"/>
-              <a:buChar char="•"/>
-            </a:pPr>
-            <a:r>
-              <a:rPr lang="en-US" sz="1400" dirty="0">
-                <a:solidFill>
-                  <a:srgbClr val="3F3138"/>
-                </a:solidFill>
-                <a:latin typeface="Calibri" pitchFamily="34" charset="0"/>
-                <a:ea typeface="Calibri" pitchFamily="34" charset="-122"/>
-                <a:cs typeface="Calibri" pitchFamily="34" charset="-120"/>
-              </a:rPr>
-              <a:t>Las campañas 2022/23 y 2023/24 dejaron cosechas muy por debajo de la media y precios récord.</a:t>
-            </a:r>
-            <a:endParaRPr lang="en-US" sz="1400" dirty="0"/>
-          </a:p>
-          <a:p>
-            <a:pPr algn="l" marL="342900" indent="-342900">
-              <a:lnSpc>
-                <a:spcPct val="122000"/>
-              </a:lnSpc>
-              <a:spcAft>
-                <a:spcPts val="1100"/>
-              </a:spcAft>
-              <a:buSzPct val="100000"/>
-              <a:buChar char="•"/>
-            </a:pPr>
-            <a:r>
-              <a:rPr lang="en-US" sz="1400" dirty="0">
-                <a:solidFill>
-                  <a:srgbClr val="3F3138"/>
-                </a:solidFill>
-                <a:latin typeface="Calibri" pitchFamily="34" charset="0"/>
-                <a:ea typeface="Calibri" pitchFamily="34" charset="-122"/>
-                <a:cs typeface="Calibri" pitchFamily="34" charset="-120"/>
-              </a:rPr>
-              <a:t>El olivar intensivo y superintensivo depende del goteo, con dotaciones que se recortan en sequía.</a:t>
-            </a:r>
-            <a:endParaRPr lang="en-US" sz="1400" dirty="0"/>
-          </a:p>
-          <a:p>
-            <a:pPr algn="l" marL="342900" indent="-342900">
-              <a:lnSpc>
-                <a:spcPct val="122000"/>
-              </a:lnSpc>
-              <a:spcAft>
-                <a:spcPts val="1100"/>
-              </a:spcAft>
-              <a:buSzPct val="100000"/>
-              <a:buChar char="•"/>
-            </a:pPr>
-            <a:r>
-              <a:rPr lang="en-US" sz="1400" dirty="0">
-                <a:solidFill>
-                  <a:srgbClr val="3F3138"/>
-                </a:solidFill>
-                <a:latin typeface="Calibri" pitchFamily="34" charset="0"/>
-                <a:ea typeface="Calibri" pitchFamily="34" charset="-122"/>
-                <a:cs typeface="Calibri" pitchFamily="34" charset="-120"/>
-              </a:rPr>
-              <a:t>EVERGREEN® en la plantación o en la línea de goteo mantiene el agua en la zona radicular entre riegos.</a:t>
-            </a:r>
-            <a:endParaRPr lang="en-US" sz="1400" dirty="0"/>
-          </a:p>
-        </p:txBody>
-      </p:sp>
-      <p:sp>
-        <p:nvSpPr>
-          <p:cNvPr id="6" name="Text 3"/>
+              <a:t>Hortalizas y cítricos se riegan en su práctica totalidad y se destinan a la exportación. Ahí el ahorro de agua se convierte directamente en margen.</a:t>
+            </a:r>
+            <a:endParaRPr lang="en-US" sz="1200" dirty="0"/>
+          </a:p>
+        </p:txBody>
+      </p:sp>
+      <p:sp>
+        <p:nvSpPr>
+          <p:cNvPr id="8" name="Text 5"/>
           <p:cNvSpPr txBox="1"/>
           <p:nvPr/>
         </p:nvSpPr>
@@ -12411,7 +13115,7 @@
       </p:sp>
       <p:sp>
         <p:nvSpPr>
-          <p:cNvPr id="7" name="Text 4"/>
+          <p:cNvPr id="9" name="Text 6"/>
           <p:cNvSpPr txBox="1"/>
           <p:nvPr/>
         </p:nvSpPr>
@@ -12515,7 +13219,7 @@
                 <a:ea typeface="Calibri" pitchFamily="34" charset="-122"/>
                 <a:cs typeface="Calibri" pitchFamily="34" charset="-120"/>
               </a:rPr>
-              <a:t>SEGUNDO SECTOR</a:t>
+              <a:t>PRIMER SECTOR</a:t>
             </a:r>
             <a:endParaRPr lang="en-US" sz="1150" dirty="0"/>
           </a:p>
@@ -12554,7 +13258,7 @@
                 <a:ea typeface="Cambria" pitchFamily="34" charset="-122"/>
                 <a:cs typeface="Cambria" pitchFamily="34" charset="-120"/>
               </a:rPr>
-              <a:t>Hortalizas de Almería y Murcia: cada metro cúbico cuenta</a:t>
+              <a:t>Olivar andaluz: la sequía se nota en la almazara</a:t>
             </a:r>
             <a:endParaRPr lang="en-US" sz="3000" dirty="0"/>
           </a:p>
@@ -12576,23 +13280,23 @@
         </p:blipFill>
         <p:spPr>
           <a:xfrm>
+            <a:off x="6522415" y="1783080"/>
+            <a:ext cx="5074920" cy="3794760"/>
+          </a:xfrm>
+          <a:prstGeom prst="rect">
+            <a:avLst/>
+          </a:prstGeom>
+        </p:spPr>
+      </p:pic>
+      <p:sp>
+        <p:nvSpPr>
+          <p:cNvPr id="5" name="Text 2"/>
+          <p:cNvSpPr txBox="1"/>
+          <p:nvPr/>
+        </p:nvSpPr>
+        <p:spPr>
+          <a:xfrm>
             <a:off x="594360" y="1783080"/>
-            <a:ext cx="5074920" cy="3794760"/>
-          </a:xfrm>
-          <a:prstGeom prst="rect">
-            <a:avLst/>
-          </a:prstGeom>
-        </p:spPr>
-      </p:pic>
-      <p:sp>
-        <p:nvSpPr>
-          <p:cNvPr id="5" name="Text 2"/>
-          <p:cNvSpPr txBox="1"/>
-          <p:nvPr/>
-        </p:nvSpPr>
-        <p:spPr>
-          <a:xfrm>
-            <a:off x="6217920" y="1783080"/>
             <a:ext cx="5379415" cy="4251960"/>
           </a:xfrm>
           <a:prstGeom prst="rect">
@@ -12624,7 +13328,7 @@
                 <a:ea typeface="Calibri" pitchFamily="34" charset="-122"/>
                 <a:cs typeface="Calibri" pitchFamily="34" charset="-120"/>
               </a:rPr>
-              <a:t>El Campo de Dalías y el Campo de Cartagena abastecen a Europa de tomate, pimiento, pepino y lechuga casi todo el año.</a:t>
+              <a:t>Andalucía reúne la mayor parte del olivar español; Jaén y Córdoba son el corazón del aceite de oliva.</a:t>
             </a:r>
             <a:endParaRPr lang="en-US" sz="1400" dirty="0"/>
           </a:p>
@@ -12648,7 +13352,7 @@
                 <a:ea typeface="Calibri" pitchFamily="34" charset="-122"/>
                 <a:cs typeface="Calibri" pitchFamily="34" charset="-120"/>
               </a:rPr>
-              <a:t>Los acuíferos están sobreexplotados y el trasvase Tajo-Segura se reduce: crece el uso de agua desalada y regenerada.</a:t>
+              <a:t>La mayor parte del olivar tradicional es de secano: sin lluvia en primavera, la floración y el cuajado fallan.</a:t>
             </a:r>
             <a:endParaRPr lang="en-US" sz="1400" dirty="0"/>
           </a:p>
@@ -12672,7 +13376,7 @@
                 <a:ea typeface="Calibri" pitchFamily="34" charset="-122"/>
                 <a:cs typeface="Calibri" pitchFamily="34" charset="-120"/>
               </a:rPr>
-              <a:t>El agua desalada es más cara: ahorrar agua por hectárea mejora directamente la cuenta del agricultor.</a:t>
+              <a:t>Las campañas 2022/23 y 2023/24 dejaron cosechas muy por debajo de la media y precios récord.</a:t>
             </a:r>
             <a:endParaRPr lang="en-US" sz="1400" dirty="0"/>
           </a:p>
@@ -12696,7 +13400,7 @@
                 <a:ea typeface="Calibri" pitchFamily="34" charset="-122"/>
                 <a:cs typeface="Calibri" pitchFamily="34" charset="-120"/>
               </a:rPr>
-              <a:t>La crisis del Mar Menor ha traído normas estrictas sobre fertilizantes y lixiviados en su entorno.</a:t>
+              <a:t>El olivar intensivo y superintensivo depende del goteo, con dotaciones que se recortan en sequía.</a:t>
             </a:r>
             <a:endParaRPr lang="en-US" sz="1400" dirty="0"/>
           </a:p>
@@ -12720,7 +13424,7 @@
                 <a:ea typeface="Calibri" pitchFamily="34" charset="-122"/>
                 <a:cs typeface="Calibri" pitchFamily="34" charset="-120"/>
               </a:rPr>
-              <a:t>NAPEMA® controla plagas sin residuos, en cultivos donde la lucha biológica ya es la norma.</a:t>
+              <a:t>EVERGREEN® en la plantación o en la línea de goteo mantiene el agua en la zona radicular entre riegos.</a:t>
             </a:r>
             <a:endParaRPr lang="en-US" sz="1400" dirty="0"/>
           </a:p>
@@ -12873,7 +13577,7 @@
                 <a:ea typeface="Calibri" pitchFamily="34" charset="-122"/>
                 <a:cs typeface="Calibri" pitchFamily="34" charset="-120"/>
               </a:rPr>
-              <a:t>Potencial de rendimiento</a:t>
+              <a:t>SEGUNDO SECTOR</a:t>
             </a:r>
             <a:endParaRPr lang="en-US" sz="1150" dirty="0"/>
           </a:p>
@@ -12912,168 +13616,181 @@
                 <a:ea typeface="Cambria" pitchFamily="34" charset="-122"/>
                 <a:cs typeface="Cambria" pitchFamily="34" charset="-120"/>
               </a:rPr>
-              <a:t>Aumento de rendimiento esperado por cultivo</a:t>
+              <a:t>Hortalizas de Almería y Murcia: cada metro cúbico cuenta</a:t>
             </a:r>
             <a:endParaRPr lang="en-US" sz="3000" dirty="0"/>
           </a:p>
         </p:txBody>
       </p:sp>
-      <p:graphicFrame>
-        <p:nvGraphicFramePr>
-          <p:cNvPr id="4" name="Chart 0" descr=""/>
-          <p:cNvGraphicFramePr/>
-          <p:nvPr/>
-        </p:nvGraphicFramePr>
-        <p:xfrm>
-          <a:off x="594360" y="1783080"/>
-          <a:ext cx="7360920" cy="3977640"/>
-        </p:xfrm>
-        <a:graphic xmlns:a="http://schemas.openxmlformats.org/drawingml/2006/main">
-          <a:graphicData uri="http://schemas.openxmlformats.org/drawingml/2006/chart">
-            <c:chart xmlns:c="http://schemas.openxmlformats.org/drawingml/2006/chart" r:id="rId1"/>
-          </a:graphicData>
-        </a:graphic>
-      </p:graphicFrame>
-      <p:sp>
-        <p:nvSpPr>
-          <p:cNvPr id="5" name="Shape 2"/>
-          <p:cNvSpPr/>
-          <p:nvPr/>
-        </p:nvSpPr>
-        <p:spPr>
-          <a:xfrm>
-            <a:off x="8275320" y="1783080"/>
-            <a:ext cx="3291840" cy="3977640"/>
-          </a:xfrm>
-          <a:prstGeom prst="roundRect">
-            <a:avLst>
-              <a:gd name="adj" fmla="val 2778"/>
-            </a:avLst>
-          </a:prstGeom>
-          <a:solidFill>
-            <a:srgbClr val="F5EFF1"/>
-          </a:solidFill>
-          <a:ln w="9525">
-            <a:solidFill>
-              <a:srgbClr val="E5D9DE"/>
-            </a:solidFill>
-            <a:prstDash val="solid"/>
-          </a:ln>
-        </p:spPr>
+      <p:pic>
+        <p:nvPicPr>
+          <p:cNvPr id="4" name="Image 0" descr="preencoded.png">    </p:cNvPr>
+          <p:cNvPicPr>
+            <a:picLocks noChangeAspect="1"/>
+          </p:cNvPicPr>
+          <p:nvPr/>
+        </p:nvPicPr>
+        <p:blipFill>
+          <a:blip r:embed="rId1"/>
+          <a:stretch>
+            <a:fillRect/>
+          </a:stretch>
+        </p:blipFill>
+        <p:spPr>
+          <a:xfrm>
+            <a:off x="594360" y="1783080"/>
+            <a:ext cx="5074920" cy="3794760"/>
+          </a:xfrm>
+          <a:prstGeom prst="rect">
+            <a:avLst/>
+          </a:prstGeom>
+        </p:spPr>
+      </p:pic>
+      <p:sp>
+        <p:nvSpPr>
+          <p:cNvPr id="5" name="Text 2"/>
+          <p:cNvSpPr txBox="1"/>
+          <p:nvPr/>
+        </p:nvSpPr>
+        <p:spPr>
+          <a:xfrm>
+            <a:off x="6217920" y="1783080"/>
+            <a:ext cx="5379415" cy="4251960"/>
+          </a:xfrm>
+          <a:prstGeom prst="rect">
+            <a:avLst/>
+          </a:prstGeom>
+          <a:noFill/>
+          <a:ln/>
+        </p:spPr>
+        <p:txBody>
+          <a:bodyPr wrap="square" lIns="0" tIns="0" rIns="0" bIns="0" rtlCol="0" anchor="t"/>
+          <a:lstStyle/>
+          <a:p>
+            <a:pPr algn="l" marL="342900" indent="-342900">
+              <a:lnSpc>
+                <a:spcPct val="122000"/>
+              </a:lnSpc>
+              <a:spcAft>
+                <a:spcPts val="1100"/>
+              </a:spcAft>
+              <a:buSzPct val="100000"/>
+              <a:buChar char="•"/>
+            </a:pPr>
+            <a:r>
+              <a:rPr lang="en-US" sz="1400" dirty="0">
+                <a:solidFill>
+                  <a:srgbClr val="3F3138"/>
+                </a:solidFill>
+                <a:latin typeface="Calibri" pitchFamily="34" charset="0"/>
+                <a:ea typeface="Calibri" pitchFamily="34" charset="-122"/>
+                <a:cs typeface="Calibri" pitchFamily="34" charset="-120"/>
+              </a:rPr>
+              <a:t>El Campo de Dalías y el Campo de Cartagena abastecen a Europa de tomate, pimiento, pepino y lechuga casi todo el año.</a:t>
+            </a:r>
+            <a:endParaRPr lang="en-US" sz="1400" dirty="0"/>
+          </a:p>
+          <a:p>
+            <a:pPr algn="l" marL="342900" indent="-342900">
+              <a:lnSpc>
+                <a:spcPct val="122000"/>
+              </a:lnSpc>
+              <a:spcAft>
+                <a:spcPts val="1100"/>
+              </a:spcAft>
+              <a:buSzPct val="100000"/>
+              <a:buChar char="•"/>
+            </a:pPr>
+            <a:r>
+              <a:rPr lang="en-US" sz="1400" dirty="0">
+                <a:solidFill>
+                  <a:srgbClr val="3F3138"/>
+                </a:solidFill>
+                <a:latin typeface="Calibri" pitchFamily="34" charset="0"/>
+                <a:ea typeface="Calibri" pitchFamily="34" charset="-122"/>
+                <a:cs typeface="Calibri" pitchFamily="34" charset="-120"/>
+              </a:rPr>
+              <a:t>Los acuíferos están sobreexplotados y el trasvase Tajo-Segura se reduce: crece el uso de agua desalada y regenerada.</a:t>
+            </a:r>
+            <a:endParaRPr lang="en-US" sz="1400" dirty="0"/>
+          </a:p>
+          <a:p>
+            <a:pPr algn="l" marL="342900" indent="-342900">
+              <a:lnSpc>
+                <a:spcPct val="122000"/>
+              </a:lnSpc>
+              <a:spcAft>
+                <a:spcPts val="1100"/>
+              </a:spcAft>
+              <a:buSzPct val="100000"/>
+              <a:buChar char="•"/>
+            </a:pPr>
+            <a:r>
+              <a:rPr lang="en-US" sz="1400" dirty="0">
+                <a:solidFill>
+                  <a:srgbClr val="3F3138"/>
+                </a:solidFill>
+                <a:latin typeface="Calibri" pitchFamily="34" charset="0"/>
+                <a:ea typeface="Calibri" pitchFamily="34" charset="-122"/>
+                <a:cs typeface="Calibri" pitchFamily="34" charset="-120"/>
+              </a:rPr>
+              <a:t>El agua desalada es más cara: ahorrar agua por hectárea mejora directamente la cuenta del agricultor.</a:t>
+            </a:r>
+            <a:endParaRPr lang="en-US" sz="1400" dirty="0"/>
+          </a:p>
+          <a:p>
+            <a:pPr algn="l" marL="342900" indent="-342900">
+              <a:lnSpc>
+                <a:spcPct val="122000"/>
+              </a:lnSpc>
+              <a:spcAft>
+                <a:spcPts val="1100"/>
+              </a:spcAft>
+              <a:buSzPct val="100000"/>
+              <a:buChar char="•"/>
+            </a:pPr>
+            <a:r>
+              <a:rPr lang="en-US" sz="1400" dirty="0">
+                <a:solidFill>
+                  <a:srgbClr val="3F3138"/>
+                </a:solidFill>
+                <a:latin typeface="Calibri" pitchFamily="34" charset="0"/>
+                <a:ea typeface="Calibri" pitchFamily="34" charset="-122"/>
+                <a:cs typeface="Calibri" pitchFamily="34" charset="-120"/>
+              </a:rPr>
+              <a:t>La crisis del Mar Menor ha traído normas estrictas sobre fertilizantes y lixiviados en su entorno.</a:t>
+            </a:r>
+            <a:endParaRPr lang="en-US" sz="1400" dirty="0"/>
+          </a:p>
+          <a:p>
+            <a:pPr algn="l" marL="342900" indent="-342900">
+              <a:lnSpc>
+                <a:spcPct val="122000"/>
+              </a:lnSpc>
+              <a:spcAft>
+                <a:spcPts val="1100"/>
+              </a:spcAft>
+              <a:buSzPct val="100000"/>
+              <a:buChar char="•"/>
+            </a:pPr>
+            <a:r>
+              <a:rPr lang="en-US" sz="1400" dirty="0">
+                <a:solidFill>
+                  <a:srgbClr val="3F3138"/>
+                </a:solidFill>
+                <a:latin typeface="Calibri" pitchFamily="34" charset="0"/>
+                <a:ea typeface="Calibri" pitchFamily="34" charset="-122"/>
+                <a:cs typeface="Calibri" pitchFamily="34" charset="-120"/>
+              </a:rPr>
+              <a:t>NAPEMA® controla plagas sin residuos, en cultivos donde la lucha biológica ya es la norma.</a:t>
+            </a:r>
+            <a:endParaRPr lang="en-US" sz="1400" dirty="0"/>
+          </a:p>
+        </p:txBody>
       </p:sp>
       <p:sp>
         <p:nvSpPr>
           <p:cNvPr id="6" name="Text 3"/>
-          <p:cNvSpPr txBox="1"/>
-          <p:nvPr/>
-        </p:nvSpPr>
-        <p:spPr>
-          <a:xfrm>
-            <a:off x="8503920" y="2011680"/>
-            <a:ext cx="2834640" cy="457200"/>
-          </a:xfrm>
-          <a:prstGeom prst="rect">
-            <a:avLst/>
-          </a:prstGeom>
-          <a:noFill/>
-          <a:ln/>
-        </p:spPr>
-        <p:txBody>
-          <a:bodyPr wrap="square" lIns="0" tIns="0" rIns="0" bIns="0" rtlCol="0" anchor="ctr"/>
-          <a:lstStyle/>
-          <a:p>
-            <a:pPr algn="l" indent="0" marL="0">
-              <a:buNone/>
-            </a:pPr>
-            <a:r>
-              <a:rPr lang="en-US" sz="1300" b="1" dirty="0">
-                <a:solidFill>
-                  <a:srgbClr val="6B2A44"/>
-                </a:solidFill>
-                <a:latin typeface="Cambria" pitchFamily="34" charset="0"/>
-                <a:ea typeface="Cambria" pitchFamily="34" charset="-122"/>
-                <a:cs typeface="Cambria" pitchFamily="34" charset="-120"/>
-              </a:rPr>
-              <a:t>Leer con prudencia</a:t>
-            </a:r>
-            <a:endParaRPr lang="en-US" sz="1300" dirty="0"/>
-          </a:p>
-        </p:txBody>
-      </p:sp>
-      <p:sp>
-        <p:nvSpPr>
-          <p:cNvPr id="7" name="Text 4"/>
-          <p:cNvSpPr txBox="1"/>
-          <p:nvPr/>
-        </p:nvSpPr>
-        <p:spPr>
-          <a:xfrm>
-            <a:off x="8503920" y="2560320"/>
-            <a:ext cx="2834640" cy="3017520"/>
-          </a:xfrm>
-          <a:prstGeom prst="rect">
-            <a:avLst/>
-          </a:prstGeom>
-          <a:noFill/>
-          <a:ln/>
-        </p:spPr>
-        <p:txBody>
-          <a:bodyPr wrap="square" lIns="0" tIns="0" rIns="0" bIns="0" rtlCol="0" anchor="t"/>
-          <a:lstStyle/>
-          <a:p>
-            <a:pPr algn="l" indent="0" marL="0">
-              <a:lnSpc>
-                <a:spcPct val="125000"/>
-              </a:lnSpc>
-              <a:buNone/>
-            </a:pPr>
-            <a:r>
-              <a:rPr lang="en-US" sz="1200" dirty="0">
-                <a:solidFill>
-                  <a:srgbClr val="3F3138"/>
-                </a:solidFill>
-                <a:latin typeface="Calibri" pitchFamily="34" charset="0"/>
-                <a:ea typeface="Calibri" pitchFamily="34" charset="-122"/>
-                <a:cs typeface="Calibri" pitchFamily="34" charset="-120"/>
-              </a:rPr>
-              <a:t>Rangos que usa nuestra calculadora de dosis, para un cultivo manejado con normalidad y EVERGREEN® aplicado en la plantación.</a:t>
-            </a:r>
-            <a:endParaRPr lang="en-US" sz="1200" dirty="0"/>
-          </a:p>
-          <a:p>
-            <a:pPr algn="l" indent="0" marL="0">
-              <a:lnSpc>
-                <a:spcPct val="125000"/>
-              </a:lnSpc>
-              <a:buNone/>
-            </a:pPr>
-            <a:endParaRPr lang="en-US" sz="1200" dirty="0"/>
-          </a:p>
-          <a:p>
-            <a:pPr algn="l" indent="0" marL="0">
-              <a:lnSpc>
-                <a:spcPct val="125000"/>
-              </a:lnSpc>
-              <a:buNone/>
-            </a:pPr>
-            <a:r>
-              <a:rPr lang="en-US" sz="1200" dirty="0">
-                <a:solidFill>
-                  <a:srgbClr val="3F3138"/>
-                </a:solidFill>
-                <a:latin typeface="Calibri" pitchFamily="34" charset="0"/>
-                <a:ea typeface="Calibri" pitchFamily="34" charset="-122"/>
-                <a:cs typeface="Calibri" pitchFamily="34" charset="-120"/>
-              </a:rPr>
-              <a:t>El resultado real depende del suelo, el clima y el manejo. En cereales no se anuncia ningún aumento sin ensayo de campo.</a:t>
-            </a:r>
-            <a:endParaRPr lang="en-US" sz="1200" dirty="0"/>
-          </a:p>
-        </p:txBody>
-      </p:sp>
-      <p:sp>
-        <p:nvSpPr>
-          <p:cNvPr id="8" name="Text 5"/>
           <p:cNvSpPr txBox="1"/>
           <p:nvPr/>
         </p:nvSpPr>
@@ -13114,7 +13831,7 @@
       </p:sp>
       <p:sp>
         <p:nvSpPr>
-          <p:cNvPr id="9" name="Text 6"/>
+          <p:cNvPr id="7" name="Text 4"/>
           <p:cNvSpPr txBox="1"/>
           <p:nvPr/>
         </p:nvSpPr>

--- a/public/documents/countries/espagne.pptx
+++ b/public/documents/countries/espagne.pptx
@@ -125,7 +125,7 @@
 </p:presentation>
 </file>
 
-<file path=ppt/charts/chart45.xml><?xml version="1.0" encoding="utf-8"?>
+<file path=ppt/charts/chart47.xml><?xml version="1.0" encoding="utf-8"?>
 <c:chartSpace xmlns:c="http://schemas.openxmlformats.org/drawingml/2006/chart" xmlns:a="http://schemas.openxmlformats.org/drawingml/2006/main" xmlns:r="http://schemas.openxmlformats.org/officeDocument/2006/relationships">
   <c:date1904 val="0"/>
   <c:roundedCorners val="1"/>
@@ -384,7 +384,7 @@
 </c:chartSpace>
 </file>
 
-<file path=ppt/charts/chart46.xml><?xml version="1.0" encoding="utf-8"?>
+<file path=ppt/charts/chart48.xml><?xml version="1.0" encoding="utf-8"?>
 <c:chartSpace xmlns:c="http://schemas.openxmlformats.org/drawingml/2006/chart" xmlns:a="http://schemas.openxmlformats.org/drawingml/2006/main" xmlns:r="http://schemas.openxmlformats.org/officeDocument/2006/relationships">
   <c:date1904 val="0"/>
   <c:roundedCorners val="1"/>
@@ -629,7 +629,7 @@
 </c:chartSpace>
 </file>
 
-<file path=ppt/charts/chart47.xml><?xml version="1.0" encoding="utf-8"?>
+<file path=ppt/charts/chart49.xml><?xml version="1.0" encoding="utf-8"?>
 <c:chartSpace xmlns:c="http://schemas.openxmlformats.org/drawingml/2006/chart" xmlns:a="http://schemas.openxmlformats.org/drawingml/2006/main" xmlns:r="http://schemas.openxmlformats.org/officeDocument/2006/relationships">
   <c:date1904 val="0"/>
   <c:roundedCorners val="1"/>
@@ -937,7 +937,7 @@
 </c:chartSpace>
 </file>
 
-<file path=ppt/charts/chart48.xml><?xml version="1.0" encoding="utf-8"?>
+<file path=ppt/charts/chart50.xml><?xml version="1.0" encoding="utf-8"?>
 <c:chartSpace xmlns:c="http://schemas.openxmlformats.org/drawingml/2006/chart" xmlns:a="http://schemas.openxmlformats.org/drawingml/2006/main" xmlns:r="http://schemas.openxmlformats.org/officeDocument/2006/relationships">
   <c:date1904 val="0"/>
   <c:roundedCorners val="1"/>
@@ -1302,7 +1302,7 @@
 </c:chartSpace>
 </file>
 
-<file path=ppt/charts/chart49.xml><?xml version="1.0" encoding="utf-8"?>
+<file path=ppt/charts/chart51.xml><?xml version="1.0" encoding="utf-8"?>
 <c:chartSpace xmlns:c="http://schemas.openxmlformats.org/drawingml/2006/chart" xmlns:a="http://schemas.openxmlformats.org/drawingml/2006/main" xmlns:r="http://schemas.openxmlformats.org/officeDocument/2006/relationships">
   <c:date1904 val="0"/>
   <c:roundedCorners val="1"/>
@@ -4092,7 +4092,7 @@
       </p:sp>
       <p:pic>
         <p:nvPicPr>
-          <p:cNvPr id="5" name="Image 1" descr="/workspace/scratch/50eb4f7d8e13/green-solutions-web/public/images/logo-icon.png">    </p:cNvPr>
+          <p:cNvPr id="5" name="Image 1" descr="/home/claude/green-solutions-web/public/images/logo-icon.png">    </p:cNvPr>
           <p:cNvPicPr>
             <a:picLocks noChangeAspect="1"/>
           </p:cNvPicPr>
@@ -4116,7 +4116,7 @@
       </p:pic>
       <p:pic>
         <p:nvPicPr>
-          <p:cNvPr id="6" name="Image 2" descr="/workspace/scratch/50eb4f7d8e13/green-solutions-web/scripts/dossiers/drapeaux/espagne.png">    </p:cNvPr>
+          <p:cNvPr id="6" name="Image 2" descr="/home/claude/green-solutions-web/scripts/dossiers/drapeaux/espagne.png">    </p:cNvPr>
           <p:cNvPicPr>
             <a:picLocks noChangeAspect="1"/>
           </p:cNvPicPr>
@@ -10276,7 +10276,7 @@
                 <a:ea typeface="Calibri" pitchFamily="34" charset="-122"/>
                 <a:cs typeface="Calibri" pitchFamily="34" charset="-120"/>
               </a:rPr>
-              <a:t>contact@evergreen-ecosorb.com · Green Solutions Groupe AIM SA, 46, route de la Condémine, 1475 Forel, Suiza</a:t>
+              <a:t>contact@green-solutions-group.com · Green Solutions Groupe AIM SA, 46, route de la Condémine, 1475 Forel, Suiza</a:t>
             </a:r>
             <a:endParaRPr lang="en-US" sz="1400" dirty="0"/>
           </a:p>
@@ -10284,7 +10284,7 @@
       </p:sp>
       <p:pic>
         <p:nvPicPr>
-          <p:cNvPr id="6" name="Image 1" descr="/workspace/scratch/50eb4f7d8e13/green-solutions-web/scripts/dossiers/sceau-aim-clair.png">    </p:cNvPr>
+          <p:cNvPr id="6" name="Image 1" descr="/home/claude/green-solutions-web/scripts/dossiers/sceau-aim-clair.png">    </p:cNvPr>
           <p:cNvPicPr>
             <a:picLocks noChangeAspect="1"/>
           </p:cNvPicPr>
